--- a/doc/Streaming.pptx
+++ b/doc/Streaming.pptx
@@ -108,6 +108,11 @@
       </a:defRPr>
     </a:lvl9pPr>
   </p:defaultTextStyle>
+  <p:extLst>
+    <p:ext uri="{EFAFB233-063F-42B5-8137-9DF3F51BA10A}">
+      <p15:sldGuideLst xmlns:p15="http://schemas.microsoft.com/office/powerpoint/2012/main"/>
+    </p:ext>
+  </p:extLst>
 </p:presentation>
 </file>
 
@@ -153,7 +158,7 @@
           </a:lstStyle>
           <a:p>
             <a:r>
-              <a:rPr lang="en-US" smtClean="0"/>
+              <a:rPr lang="en-US"/>
               <a:t>Click to edit Master title style</a:t>
             </a:r>
             <a:endParaRPr lang="en-US" dirty="0"/>
@@ -218,7 +223,7 @@
           </a:lstStyle>
           <a:p>
             <a:r>
-              <a:rPr lang="en-US" smtClean="0"/>
+              <a:rPr lang="en-US"/>
               <a:t>Click to edit Master subtitle style</a:t>
             </a:r>
             <a:endParaRPr lang="en-US" dirty="0"/>
@@ -242,7 +247,7 @@
           <a:p>
             <a:fld id="{593F253B-0AEB-9446-A946-A05F6455C0D4}" type="datetimeFigureOut">
               <a:rPr lang="en-US" smtClean="0"/>
-              <a:t>8/25/21</a:t>
+              <a:t>11/3/22</a:t>
             </a:fld>
             <a:endParaRPr lang="en-US"/>
           </a:p>
@@ -331,7 +336,7 @@
           <a:lstStyle/>
           <a:p>
             <a:r>
-              <a:rPr lang="en-US" smtClean="0"/>
+              <a:rPr lang="en-US"/>
               <a:t>Click to edit Master title style</a:t>
             </a:r>
             <a:endParaRPr lang="en-US" dirty="0"/>
@@ -355,35 +360,35 @@
           <a:p>
             <a:pPr lvl="0"/>
             <a:r>
-              <a:rPr lang="en-US" smtClean="0"/>
+              <a:rPr lang="en-US"/>
               <a:t>Click to edit Master text styles</a:t>
             </a:r>
           </a:p>
           <a:p>
             <a:pPr lvl="1"/>
             <a:r>
-              <a:rPr lang="en-US" smtClean="0"/>
+              <a:rPr lang="en-US"/>
               <a:t>Second level</a:t>
             </a:r>
           </a:p>
           <a:p>
             <a:pPr lvl="2"/>
             <a:r>
-              <a:rPr lang="en-US" smtClean="0"/>
+              <a:rPr lang="en-US"/>
               <a:t>Third level</a:t>
             </a:r>
           </a:p>
           <a:p>
             <a:pPr lvl="3"/>
             <a:r>
-              <a:rPr lang="en-US" smtClean="0"/>
+              <a:rPr lang="en-US"/>
               <a:t>Fourth level</a:t>
             </a:r>
           </a:p>
           <a:p>
             <a:pPr lvl="4"/>
             <a:r>
-              <a:rPr lang="en-US" smtClean="0"/>
+              <a:rPr lang="en-US"/>
               <a:t>Fifth level</a:t>
             </a:r>
             <a:endParaRPr lang="en-US" dirty="0"/>
@@ -407,7 +412,7 @@
           <a:p>
             <a:fld id="{593F253B-0AEB-9446-A946-A05F6455C0D4}" type="datetimeFigureOut">
               <a:rPr lang="en-US" smtClean="0"/>
-              <a:t>8/25/21</a:t>
+              <a:t>11/3/22</a:t>
             </a:fld>
             <a:endParaRPr lang="en-US"/>
           </a:p>
@@ -501,7 +506,7 @@
           <a:lstStyle/>
           <a:p>
             <a:r>
-              <a:rPr lang="en-US" smtClean="0"/>
+              <a:rPr lang="en-US"/>
               <a:t>Click to edit Master title style</a:t>
             </a:r>
             <a:endParaRPr lang="en-US" dirty="0"/>
@@ -530,35 +535,35 @@
           <a:p>
             <a:pPr lvl="0"/>
             <a:r>
-              <a:rPr lang="en-US" smtClean="0"/>
+              <a:rPr lang="en-US"/>
               <a:t>Click to edit Master text styles</a:t>
             </a:r>
           </a:p>
           <a:p>
             <a:pPr lvl="1"/>
             <a:r>
-              <a:rPr lang="en-US" smtClean="0"/>
+              <a:rPr lang="en-US"/>
               <a:t>Second level</a:t>
             </a:r>
           </a:p>
           <a:p>
             <a:pPr lvl="2"/>
             <a:r>
-              <a:rPr lang="en-US" smtClean="0"/>
+              <a:rPr lang="en-US"/>
               <a:t>Third level</a:t>
             </a:r>
           </a:p>
           <a:p>
             <a:pPr lvl="3"/>
             <a:r>
-              <a:rPr lang="en-US" smtClean="0"/>
+              <a:rPr lang="en-US"/>
               <a:t>Fourth level</a:t>
             </a:r>
           </a:p>
           <a:p>
             <a:pPr lvl="4"/>
             <a:r>
-              <a:rPr lang="en-US" smtClean="0"/>
+              <a:rPr lang="en-US"/>
               <a:t>Fifth level</a:t>
             </a:r>
             <a:endParaRPr lang="en-US" dirty="0"/>
@@ -582,7 +587,7 @@
           <a:p>
             <a:fld id="{593F253B-0AEB-9446-A946-A05F6455C0D4}" type="datetimeFigureOut">
               <a:rPr lang="en-US" smtClean="0"/>
-              <a:t>8/25/21</a:t>
+              <a:t>11/3/22</a:t>
             </a:fld>
             <a:endParaRPr lang="en-US"/>
           </a:p>
@@ -671,7 +676,7 @@
           <a:lstStyle/>
           <a:p>
             <a:r>
-              <a:rPr lang="en-US" smtClean="0"/>
+              <a:rPr lang="en-US"/>
               <a:t>Click to edit Master title style</a:t>
             </a:r>
             <a:endParaRPr lang="en-US" dirty="0"/>
@@ -695,35 +700,35 @@
           <a:p>
             <a:pPr lvl="0"/>
             <a:r>
-              <a:rPr lang="en-US" smtClean="0"/>
+              <a:rPr lang="en-US"/>
               <a:t>Click to edit Master text styles</a:t>
             </a:r>
           </a:p>
           <a:p>
             <a:pPr lvl="1"/>
             <a:r>
-              <a:rPr lang="en-US" smtClean="0"/>
+              <a:rPr lang="en-US"/>
               <a:t>Second level</a:t>
             </a:r>
           </a:p>
           <a:p>
             <a:pPr lvl="2"/>
             <a:r>
-              <a:rPr lang="en-US" smtClean="0"/>
+              <a:rPr lang="en-US"/>
               <a:t>Third level</a:t>
             </a:r>
           </a:p>
           <a:p>
             <a:pPr lvl="3"/>
             <a:r>
-              <a:rPr lang="en-US" smtClean="0"/>
+              <a:rPr lang="en-US"/>
               <a:t>Fourth level</a:t>
             </a:r>
           </a:p>
           <a:p>
             <a:pPr lvl="4"/>
             <a:r>
-              <a:rPr lang="en-US" smtClean="0"/>
+              <a:rPr lang="en-US"/>
               <a:t>Fifth level</a:t>
             </a:r>
             <a:endParaRPr lang="en-US" dirty="0"/>
@@ -747,7 +752,7 @@
           <a:p>
             <a:fld id="{593F253B-0AEB-9446-A946-A05F6455C0D4}" type="datetimeFigureOut">
               <a:rPr lang="en-US" smtClean="0"/>
-              <a:t>8/25/21</a:t>
+              <a:t>11/3/22</a:t>
             </a:fld>
             <a:endParaRPr lang="en-US"/>
           </a:p>
@@ -845,7 +850,7 @@
           </a:lstStyle>
           <a:p>
             <a:r>
-              <a:rPr lang="en-US" smtClean="0"/>
+              <a:rPr lang="en-US"/>
               <a:t>Click to edit Master title style</a:t>
             </a:r>
             <a:endParaRPr lang="en-US" dirty="0"/>
@@ -963,7 +968,7 @@
           <a:p>
             <a:pPr lvl="0"/>
             <a:r>
-              <a:rPr lang="en-US" smtClean="0"/>
+              <a:rPr lang="en-US"/>
               <a:t>Click to edit Master text styles</a:t>
             </a:r>
           </a:p>
@@ -986,7 +991,7 @@
           <a:p>
             <a:fld id="{593F253B-0AEB-9446-A946-A05F6455C0D4}" type="datetimeFigureOut">
               <a:rPr lang="en-US" smtClean="0"/>
-              <a:t>8/25/21</a:t>
+              <a:t>11/3/22</a:t>
             </a:fld>
             <a:endParaRPr lang="en-US"/>
           </a:p>
@@ -1075,7 +1080,7 @@
           <a:lstStyle/>
           <a:p>
             <a:r>
-              <a:rPr lang="en-US" smtClean="0"/>
+              <a:rPr lang="en-US"/>
               <a:t>Click to edit Master title style</a:t>
             </a:r>
             <a:endParaRPr lang="en-US" dirty="0"/>
@@ -1104,35 +1109,35 @@
           <a:p>
             <a:pPr lvl="0"/>
             <a:r>
-              <a:rPr lang="en-US" smtClean="0"/>
+              <a:rPr lang="en-US"/>
               <a:t>Click to edit Master text styles</a:t>
             </a:r>
           </a:p>
           <a:p>
             <a:pPr lvl="1"/>
             <a:r>
-              <a:rPr lang="en-US" smtClean="0"/>
+              <a:rPr lang="en-US"/>
               <a:t>Second level</a:t>
             </a:r>
           </a:p>
           <a:p>
             <a:pPr lvl="2"/>
             <a:r>
-              <a:rPr lang="en-US" smtClean="0"/>
+              <a:rPr lang="en-US"/>
               <a:t>Third level</a:t>
             </a:r>
           </a:p>
           <a:p>
             <a:pPr lvl="3"/>
             <a:r>
-              <a:rPr lang="en-US" smtClean="0"/>
+              <a:rPr lang="en-US"/>
               <a:t>Fourth level</a:t>
             </a:r>
           </a:p>
           <a:p>
             <a:pPr lvl="4"/>
             <a:r>
-              <a:rPr lang="en-US" smtClean="0"/>
+              <a:rPr lang="en-US"/>
               <a:t>Fifth level</a:t>
             </a:r>
             <a:endParaRPr lang="en-US" dirty="0"/>
@@ -1161,35 +1166,35 @@
           <a:p>
             <a:pPr lvl="0"/>
             <a:r>
-              <a:rPr lang="en-US" smtClean="0"/>
+              <a:rPr lang="en-US"/>
               <a:t>Click to edit Master text styles</a:t>
             </a:r>
           </a:p>
           <a:p>
             <a:pPr lvl="1"/>
             <a:r>
-              <a:rPr lang="en-US" smtClean="0"/>
+              <a:rPr lang="en-US"/>
               <a:t>Second level</a:t>
             </a:r>
           </a:p>
           <a:p>
             <a:pPr lvl="2"/>
             <a:r>
-              <a:rPr lang="en-US" smtClean="0"/>
+              <a:rPr lang="en-US"/>
               <a:t>Third level</a:t>
             </a:r>
           </a:p>
           <a:p>
             <a:pPr lvl="3"/>
             <a:r>
-              <a:rPr lang="en-US" smtClean="0"/>
+              <a:rPr lang="en-US"/>
               <a:t>Fourth level</a:t>
             </a:r>
           </a:p>
           <a:p>
             <a:pPr lvl="4"/>
             <a:r>
-              <a:rPr lang="en-US" smtClean="0"/>
+              <a:rPr lang="en-US"/>
               <a:t>Fifth level</a:t>
             </a:r>
             <a:endParaRPr lang="en-US" dirty="0"/>
@@ -1213,7 +1218,7 @@
           <a:p>
             <a:fld id="{593F253B-0AEB-9446-A946-A05F6455C0D4}" type="datetimeFigureOut">
               <a:rPr lang="en-US" smtClean="0"/>
-              <a:t>8/25/21</a:t>
+              <a:t>11/3/22</a:t>
             </a:fld>
             <a:endParaRPr lang="en-US"/>
           </a:p>
@@ -1307,7 +1312,7 @@
           <a:lstStyle/>
           <a:p>
             <a:r>
-              <a:rPr lang="en-US" smtClean="0"/>
+              <a:rPr lang="en-US"/>
               <a:t>Click to edit Master title style</a:t>
             </a:r>
             <a:endParaRPr lang="en-US" dirty="0"/>
@@ -1373,7 +1378,7 @@
           <a:p>
             <a:pPr lvl="0"/>
             <a:r>
-              <a:rPr lang="en-US" smtClean="0"/>
+              <a:rPr lang="en-US"/>
               <a:t>Click to edit Master text styles</a:t>
             </a:r>
           </a:p>
@@ -1401,35 +1406,35 @@
           <a:p>
             <a:pPr lvl="0"/>
             <a:r>
-              <a:rPr lang="en-US" smtClean="0"/>
+              <a:rPr lang="en-US"/>
               <a:t>Click to edit Master text styles</a:t>
             </a:r>
           </a:p>
           <a:p>
             <a:pPr lvl="1"/>
             <a:r>
-              <a:rPr lang="en-US" smtClean="0"/>
+              <a:rPr lang="en-US"/>
               <a:t>Second level</a:t>
             </a:r>
           </a:p>
           <a:p>
             <a:pPr lvl="2"/>
             <a:r>
-              <a:rPr lang="en-US" smtClean="0"/>
+              <a:rPr lang="en-US"/>
               <a:t>Third level</a:t>
             </a:r>
           </a:p>
           <a:p>
             <a:pPr lvl="3"/>
             <a:r>
-              <a:rPr lang="en-US" smtClean="0"/>
+              <a:rPr lang="en-US"/>
               <a:t>Fourth level</a:t>
             </a:r>
           </a:p>
           <a:p>
             <a:pPr lvl="4"/>
             <a:r>
-              <a:rPr lang="en-US" smtClean="0"/>
+              <a:rPr lang="en-US"/>
               <a:t>Fifth level</a:t>
             </a:r>
             <a:endParaRPr lang="en-US" dirty="0"/>
@@ -1495,7 +1500,7 @@
           <a:p>
             <a:pPr lvl="0"/>
             <a:r>
-              <a:rPr lang="en-US" smtClean="0"/>
+              <a:rPr lang="en-US"/>
               <a:t>Click to edit Master text styles</a:t>
             </a:r>
           </a:p>
@@ -1523,35 +1528,35 @@
           <a:p>
             <a:pPr lvl="0"/>
             <a:r>
-              <a:rPr lang="en-US" smtClean="0"/>
+              <a:rPr lang="en-US"/>
               <a:t>Click to edit Master text styles</a:t>
             </a:r>
           </a:p>
           <a:p>
             <a:pPr lvl="1"/>
             <a:r>
-              <a:rPr lang="en-US" smtClean="0"/>
+              <a:rPr lang="en-US"/>
               <a:t>Second level</a:t>
             </a:r>
           </a:p>
           <a:p>
             <a:pPr lvl="2"/>
             <a:r>
-              <a:rPr lang="en-US" smtClean="0"/>
+              <a:rPr lang="en-US"/>
               <a:t>Third level</a:t>
             </a:r>
           </a:p>
           <a:p>
             <a:pPr lvl="3"/>
             <a:r>
-              <a:rPr lang="en-US" smtClean="0"/>
+              <a:rPr lang="en-US"/>
               <a:t>Fourth level</a:t>
             </a:r>
           </a:p>
           <a:p>
             <a:pPr lvl="4"/>
             <a:r>
-              <a:rPr lang="en-US" smtClean="0"/>
+              <a:rPr lang="en-US"/>
               <a:t>Fifth level</a:t>
             </a:r>
             <a:endParaRPr lang="en-US" dirty="0"/>
@@ -1575,7 +1580,7 @@
           <a:p>
             <a:fld id="{593F253B-0AEB-9446-A946-A05F6455C0D4}" type="datetimeFigureOut">
               <a:rPr lang="en-US" smtClean="0"/>
-              <a:t>8/25/21</a:t>
+              <a:t>11/3/22</a:t>
             </a:fld>
             <a:endParaRPr lang="en-US"/>
           </a:p>
@@ -1664,7 +1669,7 @@
           <a:lstStyle/>
           <a:p>
             <a:r>
-              <a:rPr lang="en-US" smtClean="0"/>
+              <a:rPr lang="en-US"/>
               <a:t>Click to edit Master title style</a:t>
             </a:r>
             <a:endParaRPr lang="en-US" dirty="0"/>
@@ -1688,7 +1693,7 @@
           <a:p>
             <a:fld id="{593F253B-0AEB-9446-A946-A05F6455C0D4}" type="datetimeFigureOut">
               <a:rPr lang="en-US" smtClean="0"/>
-              <a:t>8/25/21</a:t>
+              <a:t>11/3/22</a:t>
             </a:fld>
             <a:endParaRPr lang="en-US"/>
           </a:p>
@@ -1778,7 +1783,7 @@
           <a:p>
             <a:fld id="{593F253B-0AEB-9446-A946-A05F6455C0D4}" type="datetimeFigureOut">
               <a:rPr lang="en-US" smtClean="0"/>
-              <a:t>8/25/21</a:t>
+              <a:t>11/3/22</a:t>
             </a:fld>
             <a:endParaRPr lang="en-US"/>
           </a:p>
@@ -1876,7 +1881,7 @@
           </a:lstStyle>
           <a:p>
             <a:r>
-              <a:rPr lang="en-US" smtClean="0"/>
+              <a:rPr lang="en-US"/>
               <a:t>Click to edit Master title style</a:t>
             </a:r>
             <a:endParaRPr lang="en-US" dirty="0"/>
@@ -1933,35 +1938,35 @@
           <a:p>
             <a:pPr lvl="0"/>
             <a:r>
-              <a:rPr lang="en-US" smtClean="0"/>
+              <a:rPr lang="en-US"/>
               <a:t>Click to edit Master text styles</a:t>
             </a:r>
           </a:p>
           <a:p>
             <a:pPr lvl="1"/>
             <a:r>
-              <a:rPr lang="en-US" smtClean="0"/>
+              <a:rPr lang="en-US"/>
               <a:t>Second level</a:t>
             </a:r>
           </a:p>
           <a:p>
             <a:pPr lvl="2"/>
             <a:r>
-              <a:rPr lang="en-US" smtClean="0"/>
+              <a:rPr lang="en-US"/>
               <a:t>Third level</a:t>
             </a:r>
           </a:p>
           <a:p>
             <a:pPr lvl="3"/>
             <a:r>
-              <a:rPr lang="en-US" smtClean="0"/>
+              <a:rPr lang="en-US"/>
               <a:t>Fourth level</a:t>
             </a:r>
           </a:p>
           <a:p>
             <a:pPr lvl="4"/>
             <a:r>
-              <a:rPr lang="en-US" smtClean="0"/>
+              <a:rPr lang="en-US"/>
               <a:t>Fifth level</a:t>
             </a:r>
             <a:endParaRPr lang="en-US" dirty="0"/>
@@ -2027,7 +2032,7 @@
           <a:p>
             <a:pPr lvl="0"/>
             <a:r>
-              <a:rPr lang="en-US" smtClean="0"/>
+              <a:rPr lang="en-US"/>
               <a:t>Click to edit Master text styles</a:t>
             </a:r>
           </a:p>
@@ -2050,7 +2055,7 @@
           <a:p>
             <a:fld id="{593F253B-0AEB-9446-A946-A05F6455C0D4}" type="datetimeFigureOut">
               <a:rPr lang="en-US" smtClean="0"/>
-              <a:t>8/25/21</a:t>
+              <a:t>11/3/22</a:t>
             </a:fld>
             <a:endParaRPr lang="en-US"/>
           </a:p>
@@ -2148,7 +2153,7 @@
           </a:lstStyle>
           <a:p>
             <a:r>
-              <a:rPr lang="en-US" smtClean="0"/>
+              <a:rPr lang="en-US"/>
               <a:t>Click to edit Master title style</a:t>
             </a:r>
             <a:endParaRPr lang="en-US" dirty="0"/>
@@ -2213,7 +2218,7 @@
           </a:lstStyle>
           <a:p>
             <a:r>
-              <a:rPr lang="en-US" smtClean="0"/>
+              <a:rPr lang="en-US"/>
               <a:t>Drag picture to placeholder or click icon to add</a:t>
             </a:r>
             <a:endParaRPr lang="en-US" dirty="0"/>
@@ -2279,7 +2284,7 @@
           <a:p>
             <a:pPr lvl="0"/>
             <a:r>
-              <a:rPr lang="en-US" smtClean="0"/>
+              <a:rPr lang="en-US"/>
               <a:t>Click to edit Master text styles</a:t>
             </a:r>
           </a:p>
@@ -2302,7 +2307,7 @@
           <a:p>
             <a:fld id="{593F253B-0AEB-9446-A946-A05F6455C0D4}" type="datetimeFigureOut">
               <a:rPr lang="en-US" smtClean="0"/>
-              <a:t>8/25/21</a:t>
+              <a:t>11/3/22</a:t>
             </a:fld>
             <a:endParaRPr lang="en-US"/>
           </a:p>
@@ -2406,7 +2411,7 @@
           <a:lstStyle/>
           <a:p>
             <a:r>
-              <a:rPr lang="en-US" smtClean="0"/>
+              <a:rPr lang="en-US"/>
               <a:t>Click to edit Master title style</a:t>
             </a:r>
             <a:endParaRPr lang="en-US" dirty="0"/>
@@ -2440,35 +2445,35 @@
           <a:p>
             <a:pPr lvl="0"/>
             <a:r>
-              <a:rPr lang="en-US" smtClean="0"/>
+              <a:rPr lang="en-US"/>
               <a:t>Click to edit Master text styles</a:t>
             </a:r>
           </a:p>
           <a:p>
             <a:pPr lvl="1"/>
             <a:r>
-              <a:rPr lang="en-US" smtClean="0"/>
+              <a:rPr lang="en-US"/>
               <a:t>Second level</a:t>
             </a:r>
           </a:p>
           <a:p>
             <a:pPr lvl="2"/>
             <a:r>
-              <a:rPr lang="en-US" smtClean="0"/>
+              <a:rPr lang="en-US"/>
               <a:t>Third level</a:t>
             </a:r>
           </a:p>
           <a:p>
             <a:pPr lvl="3"/>
             <a:r>
-              <a:rPr lang="en-US" smtClean="0"/>
+              <a:rPr lang="en-US"/>
               <a:t>Fourth level</a:t>
             </a:r>
           </a:p>
           <a:p>
             <a:pPr lvl="4"/>
             <a:r>
-              <a:rPr lang="en-US" smtClean="0"/>
+              <a:rPr lang="en-US"/>
               <a:t>Fifth level</a:t>
             </a:r>
             <a:endParaRPr lang="en-US" dirty="0"/>
@@ -2510,7 +2515,7 @@
           <a:p>
             <a:fld id="{593F253B-0AEB-9446-A946-A05F6455C0D4}" type="datetimeFigureOut">
               <a:rPr lang="en-US" smtClean="0"/>
-              <a:t>8/25/21</a:t>
+              <a:t>11/3/22</a:t>
             </a:fld>
             <a:endParaRPr lang="en-US"/>
           </a:p>
@@ -2945,16 +2950,12 @@
           <a:lstStyle/>
           <a:p>
             <a:r>
-              <a:rPr lang="en-US" sz="2000" b="1" dirty="0" smtClean="0">
+              <a:rPr lang="en-US" sz="2000" b="1" dirty="0">
                 <a:latin typeface="Arial" pitchFamily="34" charset="0"/>
                 <a:cs typeface="Arial" pitchFamily="34" charset="0"/>
               </a:rPr>
               <a:t>ROC Time Slice Bank</a:t>
             </a:r>
-            <a:endParaRPr lang="en-US" sz="2000" b="1" dirty="0">
-              <a:latin typeface="Arial" pitchFamily="34" charset="0"/>
-              <a:cs typeface="Arial" pitchFamily="34" charset="0"/>
-            </a:endParaRPr>
           </a:p>
         </p:txBody>
       </p:sp>
@@ -3027,28 +3028,27 @@
           <a:lstStyle/>
           <a:p>
             <a:r>
-              <a:rPr lang="en-US" sz="1600" dirty="0" smtClean="0"/>
+              <a:rPr lang="en-US" sz="1600" dirty="0"/>
               <a:t>ROC Time Slice Bank</a:t>
             </a:r>
           </a:p>
           <a:p>
-            <a:endParaRPr lang="en-US" sz="1200" dirty="0" smtClean="0"/>
+            <a:endParaRPr lang="en-US" sz="1200" dirty="0"/>
           </a:p>
           <a:p>
             <a:r>
-              <a:rPr lang="en-US" sz="1200" dirty="0" smtClean="0"/>
+              <a:rPr lang="en-US" sz="1200" dirty="0"/>
               <a:t>(Note that multiple Time Slices can be transported as defined in the EVIO Header)</a:t>
             </a:r>
           </a:p>
           <a:p>
-            <a:endParaRPr lang="en-US" sz="1200" dirty="0" smtClean="0"/>
+            <a:endParaRPr lang="en-US" sz="1200" dirty="0"/>
           </a:p>
           <a:p>
             <a:r>
-              <a:rPr lang="en-US" sz="1200" dirty="0" smtClean="0"/>
+              <a:rPr lang="en-US" sz="1200" dirty="0"/>
               <a:t>Multiple Streams can be included as defined by the Stream Status bits.</a:t>
             </a:r>
-            <a:endParaRPr lang="en-US" sz="1200" dirty="0"/>
           </a:p>
         </p:txBody>
       </p:sp>
@@ -3080,7 +3080,7 @@
           <a:lstStyle/>
           <a:p>
             <a:r>
-              <a:rPr lang="en-US" sz="1600" dirty="0" smtClean="0">
+              <a:rPr lang="en-US" sz="1600" dirty="0">
                 <a:solidFill>
                   <a:srgbClr val="0070C0"/>
                 </a:solidFill>
@@ -3118,7 +3118,7 @@
           <a:p>
             <a:pPr algn="ctr"/>
             <a:r>
-              <a:rPr lang="en-US" sz="1600" dirty="0" smtClean="0">
+              <a:rPr lang="en-US" sz="1600" dirty="0">
                 <a:solidFill>
                   <a:srgbClr val="0070C0"/>
                 </a:solidFill>
@@ -3129,7 +3129,7 @@
           <a:p>
             <a:pPr algn="ctr"/>
             <a:r>
-              <a:rPr lang="en-US" sz="1600" dirty="0" smtClean="0">
+              <a:rPr lang="en-US" sz="1600" dirty="0">
                 <a:solidFill>
                   <a:srgbClr val="0070C0"/>
                 </a:solidFill>
@@ -3140,7 +3140,7 @@
           <a:p>
             <a:pPr algn="ctr"/>
             <a:r>
-              <a:rPr lang="en-US" sz="1600" dirty="0" smtClean="0">
+              <a:rPr lang="en-US" sz="1600" dirty="0">
                 <a:solidFill>
                   <a:srgbClr val="0070C0"/>
                 </a:solidFill>
@@ -3224,7 +3224,7 @@
           <a:p>
             <a:pPr algn="ctr"/>
             <a:r>
-              <a:rPr lang="en-US" sz="1600" dirty="0" smtClean="0">
+              <a:rPr lang="en-US" sz="1600" dirty="0">
                 <a:solidFill>
                   <a:srgbClr val="0070C0"/>
                 </a:solidFill>
@@ -3418,16 +3418,12 @@
           <a:p>
             <a:pPr algn="ctr"/>
             <a:r>
-              <a:rPr lang="en-US" sz="1200" b="1" dirty="0" smtClean="0">
+              <a:rPr lang="en-US" sz="1200" b="1" dirty="0">
                 <a:latin typeface="Arial" pitchFamily="34" charset="0"/>
                 <a:cs typeface="Arial" pitchFamily="34" charset="0"/>
               </a:rPr>
               <a:t>             </a:t>
             </a:r>
-            <a:endParaRPr lang="en-US" sz="1200" b="1" dirty="0">
-              <a:latin typeface="Arial" pitchFamily="34" charset="0"/>
-              <a:cs typeface="Arial" pitchFamily="34" charset="0"/>
-            </a:endParaRPr>
           </a:p>
         </p:txBody>
       </p:sp>
@@ -3464,16 +3460,12 @@
           <a:p>
             <a:pPr algn="ctr"/>
             <a:r>
-              <a:rPr lang="en-US" sz="1200" b="1" dirty="0" smtClean="0">
+              <a:rPr lang="en-US" sz="1200" b="1" dirty="0">
                 <a:latin typeface="Arial" pitchFamily="34" charset="0"/>
                 <a:cs typeface="Arial" pitchFamily="34" charset="0"/>
               </a:rPr>
               <a:t>ROC Bank Length</a:t>
             </a:r>
-            <a:endParaRPr lang="en-US" sz="1200" b="1" dirty="0">
-              <a:latin typeface="Arial" pitchFamily="34" charset="0"/>
-              <a:cs typeface="Arial" pitchFamily="34" charset="0"/>
-            </a:endParaRPr>
           </a:p>
         </p:txBody>
       </p:sp>
@@ -3511,16 +3503,12 @@
           <a:p>
             <a:pPr algn="ctr"/>
             <a:r>
-              <a:rPr lang="en-US" sz="1200" b="1" dirty="0" smtClean="0">
+              <a:rPr lang="en-US" sz="1200" b="1" dirty="0">
                 <a:latin typeface="Arial" pitchFamily="34" charset="0"/>
                 <a:cs typeface="Arial" pitchFamily="34" charset="0"/>
               </a:rPr>
               <a:t>Stream Info Length</a:t>
             </a:r>
-            <a:endParaRPr lang="en-US" sz="1200" b="1" dirty="0">
-              <a:latin typeface="Arial" pitchFamily="34" charset="0"/>
-              <a:cs typeface="Arial" pitchFamily="34" charset="0"/>
-            </a:endParaRPr>
           </a:p>
         </p:txBody>
       </p:sp>
@@ -3552,7 +3540,7 @@
           <a:lstStyle/>
           <a:p>
             <a:pPr algn="ctr"/>
-            <a:endParaRPr lang="en-US" sz="800" b="1" dirty="0" smtClean="0">
+            <a:endParaRPr lang="en-US" sz="800" b="1" dirty="0">
               <a:latin typeface="Arial" pitchFamily="34" charset="0"/>
               <a:cs typeface="Arial" pitchFamily="34" charset="0"/>
             </a:endParaRPr>
@@ -3560,7 +3548,7 @@
           <a:p>
             <a:pPr algn="ctr"/>
             <a:r>
-              <a:rPr lang="en-US" sz="1200" b="1" dirty="0" smtClean="0">
+              <a:rPr lang="en-US" sz="1200" b="1" dirty="0">
                 <a:latin typeface="Arial" pitchFamily="34" charset="0"/>
                 <a:cs typeface="Arial" pitchFamily="34" charset="0"/>
               </a:rPr>
@@ -3569,7 +3557,7 @@
           </a:p>
           <a:p>
             <a:pPr algn="ctr"/>
-            <a:endParaRPr lang="en-US" sz="800" b="1" dirty="0" smtClean="0">
+            <a:endParaRPr lang="en-US" sz="800" b="1" dirty="0">
               <a:latin typeface="Arial" pitchFamily="34" charset="0"/>
               <a:cs typeface="Arial" pitchFamily="34" charset="0"/>
             </a:endParaRPr>
@@ -3638,16 +3626,12 @@
               <a:lstStyle/>
               <a:p>
                 <a:r>
-                  <a:rPr lang="en-US" sz="1200" b="1" dirty="0" smtClean="0">
+                  <a:rPr lang="en-US" sz="1200" b="1" dirty="0">
                     <a:latin typeface="Arial" pitchFamily="34" charset="0"/>
                     <a:cs typeface="Arial" pitchFamily="34" charset="0"/>
                   </a:rPr>
                   <a:t>     ROC ID         0x10       SS</a:t>
                 </a:r>
-                <a:endParaRPr lang="en-US" sz="1200" b="1" dirty="0">
-                  <a:latin typeface="Arial" pitchFamily="34" charset="0"/>
-                  <a:cs typeface="Arial" pitchFamily="34" charset="0"/>
-                </a:endParaRPr>
               </a:p>
             </p:txBody>
           </p:sp>
@@ -3788,16 +3772,12 @@
               <a:lstStyle/>
               <a:p>
                 <a:r>
-                  <a:rPr lang="en-US" sz="1200" b="1" dirty="0" smtClean="0">
+                  <a:rPr lang="en-US" sz="1200" b="1" dirty="0">
                     <a:latin typeface="Arial" pitchFamily="34" charset="0"/>
                     <a:cs typeface="Arial" pitchFamily="34" charset="0"/>
                   </a:rPr>
                   <a:t>     0xFF30         0x20       SS</a:t>
                 </a:r>
-                <a:endParaRPr lang="en-US" sz="1200" b="1" dirty="0">
-                  <a:latin typeface="Arial" pitchFamily="34" charset="0"/>
-                  <a:cs typeface="Arial" pitchFamily="34" charset="0"/>
-                </a:endParaRPr>
               </a:p>
             </p:txBody>
           </p:sp>
@@ -3904,7 +3884,7 @@
           <a:p>
             <a:pPr algn="ctr"/>
             <a:r>
-              <a:rPr lang="en-US" sz="2000" b="1" dirty="0" smtClean="0">
+              <a:rPr lang="en-US" sz="2000" b="1" dirty="0">
                 <a:solidFill>
                   <a:srgbClr val="0070C0"/>
                 </a:solidFill>
@@ -3958,16 +3938,12 @@
             <a:p>
               <a:pPr algn="ctr"/>
               <a:r>
-                <a:rPr lang="en-US" sz="1200" b="1" dirty="0" smtClean="0">
+                <a:rPr lang="en-US" sz="1200" b="1" dirty="0">
                   <a:latin typeface="Arial" pitchFamily="34" charset="0"/>
                   <a:cs typeface="Arial" pitchFamily="34" charset="0"/>
                 </a:rPr>
                 <a:t>Frame Number</a:t>
               </a:r>
-              <a:endParaRPr lang="en-US" sz="1200" b="1" dirty="0">
-                <a:latin typeface="Arial" pitchFamily="34" charset="0"/>
-                <a:cs typeface="Arial" pitchFamily="34" charset="0"/>
-              </a:endParaRPr>
             </a:p>
           </p:txBody>
         </p:sp>
@@ -4000,16 +3976,12 @@
             <a:p>
               <a:pPr algn="ctr"/>
               <a:r>
-                <a:rPr lang="en-US" sz="1200" b="1" dirty="0" smtClean="0">
+                <a:rPr lang="en-US" sz="1200" b="1" dirty="0">
                   <a:latin typeface="Arial" pitchFamily="34" charset="0"/>
                   <a:cs typeface="Arial" pitchFamily="34" charset="0"/>
                 </a:rPr>
                 <a:t>Timestamp1 (31 – 0)</a:t>
               </a:r>
-              <a:endParaRPr lang="en-US" sz="1200" b="1" dirty="0">
-                <a:latin typeface="Arial" pitchFamily="34" charset="0"/>
-                <a:cs typeface="Arial" pitchFamily="34" charset="0"/>
-              </a:endParaRPr>
             </a:p>
           </p:txBody>
         </p:sp>
@@ -4073,16 +4045,12 @@
                 <a:lstStyle/>
                 <a:p>
                   <a:r>
-                    <a:rPr lang="en-US" sz="1200" b="1" dirty="0" smtClean="0">
+                    <a:rPr lang="en-US" sz="1200" b="1" dirty="0">
                       <a:latin typeface="Arial" pitchFamily="34" charset="0"/>
                       <a:cs typeface="Arial" pitchFamily="34" charset="0"/>
                     </a:rPr>
                     <a:t> 0x31     0x01       TSS Len</a:t>
                   </a:r>
-                  <a:endParaRPr lang="en-US" sz="1200" b="1" dirty="0">
-                    <a:latin typeface="Arial" pitchFamily="34" charset="0"/>
-                    <a:cs typeface="Arial" pitchFamily="34" charset="0"/>
-                  </a:endParaRPr>
                 </a:p>
               </p:txBody>
             </p:sp>
@@ -4187,16 +4155,12 @@
             <a:p>
               <a:pPr algn="ctr"/>
               <a:r>
-                <a:rPr lang="en-US" sz="1200" b="1" dirty="0" smtClean="0">
+                <a:rPr lang="en-US" sz="1200" b="1" dirty="0">
                   <a:latin typeface="Arial" pitchFamily="34" charset="0"/>
                   <a:cs typeface="Arial" pitchFamily="34" charset="0"/>
                 </a:rPr>
                 <a:t>Timestamp1 (63 – 32)</a:t>
               </a:r>
-              <a:endParaRPr lang="en-US" sz="1200" b="1" dirty="0">
-                <a:latin typeface="Arial" pitchFamily="34" charset="0"/>
-                <a:cs typeface="Arial" pitchFamily="34" charset="0"/>
-              </a:endParaRPr>
             </a:p>
           </p:txBody>
         </p:sp>
@@ -4336,18 +4300,13 @@
             <a:lstStyle/>
             <a:p>
               <a:r>
-                <a:rPr lang="en-US" sz="1200" dirty="0" smtClean="0">
+                <a:rPr lang="en-US" sz="1200" dirty="0">
                   <a:solidFill>
                     <a:srgbClr val="0070C0"/>
                   </a:solidFill>
                 </a:rPr>
                 <a:t>Bank of banks</a:t>
               </a:r>
-              <a:endParaRPr lang="en-US" sz="1200" dirty="0">
-                <a:solidFill>
-                  <a:srgbClr val="0070C0"/>
-                </a:solidFill>
-              </a:endParaRPr>
             </a:p>
           </p:txBody>
         </p:sp>
@@ -4380,14 +4339,14 @@
             <a:lstStyle/>
             <a:p>
               <a:r>
-                <a:rPr lang="en-US" sz="1200" smtClean="0">
+                <a:rPr lang="en-US" sz="1200">
                   <a:solidFill>
                     <a:srgbClr val="0070C0"/>
                   </a:solidFill>
                 </a:rPr>
                 <a:t>Stream Status</a:t>
               </a:r>
-              <a:endParaRPr lang="en-US" sz="1200" dirty="0" smtClean="0">
+              <a:endParaRPr lang="en-US" sz="1200" dirty="0">
                 <a:solidFill>
                   <a:srgbClr val="0070C0"/>
                 </a:solidFill>
@@ -4424,7 +4383,7 @@
             <a:lstStyle/>
             <a:p>
               <a:r>
-                <a:rPr lang="en-US" sz="1200" smtClean="0">
+                <a:rPr lang="en-US" sz="1200">
                   <a:solidFill>
                     <a:srgbClr val="0070C0"/>
                   </a:solidFill>
@@ -4432,18 +4391,13 @@
                 <a:t> 16 </a:t>
               </a:r>
               <a:r>
-                <a:rPr lang="en-US" sz="1200" dirty="0" smtClean="0">
+                <a:rPr lang="en-US" sz="1200" dirty="0">
                   <a:solidFill>
                     <a:srgbClr val="0070C0"/>
                   </a:solidFill>
                 </a:rPr>
                 <a:t>bit ROC  ID</a:t>
               </a:r>
-              <a:endParaRPr lang="en-US" sz="1200" dirty="0">
-                <a:solidFill>
-                  <a:srgbClr val="0070C0"/>
-                </a:solidFill>
-              </a:endParaRPr>
             </a:p>
           </p:txBody>
         </p:sp>
@@ -4507,16 +4461,12 @@
                 <a:lstStyle/>
                 <a:p>
                   <a:r>
-                    <a:rPr lang="en-US" sz="1200" b="1" dirty="0" smtClean="0">
+                    <a:rPr lang="en-US" sz="1200" b="1" dirty="0">
                       <a:latin typeface="Arial" pitchFamily="34" charset="0"/>
                       <a:cs typeface="Arial" pitchFamily="34" charset="0"/>
                     </a:rPr>
                     <a:t>     ROC ID        0x10       SS</a:t>
                   </a:r>
-                  <a:endParaRPr lang="en-US" sz="1200" b="1" dirty="0">
-                    <a:latin typeface="Arial" pitchFamily="34" charset="0"/>
-                    <a:cs typeface="Arial" pitchFamily="34" charset="0"/>
-                  </a:endParaRPr>
                 </a:p>
               </p:txBody>
             </p:sp>
@@ -4724,33 +4674,22 @@
                       <a:latin typeface="Arial" pitchFamily="34" charset="0"/>
                       <a:cs typeface="Arial" pitchFamily="34" charset="0"/>
                     </a:rPr>
-                    <a:t> </a:t>
+                    <a:t>      Total </a:t>
                   </a:r>
                   <a:r>
-                    <a:rPr lang="en-US" sz="1200" b="1" dirty="0" smtClean="0">
-                      <a:latin typeface="Arial" pitchFamily="34" charset="0"/>
-                      <a:cs typeface="Arial" pitchFamily="34" charset="0"/>
-                    </a:rPr>
-                    <a:t>     Total </a:t>
-                  </a:r>
-                  <a:r>
-                    <a:rPr lang="en-US" sz="1200" b="1" smtClean="0">
+                    <a:rPr lang="en-US" sz="1200" b="1">
                       <a:latin typeface="Arial" pitchFamily="34" charset="0"/>
                       <a:cs typeface="Arial" pitchFamily="34" charset="0"/>
                     </a:rPr>
                     <a:t>Streams         </a:t>
                   </a:r>
                   <a:r>
-                    <a:rPr lang="en-US" sz="1200" b="1" dirty="0" smtClean="0">
+                    <a:rPr lang="en-US" sz="1200" b="1" dirty="0">
                       <a:latin typeface="Arial" pitchFamily="34" charset="0"/>
                       <a:cs typeface="Arial" pitchFamily="34" charset="0"/>
                     </a:rPr>
                     <a:t>Stream Mask</a:t>
                   </a:r>
-                  <a:endParaRPr lang="en-US" sz="1200" b="1" dirty="0">
-                    <a:latin typeface="Arial" pitchFamily="34" charset="0"/>
-                    <a:cs typeface="Arial" pitchFamily="34" charset="0"/>
-                  </a:endParaRPr>
                 </a:p>
               </p:txBody>
             </p:sp>
@@ -4855,42 +4794,13 @@
             <a:lstStyle/>
             <a:p>
               <a:r>
-                <a:rPr lang="en-US" sz="1200" dirty="0" smtClean="0">
+                <a:rPr lang="en-US" sz="1200" dirty="0">
                   <a:solidFill>
                     <a:srgbClr val="0070C0"/>
                   </a:solidFill>
                 </a:rPr>
-                <a:t>Bits </a:t>
+                <a:t>Bits 6 - 4</a:t>
               </a:r>
-              <a:r>
-                <a:rPr lang="en-US" sz="1200" dirty="0" smtClean="0">
-                  <a:solidFill>
-                    <a:srgbClr val="0070C0"/>
-                  </a:solidFill>
-                </a:rPr>
-                <a:t>6 </a:t>
-              </a:r>
-              <a:r>
-                <a:rPr lang="en-US" sz="1200" dirty="0" smtClean="0">
-                  <a:solidFill>
-                    <a:srgbClr val="0070C0"/>
-                  </a:solidFill>
-                </a:rPr>
-                <a:t>- </a:t>
-              </a:r>
-              <a:r>
-                <a:rPr lang="en-US" sz="1200" dirty="0" smtClean="0">
-                  <a:solidFill>
-                    <a:srgbClr val="0070C0"/>
-                  </a:solidFill>
-                </a:rPr>
-                <a:t>4</a:t>
-              </a:r>
-              <a:endParaRPr lang="en-US" sz="1200" dirty="0">
-                <a:solidFill>
-                  <a:srgbClr val="0070C0"/>
-                </a:solidFill>
-              </a:endParaRPr>
             </a:p>
           </p:txBody>
         </p:sp>
@@ -4923,42 +4833,13 @@
             <a:lstStyle/>
             <a:p>
               <a:r>
-                <a:rPr lang="en-US" sz="1200" dirty="0" smtClean="0">
+                <a:rPr lang="en-US" sz="1200" dirty="0">
                   <a:solidFill>
                     <a:srgbClr val="0070C0"/>
                   </a:solidFill>
                 </a:rPr>
-                <a:t>Bits </a:t>
+                <a:t>Bits 3 - 0</a:t>
               </a:r>
-              <a:r>
-                <a:rPr lang="en-US" sz="1200" dirty="0" smtClean="0">
-                  <a:solidFill>
-                    <a:srgbClr val="0070C0"/>
-                  </a:solidFill>
-                </a:rPr>
-                <a:t>3 </a:t>
-              </a:r>
-              <a:r>
-                <a:rPr lang="en-US" sz="1200" dirty="0" smtClean="0">
-                  <a:solidFill>
-                    <a:srgbClr val="0070C0"/>
-                  </a:solidFill>
-                </a:rPr>
-                <a:t>- </a:t>
-              </a:r>
-              <a:r>
-                <a:rPr lang="en-US" sz="1200" dirty="0" smtClean="0">
-                  <a:solidFill>
-                    <a:srgbClr val="0070C0"/>
-                  </a:solidFill>
-                </a:rPr>
-                <a:t>0</a:t>
-              </a:r>
-              <a:endParaRPr lang="en-US" sz="1200" dirty="0">
-                <a:solidFill>
-                  <a:srgbClr val="0070C0"/>
-                </a:solidFill>
-              </a:endParaRPr>
             </a:p>
           </p:txBody>
         </p:sp>
@@ -5005,16 +4886,12 @@
             <a:lstStyle/>
             <a:p>
               <a:r>
-                <a:rPr lang="en-US" sz="1200" b="1" dirty="0" smtClean="0">
+                <a:rPr lang="en-US" sz="1200" b="1" dirty="0">
                   <a:latin typeface="Arial" pitchFamily="34" charset="0"/>
                   <a:cs typeface="Arial" pitchFamily="34" charset="0"/>
                 </a:rPr>
                 <a:t>  Payload 2         Payload 1</a:t>
               </a:r>
-              <a:endParaRPr lang="en-US" sz="1200" b="1" dirty="0">
-                <a:latin typeface="Arial" pitchFamily="34" charset="0"/>
-                <a:cs typeface="Arial" pitchFamily="34" charset="0"/>
-              </a:endParaRPr>
             </a:p>
           </p:txBody>
         </p:sp>
@@ -5050,31 +4927,24 @@
                   <a:latin typeface="Arial" pitchFamily="34" charset="0"/>
                   <a:cs typeface="Arial" pitchFamily="34" charset="0"/>
                 </a:rPr>
-                <a:t> </a:t>
+                <a:t>         </a:t>
               </a:r>
               <a:r>
-                <a:rPr lang="en-US" sz="1200" b="1" dirty="0" smtClean="0">
-                  <a:latin typeface="Arial" pitchFamily="34" charset="0"/>
-                  <a:cs typeface="Arial" pitchFamily="34" charset="0"/>
-                </a:rPr>
-                <a:t>        </a:t>
-              </a:r>
-              <a:r>
-                <a:rPr lang="mr-IN" sz="1200" b="1" dirty="0" smtClean="0">
+                <a:rPr lang="mr-IN" sz="1200" b="1" dirty="0">
                   <a:latin typeface="Arial" pitchFamily="34" charset="0"/>
                   <a:cs typeface="Arial" pitchFamily="34" charset="0"/>
                 </a:rPr>
                 <a:t>…</a:t>
               </a:r>
               <a:r>
-                <a:rPr lang="en-US" sz="1200" b="1" dirty="0" smtClean="0">
+                <a:rPr lang="en-US" sz="1200" b="1" dirty="0">
                   <a:latin typeface="Arial" pitchFamily="34" charset="0"/>
                   <a:cs typeface="Arial" pitchFamily="34" charset="0"/>
                 </a:rPr>
                 <a:t>                    </a:t>
               </a:r>
               <a:r>
-                <a:rPr lang="mr-IN" sz="1200" b="1" dirty="0" smtClean="0">
+                <a:rPr lang="mr-IN" sz="1200" b="1" dirty="0">
                   <a:latin typeface="Arial" pitchFamily="34" charset="0"/>
                   <a:cs typeface="Arial" pitchFamily="34" charset="0"/>
                 </a:rPr>
@@ -5147,30 +5017,12 @@
                 <a:lstStyle/>
                 <a:p>
                   <a:r>
-                    <a:rPr lang="en-US" sz="1200" b="1" dirty="0" smtClean="0">
+                    <a:rPr lang="en-US" sz="1200" b="1" dirty="0">
                       <a:latin typeface="Arial" pitchFamily="34" charset="0"/>
                       <a:cs typeface="Arial" pitchFamily="34" charset="0"/>
                     </a:rPr>
-                    <a:t> 0x41     </a:t>
+                    <a:t> 0x41     0x85       AIS Len</a:t>
                   </a:r>
-                  <a:r>
-                    <a:rPr lang="en-US" sz="1200" b="1" dirty="0" smtClean="0">
-                      <a:latin typeface="Arial" pitchFamily="34" charset="0"/>
-                      <a:cs typeface="Arial" pitchFamily="34" charset="0"/>
-                    </a:rPr>
-                    <a:t>0x85       </a:t>
-                  </a:r>
-                  <a:r>
-                    <a:rPr lang="en-US" sz="1200" b="1" dirty="0" smtClean="0">
-                      <a:latin typeface="Arial" pitchFamily="34" charset="0"/>
-                      <a:cs typeface="Arial" pitchFamily="34" charset="0"/>
-                    </a:rPr>
-                    <a:t>AIS Len</a:t>
-                  </a:r>
-                  <a:endParaRPr lang="en-US" sz="1200" b="1" dirty="0">
-                    <a:latin typeface="Arial" pitchFamily="34" charset="0"/>
-                    <a:cs typeface="Arial" pitchFamily="34" charset="0"/>
-                  </a:endParaRPr>
                 </a:p>
               </p:txBody>
             </p:sp>
@@ -5278,19 +5130,8 @@
                   <a:latin typeface="Arial" pitchFamily="34" charset="0"/>
                   <a:cs typeface="Arial" pitchFamily="34" charset="0"/>
                 </a:rPr>
-                <a:t> </a:t>
+                <a:t>          0               Payload N     </a:t>
               </a:r>
-              <a:r>
-                <a:rPr lang="en-US" sz="1200" b="1" dirty="0" smtClean="0">
-                  <a:latin typeface="Arial" pitchFamily="34" charset="0"/>
-                  <a:cs typeface="Arial" pitchFamily="34" charset="0"/>
-                </a:rPr>
-                <a:t>         0               Payload N     </a:t>
-              </a:r>
-              <a:endParaRPr lang="en-US" sz="1200" b="1" dirty="0">
-                <a:latin typeface="Arial" pitchFamily="34" charset="0"/>
-                <a:cs typeface="Arial" pitchFamily="34" charset="0"/>
-              </a:endParaRPr>
             </a:p>
           </p:txBody>
         </p:sp>
@@ -5448,16 +5289,12 @@
             <a:p>
               <a:pPr algn="ctr"/>
               <a:r>
-                <a:rPr lang="en-US" sz="1200" b="1" dirty="0" smtClean="0">
+                <a:rPr lang="en-US" sz="1200" b="1" dirty="0">
                   <a:latin typeface="Arial" pitchFamily="34" charset="0"/>
                   <a:cs typeface="Arial" pitchFamily="34" charset="0"/>
                 </a:rPr>
                 <a:t>Payload Port 1 Length</a:t>
               </a:r>
-              <a:endParaRPr lang="en-US" sz="1200" b="1" dirty="0">
-                <a:latin typeface="Arial" pitchFamily="34" charset="0"/>
-                <a:cs typeface="Arial" pitchFamily="34" charset="0"/>
-              </a:endParaRPr>
             </a:p>
           </p:txBody>
         </p:sp>
@@ -5529,16 +5366,12 @@
                 <a:lstStyle/>
                 <a:p>
                   <a:r>
-                    <a:rPr lang="en-US" sz="1200" b="1" dirty="0" smtClean="0">
+                    <a:rPr lang="en-US" sz="1200" b="1" dirty="0">
                       <a:latin typeface="Arial" pitchFamily="34" charset="0"/>
                       <a:cs typeface="Arial" pitchFamily="34" charset="0"/>
                     </a:rPr>
                     <a:t>     PP 1 ID          0xf        SS</a:t>
                   </a:r>
-                  <a:endParaRPr lang="en-US" sz="1200" b="1" dirty="0">
-                    <a:latin typeface="Arial" pitchFamily="34" charset="0"/>
-                    <a:cs typeface="Arial" pitchFamily="34" charset="0"/>
-                  </a:endParaRPr>
                 </a:p>
               </p:txBody>
             </p:sp>
@@ -5665,16 +5498,12 @@
             <a:p>
               <a:pPr algn="ctr"/>
               <a:r>
-                <a:rPr lang="en-US" sz="1200" b="1" dirty="0" smtClean="0">
+                <a:rPr lang="en-US" sz="1200" b="1" dirty="0">
                   <a:latin typeface="Arial" pitchFamily="34" charset="0"/>
                   <a:cs typeface="Arial" pitchFamily="34" charset="0"/>
                 </a:rPr>
                 <a:t>Payload Port N Length</a:t>
               </a:r>
-              <a:endParaRPr lang="en-US" sz="1200" b="1" dirty="0">
-                <a:latin typeface="Arial" pitchFamily="34" charset="0"/>
-                <a:cs typeface="Arial" pitchFamily="34" charset="0"/>
-              </a:endParaRPr>
             </a:p>
           </p:txBody>
         </p:sp>
@@ -5746,16 +5575,12 @@
                 <a:lstStyle/>
                 <a:p>
                   <a:r>
-                    <a:rPr lang="en-US" sz="1200" b="1" dirty="0" smtClean="0">
+                    <a:rPr lang="en-US" sz="1200" b="1" dirty="0">
                       <a:latin typeface="Arial" pitchFamily="34" charset="0"/>
                       <a:cs typeface="Arial" pitchFamily="34" charset="0"/>
                     </a:rPr>
                     <a:t>     PP N ID          0xf        SS</a:t>
                   </a:r>
-                  <a:endParaRPr lang="en-US" sz="1200" b="1" dirty="0">
-                    <a:latin typeface="Arial" pitchFamily="34" charset="0"/>
-                    <a:cs typeface="Arial" pitchFamily="34" charset="0"/>
-                  </a:endParaRPr>
                 </a:p>
               </p:txBody>
             </p:sp>
@@ -5862,7 +5687,7 @@
           <a:lstStyle/>
           <a:p>
             <a:pPr algn="ctr"/>
-            <a:endParaRPr lang="en-US" sz="800" b="1" dirty="0" smtClean="0">
+            <a:endParaRPr lang="en-US" sz="800" b="1" dirty="0">
               <a:latin typeface="Arial" pitchFamily="34" charset="0"/>
               <a:cs typeface="Arial" pitchFamily="34" charset="0"/>
             </a:endParaRPr>
@@ -5870,7 +5695,7 @@
           <a:p>
             <a:pPr algn="ctr"/>
             <a:r>
-              <a:rPr lang="en-US" sz="1200" b="1" dirty="0" smtClean="0">
+              <a:rPr lang="en-US" sz="1200" b="1" dirty="0">
                 <a:latin typeface="Arial" pitchFamily="34" charset="0"/>
                 <a:cs typeface="Arial" pitchFamily="34" charset="0"/>
               </a:rPr>
@@ -5879,7 +5704,7 @@
           </a:p>
           <a:p>
             <a:pPr algn="ctr"/>
-            <a:endParaRPr lang="en-US" sz="800" b="1" dirty="0" smtClean="0">
+            <a:endParaRPr lang="en-US" sz="800" b="1" dirty="0">
               <a:latin typeface="Arial" pitchFamily="34" charset="0"/>
               <a:cs typeface="Arial" pitchFamily="34" charset="0"/>
             </a:endParaRPr>
@@ -5961,7 +5786,7 @@
           <a:lstStyle/>
           <a:p>
             <a:r>
-              <a:rPr lang="en-US" sz="1200" smtClean="0">
+              <a:rPr lang="en-US" sz="1200">
                 <a:solidFill>
                   <a:srgbClr val="0070C0"/>
                 </a:solidFill>
@@ -6004,7 +5829,7 @@
           <a:lstStyle/>
           <a:p>
             <a:pPr algn="ctr"/>
-            <a:endParaRPr lang="en-US" sz="800" b="1" dirty="0" smtClean="0">
+            <a:endParaRPr lang="en-US" sz="800" b="1" dirty="0">
               <a:latin typeface="Arial" pitchFamily="34" charset="0"/>
               <a:cs typeface="Arial" pitchFamily="34" charset="0"/>
             </a:endParaRPr>
@@ -6012,20 +5837,16 @@
           <a:p>
             <a:pPr algn="ctr"/>
             <a:r>
-              <a:rPr lang="en-US" sz="1200" b="1" dirty="0" smtClean="0">
+              <a:rPr lang="en-US" sz="1200" b="1" dirty="0">
                 <a:latin typeface="Arial" pitchFamily="34" charset="0"/>
                 <a:cs typeface="Arial" pitchFamily="34" charset="0"/>
               </a:rPr>
               <a:t>EVIO HEADER</a:t>
             </a:r>
-            <a:endParaRPr lang="en-US" sz="1200" b="1" dirty="0" smtClean="0">
-              <a:latin typeface="Arial" pitchFamily="34" charset="0"/>
-              <a:cs typeface="Arial" pitchFamily="34" charset="0"/>
-            </a:endParaRPr>
           </a:p>
           <a:p>
             <a:pPr algn="ctr"/>
-            <a:endParaRPr lang="en-US" sz="800" b="1" dirty="0" smtClean="0">
+            <a:endParaRPr lang="en-US" sz="800" b="1" dirty="0">
               <a:latin typeface="Arial" pitchFamily="34" charset="0"/>
               <a:cs typeface="Arial" pitchFamily="34" charset="0"/>
             </a:endParaRPr>
@@ -6119,7 +5940,7 @@
             <a:lstStyle/>
             <a:p>
               <a:r>
-                <a:rPr lang="en-US" sz="1200" dirty="0" smtClean="0">
+                <a:rPr lang="en-US" sz="1200" dirty="0">
                   <a:solidFill>
                     <a:srgbClr val="0070C0"/>
                   </a:solidFill>
@@ -6135,7 +5956,7 @@
               </a:endParaRPr>
             </a:p>
             <a:p>
-              <a:endParaRPr lang="en-US" sz="1200" dirty="0" smtClean="0">
+              <a:endParaRPr lang="en-US" sz="1200" dirty="0">
                 <a:solidFill>
                   <a:srgbClr val="0070C0"/>
                 </a:solidFill>
@@ -6149,14 +5970,14 @@
               </a:endParaRPr>
             </a:p>
             <a:p>
-              <a:endParaRPr lang="en-US" sz="1200" dirty="0" smtClean="0">
+              <a:endParaRPr lang="en-US" sz="1200" dirty="0">
                 <a:solidFill>
                   <a:srgbClr val="0070C0"/>
                 </a:solidFill>
               </a:endParaRPr>
             </a:p>
             <a:p>
-              <a:endParaRPr lang="en-US" sz="1200" dirty="0" smtClean="0">
+              <a:endParaRPr lang="en-US" sz="1200" dirty="0">
                 <a:solidFill>
                   <a:srgbClr val="0070C0"/>
                 </a:solidFill>
@@ -6164,18 +5985,13 @@
             </a:p>
             <a:p>
               <a:r>
-                <a:rPr lang="en-US" sz="1200" dirty="0" smtClean="0">
+                <a:rPr lang="en-US" sz="1200" dirty="0">
                   <a:solidFill>
                     <a:srgbClr val="0070C0"/>
                   </a:solidFill>
                 </a:rPr>
                 <a:t>N &lt;= 20</a:t>
               </a:r>
-              <a:endParaRPr lang="en-US" sz="1200" dirty="0">
-                <a:solidFill>
-                  <a:srgbClr val="0070C0"/>
-                </a:solidFill>
-              </a:endParaRPr>
             </a:p>
           </p:txBody>
         </p:sp>
@@ -6207,16 +6023,12 @@
             <a:lstStyle/>
             <a:p>
               <a:r>
-                <a:rPr lang="en-US" sz="1100" b="1" dirty="0" smtClean="0">
+                <a:rPr lang="en-US" sz="1100" b="1" dirty="0">
                   <a:latin typeface="Arial" pitchFamily="34" charset="0"/>
                   <a:cs typeface="Arial" pitchFamily="34" charset="0"/>
                 </a:rPr>
                 <a:t> Module ID     Bond?  Lane ID    Payload Port #</a:t>
               </a:r>
-              <a:endParaRPr lang="en-US" sz="1100" b="1" dirty="0">
-                <a:latin typeface="Arial" pitchFamily="34" charset="0"/>
-                <a:cs typeface="Arial" pitchFamily="34" charset="0"/>
-              </a:endParaRPr>
             </a:p>
           </p:txBody>
         </p:sp>
@@ -6354,42 +6166,13 @@
             <a:lstStyle/>
             <a:p>
               <a:r>
-                <a:rPr lang="en-US" sz="1200" dirty="0" smtClean="0">
+                <a:rPr lang="en-US" sz="1200" dirty="0">
                   <a:solidFill>
                     <a:srgbClr val="0070C0"/>
                   </a:solidFill>
                 </a:rPr>
-                <a:t>Bits </a:t>
+                <a:t>Bits 4 - 0</a:t>
               </a:r>
-              <a:r>
-                <a:rPr lang="en-US" sz="1200" dirty="0" smtClean="0">
-                  <a:solidFill>
-                    <a:srgbClr val="0070C0"/>
-                  </a:solidFill>
-                </a:rPr>
-                <a:t>4 </a:t>
-              </a:r>
-              <a:r>
-                <a:rPr lang="en-US" sz="1200" dirty="0" smtClean="0">
-                  <a:solidFill>
-                    <a:srgbClr val="0070C0"/>
-                  </a:solidFill>
-                </a:rPr>
-                <a:t>- </a:t>
-              </a:r>
-              <a:r>
-                <a:rPr lang="en-US" sz="1200" dirty="0" smtClean="0">
-                  <a:solidFill>
-                    <a:srgbClr val="0070C0"/>
-                  </a:solidFill>
-                </a:rPr>
-                <a:t>0</a:t>
-              </a:r>
-              <a:endParaRPr lang="en-US" sz="1200" dirty="0">
-                <a:solidFill>
-                  <a:srgbClr val="0070C0"/>
-                </a:solidFill>
-              </a:endParaRPr>
             </a:p>
           </p:txBody>
         </p:sp>
@@ -6422,26 +6205,13 @@
             <a:lstStyle/>
             <a:p>
               <a:r>
-                <a:rPr lang="en-US" sz="1200" dirty="0" smtClean="0">
+                <a:rPr lang="en-US" sz="1200" dirty="0">
                   <a:solidFill>
                     <a:srgbClr val="0070C0"/>
                   </a:solidFill>
                 </a:rPr>
-                <a:t>Bits </a:t>
+                <a:t>Bits 6 , 5</a:t>
               </a:r>
-              <a:r>
-                <a:rPr lang="en-US" sz="1200" dirty="0" smtClean="0">
-                  <a:solidFill>
-                    <a:srgbClr val="0070C0"/>
-                  </a:solidFill>
-                </a:rPr>
-                <a:t>6 , 5</a:t>
-              </a:r>
-              <a:endParaRPr lang="en-US" sz="1200" dirty="0">
-                <a:solidFill>
-                  <a:srgbClr val="0070C0"/>
-                </a:solidFill>
-              </a:endParaRPr>
             </a:p>
           </p:txBody>
         </p:sp>
@@ -6474,7 +6244,7 @@
             <a:lstStyle/>
             <a:p>
               <a:r>
-                <a:rPr lang="en-US" sz="1200" smtClean="0">
+                <a:rPr lang="en-US" sz="1200">
                   <a:solidFill>
                     <a:srgbClr val="0070C0"/>
                   </a:solidFill>
@@ -6518,28 +6288,12 @@
             <a:lstStyle/>
             <a:p>
               <a:r>
-                <a:rPr lang="en-US" sz="1200" smtClean="0">
+                <a:rPr lang="en-US" sz="1200">
                   <a:solidFill>
                     <a:srgbClr val="0070C0"/>
                   </a:solidFill>
                 </a:rPr>
-                <a:t>Bits </a:t>
-              </a:r>
-              <a:r>
-                <a:rPr lang="en-US" sz="1200" smtClean="0">
-                  <a:solidFill>
-                    <a:srgbClr val="0070C0"/>
-                  </a:solidFill>
-                </a:rPr>
-                <a:t>11 </a:t>
-              </a:r>
-              <a:r>
-                <a:rPr lang="en-US" sz="1200" smtClean="0">
-                  <a:solidFill>
-                    <a:srgbClr val="0070C0"/>
-                  </a:solidFill>
-                </a:rPr>
-                <a:t>- </a:t>
+                <a:t>Bits 11 - </a:t>
               </a:r>
               <a:r>
                 <a:rPr lang="en-US" sz="1200" dirty="0">
@@ -6549,11 +6303,6 @@
                 </a:rPr>
                 <a:t>8</a:t>
               </a:r>
-              <a:endParaRPr lang="en-US" sz="1200" dirty="0">
-                <a:solidFill>
-                  <a:srgbClr val="0070C0"/>
-                </a:solidFill>
-              </a:endParaRPr>
             </a:p>
           </p:txBody>
         </p:sp>
@@ -6623,7 +6372,7 @@
           <a:lstStyle/>
           <a:p>
             <a:r>
-              <a:rPr lang="en-US" sz="1200" dirty="0" smtClean="0">
+              <a:rPr lang="en-US" sz="1200" dirty="0">
                 <a:solidFill>
                   <a:srgbClr val="0070C0"/>
                 </a:solidFill>
@@ -6631,7 +6380,7 @@
               <a:t>2</a:t>
             </a:r>
             <a:r>
-              <a:rPr lang="en-US" sz="1200" baseline="30000" dirty="0" smtClean="0">
+              <a:rPr lang="en-US" sz="1200" baseline="30000" dirty="0">
                 <a:solidFill>
                   <a:srgbClr val="0070C0"/>
                 </a:solidFill>
@@ -6639,18 +6388,13 @@
               <a:t>nd</a:t>
             </a:r>
             <a:r>
-              <a:rPr lang="en-US" sz="1200" dirty="0" smtClean="0">
+              <a:rPr lang="en-US" sz="1200" dirty="0">
                 <a:solidFill>
                   <a:srgbClr val="0070C0"/>
                 </a:solidFill>
               </a:rPr>
               <a:t> byte: top 2 bits = 2 for padding if odd # payloads (else 0), lower 6 bits is type 5 (unsigned short) =&gt; 0x85 (1000 0101)</a:t>
             </a:r>
-            <a:endParaRPr lang="en-US" sz="1200" dirty="0">
-              <a:solidFill>
-                <a:srgbClr val="0070C0"/>
-              </a:solidFill>
-            </a:endParaRPr>
           </a:p>
         </p:txBody>
       </p:sp>
@@ -6748,7 +6492,7 @@
           <a:lstStyle/>
           <a:p>
             <a:r>
-              <a:rPr lang="en-US" sz="1600" dirty="0" smtClean="0">
+              <a:rPr lang="en-US" sz="1600" dirty="0">
                 <a:solidFill>
                   <a:srgbClr val="0070C0"/>
                 </a:solidFill>
@@ -6786,42 +6530,24 @@
           <a:p>
             <a:pPr algn="ctr"/>
             <a:r>
-              <a:rPr lang="en-US" sz="1600" dirty="0" smtClean="0">
+              <a:rPr lang="en-US" sz="1600" dirty="0">
                 <a:solidFill>
                   <a:srgbClr val="0070C0"/>
                 </a:solidFill>
               </a:rPr>
-              <a:t>Time </a:t>
+              <a:t>Time Info</a:t>
             </a:r>
-            <a:r>
-              <a:rPr lang="en-US" sz="1600" dirty="0" smtClean="0">
-                <a:solidFill>
-                  <a:srgbClr val="0070C0"/>
-                </a:solidFill>
-              </a:rPr>
-              <a:t>Info</a:t>
-            </a:r>
-            <a:endParaRPr lang="en-US" sz="1600" dirty="0" smtClean="0">
-              <a:solidFill>
-                <a:srgbClr val="0070C0"/>
-              </a:solidFill>
-            </a:endParaRPr>
           </a:p>
           <a:p>
             <a:pPr algn="ctr"/>
             <a:r>
-              <a:rPr lang="en-US" sz="1600" dirty="0" smtClean="0">
+              <a:rPr lang="en-US" sz="1600" dirty="0">
                 <a:solidFill>
                   <a:srgbClr val="0070C0"/>
                 </a:solidFill>
               </a:rPr>
               <a:t>Bank (TIB)</a:t>
             </a:r>
-            <a:endParaRPr lang="en-US" sz="1600" dirty="0" smtClean="0">
-              <a:solidFill>
-                <a:srgbClr val="0070C0"/>
-              </a:solidFill>
-            </a:endParaRPr>
           </a:p>
         </p:txBody>
       </p:sp>
@@ -6853,7 +6579,7 @@
           <a:p>
             <a:pPr algn="ctr"/>
             <a:r>
-              <a:rPr lang="en-US" sz="1600" dirty="0" smtClean="0">
+              <a:rPr lang="en-US" sz="1600" dirty="0">
                 <a:solidFill>
                   <a:srgbClr val="0070C0"/>
                 </a:solidFill>
@@ -6861,14 +6587,14 @@
               <a:t>ROC </a:t>
             </a:r>
             <a:r>
-              <a:rPr lang="en-US" sz="1600" smtClean="0">
+              <a:rPr lang="en-US" sz="1600">
                 <a:solidFill>
                   <a:srgbClr val="0070C0"/>
                 </a:solidFill>
               </a:rPr>
               <a:t>Time Slice Banks</a:t>
             </a:r>
-            <a:endParaRPr lang="en-US" sz="1600" dirty="0" smtClean="0">
+            <a:endParaRPr lang="en-US" sz="1600" dirty="0">
               <a:solidFill>
                 <a:srgbClr val="0070C0"/>
               </a:solidFill>
@@ -7060,7 +6786,7 @@
           <a:p>
             <a:pPr algn="ctr"/>
             <a:r>
-              <a:rPr lang="en-US" sz="1200" b="1" smtClean="0">
+              <a:rPr lang="en-US" sz="1200" b="1">
                 <a:latin typeface="Arial" pitchFamily="34" charset="0"/>
                 <a:cs typeface="Arial" pitchFamily="34" charset="0"/>
               </a:rPr>
@@ -7106,16 +6832,12 @@
           <a:p>
             <a:pPr algn="ctr"/>
             <a:r>
-              <a:rPr lang="en-US" sz="1200" b="1" dirty="0" smtClean="0">
+              <a:rPr lang="en-US" sz="1200" b="1" dirty="0">
                 <a:latin typeface="Arial" pitchFamily="34" charset="0"/>
                 <a:cs typeface="Arial" pitchFamily="34" charset="0"/>
               </a:rPr>
               <a:t>Physics Event Length</a:t>
             </a:r>
-            <a:endParaRPr lang="en-US" sz="1200" b="1" dirty="0">
-              <a:latin typeface="Arial" pitchFamily="34" charset="0"/>
-              <a:cs typeface="Arial" pitchFamily="34" charset="0"/>
-            </a:endParaRPr>
           </a:p>
         </p:txBody>
       </p:sp>
@@ -7181,44 +6903,12 @@
               <a:lstStyle/>
               <a:p>
                 <a:r>
-                  <a:rPr lang="en-US" sz="1200" b="1" dirty="0" smtClean="0">
+                  <a:rPr lang="en-US" sz="1200" b="1" dirty="0">
                     <a:latin typeface="Arial" pitchFamily="34" charset="0"/>
                     <a:cs typeface="Arial" pitchFamily="34" charset="0"/>
                   </a:rPr>
-                  <a:t>     </a:t>
+                  <a:t>     0xFF6X         0x10       TC</a:t>
                 </a:r>
-                <a:r>
-                  <a:rPr lang="en-US" sz="1200" b="1" dirty="0" smtClean="0">
-                    <a:latin typeface="Arial" pitchFamily="34" charset="0"/>
-                    <a:cs typeface="Arial" pitchFamily="34" charset="0"/>
-                  </a:rPr>
-                  <a:t>0</a:t>
-                </a:r>
-                <a:r>
-                  <a:rPr lang="en-US" sz="1200" b="1" dirty="0" smtClean="0">
-                    <a:latin typeface="Arial" pitchFamily="34" charset="0"/>
-                    <a:cs typeface="Arial" pitchFamily="34" charset="0"/>
-                  </a:rPr>
-                  <a:t>xFF6X         </a:t>
-                </a:r>
-                <a:r>
-                  <a:rPr lang="en-US" sz="1200" b="1" dirty="0" smtClean="0">
-                    <a:latin typeface="Arial" pitchFamily="34" charset="0"/>
-                    <a:cs typeface="Arial" pitchFamily="34" charset="0"/>
-                  </a:rPr>
-                  <a:t>0x10       </a:t>
-                </a:r>
-                <a:r>
-                  <a:rPr lang="en-US" sz="1200" b="1" dirty="0" smtClean="0">
-                    <a:latin typeface="Arial" pitchFamily="34" charset="0"/>
-                    <a:cs typeface="Arial" pitchFamily="34" charset="0"/>
-                  </a:rPr>
-                  <a:t>TC</a:t>
-                </a:r>
-                <a:endParaRPr lang="en-US" sz="1200" b="1" dirty="0">
-                  <a:latin typeface="Arial" pitchFamily="34" charset="0"/>
-                  <a:cs typeface="Arial" pitchFamily="34" charset="0"/>
-                </a:endParaRPr>
               </a:p>
             </p:txBody>
           </p:sp>
@@ -7344,16 +7034,12 @@
             <a:p>
               <a:pPr algn="ctr"/>
               <a:r>
-                <a:rPr lang="en-US" sz="1200" b="1" dirty="0" smtClean="0">
+                <a:rPr lang="en-US" sz="1200" b="1" dirty="0">
                   <a:latin typeface="Arial" pitchFamily="34" charset="0"/>
                   <a:cs typeface="Arial" pitchFamily="34" charset="0"/>
                 </a:rPr>
                 <a:t>Time Info Bank Length</a:t>
               </a:r>
-              <a:endParaRPr lang="en-US" sz="1200" b="1" dirty="0">
-                <a:latin typeface="Arial" pitchFamily="34" charset="0"/>
-                <a:cs typeface="Arial" pitchFamily="34" charset="0"/>
-              </a:endParaRPr>
             </a:p>
           </p:txBody>
         </p:sp>
@@ -7420,23 +7106,12 @@
                 <a:lstStyle/>
                 <a:p>
                   <a:r>
-                    <a:rPr lang="en-US" sz="1200" b="1" dirty="0" smtClean="0">
+                    <a:rPr lang="en-US" sz="1200" b="1" dirty="0">
                       <a:latin typeface="Arial" pitchFamily="34" charset="0"/>
                       <a:cs typeface="Arial" pitchFamily="34" charset="0"/>
                     </a:rPr>
-                    <a:t>     </a:t>
+                    <a:t>     0xFF31         0x01       TC</a:t>
                   </a:r>
-                  <a:r>
-                    <a:rPr lang="en-US" sz="1200" b="1" dirty="0" smtClean="0">
-                      <a:latin typeface="Arial" pitchFamily="34" charset="0"/>
-                      <a:cs typeface="Arial" pitchFamily="34" charset="0"/>
-                    </a:rPr>
-                    <a:t>0xFF31         0x01       TC</a:t>
-                  </a:r>
-                  <a:endParaRPr lang="en-US" sz="1200" b="1" dirty="0">
-                    <a:latin typeface="Arial" pitchFamily="34" charset="0"/>
-                    <a:cs typeface="Arial" pitchFamily="34" charset="0"/>
-                  </a:endParaRPr>
                 </a:p>
               </p:txBody>
             </p:sp>
@@ -7543,23 +7218,12 @@
             <a:p>
               <a:pPr algn="ctr"/>
               <a:r>
-                <a:rPr lang="en-US" sz="1200" b="1" dirty="0" smtClean="0">
-                  <a:latin typeface="Arial" pitchFamily="34" charset="0"/>
-                  <a:cs typeface="Arial" pitchFamily="34" charset="0"/>
-                </a:rPr>
-                <a:t>Avg. Timestamp1 </a:t>
-              </a:r>
-              <a:r>
                 <a:rPr lang="en-US" sz="1200" b="1" dirty="0">
                   <a:latin typeface="Arial" pitchFamily="34" charset="0"/>
                   <a:cs typeface="Arial" pitchFamily="34" charset="0"/>
                 </a:rPr>
-                <a:t>(31 – 0)</a:t>
+                <a:t>Avg. Timestamp1 (31 – 0)</a:t>
               </a:r>
-              <a:endParaRPr lang="en-US" sz="1200" b="1" dirty="0">
-                <a:latin typeface="Arial" pitchFamily="34" charset="0"/>
-                <a:cs typeface="Arial" pitchFamily="34" charset="0"/>
-              </a:endParaRPr>
             </a:p>
           </p:txBody>
         </p:sp>
@@ -7592,23 +7256,12 @@
             <a:p>
               <a:pPr algn="ctr"/>
               <a:r>
-                <a:rPr lang="en-US" sz="1200" b="1" dirty="0" smtClean="0">
-                  <a:latin typeface="Arial" pitchFamily="34" charset="0"/>
-                  <a:cs typeface="Arial" pitchFamily="34" charset="0"/>
-                </a:rPr>
-                <a:t>Avg. Timestamp1 </a:t>
-              </a:r>
-              <a:r>
                 <a:rPr lang="en-US" sz="1200" b="1" dirty="0">
                   <a:latin typeface="Arial" pitchFamily="34" charset="0"/>
                   <a:cs typeface="Arial" pitchFamily="34" charset="0"/>
                 </a:rPr>
-                <a:t>(63 – 32)</a:t>
+                <a:t>Avg. Timestamp1 (63 – 32)</a:t>
               </a:r>
-              <a:endParaRPr lang="en-US" sz="1200" b="1" dirty="0">
-                <a:latin typeface="Arial" pitchFamily="34" charset="0"/>
-                <a:cs typeface="Arial" pitchFamily="34" charset="0"/>
-              </a:endParaRPr>
             </a:p>
           </p:txBody>
         </p:sp>
@@ -7641,16 +7294,12 @@
             <a:p>
               <a:pPr algn="ctr"/>
               <a:r>
-                <a:rPr lang="en-US" sz="1200" b="1" dirty="0" smtClean="0">
+                <a:rPr lang="en-US" sz="1200" b="1" dirty="0">
                   <a:latin typeface="Arial" pitchFamily="34" charset="0"/>
                   <a:cs typeface="Arial" pitchFamily="34" charset="0"/>
                 </a:rPr>
                 <a:t>Avg. Frame Number</a:t>
               </a:r>
-              <a:endParaRPr lang="en-US" sz="1200" b="1" dirty="0">
-                <a:latin typeface="Arial" pitchFamily="34" charset="0"/>
-                <a:cs typeface="Arial" pitchFamily="34" charset="0"/>
-              </a:endParaRPr>
             </a:p>
           </p:txBody>
         </p:sp>
@@ -7744,18 +7393,13 @@
           <a:lstStyle/>
           <a:p>
             <a:r>
-              <a:rPr lang="en-US" sz="1200" dirty="0" smtClean="0">
+              <a:rPr lang="en-US" sz="1200" dirty="0">
                 <a:solidFill>
                   <a:srgbClr val="0070C0"/>
                 </a:solidFill>
               </a:rPr>
               <a:t>Bank of banks</a:t>
             </a:r>
-            <a:endParaRPr lang="en-US" sz="1200" dirty="0">
-              <a:solidFill>
-                <a:srgbClr val="0070C0"/>
-              </a:solidFill>
-            </a:endParaRPr>
           </a:p>
         </p:txBody>
       </p:sp>
@@ -7788,7 +7432,7 @@
           <a:lstStyle/>
           <a:p>
             <a:r>
-              <a:rPr lang="en-US" sz="1200" dirty="0" smtClean="0">
+              <a:rPr lang="en-US" sz="1200" dirty="0">
                 <a:solidFill>
                   <a:srgbClr val="0070C0"/>
                 </a:solidFill>
@@ -7796,7 +7440,7 @@
               <a:t>Built Physics </a:t>
             </a:r>
             <a:r>
-              <a:rPr lang="en-US" sz="1200" smtClean="0">
+              <a:rPr lang="en-US" sz="1200">
                 <a:solidFill>
                   <a:srgbClr val="0070C0"/>
                 </a:solidFill>
@@ -7871,30 +7515,12 @@
               <a:lstStyle/>
               <a:p>
                 <a:r>
-                  <a:rPr lang="en-US" sz="1200" b="1" dirty="0" smtClean="0">
+                  <a:rPr lang="en-US" sz="1200" b="1" dirty="0">
                     <a:latin typeface="Arial" pitchFamily="34" charset="0"/>
                     <a:cs typeface="Arial" pitchFamily="34" charset="0"/>
                   </a:rPr>
-                  <a:t>     0xFF6X        </a:t>
+                  <a:t>     0xFF6X        0x10       TC</a:t>
                 </a:r>
-                <a:r>
-                  <a:rPr lang="en-US" sz="1200" b="1" dirty="0" smtClean="0">
-                    <a:latin typeface="Arial" pitchFamily="34" charset="0"/>
-                    <a:cs typeface="Arial" pitchFamily="34" charset="0"/>
-                  </a:rPr>
-                  <a:t>0x10       </a:t>
-                </a:r>
-                <a:r>
-                  <a:rPr lang="en-US" sz="1200" b="1" dirty="0" smtClean="0">
-                    <a:latin typeface="Arial" pitchFamily="34" charset="0"/>
-                    <a:cs typeface="Arial" pitchFamily="34" charset="0"/>
-                  </a:rPr>
-                  <a:t>TC</a:t>
-                </a:r>
-                <a:endParaRPr lang="en-US" sz="1200" b="1" dirty="0">
-                  <a:latin typeface="Arial" pitchFamily="34" charset="0"/>
-                  <a:cs typeface="Arial" pitchFamily="34" charset="0"/>
-                </a:endParaRPr>
               </a:p>
             </p:txBody>
           </p:sp>
@@ -8001,7 +7627,7 @@
           <a:lstStyle/>
           <a:p>
             <a:r>
-              <a:rPr lang="en-US" sz="1200" dirty="0" smtClean="0">
+              <a:rPr lang="en-US" sz="1200" dirty="0">
                 <a:solidFill>
                   <a:srgbClr val="0070C0"/>
                 </a:solidFill>
@@ -8010,7 +7636,7 @@
             </a:r>
           </a:p>
           <a:p>
-            <a:endParaRPr lang="en-US" sz="1200" dirty="0" smtClean="0">
+            <a:endParaRPr lang="en-US" sz="1200" dirty="0">
               <a:solidFill>
                 <a:srgbClr val="0070C0"/>
               </a:solidFill>
@@ -8018,18 +7644,13 @@
           </a:p>
           <a:p>
             <a:r>
-              <a:rPr lang="en-US" sz="1200" dirty="0" smtClean="0">
+              <a:rPr lang="en-US" sz="1200" dirty="0">
                 <a:solidFill>
                   <a:srgbClr val="0070C0"/>
                 </a:solidFill>
               </a:rPr>
               <a:t>Note: there can be up to 4 streams from each ROC</a:t>
             </a:r>
-            <a:endParaRPr lang="en-US" sz="1200" dirty="0" smtClean="0">
-              <a:solidFill>
-                <a:srgbClr val="0070C0"/>
-              </a:solidFill>
-            </a:endParaRPr>
           </a:p>
         </p:txBody>
       </p:sp>
@@ -8063,23 +7684,12 @@
           <a:lstStyle/>
           <a:p>
             <a:r>
-              <a:rPr lang="en-US" sz="2000" b="1" dirty="0" smtClean="0">
+              <a:rPr lang="en-US" sz="2000" b="1" dirty="0">
                 <a:latin typeface="Arial" pitchFamily="34" charset="0"/>
                 <a:cs typeface="Arial" pitchFamily="34" charset="0"/>
               </a:rPr>
-              <a:t>Streaming Physics </a:t>
+              <a:t>Streaming Physics Event</a:t>
             </a:r>
-            <a:r>
-              <a:rPr lang="en-US" sz="2000" b="1" dirty="0" smtClean="0">
-                <a:latin typeface="Arial" pitchFamily="34" charset="0"/>
-                <a:cs typeface="Arial" pitchFamily="34" charset="0"/>
-              </a:rPr>
-              <a:t>Event</a:t>
-            </a:r>
-            <a:endParaRPr lang="en-US" sz="2000" b="1" dirty="0">
-              <a:latin typeface="Arial" pitchFamily="34" charset="0"/>
-              <a:cs typeface="Arial" pitchFamily="34" charset="0"/>
-            </a:endParaRPr>
           </a:p>
         </p:txBody>
       </p:sp>
@@ -8135,26 +7745,8 @@
                   <a:latin typeface="Arial" pitchFamily="34" charset="0"/>
                   <a:cs typeface="Arial" pitchFamily="34" charset="0"/>
                 </a:rPr>
-                <a:t>ROC </a:t>
+                <a:t>ROC N Time Slice Bank</a:t>
               </a:r>
-              <a:r>
-                <a:rPr lang="en-US" sz="1200" b="1" dirty="0" smtClean="0">
-                  <a:latin typeface="Arial" pitchFamily="34" charset="0"/>
-                  <a:cs typeface="Arial" pitchFamily="34" charset="0"/>
-                </a:rPr>
-                <a:t>N </a:t>
-              </a:r>
-              <a:r>
-                <a:rPr lang="en-US" sz="1200" b="1" dirty="0">
-                  <a:latin typeface="Arial" pitchFamily="34" charset="0"/>
-                  <a:cs typeface="Arial" pitchFamily="34" charset="0"/>
-                </a:rPr>
-                <a:t>Time Slice Bank</a:t>
-              </a:r>
-              <a:endParaRPr lang="en-US" sz="1200" b="1" dirty="0">
-                <a:latin typeface="Arial" pitchFamily="34" charset="0"/>
-                <a:cs typeface="Arial" pitchFamily="34" charset="0"/>
-              </a:endParaRPr>
             </a:p>
           </p:txBody>
         </p:sp>
@@ -8192,16 +7784,12 @@
             <a:p>
               <a:pPr algn="ctr"/>
               <a:r>
-                <a:rPr lang="en-US" sz="1200" b="1" dirty="0" smtClean="0">
+                <a:rPr lang="en-US" sz="1200" b="1" dirty="0">
                   <a:latin typeface="Arial" pitchFamily="34" charset="0"/>
                   <a:cs typeface="Arial" pitchFamily="34" charset="0"/>
                 </a:rPr>
                 <a:t>ROC 1a Time Slice Bank</a:t>
               </a:r>
-              <a:endParaRPr lang="en-US" sz="1200" b="1" dirty="0">
-                <a:latin typeface="Arial" pitchFamily="34" charset="0"/>
-                <a:cs typeface="Arial" pitchFamily="34" charset="0"/>
-              </a:endParaRPr>
             </a:p>
           </p:txBody>
         </p:sp>
@@ -8239,7 +7827,7 @@
             <a:p>
               <a:pPr algn="ctr"/>
               <a:r>
-                <a:rPr lang="mr-IN" sz="1200" b="1" dirty="0" smtClean="0">
+                <a:rPr lang="mr-IN" sz="1200" b="1" dirty="0">
                   <a:latin typeface="Arial" pitchFamily="34" charset="0"/>
                   <a:cs typeface="Arial" pitchFamily="34" charset="0"/>
                 </a:rPr>
@@ -8286,16 +7874,12 @@
             <a:p>
               <a:pPr algn="ctr"/>
               <a:r>
-                <a:rPr lang="en-US" sz="1200" b="1" dirty="0" smtClean="0">
+                <a:rPr lang="en-US" sz="1200" b="1" dirty="0">
                   <a:latin typeface="Arial" pitchFamily="34" charset="0"/>
                   <a:cs typeface="Arial" pitchFamily="34" charset="0"/>
                 </a:rPr>
                 <a:t>ROC 2 Time Slice Bank</a:t>
               </a:r>
-              <a:endParaRPr lang="en-US" sz="1200" b="1" dirty="0">
-                <a:latin typeface="Arial" pitchFamily="34" charset="0"/>
-                <a:cs typeface="Arial" pitchFamily="34" charset="0"/>
-              </a:endParaRPr>
             </a:p>
           </p:txBody>
         </p:sp>
@@ -8333,16 +7917,12 @@
             <a:p>
               <a:pPr algn="ctr"/>
               <a:r>
-                <a:rPr lang="en-US" sz="1200" b="1" dirty="0" smtClean="0">
+                <a:rPr lang="en-US" sz="1200" b="1" dirty="0">
                   <a:latin typeface="Arial" pitchFamily="34" charset="0"/>
                   <a:cs typeface="Arial" pitchFamily="34" charset="0"/>
                 </a:rPr>
                 <a:t>ROC 1b Time Slice Bank</a:t>
               </a:r>
-              <a:endParaRPr lang="en-US" sz="1200" b="1" dirty="0">
-                <a:latin typeface="Arial" pitchFamily="34" charset="0"/>
-                <a:cs typeface="Arial" pitchFamily="34" charset="0"/>
-              </a:endParaRPr>
             </a:p>
           </p:txBody>
         </p:sp>
@@ -8437,37 +8017,12 @@
           <a:lstStyle/>
           <a:p>
             <a:r>
-              <a:rPr lang="en-US" sz="2000" b="1" dirty="0" smtClean="0">
+              <a:rPr lang="en-US" sz="2000" b="1" dirty="0">
                 <a:latin typeface="Arial" pitchFamily="34" charset="0"/>
                 <a:cs typeface="Arial" pitchFamily="34" charset="0"/>
               </a:rPr>
-              <a:t>TRIGGER </a:t>
+              <a:t>TRIGGER / STREAMING  BANK  TAGS</a:t>
             </a:r>
-            <a:r>
-              <a:rPr lang="en-US" sz="2000" b="1" dirty="0" smtClean="0">
-                <a:latin typeface="Arial" pitchFamily="34" charset="0"/>
-                <a:cs typeface="Arial" pitchFamily="34" charset="0"/>
-              </a:rPr>
-              <a:t>/ STREAMING  </a:t>
-            </a:r>
-            <a:r>
-              <a:rPr lang="en-US" sz="2000" b="1" dirty="0" smtClean="0">
-                <a:latin typeface="Arial" pitchFamily="34" charset="0"/>
-                <a:cs typeface="Arial" pitchFamily="34" charset="0"/>
-              </a:rPr>
-              <a:t>BANK  </a:t>
-            </a:r>
-            <a:r>
-              <a:rPr lang="en-US" sz="2000" b="1" dirty="0" smtClean="0">
-                <a:latin typeface="Arial" pitchFamily="34" charset="0"/>
-                <a:cs typeface="Arial" pitchFamily="34" charset="0"/>
-              </a:rPr>
-              <a:t>TAGS</a:t>
-            </a:r>
-            <a:endParaRPr lang="en-US" sz="2000" b="1" dirty="0">
-              <a:latin typeface="Arial" pitchFamily="34" charset="0"/>
-              <a:cs typeface="Arial" pitchFamily="34" charset="0"/>
-            </a:endParaRPr>
           </a:p>
         </p:txBody>
       </p:sp>
@@ -8499,14 +8054,14 @@
                 <a:gridCol w="1553367">
                   <a:extLst>
                     <a:ext uri="{9D8B030D-6E8A-4147-A177-3AD203B41FA5}">
-                      <a16:colId xmlns:a16="http://schemas.microsoft.com/office/drawing/2014/main" xmlns="" val="20000"/>
+                      <a16:colId xmlns:a16="http://schemas.microsoft.com/office/drawing/2014/main" val="20000"/>
                     </a:ext>
                   </a:extLst>
                 </a:gridCol>
                 <a:gridCol w="6295233">
                   <a:extLst>
                     <a:ext uri="{9D8B030D-6E8A-4147-A177-3AD203B41FA5}">
-                      <a16:colId xmlns:a16="http://schemas.microsoft.com/office/drawing/2014/main" xmlns="" val="20001"/>
+                      <a16:colId xmlns:a16="http://schemas.microsoft.com/office/drawing/2014/main" val="20001"/>
                     </a:ext>
                   </a:extLst>
                 </a:gridCol>
@@ -8519,11 +8074,11 @@
                     <a:p>
                       <a:pPr algn="ctr"/>
                       <a:r>
-                        <a:rPr lang="en-US" sz="1600" dirty="0" smtClean="0"/>
+                        <a:rPr lang="en-US" sz="1600" dirty="0"/>
                         <a:t>Tag</a:t>
                       </a:r>
                       <a:r>
-                        <a:rPr lang="en-US" sz="1600" baseline="0" dirty="0" smtClean="0"/>
+                        <a:rPr lang="en-US" sz="1600" baseline="0" dirty="0"/>
                         <a:t> Value</a:t>
                       </a:r>
                       <a:endParaRPr lang="en-US" sz="1600" dirty="0"/>
@@ -8557,10 +8112,9 @@
                     <a:p>
                       <a:pPr algn="ctr"/>
                       <a:r>
-                        <a:rPr lang="en-US" sz="1600" dirty="0" smtClean="0"/>
+                        <a:rPr lang="en-US" sz="1600" dirty="0"/>
                         <a:t>Purpose</a:t>
                       </a:r>
-                      <a:endParaRPr lang="en-US" sz="1600" dirty="0"/>
                     </a:p>
                   </a:txBody>
                   <a:tcPr>
@@ -8586,7 +8140,7 @@
                 </a:tc>
                 <a:extLst>
                   <a:ext uri="{0D108BD9-81ED-4DB2-BD59-A6C34878D82A}">
-                    <a16:rowId xmlns:a16="http://schemas.microsoft.com/office/drawing/2014/main" xmlns="" val="10000"/>
+                    <a16:rowId xmlns:a16="http://schemas.microsoft.com/office/drawing/2014/main" val="10000"/>
                   </a:ext>
                 </a:extLst>
               </a:tr>
@@ -8598,7 +8152,7 @@
                     <a:p>
                       <a:pPr algn="ctr"/>
                       <a:r>
-                        <a:rPr lang="en-US" sz="1400" kern="1200" dirty="0" smtClean="0">
+                        <a:rPr lang="en-US" sz="1400" kern="1200" dirty="0">
                           <a:solidFill>
                             <a:schemeClr val="dk1"/>
                           </a:solidFill>
@@ -8609,7 +8163,7 @@
                         </a:rPr>
                         <a:t>0xFF4F</a:t>
                       </a:r>
-                      <a:endParaRPr lang="en-US" sz="1400" baseline="0" dirty="0" smtClean="0"/>
+                      <a:endParaRPr lang="en-US" sz="1400" baseline="0" dirty="0"/>
                     </a:p>
                   </a:txBody>
                   <a:tcPr>
@@ -8648,7 +8202,7 @@
                     <a:lstStyle/>
                     <a:p>
                       <a:r>
-                        <a:rPr lang="en-US" sz="1400" i="0" kern="1200" dirty="0" smtClean="0">
+                        <a:rPr lang="en-US" sz="1400" i="0" kern="1200" dirty="0">
                           <a:solidFill>
                             <a:schemeClr val="dk1"/>
                           </a:solidFill>
@@ -8660,7 +8214,7 @@
                         <a:t>At least one ROC used in building trigger bank</a:t>
                       </a:r>
                       <a:r>
-                        <a:rPr lang="en-US" sz="1400" i="0" kern="1200" baseline="0" dirty="0" smtClean="0">
+                        <a:rPr lang="en-US" sz="1400" i="0" kern="1200" baseline="0" dirty="0">
                           <a:solidFill>
                             <a:schemeClr val="dk1"/>
                           </a:solidFill>
@@ -8672,7 +8226,7 @@
                         <a:t> </a:t>
                       </a:r>
                       <a:r>
-                        <a:rPr lang="en-US" sz="1400" i="0" kern="1200" dirty="0" smtClean="0">
+                        <a:rPr lang="en-US" sz="1400" i="0" kern="1200" dirty="0">
                           <a:solidFill>
                             <a:schemeClr val="dk1"/>
                           </a:solidFill>
@@ -8683,7 +8237,7 @@
                         </a:rPr>
                         <a:t>has bad or nonexistent trigger bank</a:t>
                       </a:r>
-                      <a:endParaRPr lang="en-US" sz="1400" i="0" baseline="0" dirty="0" smtClean="0"/>
+                      <a:endParaRPr lang="en-US" sz="1400" i="0" baseline="0" dirty="0"/>
                     </a:p>
                   </a:txBody>
                   <a:tcPr>
@@ -8718,7 +8272,7 @@
                 </a:tc>
                 <a:extLst>
                   <a:ext uri="{0D108BD9-81ED-4DB2-BD59-A6C34878D82A}">
-                    <a16:rowId xmlns:a16="http://schemas.microsoft.com/office/drawing/2014/main" xmlns="" val="10002"/>
+                    <a16:rowId xmlns:a16="http://schemas.microsoft.com/office/drawing/2014/main" val="10002"/>
                   </a:ext>
                 </a:extLst>
               </a:tr>
@@ -8730,10 +8284,9 @@
                     <a:p>
                       <a:pPr algn="ctr"/>
                       <a:r>
-                        <a:rPr lang="en-US" sz="1400" dirty="0" smtClean="0"/>
+                        <a:rPr lang="en-US" sz="1400" dirty="0"/>
                         <a:t>0xFF50</a:t>
                       </a:r>
-                      <a:endParaRPr lang="en-US" sz="1400" dirty="0"/>
                     </a:p>
                   </a:txBody>
                   <a:tcPr>
@@ -8781,7 +8334,7 @@
                     <a:lstStyle/>
                     <a:p>
                       <a:r>
-                        <a:rPr lang="en-US" sz="1400" i="0" kern="1200" dirty="0" smtClean="0">
+                        <a:rPr lang="en-US" sz="1400" i="0" kern="1200" dirty="0">
                           <a:solidFill>
                             <a:schemeClr val="dk1"/>
                           </a:solidFill>
@@ -8836,7 +8389,7 @@
                 </a:tc>
                 <a:extLst>
                   <a:ext uri="{0D108BD9-81ED-4DB2-BD59-A6C34878D82A}">
-                    <a16:rowId xmlns:a16="http://schemas.microsoft.com/office/drawing/2014/main" xmlns="" val="10003"/>
+                    <a16:rowId xmlns:a16="http://schemas.microsoft.com/office/drawing/2014/main" val="10003"/>
                   </a:ext>
                 </a:extLst>
               </a:tr>
@@ -8848,10 +8401,9 @@
                     <a:p>
                       <a:pPr algn="ctr"/>
                       <a:r>
-                        <a:rPr lang="en-US" sz="1400" dirty="0" smtClean="0"/>
+                        <a:rPr lang="en-US" sz="1400" dirty="0"/>
                         <a:t>0xFF58</a:t>
                       </a:r>
-                      <a:endParaRPr lang="en-US" sz="1400" dirty="0"/>
                     </a:p>
                   </a:txBody>
                   <a:tcPr>
@@ -8916,7 +8468,7 @@
                         <a:defRPr/>
                       </a:pPr>
                       <a:r>
-                        <a:rPr lang="en-US" sz="1400" i="0" kern="1200" dirty="0" smtClean="0">
+                        <a:rPr lang="en-US" sz="1400" i="0" kern="1200" dirty="0">
                           <a:solidFill>
                             <a:schemeClr val="dk1"/>
                           </a:solidFill>
@@ -8927,7 +8479,7 @@
                         </a:rPr>
                         <a:t>Event built by primary event builder with sync bit set</a:t>
                       </a:r>
-                      <a:endParaRPr lang="en-US" sz="1400" b="0" i="0" dirty="0" smtClean="0"/>
+                      <a:endParaRPr lang="en-US" sz="1400" b="0" i="0" dirty="0"/>
                     </a:p>
                   </a:txBody>
                   <a:tcPr>
@@ -8971,7 +8523,7 @@
                 </a:tc>
                 <a:extLst>
                   <a:ext uri="{0D108BD9-81ED-4DB2-BD59-A6C34878D82A}">
-                    <a16:rowId xmlns:a16="http://schemas.microsoft.com/office/drawing/2014/main" xmlns="" val="10004"/>
+                    <a16:rowId xmlns:a16="http://schemas.microsoft.com/office/drawing/2014/main" val="10004"/>
                   </a:ext>
                 </a:extLst>
               </a:tr>
@@ -8983,7 +8535,7 @@
                     <a:p>
                       <a:pPr algn="ctr"/>
                       <a:r>
-                        <a:rPr lang="en-US" sz="1400" baseline="0" dirty="0" smtClean="0"/>
+                        <a:rPr lang="en-US" sz="1400" baseline="0" dirty="0"/>
                         <a:t>0xFF70</a:t>
                       </a:r>
                       <a:endParaRPr lang="en-US" sz="1400" dirty="0"/>
@@ -9051,7 +8603,7 @@
                         <a:defRPr/>
                       </a:pPr>
                       <a:r>
-                        <a:rPr lang="en-US" sz="1400" i="0" kern="1200" dirty="0" smtClean="0">
+                        <a:rPr lang="en-US" sz="1400" i="0" kern="1200" dirty="0">
                           <a:solidFill>
                             <a:schemeClr val="dk1"/>
                           </a:solidFill>
@@ -9062,7 +8614,7 @@
                         </a:rPr>
                         <a:t>Event built by secondary event builder</a:t>
                       </a:r>
-                      <a:endParaRPr lang="en-US" sz="1400" b="0" i="0" dirty="0" smtClean="0"/>
+                      <a:endParaRPr lang="en-US" sz="1400" b="0" i="0" dirty="0"/>
                     </a:p>
                   </a:txBody>
                   <a:tcPr>
@@ -9106,7 +8658,7 @@
                 </a:tc>
                 <a:extLst>
                   <a:ext uri="{0D108BD9-81ED-4DB2-BD59-A6C34878D82A}">
-                    <a16:rowId xmlns:a16="http://schemas.microsoft.com/office/drawing/2014/main" xmlns="" val="10005"/>
+                    <a16:rowId xmlns:a16="http://schemas.microsoft.com/office/drawing/2014/main" val="10005"/>
                   </a:ext>
                 </a:extLst>
               </a:tr>
@@ -9118,10 +8670,9 @@
                     <a:p>
                       <a:pPr algn="ctr"/>
                       <a:r>
-                        <a:rPr lang="en-US" sz="1400" dirty="0" smtClean="0"/>
+                        <a:rPr lang="en-US" sz="1400" dirty="0"/>
                         <a:t>0xFF78</a:t>
                       </a:r>
-                      <a:endParaRPr lang="en-US" sz="1400" dirty="0"/>
                     </a:p>
                   </a:txBody>
                   <a:tcPr>
@@ -9186,7 +8737,7 @@
                         <a:defRPr/>
                       </a:pPr>
                       <a:r>
-                        <a:rPr lang="en-US" sz="1400" i="0" kern="1200" dirty="0" smtClean="0">
+                        <a:rPr lang="en-US" sz="1400" i="0" kern="1200" dirty="0">
                           <a:solidFill>
                             <a:schemeClr val="dk1"/>
                           </a:solidFill>
@@ -9197,7 +8748,7 @@
                         </a:rPr>
                         <a:t>Event built by secondary event builder with sync bit set</a:t>
                       </a:r>
-                      <a:endParaRPr lang="en-US" sz="1400" b="0" i="0" dirty="0" smtClean="0"/>
+                      <a:endParaRPr lang="en-US" sz="1400" b="0" i="0" dirty="0"/>
                     </a:p>
                   </a:txBody>
                   <a:tcPr>
@@ -9241,7 +8792,7 @@
                 </a:tc>
                 <a:extLst>
                   <a:ext uri="{0D108BD9-81ED-4DB2-BD59-A6C34878D82A}">
-                    <a16:rowId xmlns:a16="http://schemas.microsoft.com/office/drawing/2014/main" xmlns="" val="10006"/>
+                    <a16:rowId xmlns:a16="http://schemas.microsoft.com/office/drawing/2014/main" val="10006"/>
                   </a:ext>
                 </a:extLst>
               </a:tr>
@@ -9323,10 +8874,9 @@
                         <a:defRPr/>
                       </a:pPr>
                       <a:r>
-                        <a:rPr lang="en-US" sz="1200" b="0" dirty="0" smtClean="0"/>
+                        <a:rPr lang="en-US" sz="1200" b="0" dirty="0"/>
                         <a:t>STREAMING TAGS</a:t>
                       </a:r>
-                      <a:endParaRPr lang="en-US" sz="1200" b="0" dirty="0" smtClean="0"/>
                     </a:p>
                   </a:txBody>
                   <a:tcPr>
@@ -9374,6 +8924,11 @@
                     </a:solidFill>
                   </a:tcPr>
                 </a:tc>
+                <a:extLst>
+                  <a:ext uri="{0D108BD9-81ED-4DB2-BD59-A6C34878D82A}">
+                    <a16:rowId xmlns:a16="http://schemas.microsoft.com/office/drawing/2014/main" val="10010"/>
+                  </a:ext>
+                </a:extLst>
               </a:tr>
               <a:tr h="330926">
                 <a:tc>
@@ -9383,10 +8938,9 @@
                     <a:p>
                       <a:pPr algn="ctr"/>
                       <a:r>
-                        <a:rPr lang="en-US" sz="1400" dirty="0" smtClean="0"/>
+                        <a:rPr lang="en-US" sz="1400" dirty="0"/>
                         <a:t>0xFF30</a:t>
                       </a:r>
-                      <a:endParaRPr lang="en-US" sz="1400" dirty="0"/>
                     </a:p>
                   </a:txBody>
                   <a:tcPr>
@@ -9451,18 +9005,14 @@
                         <a:defRPr/>
                       </a:pPr>
                       <a:r>
-                        <a:rPr lang="en-US" sz="1400" b="0" dirty="0" smtClean="0"/>
+                        <a:rPr lang="en-US" sz="1400" b="0" dirty="0"/>
                         <a:t>Stream Info Bank</a:t>
                       </a:r>
                       <a:r>
-                        <a:rPr lang="en-US" sz="1400" b="0" baseline="0" dirty="0" smtClean="0"/>
-                        <a:t> </a:t>
+                        <a:rPr lang="en-US" sz="1400" b="0" baseline="0" dirty="0"/>
+                        <a:t> (for ROC Raw)</a:t>
                       </a:r>
-                      <a:r>
-                        <a:rPr lang="en-US" sz="1400" b="0" baseline="0" dirty="0" smtClean="0"/>
-                        <a:t>(for ROC Raw)</a:t>
-                      </a:r>
-                      <a:endParaRPr lang="en-US" sz="1400" b="0" dirty="0" smtClean="0"/>
+                      <a:endParaRPr lang="en-US" sz="1400" b="0" dirty="0"/>
                     </a:p>
                   </a:txBody>
                   <a:tcPr>
@@ -9506,7 +9056,7 @@
                 </a:tc>
                 <a:extLst>
                   <a:ext uri="{0D108BD9-81ED-4DB2-BD59-A6C34878D82A}">
-                    <a16:rowId xmlns:a16="http://schemas.microsoft.com/office/drawing/2014/main" xmlns="" val="10007"/>
+                    <a16:rowId xmlns:a16="http://schemas.microsoft.com/office/drawing/2014/main" val="10007"/>
                   </a:ext>
                 </a:extLst>
               </a:tr>
@@ -9518,7 +9068,7 @@
                     <a:p>
                       <a:pPr algn="ctr"/>
                       <a:r>
-                        <a:rPr lang="en-US" sz="1400" baseline="0" dirty="0" smtClean="0"/>
+                        <a:rPr lang="en-US" sz="1400" baseline="0" dirty="0"/>
                         <a:t>0xFF31</a:t>
                       </a:r>
                       <a:endParaRPr lang="en-US" sz="1400" dirty="0"/>
@@ -9586,14 +9136,14 @@
                         <a:defRPr/>
                       </a:pPr>
                       <a:r>
-                        <a:rPr lang="en-US" sz="1400" b="0" dirty="0" smtClean="0"/>
+                        <a:rPr lang="en-US" sz="1400" b="0" dirty="0"/>
                         <a:t>Time Info Bank</a:t>
                       </a:r>
                       <a:r>
-                        <a:rPr lang="en-US" sz="1400" b="0" baseline="0" dirty="0" smtClean="0"/>
+                        <a:rPr lang="en-US" sz="1400" b="0" baseline="0" dirty="0"/>
                         <a:t> (for Physics)</a:t>
                       </a:r>
-                      <a:endParaRPr lang="en-US" sz="1400" b="0" dirty="0" smtClean="0"/>
+                      <a:endParaRPr lang="en-US" sz="1400" b="0" dirty="0"/>
                     </a:p>
                   </a:txBody>
                   <a:tcPr>
@@ -9637,7 +9187,7 @@
                 </a:tc>
                 <a:extLst>
                   <a:ext uri="{0D108BD9-81ED-4DB2-BD59-A6C34878D82A}">
-                    <a16:rowId xmlns:a16="http://schemas.microsoft.com/office/drawing/2014/main" xmlns="" val="10008"/>
+                    <a16:rowId xmlns:a16="http://schemas.microsoft.com/office/drawing/2014/main" val="10008"/>
                   </a:ext>
                 </a:extLst>
               </a:tr>
@@ -9649,7 +9199,7 @@
                     <a:p>
                       <a:pPr algn="ctr"/>
                       <a:r>
-                        <a:rPr lang="en-US" sz="1400" baseline="0" dirty="0" smtClean="0"/>
+                        <a:rPr lang="en-US" sz="1400" baseline="0" dirty="0"/>
                         <a:t>0xFF60</a:t>
                       </a:r>
                       <a:endParaRPr lang="en-US" sz="1400" dirty="0"/>
@@ -9717,7 +9267,7 @@
                         <a:defRPr/>
                       </a:pPr>
                       <a:r>
-                        <a:rPr lang="en-US" sz="1400" i="0" kern="1200" dirty="0" smtClean="0">
+                        <a:rPr lang="en-US" sz="1400" i="0" kern="1200" dirty="0">
                           <a:solidFill>
                             <a:schemeClr val="dk1"/>
                           </a:solidFill>
@@ -9728,7 +9278,7 @@
                         </a:rPr>
                         <a:t>Event built by primary event builder in streaming mode</a:t>
                       </a:r>
-                      <a:endParaRPr lang="en-US" sz="1400" b="0" i="0" dirty="0" smtClean="0"/>
+                      <a:endParaRPr lang="en-US" sz="1400" b="0" i="0" dirty="0"/>
                     </a:p>
                   </a:txBody>
                   <a:tcPr>
@@ -9772,7 +9322,7 @@
                 </a:tc>
                 <a:extLst>
                   <a:ext uri="{0D108BD9-81ED-4DB2-BD59-A6C34878D82A}">
-                    <a16:rowId xmlns:a16="http://schemas.microsoft.com/office/drawing/2014/main" xmlns="" val="10009"/>
+                    <a16:rowId xmlns:a16="http://schemas.microsoft.com/office/drawing/2014/main" val="10009"/>
                   </a:ext>
                 </a:extLst>
               </a:tr>
@@ -9784,7 +9334,7 @@
                     <a:p>
                       <a:pPr algn="ctr"/>
                       <a:r>
-                        <a:rPr lang="en-US" sz="1400" baseline="0" dirty="0" smtClean="0"/>
+                        <a:rPr lang="en-US" sz="1400" baseline="0" dirty="0"/>
                         <a:t>0xFF62</a:t>
                       </a:r>
                       <a:endParaRPr lang="en-US" sz="1400" dirty="0"/>
@@ -9852,7 +9402,7 @@
                         <a:defRPr/>
                       </a:pPr>
                       <a:r>
-                        <a:rPr lang="en-US" sz="1400" i="0" kern="1200" dirty="0" smtClean="0">
+                        <a:rPr lang="en-US" sz="1400" i="0" kern="1200" dirty="0">
                           <a:solidFill>
                             <a:schemeClr val="dk1"/>
                           </a:solidFill>
@@ -9863,7 +9413,7 @@
                         </a:rPr>
                         <a:t>Event built by secondary event builder in streaming mode</a:t>
                       </a:r>
-                      <a:endParaRPr lang="en-US" sz="1400" b="0" i="0" dirty="0" smtClean="0"/>
+                      <a:endParaRPr lang="en-US" sz="1400" b="0" i="0" dirty="0"/>
                     </a:p>
                   </a:txBody>
                   <a:tcPr>
@@ -9905,6 +9455,11 @@
                     </a:lnB>
                   </a:tcPr>
                 </a:tc>
+                <a:extLst>
+                  <a:ext uri="{0D108BD9-81ED-4DB2-BD59-A6C34878D82A}">
+                    <a16:rowId xmlns:a16="http://schemas.microsoft.com/office/drawing/2014/main" val="10011"/>
+                  </a:ext>
+                </a:extLst>
               </a:tr>
               <a:tr h="330926">
                 <a:tc>
@@ -9914,7 +9469,7 @@
                     <a:p>
                       <a:pPr algn="ctr"/>
                       <a:r>
-                        <a:rPr lang="en-US" sz="1400" baseline="0" dirty="0" smtClean="0"/>
+                        <a:rPr lang="en-US" sz="1400" baseline="0" dirty="0"/>
                         <a:t>0xFF64</a:t>
                       </a:r>
                       <a:endParaRPr lang="en-US" sz="1400" dirty="0"/>
@@ -9982,7 +9537,7 @@
                         <a:defRPr/>
                       </a:pPr>
                       <a:r>
-                        <a:rPr lang="en-US" sz="1400" i="0" kern="1200" dirty="0" smtClean="0">
+                        <a:rPr lang="en-US" sz="1400" i="0" kern="1200" dirty="0">
                           <a:solidFill>
                             <a:schemeClr val="dk1"/>
                           </a:solidFill>
@@ -9993,7 +9548,7 @@
                         </a:rPr>
                         <a:t>Event built by DC event builder in streaming mode</a:t>
                       </a:r>
-                      <a:endParaRPr lang="en-US" sz="1400" b="0" i="0" dirty="0" smtClean="0"/>
+                      <a:endParaRPr lang="en-US" sz="1400" b="0" i="0" dirty="0"/>
                     </a:p>
                   </a:txBody>
                   <a:tcPr>
@@ -10035,6 +9590,11 @@
                     </a:lnB>
                   </a:tcPr>
                 </a:tc>
+                <a:extLst>
+                  <a:ext uri="{0D108BD9-81ED-4DB2-BD59-A6C34878D82A}">
+                    <a16:rowId xmlns:a16="http://schemas.microsoft.com/office/drawing/2014/main" val="10012"/>
+                  </a:ext>
+                </a:extLst>
               </a:tr>
             </a:tbl>
           </a:graphicData>
@@ -10099,7 +9659,7 @@
           <a:p>
             <a:pPr algn="ctr"/>
             <a:r>
-              <a:rPr lang="en-US" sz="1200" b="1" dirty="0" smtClean="0">
+              <a:rPr lang="en-US" sz="1200" b="1" dirty="0">
                 <a:latin typeface="Arial" pitchFamily="34" charset="0"/>
                 <a:cs typeface="Arial" pitchFamily="34" charset="0"/>
               </a:rPr>
@@ -10109,13 +9669,13 @@
           <a:p>
             <a:pPr algn="ctr"/>
             <a:r>
-              <a:rPr lang="en-US" sz="1200" b="1" dirty="0" smtClean="0">
+              <a:rPr lang="en-US" sz="1200" b="1" dirty="0">
                 <a:latin typeface="Arial" pitchFamily="34" charset="0"/>
                 <a:cs typeface="Arial" pitchFamily="34" charset="0"/>
               </a:rPr>
               <a:t>(3 streams)</a:t>
             </a:r>
-            <a:endParaRPr lang="en-US" sz="800" b="1" dirty="0" smtClean="0">
+            <a:endParaRPr lang="en-US" sz="800" b="1" dirty="0">
               <a:latin typeface="Arial" pitchFamily="34" charset="0"/>
               <a:cs typeface="Arial" pitchFamily="34" charset="0"/>
             </a:endParaRPr>
@@ -10151,7 +9711,7 @@
           <a:p>
             <a:pPr algn="ctr"/>
             <a:r>
-              <a:rPr lang="en-US" sz="1200" b="1" dirty="0" smtClean="0">
+              <a:rPr lang="en-US" sz="1200" b="1" dirty="0">
                 <a:latin typeface="Arial" pitchFamily="34" charset="0"/>
                 <a:cs typeface="Arial" pitchFamily="34" charset="0"/>
               </a:rPr>
@@ -10161,13 +9721,13 @@
           <a:p>
             <a:pPr algn="ctr"/>
             <a:r>
-              <a:rPr lang="en-US" sz="1200" b="1" dirty="0" smtClean="0">
+              <a:rPr lang="en-US" sz="1200" b="1" dirty="0">
                 <a:latin typeface="Arial" pitchFamily="34" charset="0"/>
                 <a:cs typeface="Arial" pitchFamily="34" charset="0"/>
               </a:rPr>
               <a:t>(1 stream)</a:t>
             </a:r>
-            <a:endParaRPr lang="en-US" sz="800" b="1" dirty="0" smtClean="0">
+            <a:endParaRPr lang="en-US" sz="800" b="1" dirty="0">
               <a:latin typeface="Arial" pitchFamily="34" charset="0"/>
               <a:cs typeface="Arial" pitchFamily="34" charset="0"/>
             </a:endParaRPr>
@@ -10203,7 +9763,7 @@
           <a:p>
             <a:pPr algn="ctr"/>
             <a:r>
-              <a:rPr lang="en-US" sz="1200" b="1" dirty="0" smtClean="0">
+              <a:rPr lang="en-US" sz="1200" b="1" dirty="0">
                 <a:latin typeface="Arial" pitchFamily="34" charset="0"/>
                 <a:cs typeface="Arial" pitchFamily="34" charset="0"/>
               </a:rPr>
@@ -10213,13 +9773,13 @@
           <a:p>
             <a:pPr algn="ctr"/>
             <a:r>
-              <a:rPr lang="en-US" sz="1200" b="1" dirty="0" smtClean="0">
+              <a:rPr lang="en-US" sz="1200" b="1" dirty="0">
                 <a:latin typeface="Arial" pitchFamily="34" charset="0"/>
                 <a:cs typeface="Arial" pitchFamily="34" charset="0"/>
               </a:rPr>
               <a:t>(2 streams)</a:t>
             </a:r>
-            <a:endParaRPr lang="en-US" sz="800" b="1" dirty="0" smtClean="0">
+            <a:endParaRPr lang="en-US" sz="800" b="1" dirty="0">
               <a:latin typeface="Arial" pitchFamily="34" charset="0"/>
               <a:cs typeface="Arial" pitchFamily="34" charset="0"/>
             </a:endParaRPr>
@@ -10259,44 +9819,44 @@
           <a:lstStyle/>
           <a:p>
             <a:r>
-              <a:rPr lang="en-US" sz="1600" dirty="0" smtClean="0"/>
+              <a:rPr lang="en-US" sz="1600" dirty="0"/>
               <a:t>S ==&gt; Stream</a:t>
             </a:r>
           </a:p>
           <a:p>
             <a:r>
-              <a:rPr lang="en-US" sz="1600" dirty="0" smtClean="0"/>
+              <a:rPr lang="en-US" sz="1600" dirty="0"/>
               <a:t>TS </a:t>
             </a:r>
             <a:r>
-              <a:rPr lang="en-US" sz="1600" dirty="0" smtClean="0">
+              <a:rPr lang="en-US" sz="1600" dirty="0">
                 <a:sym typeface="Wingdings"/>
               </a:rPr>
               <a:t>==&gt;</a:t>
             </a:r>
             <a:r>
-              <a:rPr lang="en-US" sz="1600" dirty="0" smtClean="0"/>
+              <a:rPr lang="en-US" sz="1600" dirty="0"/>
               <a:t>  Time Slice</a:t>
             </a:r>
           </a:p>
           <a:p>
             <a:r>
-              <a:rPr lang="en-US" sz="1600" dirty="0" smtClean="0"/>
+              <a:rPr lang="en-US" sz="1600" dirty="0"/>
               <a:t>TSB </a:t>
             </a:r>
             <a:r>
-              <a:rPr lang="en-US" sz="1600" dirty="0" smtClean="0">
+              <a:rPr lang="en-US" sz="1600" dirty="0">
                 <a:sym typeface="Wingdings"/>
               </a:rPr>
               <a:t>==&gt;</a:t>
             </a:r>
             <a:r>
-              <a:rPr lang="en-US" sz="1600" dirty="0" smtClean="0"/>
+              <a:rPr lang="en-US" sz="1600" dirty="0"/>
               <a:t> ROC Time Slice Bank</a:t>
             </a:r>
           </a:p>
           <a:p>
-            <a:endParaRPr lang="en-US" sz="1200" dirty="0" smtClean="0"/>
+            <a:endParaRPr lang="en-US" sz="1200" dirty="0"/>
           </a:p>
         </p:txBody>
       </p:sp>
@@ -10348,16 +9908,12 @@
             <a:p>
               <a:pPr algn="ctr"/>
               <a:r>
-                <a:rPr lang="en-US" sz="1200" b="1" dirty="0" smtClean="0">
+                <a:rPr lang="en-US" sz="1200" b="1" dirty="0">
                   <a:latin typeface="Arial" pitchFamily="34" charset="0"/>
                   <a:cs typeface="Arial" pitchFamily="34" charset="0"/>
                 </a:rPr>
                 <a:t>ROC 1, TS 2, S 1</a:t>
               </a:r>
-              <a:endParaRPr lang="en-US" sz="1200" b="1" dirty="0">
-                <a:latin typeface="Arial" pitchFamily="34" charset="0"/>
-                <a:cs typeface="Arial" pitchFamily="34" charset="0"/>
-              </a:endParaRPr>
             </a:p>
           </p:txBody>
         </p:sp>
@@ -10395,16 +9951,12 @@
             <a:p>
               <a:pPr algn="ctr"/>
               <a:r>
-                <a:rPr lang="en-US" sz="1200" b="1" dirty="0" smtClean="0">
+                <a:rPr lang="en-US" sz="1200" b="1" dirty="0">
                   <a:latin typeface="Arial" pitchFamily="34" charset="0"/>
                   <a:cs typeface="Arial" pitchFamily="34" charset="0"/>
                 </a:rPr>
                 <a:t>ROC 1, TS 2, S 3</a:t>
               </a:r>
-              <a:endParaRPr lang="en-US" sz="1200" b="1" dirty="0">
-                <a:latin typeface="Arial" pitchFamily="34" charset="0"/>
-                <a:cs typeface="Arial" pitchFamily="34" charset="0"/>
-              </a:endParaRPr>
             </a:p>
           </p:txBody>
         </p:sp>
@@ -10442,16 +9994,12 @@
             <a:p>
               <a:pPr algn="ctr"/>
               <a:r>
-                <a:rPr lang="en-US" sz="1200" b="1" dirty="0" smtClean="0">
+                <a:rPr lang="en-US" sz="1200" b="1" dirty="0">
                   <a:latin typeface="Arial" pitchFamily="34" charset="0"/>
                   <a:cs typeface="Arial" pitchFamily="34" charset="0"/>
                 </a:rPr>
                 <a:t>ROC 1, TS 2, S 2</a:t>
               </a:r>
-              <a:endParaRPr lang="en-US" sz="1200" b="1" dirty="0">
-                <a:latin typeface="Arial" pitchFamily="34" charset="0"/>
-                <a:cs typeface="Arial" pitchFamily="34" charset="0"/>
-              </a:endParaRPr>
             </a:p>
           </p:txBody>
         </p:sp>
@@ -10504,16 +10052,12 @@
             <a:p>
               <a:pPr algn="ctr"/>
               <a:r>
-                <a:rPr lang="en-US" sz="1200" b="1" dirty="0" smtClean="0">
+                <a:rPr lang="en-US" sz="1200" b="1" dirty="0">
                   <a:latin typeface="Arial" pitchFamily="34" charset="0"/>
                   <a:cs typeface="Arial" pitchFamily="34" charset="0"/>
                 </a:rPr>
                 <a:t>ROC 1, TS 1, S 1</a:t>
               </a:r>
-              <a:endParaRPr lang="en-US" sz="1200" b="1" dirty="0">
-                <a:latin typeface="Arial" pitchFamily="34" charset="0"/>
-                <a:cs typeface="Arial" pitchFamily="34" charset="0"/>
-              </a:endParaRPr>
             </a:p>
           </p:txBody>
         </p:sp>
@@ -10551,16 +10095,12 @@
             <a:p>
               <a:pPr algn="ctr"/>
               <a:r>
-                <a:rPr lang="en-US" sz="1200" b="1" dirty="0" smtClean="0">
+                <a:rPr lang="en-US" sz="1200" b="1" dirty="0">
                   <a:latin typeface="Arial" pitchFamily="34" charset="0"/>
                   <a:cs typeface="Arial" pitchFamily="34" charset="0"/>
                 </a:rPr>
                 <a:t>ROC 1, TS 1, S 3</a:t>
               </a:r>
-              <a:endParaRPr lang="en-US" sz="1200" b="1" dirty="0">
-                <a:latin typeface="Arial" pitchFamily="34" charset="0"/>
-                <a:cs typeface="Arial" pitchFamily="34" charset="0"/>
-              </a:endParaRPr>
             </a:p>
           </p:txBody>
         </p:sp>
@@ -10598,16 +10138,12 @@
             <a:p>
               <a:pPr algn="ctr"/>
               <a:r>
-                <a:rPr lang="en-US" sz="1200" b="1" dirty="0" smtClean="0">
+                <a:rPr lang="en-US" sz="1200" b="1" dirty="0">
                   <a:latin typeface="Arial" pitchFamily="34" charset="0"/>
                   <a:cs typeface="Arial" pitchFamily="34" charset="0"/>
                 </a:rPr>
                 <a:t>ROC 1, TS 1, S 2</a:t>
               </a:r>
-              <a:endParaRPr lang="en-US" sz="1200" b="1" dirty="0">
-                <a:latin typeface="Arial" pitchFamily="34" charset="0"/>
-                <a:cs typeface="Arial" pitchFamily="34" charset="0"/>
-              </a:endParaRPr>
             </a:p>
           </p:txBody>
         </p:sp>
@@ -10660,16 +10196,12 @@
             <a:p>
               <a:pPr algn="ctr"/>
               <a:r>
-                <a:rPr lang="en-US" sz="1200" b="1" dirty="0" smtClean="0">
+                <a:rPr lang="en-US" sz="1200" b="1" dirty="0">
                   <a:latin typeface="Arial" pitchFamily="34" charset="0"/>
                   <a:cs typeface="Arial" pitchFamily="34" charset="0"/>
                 </a:rPr>
                 <a:t>ROC 1, TS 3, S 1</a:t>
               </a:r>
-              <a:endParaRPr lang="en-US" sz="1200" b="1" dirty="0">
-                <a:latin typeface="Arial" pitchFamily="34" charset="0"/>
-                <a:cs typeface="Arial" pitchFamily="34" charset="0"/>
-              </a:endParaRPr>
             </a:p>
           </p:txBody>
         </p:sp>
@@ -10707,16 +10239,12 @@
             <a:p>
               <a:pPr algn="ctr"/>
               <a:r>
-                <a:rPr lang="en-US" sz="1200" b="1" dirty="0" smtClean="0">
+                <a:rPr lang="en-US" sz="1200" b="1" dirty="0">
                   <a:latin typeface="Arial" pitchFamily="34" charset="0"/>
                   <a:cs typeface="Arial" pitchFamily="34" charset="0"/>
                 </a:rPr>
                 <a:t>ROC 1, TS 3, S 3</a:t>
               </a:r>
-              <a:endParaRPr lang="en-US" sz="1200" b="1" dirty="0">
-                <a:latin typeface="Arial" pitchFamily="34" charset="0"/>
-                <a:cs typeface="Arial" pitchFamily="34" charset="0"/>
-              </a:endParaRPr>
             </a:p>
           </p:txBody>
         </p:sp>
@@ -10754,16 +10282,12 @@
             <a:p>
               <a:pPr algn="ctr"/>
               <a:r>
-                <a:rPr lang="en-US" sz="1200" b="1" dirty="0" smtClean="0">
+                <a:rPr lang="en-US" sz="1200" b="1" dirty="0">
                   <a:latin typeface="Arial" pitchFamily="34" charset="0"/>
                   <a:cs typeface="Arial" pitchFamily="34" charset="0"/>
                 </a:rPr>
                 <a:t>ROC 1, TS 3, S 2</a:t>
               </a:r>
-              <a:endParaRPr lang="en-US" sz="1200" b="1" dirty="0">
-                <a:latin typeface="Arial" pitchFamily="34" charset="0"/>
-                <a:cs typeface="Arial" pitchFamily="34" charset="0"/>
-              </a:endParaRPr>
             </a:p>
           </p:txBody>
         </p:sp>
@@ -10802,16 +10326,12 @@
           <a:p>
             <a:pPr algn="ctr"/>
             <a:r>
-              <a:rPr lang="en-US" sz="1200" b="1" dirty="0" smtClean="0">
+              <a:rPr lang="en-US" sz="1200" b="1" dirty="0">
                 <a:latin typeface="Arial" pitchFamily="34" charset="0"/>
                 <a:cs typeface="Arial" pitchFamily="34" charset="0"/>
               </a:rPr>
               <a:t>ROC 2, TS 2, S 1</a:t>
             </a:r>
-            <a:endParaRPr lang="en-US" sz="1200" b="1" dirty="0">
-              <a:latin typeface="Arial" pitchFamily="34" charset="0"/>
-              <a:cs typeface="Arial" pitchFamily="34" charset="0"/>
-            </a:endParaRPr>
           </a:p>
         </p:txBody>
       </p:sp>
@@ -10849,16 +10369,12 @@
           <a:p>
             <a:pPr algn="ctr"/>
             <a:r>
-              <a:rPr lang="en-US" sz="1200" b="1" dirty="0" smtClean="0">
+              <a:rPr lang="en-US" sz="1200" b="1" dirty="0">
                 <a:latin typeface="Arial" pitchFamily="34" charset="0"/>
                 <a:cs typeface="Arial" pitchFamily="34" charset="0"/>
               </a:rPr>
               <a:t>ROC 2, TS 1, S 1</a:t>
             </a:r>
-            <a:endParaRPr lang="en-US" sz="1200" b="1" dirty="0">
-              <a:latin typeface="Arial" pitchFamily="34" charset="0"/>
-              <a:cs typeface="Arial" pitchFamily="34" charset="0"/>
-            </a:endParaRPr>
           </a:p>
         </p:txBody>
       </p:sp>
@@ -10896,16 +10412,12 @@
           <a:p>
             <a:pPr algn="ctr"/>
             <a:r>
-              <a:rPr lang="en-US" sz="1200" b="1" dirty="0" smtClean="0">
+              <a:rPr lang="en-US" sz="1200" b="1" dirty="0">
                 <a:latin typeface="Arial" pitchFamily="34" charset="0"/>
                 <a:cs typeface="Arial" pitchFamily="34" charset="0"/>
               </a:rPr>
               <a:t>ROC 2, TS 3, S 1</a:t>
             </a:r>
-            <a:endParaRPr lang="en-US" sz="1200" b="1" dirty="0">
-              <a:latin typeface="Arial" pitchFamily="34" charset="0"/>
-              <a:cs typeface="Arial" pitchFamily="34" charset="0"/>
-            </a:endParaRPr>
           </a:p>
         </p:txBody>
       </p:sp>
@@ -10957,16 +10469,12 @@
             <a:p>
               <a:pPr algn="ctr"/>
               <a:r>
-                <a:rPr lang="en-US" sz="1200" b="1" dirty="0" smtClean="0">
+                <a:rPr lang="en-US" sz="1200" b="1" dirty="0">
                   <a:latin typeface="Arial" pitchFamily="34" charset="0"/>
                   <a:cs typeface="Arial" pitchFamily="34" charset="0"/>
                 </a:rPr>
                 <a:t>ROC 3, TS 2, S 1</a:t>
               </a:r>
-              <a:endParaRPr lang="en-US" sz="1200" b="1" dirty="0">
-                <a:latin typeface="Arial" pitchFamily="34" charset="0"/>
-                <a:cs typeface="Arial" pitchFamily="34" charset="0"/>
-              </a:endParaRPr>
             </a:p>
           </p:txBody>
         </p:sp>
@@ -11004,16 +10512,12 @@
             <a:p>
               <a:pPr algn="ctr"/>
               <a:r>
-                <a:rPr lang="en-US" sz="1200" b="1" dirty="0" smtClean="0">
+                <a:rPr lang="en-US" sz="1200" b="1" dirty="0">
                   <a:latin typeface="Arial" pitchFamily="34" charset="0"/>
                   <a:cs typeface="Arial" pitchFamily="34" charset="0"/>
                 </a:rPr>
                 <a:t>ROC 3, TS 2, S 2</a:t>
               </a:r>
-              <a:endParaRPr lang="en-US" sz="1200" b="1" dirty="0">
-                <a:latin typeface="Arial" pitchFamily="34" charset="0"/>
-                <a:cs typeface="Arial" pitchFamily="34" charset="0"/>
-              </a:endParaRPr>
             </a:p>
           </p:txBody>
         </p:sp>
@@ -11066,16 +10570,12 @@
             <a:p>
               <a:pPr algn="ctr"/>
               <a:r>
-                <a:rPr lang="en-US" sz="1200" b="1" dirty="0" smtClean="0">
+                <a:rPr lang="en-US" sz="1200" b="1" dirty="0">
                   <a:latin typeface="Arial" pitchFamily="34" charset="0"/>
                   <a:cs typeface="Arial" pitchFamily="34" charset="0"/>
                 </a:rPr>
                 <a:t>ROC 3, TS 1, S 1</a:t>
               </a:r>
-              <a:endParaRPr lang="en-US" sz="1200" b="1" dirty="0">
-                <a:latin typeface="Arial" pitchFamily="34" charset="0"/>
-                <a:cs typeface="Arial" pitchFamily="34" charset="0"/>
-              </a:endParaRPr>
             </a:p>
           </p:txBody>
         </p:sp>
@@ -11113,16 +10613,12 @@
             <a:p>
               <a:pPr algn="ctr"/>
               <a:r>
-                <a:rPr lang="en-US" sz="1200" b="1" dirty="0" smtClean="0">
+                <a:rPr lang="en-US" sz="1200" b="1" dirty="0">
                   <a:latin typeface="Arial" pitchFamily="34" charset="0"/>
                   <a:cs typeface="Arial" pitchFamily="34" charset="0"/>
                 </a:rPr>
                 <a:t>ROC 3, TS 1, S 2</a:t>
               </a:r>
-              <a:endParaRPr lang="en-US" sz="1200" b="1" dirty="0">
-                <a:latin typeface="Arial" pitchFamily="34" charset="0"/>
-                <a:cs typeface="Arial" pitchFamily="34" charset="0"/>
-              </a:endParaRPr>
             </a:p>
           </p:txBody>
         </p:sp>
@@ -11175,16 +10671,12 @@
             <a:p>
               <a:pPr algn="ctr"/>
               <a:r>
-                <a:rPr lang="en-US" sz="1200" b="1" dirty="0" smtClean="0">
+                <a:rPr lang="en-US" sz="1200" b="1" dirty="0">
                   <a:latin typeface="Arial" pitchFamily="34" charset="0"/>
                   <a:cs typeface="Arial" pitchFamily="34" charset="0"/>
                 </a:rPr>
                 <a:t>ROC 3, TS 3, S 1</a:t>
               </a:r>
-              <a:endParaRPr lang="en-US" sz="1200" b="1" dirty="0">
-                <a:latin typeface="Arial" pitchFamily="34" charset="0"/>
-                <a:cs typeface="Arial" pitchFamily="34" charset="0"/>
-              </a:endParaRPr>
             </a:p>
           </p:txBody>
         </p:sp>
@@ -11222,16 +10714,12 @@
             <a:p>
               <a:pPr algn="ctr"/>
               <a:r>
-                <a:rPr lang="en-US" sz="1200" b="1" dirty="0" smtClean="0">
+                <a:rPr lang="en-US" sz="1200" b="1" dirty="0">
                   <a:latin typeface="Arial" pitchFamily="34" charset="0"/>
                   <a:cs typeface="Arial" pitchFamily="34" charset="0"/>
                 </a:rPr>
                 <a:t>ROC 3, TS 3, S 2</a:t>
               </a:r>
-              <a:endParaRPr lang="en-US" sz="1200" b="1" dirty="0">
-                <a:latin typeface="Arial" pitchFamily="34" charset="0"/>
-                <a:cs typeface="Arial" pitchFamily="34" charset="0"/>
-              </a:endParaRPr>
             </a:p>
           </p:txBody>
         </p:sp>
@@ -11265,13 +10753,13 @@
           <a:p>
             <a:pPr algn="ctr"/>
             <a:r>
-              <a:rPr lang="en-US" sz="1200" b="1" dirty="0" smtClean="0">
+              <a:rPr lang="en-US" sz="1200" b="1" dirty="0">
                 <a:latin typeface="Arial" pitchFamily="34" charset="0"/>
                 <a:cs typeface="Arial" pitchFamily="34" charset="0"/>
               </a:rPr>
               <a:t>Time Slice Sorting Thread</a:t>
             </a:r>
-            <a:endParaRPr lang="en-US" sz="800" b="1" dirty="0" smtClean="0">
+            <a:endParaRPr lang="en-US" sz="800" b="1" dirty="0">
               <a:latin typeface="Arial" pitchFamily="34" charset="0"/>
               <a:cs typeface="Arial" pitchFamily="34" charset="0"/>
             </a:endParaRPr>
@@ -11419,14 +10907,14 @@
           <a:lstStyle/>
           <a:p>
             <a:r>
-              <a:rPr lang="en-US" sz="2000" b="1" dirty="0" smtClean="0">
+              <a:rPr lang="en-US" sz="2000" b="1" dirty="0">
                 <a:latin typeface="Arial" pitchFamily="34" charset="0"/>
                 <a:cs typeface="Arial" pitchFamily="34" charset="0"/>
               </a:rPr>
               <a:t>Event Building </a:t>
             </a:r>
             <a:r>
-              <a:rPr lang="en-US" sz="2000" b="1" smtClean="0">
+              <a:rPr lang="en-US" sz="2000" b="1">
                 <a:latin typeface="Arial" pitchFamily="34" charset="0"/>
                 <a:cs typeface="Arial" pitchFamily="34" charset="0"/>
               </a:rPr>
@@ -11839,10 +11327,9 @@
             <a:lstStyle/>
             <a:p>
               <a:r>
-                <a:rPr lang="en-US" smtClean="0"/>
+                <a:rPr lang="en-US"/>
                 <a:t>1</a:t>
               </a:r>
-              <a:endParaRPr lang="en-US"/>
             </a:p>
           </p:txBody>
         </p:sp>
@@ -11869,10 +11356,9 @@
             <a:lstStyle/>
             <a:p>
               <a:r>
-                <a:rPr lang="en-US" smtClean="0"/>
+                <a:rPr lang="en-US"/>
                 <a:t>1</a:t>
               </a:r>
-              <a:endParaRPr lang="en-US"/>
             </a:p>
           </p:txBody>
         </p:sp>
@@ -11899,10 +11385,9 @@
             <a:lstStyle/>
             <a:p>
               <a:r>
-                <a:rPr lang="en-US" smtClean="0"/>
+                <a:rPr lang="en-US"/>
                 <a:t>1</a:t>
               </a:r>
-              <a:endParaRPr lang="en-US"/>
             </a:p>
           </p:txBody>
         </p:sp>
@@ -11929,10 +11414,9 @@
             <a:lstStyle/>
             <a:p>
               <a:r>
-                <a:rPr lang="en-US" smtClean="0"/>
+                <a:rPr lang="en-US"/>
                 <a:t>1</a:t>
               </a:r>
-              <a:endParaRPr lang="en-US"/>
             </a:p>
           </p:txBody>
         </p:sp>
@@ -11959,10 +11443,9 @@
             <a:lstStyle/>
             <a:p>
               <a:r>
-                <a:rPr lang="en-US" smtClean="0"/>
+                <a:rPr lang="en-US"/>
                 <a:t>1</a:t>
               </a:r>
-              <a:endParaRPr lang="en-US"/>
             </a:p>
           </p:txBody>
         </p:sp>
@@ -11989,10 +11472,9 @@
             <a:lstStyle/>
             <a:p>
               <a:r>
-                <a:rPr lang="en-US" dirty="0" smtClean="0"/>
+                <a:rPr lang="en-US" dirty="0"/>
                 <a:t>3</a:t>
               </a:r>
-              <a:endParaRPr lang="en-US" dirty="0"/>
             </a:p>
           </p:txBody>
         </p:sp>
@@ -12019,10 +11501,9 @@
             <a:lstStyle/>
             <a:p>
               <a:r>
-                <a:rPr lang="en-US" smtClean="0"/>
+                <a:rPr lang="en-US"/>
                 <a:t>1</a:t>
               </a:r>
-              <a:endParaRPr lang="en-US"/>
             </a:p>
           </p:txBody>
         </p:sp>
@@ -12049,10 +11530,9 @@
             <a:lstStyle/>
             <a:p>
               <a:r>
-                <a:rPr lang="en-US" dirty="0" smtClean="0"/>
+                <a:rPr lang="en-US" dirty="0"/>
                 <a:t>3</a:t>
               </a:r>
-              <a:endParaRPr lang="en-US" dirty="0"/>
             </a:p>
           </p:txBody>
         </p:sp>
@@ -12108,10 +11588,9 @@
             <a:lstStyle/>
             <a:p>
               <a:r>
-                <a:rPr lang="en-US" dirty="0" smtClean="0"/>
+                <a:rPr lang="en-US" dirty="0"/>
                 <a:t>3</a:t>
               </a:r>
-              <a:endParaRPr lang="en-US" dirty="0"/>
             </a:p>
           </p:txBody>
         </p:sp>
@@ -12138,10 +11617,9 @@
             <a:lstStyle/>
             <a:p>
               <a:r>
-                <a:rPr lang="en-US" dirty="0" smtClean="0"/>
+                <a:rPr lang="en-US" dirty="0"/>
                 <a:t>3</a:t>
               </a:r>
-              <a:endParaRPr lang="en-US" dirty="0"/>
             </a:p>
           </p:txBody>
         </p:sp>
@@ -12168,10 +11646,9 @@
             <a:lstStyle/>
             <a:p>
               <a:r>
-                <a:rPr lang="en-US" dirty="0" smtClean="0"/>
+                <a:rPr lang="en-US" dirty="0"/>
                 <a:t>3</a:t>
               </a:r>
-              <a:endParaRPr lang="en-US" dirty="0"/>
             </a:p>
           </p:txBody>
         </p:sp>
@@ -12564,10 +12041,9 @@
             <a:lstStyle/>
             <a:p>
               <a:r>
-                <a:rPr lang="en-US" dirty="0" smtClean="0"/>
+                <a:rPr lang="en-US" dirty="0"/>
                 <a:t>2</a:t>
               </a:r>
-              <a:endParaRPr lang="en-US" dirty="0"/>
             </a:p>
           </p:txBody>
         </p:sp>
@@ -12594,10 +12070,9 @@
             <a:lstStyle/>
             <a:p>
               <a:r>
-                <a:rPr lang="en-US" dirty="0" smtClean="0"/>
+                <a:rPr lang="en-US" dirty="0"/>
                 <a:t>2</a:t>
               </a:r>
-              <a:endParaRPr lang="en-US" dirty="0"/>
             </a:p>
           </p:txBody>
         </p:sp>
@@ -12624,10 +12099,9 @@
             <a:lstStyle/>
             <a:p>
               <a:r>
-                <a:rPr lang="en-US" dirty="0" smtClean="0"/>
+                <a:rPr lang="en-US" dirty="0"/>
                 <a:t>2</a:t>
               </a:r>
-              <a:endParaRPr lang="en-US" dirty="0"/>
             </a:p>
           </p:txBody>
         </p:sp>
@@ -12654,10 +12128,9 @@
             <a:lstStyle/>
             <a:p>
               <a:r>
-                <a:rPr lang="en-US" dirty="0" smtClean="0"/>
+                <a:rPr lang="en-US" dirty="0"/>
                 <a:t>2</a:t>
               </a:r>
-              <a:endParaRPr lang="en-US" dirty="0"/>
             </a:p>
           </p:txBody>
         </p:sp>
@@ -12684,7 +12157,7 @@
             <a:lstStyle/>
             <a:p>
               <a:r>
-                <a:rPr lang="en-US" smtClean="0"/>
+                <a:rPr lang="en-US"/>
                 <a:t>2</a:t>
               </a:r>
               <a:endParaRPr lang="en-US" dirty="0"/>
@@ -12714,7 +12187,7 @@
             <a:lstStyle/>
             <a:p>
               <a:r>
-                <a:rPr lang="en-US" smtClean="0"/>
+                <a:rPr lang="en-US"/>
                 <a:t>2</a:t>
               </a:r>
               <a:endParaRPr lang="en-US" dirty="0"/>
@@ -12822,26 +12295,25 @@
           <a:p>
             <a:pPr algn="ctr"/>
             <a:r>
-              <a:rPr lang="en-US" dirty="0" smtClean="0"/>
+              <a:rPr lang="en-US" dirty="0"/>
               <a:t>Ring </a:t>
             </a:r>
             <a:r>
-              <a:rPr lang="en-US" dirty="0" err="1" smtClean="0"/>
+              <a:rPr lang="en-US" dirty="0" err="1"/>
               <a:t>Buf</a:t>
             </a:r>
             <a:r>
-              <a:rPr lang="en-US" dirty="0" smtClean="0"/>
+              <a:rPr lang="en-US" dirty="0"/>
               <a:t> of TSBs (TS </a:t>
             </a:r>
             <a:r>
-              <a:rPr lang="en-US" dirty="0" err="1" smtClean="0"/>
+              <a:rPr lang="en-US" dirty="0" err="1"/>
               <a:t>val</a:t>
             </a:r>
             <a:r>
-              <a:rPr lang="en-US" dirty="0" smtClean="0"/>
+              <a:rPr lang="en-US" dirty="0"/>
               <a:t>)</a:t>
             </a:r>
-            <a:endParaRPr lang="en-US" dirty="0"/>
           </a:p>
         </p:txBody>
       </p:sp>
@@ -12915,10 +12387,9 @@
           <a:p>
             <a:pPr algn="ctr"/>
             <a:r>
-              <a:rPr lang="en-US" dirty="0" smtClean="0"/>
+              <a:rPr lang="en-US" dirty="0"/>
               <a:t>Event Building Threads</a:t>
             </a:r>
-            <a:endParaRPr lang="en-US" dirty="0"/>
           </a:p>
         </p:txBody>
       </p:sp>
@@ -12951,13 +12422,13 @@
           <a:p>
             <a:pPr algn="ctr"/>
             <a:r>
-              <a:rPr lang="en-US" sz="1200" b="1" smtClean="0">
+              <a:rPr lang="en-US" sz="1200" b="1">
                 <a:latin typeface="Arial" pitchFamily="34" charset="0"/>
                 <a:cs typeface="Arial" pitchFamily="34" charset="0"/>
               </a:rPr>
               <a:t>Building Thread 1</a:t>
             </a:r>
-            <a:endParaRPr lang="en-US" sz="800" b="1" dirty="0" smtClean="0">
+            <a:endParaRPr lang="en-US" sz="800" b="1" dirty="0">
               <a:latin typeface="Arial" pitchFamily="34" charset="0"/>
               <a:cs typeface="Arial" pitchFamily="34" charset="0"/>
             </a:endParaRPr>
@@ -12993,13 +12464,13 @@
           <a:p>
             <a:pPr algn="ctr"/>
             <a:r>
-              <a:rPr lang="en-US" sz="1200" b="1" dirty="0" smtClean="0">
+              <a:rPr lang="en-US" sz="1200" b="1" dirty="0">
                 <a:latin typeface="Arial" pitchFamily="34" charset="0"/>
                 <a:cs typeface="Arial" pitchFamily="34" charset="0"/>
               </a:rPr>
               <a:t>Building Thread 2</a:t>
             </a:r>
-            <a:endParaRPr lang="en-US" sz="800" b="1" dirty="0" smtClean="0">
+            <a:endParaRPr lang="en-US" sz="800" b="1" dirty="0">
               <a:latin typeface="Arial" pitchFamily="34" charset="0"/>
               <a:cs typeface="Arial" pitchFamily="34" charset="0"/>
             </a:endParaRPr>
@@ -13174,10 +12645,9 @@
           <a:p>
             <a:pPr algn="ctr"/>
             <a:r>
-              <a:rPr lang="en-US" dirty="0" smtClean="0"/>
+              <a:rPr lang="en-US" dirty="0"/>
               <a:t>Contents of each channel’s ring buffer</a:t>
             </a:r>
-            <a:endParaRPr lang="en-US" dirty="0"/>
           </a:p>
         </p:txBody>
       </p:sp>
@@ -13213,13 +12683,748 @@
       </p:grpSpPr>
       <p:sp>
         <p:nvSpPr>
-          <p:cNvPr id="4" name="TextBox 3"/>
+          <p:cNvPr id="159" name="Rectangle 158">
+            <a:extLst>
+              <a:ext uri="{FF2B5EF4-FFF2-40B4-BE49-F238E27FC236}">
+                <a16:creationId xmlns:a16="http://schemas.microsoft.com/office/drawing/2014/main" id="{EC1FA332-4628-4A4E-9718-DA39BB6DFF6C}"/>
+              </a:ext>
+            </a:extLst>
+          </p:cNvPr>
+          <p:cNvSpPr/>
+          <p:nvPr/>
+        </p:nvSpPr>
+        <p:spPr>
+          <a:xfrm>
+            <a:off x="1136470" y="2704285"/>
+            <a:ext cx="6321012" cy="2990616"/>
+          </a:xfrm>
+          <a:prstGeom prst="rect">
+            <a:avLst/>
+          </a:prstGeom>
+          <a:solidFill>
+            <a:srgbClr val="EEE7FF"/>
+          </a:solidFill>
+          <a:ln w="25400">
+            <a:solidFill>
+              <a:srgbClr val="7030A0"/>
+            </a:solidFill>
+          </a:ln>
+        </p:spPr>
+        <p:style>
+          <a:lnRef idx="2">
+            <a:schemeClr val="accent1">
+              <a:shade val="50000"/>
+            </a:schemeClr>
+          </a:lnRef>
+          <a:fillRef idx="1">
+            <a:schemeClr val="accent1"/>
+          </a:fillRef>
+          <a:effectRef idx="0">
+            <a:schemeClr val="accent1"/>
+          </a:effectRef>
+          <a:fontRef idx="minor">
+            <a:schemeClr val="lt1"/>
+          </a:fontRef>
+        </p:style>
+        <p:txBody>
+          <a:bodyPr rtlCol="0" anchor="ctr"/>
+          <a:lstStyle/>
+          <a:p>
+            <a:pPr algn="ctr"/>
+            <a:endParaRPr lang="en-US" dirty="0"/>
+          </a:p>
+        </p:txBody>
+      </p:sp>
+      <p:sp>
+        <p:nvSpPr>
+          <p:cNvPr id="59" name="TextBox 58">
+            <a:extLst>
+              <a:ext uri="{FF2B5EF4-FFF2-40B4-BE49-F238E27FC236}">
+                <a16:creationId xmlns:a16="http://schemas.microsoft.com/office/drawing/2014/main" id="{97308917-C440-E342-BDEE-DC8EF22E4AEC}"/>
+              </a:ext>
+            </a:extLst>
+          </p:cNvPr>
           <p:cNvSpPr txBox="1"/>
           <p:nvPr/>
         </p:nvSpPr>
         <p:spPr>
           <a:xfrm>
-            <a:off x="3641551" y="202474"/>
+            <a:off x="1136470" y="60320"/>
+            <a:ext cx="1663880" cy="461665"/>
+          </a:xfrm>
+          <a:prstGeom prst="rect">
+            <a:avLst/>
+          </a:prstGeom>
+          <a:solidFill>
+            <a:schemeClr val="accent1">
+              <a:lumMod val="20000"/>
+              <a:lumOff val="80000"/>
+            </a:schemeClr>
+          </a:solidFill>
+          <a:ln w="19050">
+            <a:solidFill>
+              <a:schemeClr val="tx1"/>
+            </a:solidFill>
+          </a:ln>
+        </p:spPr>
+        <p:txBody>
+          <a:bodyPr wrap="square" rtlCol="0">
+            <a:spAutoFit/>
+          </a:bodyPr>
+          <a:lstStyle/>
+          <a:p>
+            <a:pPr algn="ctr"/>
+            <a:r>
+              <a:rPr lang="en-US" sz="1200" b="1" dirty="0">
+                <a:latin typeface="Arial" pitchFamily="34" charset="0"/>
+                <a:cs typeface="Arial" pitchFamily="34" charset="0"/>
+              </a:rPr>
+              <a:t>Input Channel 1</a:t>
+            </a:r>
+          </a:p>
+          <a:p>
+            <a:pPr algn="ctr"/>
+            <a:r>
+              <a:rPr lang="en-US" sz="1200" b="1" dirty="0">
+                <a:latin typeface="Arial" pitchFamily="34" charset="0"/>
+                <a:cs typeface="Arial" pitchFamily="34" charset="0"/>
+              </a:rPr>
+              <a:t>(2 streams) </a:t>
+            </a:r>
+            <a:endParaRPr lang="en-US" sz="800" b="1" dirty="0">
+              <a:latin typeface="Arial" pitchFamily="34" charset="0"/>
+              <a:cs typeface="Arial" pitchFamily="34" charset="0"/>
+            </a:endParaRPr>
+          </a:p>
+        </p:txBody>
+      </p:sp>
+      <p:sp>
+        <p:nvSpPr>
+          <p:cNvPr id="60" name="TextBox 59">
+            <a:extLst>
+              <a:ext uri="{FF2B5EF4-FFF2-40B4-BE49-F238E27FC236}">
+                <a16:creationId xmlns:a16="http://schemas.microsoft.com/office/drawing/2014/main" id="{D328EA91-EC09-E245-89BD-B4CA7EA12CF0}"/>
+              </a:ext>
+            </a:extLst>
+          </p:cNvPr>
+          <p:cNvSpPr txBox="1"/>
+          <p:nvPr/>
+        </p:nvSpPr>
+        <p:spPr>
+          <a:xfrm>
+            <a:off x="3468572" y="60320"/>
+            <a:ext cx="1663880" cy="461665"/>
+          </a:xfrm>
+          <a:prstGeom prst="rect">
+            <a:avLst/>
+          </a:prstGeom>
+          <a:solidFill>
+            <a:schemeClr val="accent1">
+              <a:lumMod val="20000"/>
+              <a:lumOff val="80000"/>
+            </a:schemeClr>
+          </a:solidFill>
+          <a:ln w="19050">
+            <a:solidFill>
+              <a:schemeClr val="tx1"/>
+            </a:solidFill>
+          </a:ln>
+        </p:spPr>
+        <p:txBody>
+          <a:bodyPr wrap="square" rtlCol="0">
+            <a:spAutoFit/>
+          </a:bodyPr>
+          <a:lstStyle/>
+          <a:p>
+            <a:pPr algn="ctr"/>
+            <a:r>
+              <a:rPr lang="en-US" sz="1200" b="1" dirty="0">
+                <a:latin typeface="Arial" pitchFamily="34" charset="0"/>
+                <a:cs typeface="Arial" pitchFamily="34" charset="0"/>
+              </a:rPr>
+              <a:t>Input Channel 2</a:t>
+            </a:r>
+          </a:p>
+          <a:p>
+            <a:pPr algn="ctr"/>
+            <a:r>
+              <a:rPr lang="en-US" sz="1200" b="1" dirty="0">
+                <a:latin typeface="Arial" pitchFamily="34" charset="0"/>
+                <a:cs typeface="Arial" pitchFamily="34" charset="0"/>
+              </a:rPr>
+              <a:t>(1 stream)</a:t>
+            </a:r>
+            <a:endParaRPr lang="en-US" sz="800" b="1" dirty="0">
+              <a:latin typeface="Arial" pitchFamily="34" charset="0"/>
+              <a:cs typeface="Arial" pitchFamily="34" charset="0"/>
+            </a:endParaRPr>
+          </a:p>
+        </p:txBody>
+      </p:sp>
+      <p:sp>
+        <p:nvSpPr>
+          <p:cNvPr id="61" name="TextBox 60">
+            <a:extLst>
+              <a:ext uri="{FF2B5EF4-FFF2-40B4-BE49-F238E27FC236}">
+                <a16:creationId xmlns:a16="http://schemas.microsoft.com/office/drawing/2014/main" id="{C5BCBEE1-0744-CD4B-91BC-54BD48BA44F0}"/>
+              </a:ext>
+            </a:extLst>
+          </p:cNvPr>
+          <p:cNvSpPr txBox="1"/>
+          <p:nvPr/>
+        </p:nvSpPr>
+        <p:spPr>
+          <a:xfrm>
+            <a:off x="5800674" y="60320"/>
+            <a:ext cx="1663880" cy="461665"/>
+          </a:xfrm>
+          <a:prstGeom prst="rect">
+            <a:avLst/>
+          </a:prstGeom>
+          <a:solidFill>
+            <a:schemeClr val="accent1">
+              <a:lumMod val="20000"/>
+              <a:lumOff val="80000"/>
+            </a:schemeClr>
+          </a:solidFill>
+          <a:ln w="19050">
+            <a:solidFill>
+              <a:schemeClr val="tx1"/>
+            </a:solidFill>
+          </a:ln>
+        </p:spPr>
+        <p:txBody>
+          <a:bodyPr wrap="square" rtlCol="0">
+            <a:spAutoFit/>
+          </a:bodyPr>
+          <a:lstStyle/>
+          <a:p>
+            <a:pPr algn="ctr"/>
+            <a:r>
+              <a:rPr lang="en-US" sz="1200" b="1" dirty="0">
+                <a:latin typeface="Arial" pitchFamily="34" charset="0"/>
+                <a:cs typeface="Arial" pitchFamily="34" charset="0"/>
+              </a:rPr>
+              <a:t>Input Channel 3</a:t>
+            </a:r>
+          </a:p>
+          <a:p>
+            <a:pPr algn="ctr"/>
+            <a:r>
+              <a:rPr lang="en-US" sz="1200" b="1" dirty="0">
+                <a:latin typeface="Arial" pitchFamily="34" charset="0"/>
+                <a:cs typeface="Arial" pitchFamily="34" charset="0"/>
+              </a:rPr>
+              <a:t>(2 streams)</a:t>
+            </a:r>
+            <a:endParaRPr lang="en-US" sz="800" b="1" dirty="0">
+              <a:latin typeface="Arial" pitchFamily="34" charset="0"/>
+              <a:cs typeface="Arial" pitchFamily="34" charset="0"/>
+            </a:endParaRPr>
+          </a:p>
+        </p:txBody>
+      </p:sp>
+      <p:sp>
+        <p:nvSpPr>
+          <p:cNvPr id="62" name="TextBox 61">
+            <a:extLst>
+              <a:ext uri="{FF2B5EF4-FFF2-40B4-BE49-F238E27FC236}">
+                <a16:creationId xmlns:a16="http://schemas.microsoft.com/office/drawing/2014/main" id="{E3608050-9784-834A-BD6F-5450A2750941}"/>
+              </a:ext>
+            </a:extLst>
+          </p:cNvPr>
+          <p:cNvSpPr txBox="1"/>
+          <p:nvPr/>
+        </p:nvSpPr>
+        <p:spPr>
+          <a:xfrm>
+            <a:off x="6098049" y="3044313"/>
+            <a:ext cx="1219730" cy="892552"/>
+          </a:xfrm>
+          <a:prstGeom prst="rect">
+            <a:avLst/>
+          </a:prstGeom>
+          <a:solidFill>
+            <a:schemeClr val="bg1">
+              <a:lumMod val="85000"/>
+            </a:schemeClr>
+          </a:solidFill>
+          <a:ln w="3175">
+            <a:solidFill>
+              <a:srgbClr val="0070C0"/>
+            </a:solidFill>
+            <a:prstDash val="lgDash"/>
+          </a:ln>
+        </p:spPr>
+        <p:txBody>
+          <a:bodyPr wrap="square" rtlCol="0">
+            <a:spAutoFit/>
+          </a:bodyPr>
+          <a:lstStyle/>
+          <a:p>
+            <a:r>
+              <a:rPr lang="en-US" sz="1000" dirty="0"/>
+              <a:t>S =&gt; Stream</a:t>
+            </a:r>
+          </a:p>
+          <a:p>
+            <a:r>
+              <a:rPr lang="en-US" sz="1000" dirty="0"/>
+              <a:t>TS </a:t>
+            </a:r>
+            <a:r>
+              <a:rPr lang="en-US" sz="1000" dirty="0">
+                <a:sym typeface="Wingdings"/>
+              </a:rPr>
+              <a:t>=&gt;</a:t>
+            </a:r>
+            <a:r>
+              <a:rPr lang="en-US" sz="1000" dirty="0"/>
+              <a:t>  Time Slice</a:t>
+            </a:r>
+          </a:p>
+          <a:p>
+            <a:r>
+              <a:rPr lang="en-US" sz="1000" dirty="0"/>
+              <a:t>TSB </a:t>
+            </a:r>
+            <a:r>
+              <a:rPr lang="en-US" sz="1000" dirty="0">
+                <a:sym typeface="Wingdings"/>
+              </a:rPr>
+              <a:t>=&gt;</a:t>
+            </a:r>
+            <a:r>
+              <a:rPr lang="en-US" sz="1000" dirty="0"/>
+              <a:t> ROC Time Slice Bank</a:t>
+            </a:r>
+          </a:p>
+          <a:p>
+            <a:endParaRPr lang="en-US" sz="1200" dirty="0"/>
+          </a:p>
+        </p:txBody>
+      </p:sp>
+      <p:grpSp>
+        <p:nvGrpSpPr>
+          <p:cNvPr id="63" name="Group 62">
+            <a:extLst>
+              <a:ext uri="{FF2B5EF4-FFF2-40B4-BE49-F238E27FC236}">
+                <a16:creationId xmlns:a16="http://schemas.microsoft.com/office/drawing/2014/main" id="{01DFCB47-11C9-4E44-8149-47C91D2B53B1}"/>
+              </a:ext>
+            </a:extLst>
+          </p:cNvPr>
+          <p:cNvGrpSpPr/>
+          <p:nvPr/>
+        </p:nvGrpSpPr>
+        <p:grpSpPr>
+          <a:xfrm>
+            <a:off x="1236774" y="1280948"/>
+            <a:ext cx="1469450" cy="547686"/>
+            <a:chOff x="1136470" y="3100384"/>
+            <a:chExt cx="1469450" cy="547686"/>
+          </a:xfrm>
+        </p:grpSpPr>
+        <p:sp>
+          <p:nvSpPr>
+            <p:cNvPr id="64" name="TextBox 63">
+              <a:extLst>
+                <a:ext uri="{FF2B5EF4-FFF2-40B4-BE49-F238E27FC236}">
+                  <a16:creationId xmlns:a16="http://schemas.microsoft.com/office/drawing/2014/main" id="{7FFBBBBB-01BE-FF4F-8767-02849D7144F1}"/>
+                </a:ext>
+              </a:extLst>
+            </p:cNvPr>
+            <p:cNvSpPr txBox="1"/>
+            <p:nvPr/>
+          </p:nvSpPr>
+          <p:spPr>
+            <a:xfrm>
+              <a:off x="1136470" y="3371071"/>
+              <a:ext cx="1469450" cy="276999"/>
+            </a:xfrm>
+            <a:prstGeom prst="rect">
+              <a:avLst/>
+            </a:prstGeom>
+            <a:solidFill>
+              <a:schemeClr val="accent4">
+                <a:lumMod val="20000"/>
+                <a:lumOff val="80000"/>
+              </a:schemeClr>
+            </a:solidFill>
+            <a:ln w="19050">
+              <a:solidFill>
+                <a:schemeClr val="tx1"/>
+              </a:solidFill>
+            </a:ln>
+          </p:spPr>
+          <p:txBody>
+            <a:bodyPr wrap="square" rtlCol="0">
+              <a:spAutoFit/>
+            </a:bodyPr>
+            <a:lstStyle/>
+            <a:p>
+              <a:pPr algn="ctr"/>
+              <a:r>
+                <a:rPr lang="en-US" sz="1200" b="1" dirty="0">
+                  <a:latin typeface="Arial" pitchFamily="34" charset="0"/>
+                  <a:cs typeface="Arial" pitchFamily="34" charset="0"/>
+                </a:rPr>
+                <a:t>ROC 1, TS 2, S 1</a:t>
+              </a:r>
+            </a:p>
+          </p:txBody>
+        </p:sp>
+        <p:sp>
+          <p:nvSpPr>
+            <p:cNvPr id="66" name="TextBox 65">
+              <a:extLst>
+                <a:ext uri="{FF2B5EF4-FFF2-40B4-BE49-F238E27FC236}">
+                  <a16:creationId xmlns:a16="http://schemas.microsoft.com/office/drawing/2014/main" id="{1EE6A120-CF8C-4349-937A-C1AC2BDA1EE1}"/>
+                </a:ext>
+              </a:extLst>
+            </p:cNvPr>
+            <p:cNvSpPr txBox="1"/>
+            <p:nvPr/>
+          </p:nvSpPr>
+          <p:spPr>
+            <a:xfrm>
+              <a:off x="1136470" y="3100384"/>
+              <a:ext cx="1469450" cy="276999"/>
+            </a:xfrm>
+            <a:prstGeom prst="rect">
+              <a:avLst/>
+            </a:prstGeom>
+            <a:solidFill>
+              <a:schemeClr val="accent4">
+                <a:lumMod val="20000"/>
+                <a:lumOff val="80000"/>
+              </a:schemeClr>
+            </a:solidFill>
+            <a:ln w="19050">
+              <a:solidFill>
+                <a:schemeClr val="tx1"/>
+              </a:solidFill>
+            </a:ln>
+          </p:spPr>
+          <p:txBody>
+            <a:bodyPr wrap="square" rtlCol="0">
+              <a:spAutoFit/>
+            </a:bodyPr>
+            <a:lstStyle/>
+            <a:p>
+              <a:pPr algn="ctr"/>
+              <a:r>
+                <a:rPr lang="en-US" sz="1200" b="1" dirty="0">
+                  <a:latin typeface="Arial" pitchFamily="34" charset="0"/>
+                  <a:cs typeface="Arial" pitchFamily="34" charset="0"/>
+                </a:rPr>
+                <a:t>ROC 1, TS 2, S 2</a:t>
+              </a:r>
+            </a:p>
+          </p:txBody>
+        </p:sp>
+      </p:grpSp>
+      <p:grpSp>
+        <p:nvGrpSpPr>
+          <p:cNvPr id="67" name="Group 66">
+            <a:extLst>
+              <a:ext uri="{FF2B5EF4-FFF2-40B4-BE49-F238E27FC236}">
+                <a16:creationId xmlns:a16="http://schemas.microsoft.com/office/drawing/2014/main" id="{5BB00748-3145-4448-90F8-F2BCC6C39FA6}"/>
+              </a:ext>
+            </a:extLst>
+          </p:cNvPr>
+          <p:cNvGrpSpPr/>
+          <p:nvPr/>
+        </p:nvGrpSpPr>
+        <p:grpSpPr>
+          <a:xfrm>
+            <a:off x="1236774" y="1937607"/>
+            <a:ext cx="1469450" cy="547686"/>
+            <a:chOff x="1136470" y="3100384"/>
+            <a:chExt cx="1469450" cy="547686"/>
+          </a:xfrm>
+        </p:grpSpPr>
+        <p:sp>
+          <p:nvSpPr>
+            <p:cNvPr id="68" name="TextBox 67">
+              <a:extLst>
+                <a:ext uri="{FF2B5EF4-FFF2-40B4-BE49-F238E27FC236}">
+                  <a16:creationId xmlns:a16="http://schemas.microsoft.com/office/drawing/2014/main" id="{992ED400-5BE7-6B46-9631-A31DA62CBFF7}"/>
+                </a:ext>
+              </a:extLst>
+            </p:cNvPr>
+            <p:cNvSpPr txBox="1"/>
+            <p:nvPr/>
+          </p:nvSpPr>
+          <p:spPr>
+            <a:xfrm>
+              <a:off x="1136470" y="3371071"/>
+              <a:ext cx="1469450" cy="276999"/>
+            </a:xfrm>
+            <a:prstGeom prst="rect">
+              <a:avLst/>
+            </a:prstGeom>
+            <a:solidFill>
+              <a:schemeClr val="accent1">
+                <a:lumMod val="20000"/>
+                <a:lumOff val="80000"/>
+              </a:schemeClr>
+            </a:solidFill>
+            <a:ln w="19050">
+              <a:solidFill>
+                <a:schemeClr val="tx1"/>
+              </a:solidFill>
+            </a:ln>
+          </p:spPr>
+          <p:txBody>
+            <a:bodyPr wrap="square" rtlCol="0">
+              <a:spAutoFit/>
+            </a:bodyPr>
+            <a:lstStyle/>
+            <a:p>
+              <a:pPr algn="ctr"/>
+              <a:r>
+                <a:rPr lang="en-US" sz="1200" b="1" dirty="0">
+                  <a:latin typeface="Arial" pitchFamily="34" charset="0"/>
+                  <a:cs typeface="Arial" pitchFamily="34" charset="0"/>
+                </a:rPr>
+                <a:t>ROC 1, TS 1, S 1</a:t>
+              </a:r>
+            </a:p>
+          </p:txBody>
+        </p:sp>
+        <p:sp>
+          <p:nvSpPr>
+            <p:cNvPr id="70" name="TextBox 69">
+              <a:extLst>
+                <a:ext uri="{FF2B5EF4-FFF2-40B4-BE49-F238E27FC236}">
+                  <a16:creationId xmlns:a16="http://schemas.microsoft.com/office/drawing/2014/main" id="{EFF1404C-4577-BE45-9D03-20FD4BA0703E}"/>
+                </a:ext>
+              </a:extLst>
+            </p:cNvPr>
+            <p:cNvSpPr txBox="1"/>
+            <p:nvPr/>
+          </p:nvSpPr>
+          <p:spPr>
+            <a:xfrm>
+              <a:off x="1136470" y="3100384"/>
+              <a:ext cx="1469450" cy="276999"/>
+            </a:xfrm>
+            <a:prstGeom prst="rect">
+              <a:avLst/>
+            </a:prstGeom>
+            <a:solidFill>
+              <a:schemeClr val="accent1">
+                <a:lumMod val="20000"/>
+                <a:lumOff val="80000"/>
+              </a:schemeClr>
+            </a:solidFill>
+            <a:ln w="19050">
+              <a:solidFill>
+                <a:schemeClr val="tx1"/>
+              </a:solidFill>
+            </a:ln>
+          </p:spPr>
+          <p:txBody>
+            <a:bodyPr wrap="square" rtlCol="0">
+              <a:spAutoFit/>
+            </a:bodyPr>
+            <a:lstStyle/>
+            <a:p>
+              <a:pPr algn="ctr"/>
+              <a:r>
+                <a:rPr lang="en-US" sz="1200" b="1" dirty="0">
+                  <a:latin typeface="Arial" pitchFamily="34" charset="0"/>
+                  <a:cs typeface="Arial" pitchFamily="34" charset="0"/>
+                </a:rPr>
+                <a:t>ROC 1, TS 1, S 2</a:t>
+              </a:r>
+            </a:p>
+          </p:txBody>
+        </p:sp>
+      </p:grpSp>
+      <p:grpSp>
+        <p:nvGrpSpPr>
+          <p:cNvPr id="71" name="Group 70">
+            <a:extLst>
+              <a:ext uri="{FF2B5EF4-FFF2-40B4-BE49-F238E27FC236}">
+                <a16:creationId xmlns:a16="http://schemas.microsoft.com/office/drawing/2014/main" id="{324F6A45-B603-4F43-80B0-B3E9BEDA7659}"/>
+              </a:ext>
+            </a:extLst>
+          </p:cNvPr>
+          <p:cNvGrpSpPr/>
+          <p:nvPr/>
+        </p:nvGrpSpPr>
+        <p:grpSpPr>
+          <a:xfrm>
+            <a:off x="1236774" y="634017"/>
+            <a:ext cx="1469450" cy="547686"/>
+            <a:chOff x="1136470" y="3100384"/>
+            <a:chExt cx="1469450" cy="547686"/>
+          </a:xfrm>
+        </p:grpSpPr>
+        <p:sp>
+          <p:nvSpPr>
+            <p:cNvPr id="72" name="TextBox 71">
+              <a:extLst>
+                <a:ext uri="{FF2B5EF4-FFF2-40B4-BE49-F238E27FC236}">
+                  <a16:creationId xmlns:a16="http://schemas.microsoft.com/office/drawing/2014/main" id="{3C4602A9-C37A-7543-84AD-4E41E402E61F}"/>
+                </a:ext>
+              </a:extLst>
+            </p:cNvPr>
+            <p:cNvSpPr txBox="1"/>
+            <p:nvPr/>
+          </p:nvSpPr>
+          <p:spPr>
+            <a:xfrm>
+              <a:off x="1136470" y="3371071"/>
+              <a:ext cx="1469450" cy="276999"/>
+            </a:xfrm>
+            <a:prstGeom prst="rect">
+              <a:avLst/>
+            </a:prstGeom>
+            <a:solidFill>
+              <a:schemeClr val="accent6">
+                <a:lumMod val="20000"/>
+                <a:lumOff val="80000"/>
+              </a:schemeClr>
+            </a:solidFill>
+            <a:ln w="19050">
+              <a:solidFill>
+                <a:schemeClr val="tx1"/>
+              </a:solidFill>
+            </a:ln>
+          </p:spPr>
+          <p:txBody>
+            <a:bodyPr wrap="square" rtlCol="0">
+              <a:spAutoFit/>
+            </a:bodyPr>
+            <a:lstStyle/>
+            <a:p>
+              <a:pPr algn="ctr"/>
+              <a:r>
+                <a:rPr lang="en-US" sz="1200" b="1" dirty="0">
+                  <a:latin typeface="Arial" pitchFamily="34" charset="0"/>
+                  <a:cs typeface="Arial" pitchFamily="34" charset="0"/>
+                </a:rPr>
+                <a:t>ROC 1, TS 3, S 1</a:t>
+              </a:r>
+            </a:p>
+          </p:txBody>
+        </p:sp>
+        <p:sp>
+          <p:nvSpPr>
+            <p:cNvPr id="74" name="TextBox 73">
+              <a:extLst>
+                <a:ext uri="{FF2B5EF4-FFF2-40B4-BE49-F238E27FC236}">
+                  <a16:creationId xmlns:a16="http://schemas.microsoft.com/office/drawing/2014/main" id="{152EC84E-5D50-D041-AF04-1657019BE5CE}"/>
+                </a:ext>
+              </a:extLst>
+            </p:cNvPr>
+            <p:cNvSpPr txBox="1"/>
+            <p:nvPr/>
+          </p:nvSpPr>
+          <p:spPr>
+            <a:xfrm>
+              <a:off x="1136470" y="3100384"/>
+              <a:ext cx="1469450" cy="276999"/>
+            </a:xfrm>
+            <a:prstGeom prst="rect">
+              <a:avLst/>
+            </a:prstGeom>
+            <a:solidFill>
+              <a:schemeClr val="accent6">
+                <a:lumMod val="20000"/>
+                <a:lumOff val="80000"/>
+              </a:schemeClr>
+            </a:solidFill>
+            <a:ln w="19050">
+              <a:solidFill>
+                <a:schemeClr val="tx1"/>
+              </a:solidFill>
+            </a:ln>
+          </p:spPr>
+          <p:txBody>
+            <a:bodyPr wrap="square" rtlCol="0">
+              <a:spAutoFit/>
+            </a:bodyPr>
+            <a:lstStyle/>
+            <a:p>
+              <a:pPr algn="ctr"/>
+              <a:r>
+                <a:rPr lang="en-US" sz="1200" b="1" dirty="0">
+                  <a:latin typeface="Arial" pitchFamily="34" charset="0"/>
+                  <a:cs typeface="Arial" pitchFamily="34" charset="0"/>
+                </a:rPr>
+                <a:t>ROC 1, TS 3, S 2</a:t>
+              </a:r>
+            </a:p>
+          </p:txBody>
+        </p:sp>
+      </p:grpSp>
+      <p:sp>
+        <p:nvSpPr>
+          <p:cNvPr id="75" name="TextBox 74">
+            <a:extLst>
+              <a:ext uri="{FF2B5EF4-FFF2-40B4-BE49-F238E27FC236}">
+                <a16:creationId xmlns:a16="http://schemas.microsoft.com/office/drawing/2014/main" id="{F868BDD9-351D-A044-95FE-A8182466FF96}"/>
+              </a:ext>
+            </a:extLst>
+          </p:cNvPr>
+          <p:cNvSpPr txBox="1"/>
+          <p:nvPr/>
+        </p:nvSpPr>
+        <p:spPr>
+          <a:xfrm>
+            <a:off x="3568373" y="1279261"/>
+            <a:ext cx="1469450" cy="276999"/>
+          </a:xfrm>
+          <a:prstGeom prst="rect">
+            <a:avLst/>
+          </a:prstGeom>
+          <a:solidFill>
+            <a:schemeClr val="accent4">
+              <a:lumMod val="20000"/>
+              <a:lumOff val="80000"/>
+            </a:schemeClr>
+          </a:solidFill>
+          <a:ln w="19050">
+            <a:solidFill>
+              <a:schemeClr val="tx1"/>
+            </a:solidFill>
+          </a:ln>
+        </p:spPr>
+        <p:txBody>
+          <a:bodyPr wrap="square" rtlCol="0">
+            <a:spAutoFit/>
+          </a:bodyPr>
+          <a:lstStyle/>
+          <a:p>
+            <a:pPr algn="ctr"/>
+            <a:r>
+              <a:rPr lang="en-US" sz="1200" b="1" dirty="0">
+                <a:latin typeface="Arial" pitchFamily="34" charset="0"/>
+                <a:cs typeface="Arial" pitchFamily="34" charset="0"/>
+              </a:rPr>
+              <a:t>ROC 2, TS 2, S 1</a:t>
+            </a:r>
+          </a:p>
+        </p:txBody>
+      </p:sp>
+      <p:sp>
+        <p:nvSpPr>
+          <p:cNvPr id="76" name="TextBox 75">
+            <a:extLst>
+              <a:ext uri="{FF2B5EF4-FFF2-40B4-BE49-F238E27FC236}">
+                <a16:creationId xmlns:a16="http://schemas.microsoft.com/office/drawing/2014/main" id="{6EB57515-C843-E04A-81FA-D6AFB6FC72C8}"/>
+              </a:ext>
+            </a:extLst>
+          </p:cNvPr>
+          <p:cNvSpPr txBox="1"/>
+          <p:nvPr/>
+        </p:nvSpPr>
+        <p:spPr>
+          <a:xfrm>
+            <a:off x="3568373" y="1935920"/>
             <a:ext cx="1469450" cy="276999"/>
           </a:xfrm>
           <a:prstGeom prst="rect">
@@ -13245,34 +13450,41 @@
           <a:p>
             <a:pPr algn="ctr"/>
             <a:r>
-              <a:rPr lang="en-US" sz="1200" b="1" dirty="0" smtClean="0">
+              <a:rPr lang="en-US" sz="1200" b="1" dirty="0">
                 <a:latin typeface="Arial" pitchFamily="34" charset="0"/>
                 <a:cs typeface="Arial" pitchFamily="34" charset="0"/>
               </a:rPr>
               <a:t>ROC 2, TS 1, S 1</a:t>
             </a:r>
-            <a:endParaRPr lang="en-US" sz="1200" b="1" dirty="0">
-              <a:latin typeface="Arial" pitchFamily="34" charset="0"/>
-              <a:cs typeface="Arial" pitchFamily="34" charset="0"/>
-            </a:endParaRPr>
           </a:p>
         </p:txBody>
       </p:sp>
       <p:sp>
         <p:nvSpPr>
-          <p:cNvPr id="5" name="TextBox 4"/>
+          <p:cNvPr id="77" name="TextBox 76">
+            <a:extLst>
+              <a:ext uri="{FF2B5EF4-FFF2-40B4-BE49-F238E27FC236}">
+                <a16:creationId xmlns:a16="http://schemas.microsoft.com/office/drawing/2014/main" id="{7713C110-38B7-E541-BD90-08129985C1DB}"/>
+              </a:ext>
+            </a:extLst>
+          </p:cNvPr>
           <p:cNvSpPr txBox="1"/>
           <p:nvPr/>
         </p:nvSpPr>
         <p:spPr>
           <a:xfrm>
-            <a:off x="988744" y="1001603"/>
-            <a:ext cx="7423736" cy="276999"/>
+            <a:off x="3568373" y="632330"/>
+            <a:ext cx="1469450" cy="276999"/>
           </a:xfrm>
           <a:prstGeom prst="rect">
             <a:avLst/>
           </a:prstGeom>
-          <a:noFill/>
+          <a:solidFill>
+            <a:schemeClr val="accent6">
+              <a:lumMod val="20000"/>
+              <a:lumOff val="80000"/>
+            </a:schemeClr>
+          </a:solidFill>
           <a:ln w="19050">
             <a:solidFill>
               <a:schemeClr val="tx1"/>
@@ -13287,29 +13499,392 @@
           <a:p>
             <a:pPr algn="ctr"/>
             <a:r>
-              <a:rPr lang="en-US" sz="1200" b="1" dirty="0" smtClean="0">
+              <a:rPr lang="en-US" sz="1200" b="1" dirty="0">
                 <a:latin typeface="Arial" pitchFamily="34" charset="0"/>
                 <a:cs typeface="Arial" pitchFamily="34" charset="0"/>
               </a:rPr>
-              <a:t>Time Slice Sorting Thread</a:t>
+              <a:t>ROC 2, TS 3, S 1</a:t>
             </a:r>
-            <a:endParaRPr lang="en-US" sz="800" b="1" dirty="0" smtClean="0">
-              <a:latin typeface="Arial" pitchFamily="34" charset="0"/>
-              <a:cs typeface="Arial" pitchFamily="34" charset="0"/>
-            </a:endParaRPr>
           </a:p>
         </p:txBody>
       </p:sp>
+      <p:grpSp>
+        <p:nvGrpSpPr>
+          <p:cNvPr id="78" name="Group 77">
+            <a:extLst>
+              <a:ext uri="{FF2B5EF4-FFF2-40B4-BE49-F238E27FC236}">
+                <a16:creationId xmlns:a16="http://schemas.microsoft.com/office/drawing/2014/main" id="{655EE58E-62BC-AA44-8617-4D4A92AEDC63}"/>
+              </a:ext>
+            </a:extLst>
+          </p:cNvPr>
+          <p:cNvGrpSpPr/>
+          <p:nvPr/>
+        </p:nvGrpSpPr>
+        <p:grpSpPr>
+          <a:xfrm>
+            <a:off x="5897549" y="1280952"/>
+            <a:ext cx="1469450" cy="547686"/>
+            <a:chOff x="1136470" y="3100384"/>
+            <a:chExt cx="1469450" cy="547686"/>
+          </a:xfrm>
+        </p:grpSpPr>
+        <p:sp>
+          <p:nvSpPr>
+            <p:cNvPr id="79" name="TextBox 78">
+              <a:extLst>
+                <a:ext uri="{FF2B5EF4-FFF2-40B4-BE49-F238E27FC236}">
+                  <a16:creationId xmlns:a16="http://schemas.microsoft.com/office/drawing/2014/main" id="{0492D90D-4EB2-9A45-B627-F9AA8A16114E}"/>
+                </a:ext>
+              </a:extLst>
+            </p:cNvPr>
+            <p:cNvSpPr txBox="1"/>
+            <p:nvPr/>
+          </p:nvSpPr>
+          <p:spPr>
+            <a:xfrm>
+              <a:off x="1136470" y="3371071"/>
+              <a:ext cx="1469450" cy="276999"/>
+            </a:xfrm>
+            <a:prstGeom prst="rect">
+              <a:avLst/>
+            </a:prstGeom>
+            <a:solidFill>
+              <a:schemeClr val="accent4">
+                <a:lumMod val="20000"/>
+                <a:lumOff val="80000"/>
+              </a:schemeClr>
+            </a:solidFill>
+            <a:ln w="19050">
+              <a:solidFill>
+                <a:schemeClr val="tx1"/>
+              </a:solidFill>
+            </a:ln>
+          </p:spPr>
+          <p:txBody>
+            <a:bodyPr wrap="square" rtlCol="0">
+              <a:spAutoFit/>
+            </a:bodyPr>
+            <a:lstStyle/>
+            <a:p>
+              <a:pPr algn="ctr"/>
+              <a:r>
+                <a:rPr lang="en-US" sz="1200" b="1" dirty="0">
+                  <a:latin typeface="Arial" pitchFamily="34" charset="0"/>
+                  <a:cs typeface="Arial" pitchFamily="34" charset="0"/>
+                </a:rPr>
+                <a:t>ROC 3, TS 2, S 1</a:t>
+              </a:r>
+            </a:p>
+          </p:txBody>
+        </p:sp>
+        <p:sp>
+          <p:nvSpPr>
+            <p:cNvPr id="80" name="TextBox 79">
+              <a:extLst>
+                <a:ext uri="{FF2B5EF4-FFF2-40B4-BE49-F238E27FC236}">
+                  <a16:creationId xmlns:a16="http://schemas.microsoft.com/office/drawing/2014/main" id="{A78DB41C-0C0A-EC48-92A5-432ED0645D96}"/>
+                </a:ext>
+              </a:extLst>
+            </p:cNvPr>
+            <p:cNvSpPr txBox="1"/>
+            <p:nvPr/>
+          </p:nvSpPr>
+          <p:spPr>
+            <a:xfrm>
+              <a:off x="1136470" y="3100384"/>
+              <a:ext cx="1469450" cy="276999"/>
+            </a:xfrm>
+            <a:prstGeom prst="rect">
+              <a:avLst/>
+            </a:prstGeom>
+            <a:solidFill>
+              <a:schemeClr val="accent4">
+                <a:lumMod val="20000"/>
+                <a:lumOff val="80000"/>
+              </a:schemeClr>
+            </a:solidFill>
+            <a:ln w="19050">
+              <a:solidFill>
+                <a:schemeClr val="tx1"/>
+              </a:solidFill>
+            </a:ln>
+          </p:spPr>
+          <p:txBody>
+            <a:bodyPr wrap="square" rtlCol="0">
+              <a:spAutoFit/>
+            </a:bodyPr>
+            <a:lstStyle/>
+            <a:p>
+              <a:pPr algn="ctr"/>
+              <a:r>
+                <a:rPr lang="en-US" sz="1200" b="1" dirty="0">
+                  <a:latin typeface="Arial" pitchFamily="34" charset="0"/>
+                  <a:cs typeface="Arial" pitchFamily="34" charset="0"/>
+                </a:rPr>
+                <a:t>ROC 3, TS 2, S 2</a:t>
+              </a:r>
+            </a:p>
+          </p:txBody>
+        </p:sp>
+      </p:grpSp>
+      <p:grpSp>
+        <p:nvGrpSpPr>
+          <p:cNvPr id="81" name="Group 80">
+            <a:extLst>
+              <a:ext uri="{FF2B5EF4-FFF2-40B4-BE49-F238E27FC236}">
+                <a16:creationId xmlns:a16="http://schemas.microsoft.com/office/drawing/2014/main" id="{9BA2C74B-4ADF-134A-92EB-2687AC6DCE55}"/>
+              </a:ext>
+            </a:extLst>
+          </p:cNvPr>
+          <p:cNvGrpSpPr/>
+          <p:nvPr/>
+        </p:nvGrpSpPr>
+        <p:grpSpPr>
+          <a:xfrm>
+            <a:off x="5897549" y="1937611"/>
+            <a:ext cx="1469450" cy="547686"/>
+            <a:chOff x="1136470" y="3100384"/>
+            <a:chExt cx="1469450" cy="547686"/>
+          </a:xfrm>
+        </p:grpSpPr>
+        <p:sp>
+          <p:nvSpPr>
+            <p:cNvPr id="82" name="TextBox 81">
+              <a:extLst>
+                <a:ext uri="{FF2B5EF4-FFF2-40B4-BE49-F238E27FC236}">
+                  <a16:creationId xmlns:a16="http://schemas.microsoft.com/office/drawing/2014/main" id="{41FC2AFC-B786-FD45-B52A-E38EB4AD8AAD}"/>
+                </a:ext>
+              </a:extLst>
+            </p:cNvPr>
+            <p:cNvSpPr txBox="1"/>
+            <p:nvPr/>
+          </p:nvSpPr>
+          <p:spPr>
+            <a:xfrm>
+              <a:off x="1136470" y="3371071"/>
+              <a:ext cx="1469450" cy="276999"/>
+            </a:xfrm>
+            <a:prstGeom prst="rect">
+              <a:avLst/>
+            </a:prstGeom>
+            <a:solidFill>
+              <a:schemeClr val="accent1">
+                <a:lumMod val="20000"/>
+                <a:lumOff val="80000"/>
+              </a:schemeClr>
+            </a:solidFill>
+            <a:ln w="19050">
+              <a:solidFill>
+                <a:schemeClr val="tx1"/>
+              </a:solidFill>
+            </a:ln>
+          </p:spPr>
+          <p:txBody>
+            <a:bodyPr wrap="square" rtlCol="0">
+              <a:spAutoFit/>
+            </a:bodyPr>
+            <a:lstStyle/>
+            <a:p>
+              <a:pPr algn="ctr"/>
+              <a:r>
+                <a:rPr lang="en-US" sz="1200" b="1" dirty="0">
+                  <a:latin typeface="Arial" pitchFamily="34" charset="0"/>
+                  <a:cs typeface="Arial" pitchFamily="34" charset="0"/>
+                </a:rPr>
+                <a:t>ROC 3, TS 1, S 1</a:t>
+              </a:r>
+            </a:p>
+          </p:txBody>
+        </p:sp>
+        <p:sp>
+          <p:nvSpPr>
+            <p:cNvPr id="83" name="TextBox 82">
+              <a:extLst>
+                <a:ext uri="{FF2B5EF4-FFF2-40B4-BE49-F238E27FC236}">
+                  <a16:creationId xmlns:a16="http://schemas.microsoft.com/office/drawing/2014/main" id="{EF4A209D-6DCD-224D-867B-302C34CF994B}"/>
+                </a:ext>
+              </a:extLst>
+            </p:cNvPr>
+            <p:cNvSpPr txBox="1"/>
+            <p:nvPr/>
+          </p:nvSpPr>
+          <p:spPr>
+            <a:xfrm>
+              <a:off x="1136470" y="3100384"/>
+              <a:ext cx="1469450" cy="276999"/>
+            </a:xfrm>
+            <a:prstGeom prst="rect">
+              <a:avLst/>
+            </a:prstGeom>
+            <a:solidFill>
+              <a:schemeClr val="accent1">
+                <a:lumMod val="20000"/>
+                <a:lumOff val="80000"/>
+              </a:schemeClr>
+            </a:solidFill>
+            <a:ln w="19050">
+              <a:solidFill>
+                <a:schemeClr val="tx1"/>
+              </a:solidFill>
+            </a:ln>
+          </p:spPr>
+          <p:txBody>
+            <a:bodyPr wrap="square" rtlCol="0">
+              <a:spAutoFit/>
+            </a:bodyPr>
+            <a:lstStyle/>
+            <a:p>
+              <a:pPr algn="ctr"/>
+              <a:r>
+                <a:rPr lang="en-US" sz="1200" b="1" dirty="0">
+                  <a:latin typeface="Arial" pitchFamily="34" charset="0"/>
+                  <a:cs typeface="Arial" pitchFamily="34" charset="0"/>
+                </a:rPr>
+                <a:t>ROC 3, TS 1, S 2</a:t>
+              </a:r>
+            </a:p>
+          </p:txBody>
+        </p:sp>
+      </p:grpSp>
+      <p:grpSp>
+        <p:nvGrpSpPr>
+          <p:cNvPr id="84" name="Group 83">
+            <a:extLst>
+              <a:ext uri="{FF2B5EF4-FFF2-40B4-BE49-F238E27FC236}">
+                <a16:creationId xmlns:a16="http://schemas.microsoft.com/office/drawing/2014/main" id="{C42386D0-BB60-024A-A480-F6509A01602D}"/>
+              </a:ext>
+            </a:extLst>
+          </p:cNvPr>
+          <p:cNvGrpSpPr/>
+          <p:nvPr/>
+        </p:nvGrpSpPr>
+        <p:grpSpPr>
+          <a:xfrm>
+            <a:off x="5897549" y="634021"/>
+            <a:ext cx="1469450" cy="547686"/>
+            <a:chOff x="1136470" y="3100384"/>
+            <a:chExt cx="1469450" cy="547686"/>
+          </a:xfrm>
+        </p:grpSpPr>
+        <p:sp>
+          <p:nvSpPr>
+            <p:cNvPr id="85" name="TextBox 84">
+              <a:extLst>
+                <a:ext uri="{FF2B5EF4-FFF2-40B4-BE49-F238E27FC236}">
+                  <a16:creationId xmlns:a16="http://schemas.microsoft.com/office/drawing/2014/main" id="{C81BF844-B114-CB4F-8F7C-6081E5421103}"/>
+                </a:ext>
+              </a:extLst>
+            </p:cNvPr>
+            <p:cNvSpPr txBox="1"/>
+            <p:nvPr/>
+          </p:nvSpPr>
+          <p:spPr>
+            <a:xfrm>
+              <a:off x="1136470" y="3371071"/>
+              <a:ext cx="1469450" cy="276999"/>
+            </a:xfrm>
+            <a:prstGeom prst="rect">
+              <a:avLst/>
+            </a:prstGeom>
+            <a:solidFill>
+              <a:schemeClr val="accent6">
+                <a:lumMod val="20000"/>
+                <a:lumOff val="80000"/>
+              </a:schemeClr>
+            </a:solidFill>
+            <a:ln w="19050">
+              <a:solidFill>
+                <a:schemeClr val="tx1"/>
+              </a:solidFill>
+            </a:ln>
+          </p:spPr>
+          <p:txBody>
+            <a:bodyPr wrap="square" rtlCol="0">
+              <a:spAutoFit/>
+            </a:bodyPr>
+            <a:lstStyle/>
+            <a:p>
+              <a:pPr algn="ctr"/>
+              <a:r>
+                <a:rPr lang="en-US" sz="1200" b="1" dirty="0">
+                  <a:latin typeface="Arial" pitchFamily="34" charset="0"/>
+                  <a:cs typeface="Arial" pitchFamily="34" charset="0"/>
+                </a:rPr>
+                <a:t>ROC 3, TS 3, S 1</a:t>
+              </a:r>
+            </a:p>
+          </p:txBody>
+        </p:sp>
+        <p:sp>
+          <p:nvSpPr>
+            <p:cNvPr id="86" name="TextBox 85">
+              <a:extLst>
+                <a:ext uri="{FF2B5EF4-FFF2-40B4-BE49-F238E27FC236}">
+                  <a16:creationId xmlns:a16="http://schemas.microsoft.com/office/drawing/2014/main" id="{40FBD104-45EE-2F4C-8EAE-B5695F4465D5}"/>
+                </a:ext>
+              </a:extLst>
+            </p:cNvPr>
+            <p:cNvSpPr txBox="1"/>
+            <p:nvPr/>
+          </p:nvSpPr>
+          <p:spPr>
+            <a:xfrm>
+              <a:off x="1136470" y="3100384"/>
+              <a:ext cx="1469450" cy="276999"/>
+            </a:xfrm>
+            <a:prstGeom prst="rect">
+              <a:avLst/>
+            </a:prstGeom>
+            <a:solidFill>
+              <a:schemeClr val="accent6">
+                <a:lumMod val="20000"/>
+                <a:lumOff val="80000"/>
+              </a:schemeClr>
+            </a:solidFill>
+            <a:ln w="19050">
+              <a:solidFill>
+                <a:schemeClr val="tx1"/>
+              </a:solidFill>
+            </a:ln>
+          </p:spPr>
+          <p:txBody>
+            <a:bodyPr wrap="square" rtlCol="0">
+              <a:spAutoFit/>
+            </a:bodyPr>
+            <a:lstStyle/>
+            <a:p>
+              <a:pPr algn="ctr"/>
+              <a:r>
+                <a:rPr lang="en-US" sz="1200" b="1" dirty="0">
+                  <a:latin typeface="Arial" pitchFamily="34" charset="0"/>
+                  <a:cs typeface="Arial" pitchFamily="34" charset="0"/>
+                </a:rPr>
+                <a:t>ROC 3, TS 3, S 2</a:t>
+              </a:r>
+            </a:p>
+          </p:txBody>
+        </p:sp>
+      </p:grpSp>
       <p:cxnSp>
         <p:nvCxnSpPr>
-          <p:cNvPr id="6" name="Straight Arrow Connector 5"/>
-          <p:cNvCxnSpPr/>
+          <p:cNvPr id="88" name="Straight Arrow Connector 87">
+            <a:extLst>
+              <a:ext uri="{FF2B5EF4-FFF2-40B4-BE49-F238E27FC236}">
+                <a16:creationId xmlns:a16="http://schemas.microsoft.com/office/drawing/2014/main" id="{16EF3AAB-F9AC-DE40-9F39-BB0F25B6984D}"/>
+              </a:ext>
+            </a:extLst>
+          </p:cNvPr>
+          <p:cNvCxnSpPr>
+            <a:cxnSpLocks/>
+            <a:stCxn id="148" idx="2"/>
+            <a:endCxn id="87" idx="1"/>
+          </p:cNvCxnSpPr>
           <p:nvPr/>
         </p:nvCxnSpPr>
         <p:spPr>
           <a:xfrm>
-            <a:off x="1390772" y="476617"/>
-            <a:ext cx="771691" cy="485441"/>
+            <a:off x="1968410" y="2577825"/>
+            <a:ext cx="814061" cy="547290"/>
           </a:xfrm>
           <a:prstGeom prst="straightConnector1">
             <a:avLst/>
@@ -13338,14 +13913,24 @@
       </p:cxnSp>
       <p:cxnSp>
         <p:nvCxnSpPr>
-          <p:cNvPr id="7" name="Straight Arrow Connector 6"/>
-          <p:cNvCxnSpPr/>
+          <p:cNvPr id="89" name="Straight Arrow Connector 88">
+            <a:extLst>
+              <a:ext uri="{FF2B5EF4-FFF2-40B4-BE49-F238E27FC236}">
+                <a16:creationId xmlns:a16="http://schemas.microsoft.com/office/drawing/2014/main" id="{CFAD823C-0CB4-E840-BDA7-523CC4EEEBB9}"/>
+              </a:ext>
+            </a:extLst>
+          </p:cNvPr>
+          <p:cNvCxnSpPr>
+            <a:cxnSpLocks/>
+            <a:stCxn id="149" idx="2"/>
+            <a:endCxn id="87" idx="0"/>
+          </p:cNvCxnSpPr>
           <p:nvPr/>
         </p:nvCxnSpPr>
         <p:spPr>
-          <a:xfrm>
-            <a:off x="4441849" y="479630"/>
-            <a:ext cx="0" cy="521972"/>
+          <a:xfrm flipH="1">
+            <a:off x="4295721" y="2584247"/>
+            <a:ext cx="4443" cy="402368"/>
           </a:xfrm>
           <a:prstGeom prst="straightConnector1">
             <a:avLst/>
@@ -13374,14 +13959,23 @@
       </p:cxnSp>
       <p:cxnSp>
         <p:nvCxnSpPr>
-          <p:cNvPr id="8" name="Straight Arrow Connector 7"/>
-          <p:cNvCxnSpPr/>
+          <p:cNvPr id="90" name="Straight Arrow Connector 89">
+            <a:extLst>
+              <a:ext uri="{FF2B5EF4-FFF2-40B4-BE49-F238E27FC236}">
+                <a16:creationId xmlns:a16="http://schemas.microsoft.com/office/drawing/2014/main" id="{D312D2C5-582E-ED44-BFC7-312788D62D93}"/>
+              </a:ext>
+            </a:extLst>
+          </p:cNvPr>
+          <p:cNvCxnSpPr>
+            <a:cxnSpLocks/>
+            <a:endCxn id="87" idx="3"/>
+          </p:cNvCxnSpPr>
           <p:nvPr/>
         </p:nvCxnSpPr>
         <p:spPr>
           <a:xfrm flipH="1">
-            <a:off x="6146114" y="503048"/>
-            <a:ext cx="952248" cy="455246"/>
+            <a:off x="5808971" y="2577583"/>
+            <a:ext cx="933342" cy="547532"/>
           </a:xfrm>
           <a:prstGeom prst="straightConnector1">
             <a:avLst/>
@@ -13410,42 +14004,2118 @@
       </p:cxnSp>
       <p:grpSp>
         <p:nvGrpSpPr>
-          <p:cNvPr id="9" name="Group 8"/>
+          <p:cNvPr id="175" name="Group 174">
+            <a:extLst>
+              <a:ext uri="{FF2B5EF4-FFF2-40B4-BE49-F238E27FC236}">
+                <a16:creationId xmlns:a16="http://schemas.microsoft.com/office/drawing/2014/main" id="{8502F2F0-FAB0-9943-BABB-7EC590B6ECFD}"/>
+              </a:ext>
+            </a:extLst>
+          </p:cNvPr>
           <p:cNvGrpSpPr/>
           <p:nvPr/>
         </p:nvGrpSpPr>
         <p:grpSpPr>
           <a:xfrm>
-            <a:off x="2481221" y="4214668"/>
-            <a:ext cx="1623060" cy="1623060"/>
-            <a:chOff x="2633980" y="723900"/>
-            <a:chExt cx="1623060" cy="1623060"/>
+            <a:off x="1260601" y="2986615"/>
+            <a:ext cx="4733296" cy="2503760"/>
+            <a:chOff x="1260601" y="2986615"/>
+            <a:chExt cx="4733296" cy="2503760"/>
           </a:xfrm>
         </p:grpSpPr>
+        <p:sp>
+          <p:nvSpPr>
+            <p:cNvPr id="87" name="TextBox 86">
+              <a:extLst>
+                <a:ext uri="{FF2B5EF4-FFF2-40B4-BE49-F238E27FC236}">
+                  <a16:creationId xmlns:a16="http://schemas.microsoft.com/office/drawing/2014/main" id="{D66F9FC0-7F20-8443-9031-D6DFAE0237AB}"/>
+                </a:ext>
+              </a:extLst>
+            </p:cNvPr>
+            <p:cNvSpPr txBox="1"/>
+            <p:nvPr/>
+          </p:nvSpPr>
+          <p:spPr>
+            <a:xfrm>
+              <a:off x="2782471" y="2986615"/>
+              <a:ext cx="3026500" cy="276999"/>
+            </a:xfrm>
+            <a:prstGeom prst="rect">
+              <a:avLst/>
+            </a:prstGeom>
+            <a:solidFill>
+              <a:schemeClr val="bg1"/>
+            </a:solidFill>
+            <a:ln w="19050">
+              <a:solidFill>
+                <a:schemeClr val="tx1"/>
+              </a:solidFill>
+            </a:ln>
+          </p:spPr>
+          <p:txBody>
+            <a:bodyPr wrap="square" rtlCol="0">
+              <a:spAutoFit/>
+            </a:bodyPr>
+            <a:lstStyle/>
+            <a:p>
+              <a:pPr algn="ctr"/>
+              <a:r>
+                <a:rPr lang="en-US" sz="1200" b="1" dirty="0">
+                  <a:latin typeface="Arial" pitchFamily="34" charset="0"/>
+                  <a:cs typeface="Arial" pitchFamily="34" charset="0"/>
+                </a:rPr>
+                <a:t>Time Slice Sorting Thread</a:t>
+              </a:r>
+              <a:endParaRPr lang="en-US" sz="800" b="1" dirty="0">
+                <a:latin typeface="Arial" pitchFamily="34" charset="0"/>
+                <a:cs typeface="Arial" pitchFamily="34" charset="0"/>
+              </a:endParaRPr>
+            </a:p>
+          </p:txBody>
+        </p:sp>
         <p:grpSp>
           <p:nvGrpSpPr>
-            <p:cNvPr id="10" name="Group 9"/>
+            <p:cNvPr id="92" name="Group 91">
+              <a:extLst>
+                <a:ext uri="{FF2B5EF4-FFF2-40B4-BE49-F238E27FC236}">
+                  <a16:creationId xmlns:a16="http://schemas.microsoft.com/office/drawing/2014/main" id="{B6F6A71B-0737-E543-B8C1-632BE9D1A30F}"/>
+                </a:ext>
+              </a:extLst>
+            </p:cNvPr>
             <p:cNvGrpSpPr/>
             <p:nvPr/>
           </p:nvGrpSpPr>
           <p:grpSpPr>
             <a:xfrm>
-              <a:off x="2633980" y="723900"/>
+              <a:off x="2520133" y="3378071"/>
               <a:ext cx="1623060" cy="1623060"/>
               <a:chOff x="2633980" y="723900"/>
-              <a:chExt cx="2966720" cy="2966720"/>
+              <a:chExt cx="1623060" cy="1623060"/>
+            </a:xfrm>
+          </p:grpSpPr>
+          <p:grpSp>
+            <p:nvGrpSpPr>
+              <p:cNvPr id="93" name="Group 92">
+                <a:extLst>
+                  <a:ext uri="{FF2B5EF4-FFF2-40B4-BE49-F238E27FC236}">
+                    <a16:creationId xmlns:a16="http://schemas.microsoft.com/office/drawing/2014/main" id="{CB72F791-21F2-2F46-A5CC-AB651E6F9463}"/>
+                  </a:ext>
+                </a:extLst>
+              </p:cNvPr>
+              <p:cNvGrpSpPr/>
+              <p:nvPr/>
+            </p:nvGrpSpPr>
+            <p:grpSpPr>
+              <a:xfrm>
+                <a:off x="2633980" y="723900"/>
+                <a:ext cx="1623060" cy="1623060"/>
+                <a:chOff x="2633980" y="723900"/>
+                <a:chExt cx="2966720" cy="2966720"/>
+              </a:xfrm>
+            </p:grpSpPr>
+            <p:sp>
+              <p:nvSpPr>
+                <p:cNvPr id="106" name="Oval 105">
+                  <a:extLst>
+                    <a:ext uri="{FF2B5EF4-FFF2-40B4-BE49-F238E27FC236}">
+                      <a16:creationId xmlns:a16="http://schemas.microsoft.com/office/drawing/2014/main" id="{068A7C10-46EA-1146-9E90-C03CC6739883}"/>
+                    </a:ext>
+                  </a:extLst>
+                </p:cNvPr>
+                <p:cNvSpPr/>
+                <p:nvPr/>
+              </p:nvSpPr>
+              <p:spPr>
+                <a:xfrm>
+                  <a:off x="2633980" y="723900"/>
+                  <a:ext cx="2966720" cy="2966720"/>
+                </a:xfrm>
+                <a:prstGeom prst="ellipse">
+                  <a:avLst/>
+                </a:prstGeom>
+                <a:solidFill>
+                  <a:schemeClr val="bg1"/>
+                </a:solidFill>
+                <a:ln w="25400"/>
+              </p:spPr>
+              <p:style>
+                <a:lnRef idx="2">
+                  <a:schemeClr val="accent1">
+                    <a:shade val="50000"/>
+                  </a:schemeClr>
+                </a:lnRef>
+                <a:fillRef idx="1">
+                  <a:schemeClr val="accent1"/>
+                </a:fillRef>
+                <a:effectRef idx="0">
+                  <a:schemeClr val="accent1"/>
+                </a:effectRef>
+                <a:fontRef idx="minor">
+                  <a:schemeClr val="lt1"/>
+                </a:fontRef>
+              </p:style>
+              <p:txBody>
+                <a:bodyPr rtlCol="0" anchor="ctr"/>
+                <a:lstStyle/>
+                <a:p>
+                  <a:pPr algn="ctr"/>
+                  <a:endParaRPr lang="en-US"/>
+                </a:p>
+              </p:txBody>
+            </p:sp>
+            <p:cxnSp>
+              <p:nvCxnSpPr>
+                <p:cNvPr id="107" name="Straight Connector 106">
+                  <a:extLst>
+                    <a:ext uri="{FF2B5EF4-FFF2-40B4-BE49-F238E27FC236}">
+                      <a16:creationId xmlns:a16="http://schemas.microsoft.com/office/drawing/2014/main" id="{7DA7AC51-61B7-7D4C-AFDA-FBE02A099992}"/>
+                    </a:ext>
+                  </a:extLst>
+                </p:cNvPr>
+                <p:cNvCxnSpPr>
+                  <a:cxnSpLocks/>
+                </p:cNvCxnSpPr>
+                <p:nvPr/>
+              </p:nvCxnSpPr>
+              <p:spPr>
+                <a:xfrm>
+                  <a:off x="4117340" y="723900"/>
+                  <a:ext cx="0" cy="2966720"/>
+                </a:xfrm>
+                <a:prstGeom prst="line">
+                  <a:avLst/>
+                </a:prstGeom>
+                <a:ln w="25400"/>
+              </p:spPr>
+              <p:style>
+                <a:lnRef idx="1">
+                  <a:schemeClr val="accent1"/>
+                </a:lnRef>
+                <a:fillRef idx="0">
+                  <a:schemeClr val="accent1"/>
+                </a:fillRef>
+                <a:effectRef idx="0">
+                  <a:schemeClr val="accent1"/>
+                </a:effectRef>
+                <a:fontRef idx="minor">
+                  <a:schemeClr val="tx1"/>
+                </a:fontRef>
+              </p:style>
+            </p:cxnSp>
+            <p:cxnSp>
+              <p:nvCxnSpPr>
+                <p:cNvPr id="108" name="Straight Connector 107">
+                  <a:extLst>
+                    <a:ext uri="{FF2B5EF4-FFF2-40B4-BE49-F238E27FC236}">
+                      <a16:creationId xmlns:a16="http://schemas.microsoft.com/office/drawing/2014/main" id="{9530999F-390A-D244-9243-6D5C0B3284DE}"/>
+                    </a:ext>
+                  </a:extLst>
+                </p:cNvPr>
+                <p:cNvCxnSpPr>
+                  <a:cxnSpLocks/>
+                </p:cNvCxnSpPr>
+                <p:nvPr/>
+              </p:nvCxnSpPr>
+              <p:spPr>
+                <a:xfrm>
+                  <a:off x="2633980" y="2207260"/>
+                  <a:ext cx="2966720" cy="0"/>
+                </a:xfrm>
+                <a:prstGeom prst="line">
+                  <a:avLst/>
+                </a:prstGeom>
+                <a:ln w="25400"/>
+              </p:spPr>
+              <p:style>
+                <a:lnRef idx="1">
+                  <a:schemeClr val="accent1"/>
+                </a:lnRef>
+                <a:fillRef idx="0">
+                  <a:schemeClr val="accent1"/>
+                </a:fillRef>
+                <a:effectRef idx="0">
+                  <a:schemeClr val="accent1"/>
+                </a:effectRef>
+                <a:fontRef idx="minor">
+                  <a:schemeClr val="tx1"/>
+                </a:fontRef>
+              </p:style>
+            </p:cxnSp>
+            <p:cxnSp>
+              <p:nvCxnSpPr>
+                <p:cNvPr id="109" name="Straight Connector 108">
+                  <a:extLst>
+                    <a:ext uri="{FF2B5EF4-FFF2-40B4-BE49-F238E27FC236}">
+                      <a16:creationId xmlns:a16="http://schemas.microsoft.com/office/drawing/2014/main" id="{AB16D448-4F4D-C143-91CA-CE8D469D744D}"/>
+                    </a:ext>
+                  </a:extLst>
+                </p:cNvPr>
+                <p:cNvCxnSpPr>
+                  <a:cxnSpLocks/>
+                </p:cNvCxnSpPr>
+                <p:nvPr/>
+              </p:nvCxnSpPr>
+              <p:spPr>
+                <a:xfrm>
+                  <a:off x="3068446" y="1158366"/>
+                  <a:ext cx="2097788" cy="2097788"/>
+                </a:xfrm>
+                <a:prstGeom prst="line">
+                  <a:avLst/>
+                </a:prstGeom>
+                <a:ln w="25400"/>
+              </p:spPr>
+              <p:style>
+                <a:lnRef idx="1">
+                  <a:schemeClr val="accent1"/>
+                </a:lnRef>
+                <a:fillRef idx="0">
+                  <a:schemeClr val="accent1"/>
+                </a:fillRef>
+                <a:effectRef idx="0">
+                  <a:schemeClr val="accent1"/>
+                </a:effectRef>
+                <a:fontRef idx="minor">
+                  <a:schemeClr val="tx1"/>
+                </a:fontRef>
+              </p:style>
+            </p:cxnSp>
+            <p:cxnSp>
+              <p:nvCxnSpPr>
+                <p:cNvPr id="110" name="Straight Connector 109">
+                  <a:extLst>
+                    <a:ext uri="{FF2B5EF4-FFF2-40B4-BE49-F238E27FC236}">
+                      <a16:creationId xmlns:a16="http://schemas.microsoft.com/office/drawing/2014/main" id="{CADF0251-3C82-054A-9DF5-F9EFB3B7E606}"/>
+                    </a:ext>
+                  </a:extLst>
+                </p:cNvPr>
+                <p:cNvCxnSpPr>
+                  <a:cxnSpLocks/>
+                </p:cNvCxnSpPr>
+                <p:nvPr/>
+              </p:nvCxnSpPr>
+              <p:spPr>
+                <a:xfrm flipH="1">
+                  <a:off x="3068446" y="1158366"/>
+                  <a:ext cx="2097788" cy="2097788"/>
+                </a:xfrm>
+                <a:prstGeom prst="line">
+                  <a:avLst/>
+                </a:prstGeom>
+                <a:ln w="25400"/>
+              </p:spPr>
+              <p:style>
+                <a:lnRef idx="1">
+                  <a:schemeClr val="accent1"/>
+                </a:lnRef>
+                <a:fillRef idx="0">
+                  <a:schemeClr val="accent1"/>
+                </a:fillRef>
+                <a:effectRef idx="0">
+                  <a:schemeClr val="accent1"/>
+                </a:effectRef>
+                <a:fontRef idx="minor">
+                  <a:schemeClr val="tx1"/>
+                </a:fontRef>
+              </p:style>
+            </p:cxnSp>
+            <p:cxnSp>
+              <p:nvCxnSpPr>
+                <p:cNvPr id="111" name="Straight Connector 110">
+                  <a:extLst>
+                    <a:ext uri="{FF2B5EF4-FFF2-40B4-BE49-F238E27FC236}">
+                      <a16:creationId xmlns:a16="http://schemas.microsoft.com/office/drawing/2014/main" id="{96A47661-A51B-E540-8351-99345AFFFF65}"/>
+                    </a:ext>
+                  </a:extLst>
+                </p:cNvPr>
+                <p:cNvCxnSpPr/>
+                <p:nvPr/>
+              </p:nvCxnSpPr>
+              <p:spPr>
+                <a:xfrm>
+                  <a:off x="3548380" y="855980"/>
+                  <a:ext cx="1137920" cy="2702560"/>
+                </a:xfrm>
+                <a:prstGeom prst="line">
+                  <a:avLst/>
+                </a:prstGeom>
+                <a:ln w="25400"/>
+              </p:spPr>
+              <p:style>
+                <a:lnRef idx="1">
+                  <a:schemeClr val="accent1"/>
+                </a:lnRef>
+                <a:fillRef idx="0">
+                  <a:schemeClr val="accent1"/>
+                </a:fillRef>
+                <a:effectRef idx="0">
+                  <a:schemeClr val="accent1"/>
+                </a:effectRef>
+                <a:fontRef idx="minor">
+                  <a:schemeClr val="tx1"/>
+                </a:fontRef>
+              </p:style>
+            </p:cxnSp>
+            <p:cxnSp>
+              <p:nvCxnSpPr>
+                <p:cNvPr id="112" name="Straight Connector 111">
+                  <a:extLst>
+                    <a:ext uri="{FF2B5EF4-FFF2-40B4-BE49-F238E27FC236}">
+                      <a16:creationId xmlns:a16="http://schemas.microsoft.com/office/drawing/2014/main" id="{6D12EBE3-B9CC-FF4B-85BD-1257E61DE220}"/>
+                    </a:ext>
+                  </a:extLst>
+                </p:cNvPr>
+                <p:cNvCxnSpPr/>
+                <p:nvPr/>
+              </p:nvCxnSpPr>
+              <p:spPr>
+                <a:xfrm>
+                  <a:off x="2743200" y="1656080"/>
+                  <a:ext cx="2763520" cy="1106123"/>
+                </a:xfrm>
+                <a:prstGeom prst="line">
+                  <a:avLst/>
+                </a:prstGeom>
+                <a:ln w="25400"/>
+              </p:spPr>
+              <p:style>
+                <a:lnRef idx="1">
+                  <a:schemeClr val="accent1"/>
+                </a:lnRef>
+                <a:fillRef idx="0">
+                  <a:schemeClr val="accent1"/>
+                </a:fillRef>
+                <a:effectRef idx="0">
+                  <a:schemeClr val="accent1"/>
+                </a:effectRef>
+                <a:fontRef idx="minor">
+                  <a:schemeClr val="tx1"/>
+                </a:fontRef>
+              </p:style>
+            </p:cxnSp>
+            <p:cxnSp>
+              <p:nvCxnSpPr>
+                <p:cNvPr id="113" name="Straight Connector 112">
+                  <a:extLst>
+                    <a:ext uri="{FF2B5EF4-FFF2-40B4-BE49-F238E27FC236}">
+                      <a16:creationId xmlns:a16="http://schemas.microsoft.com/office/drawing/2014/main" id="{67FF7DB5-4F07-E84C-B58C-ECC5BF6FF01B}"/>
+                    </a:ext>
+                  </a:extLst>
+                </p:cNvPr>
+                <p:cNvCxnSpPr/>
+                <p:nvPr/>
+              </p:nvCxnSpPr>
+              <p:spPr>
+                <a:xfrm flipH="1">
+                  <a:off x="3548381" y="855980"/>
+                  <a:ext cx="1131984" cy="2702560"/>
+                </a:xfrm>
+                <a:prstGeom prst="line">
+                  <a:avLst/>
+                </a:prstGeom>
+                <a:ln w="25400"/>
+              </p:spPr>
+              <p:style>
+                <a:lnRef idx="1">
+                  <a:schemeClr val="accent1"/>
+                </a:lnRef>
+                <a:fillRef idx="0">
+                  <a:schemeClr val="accent1"/>
+                </a:fillRef>
+                <a:effectRef idx="0">
+                  <a:schemeClr val="accent1"/>
+                </a:effectRef>
+                <a:fontRef idx="minor">
+                  <a:schemeClr val="tx1"/>
+                </a:fontRef>
+              </p:style>
+            </p:cxnSp>
+            <p:cxnSp>
+              <p:nvCxnSpPr>
+                <p:cNvPr id="116" name="Straight Connector 115">
+                  <a:extLst>
+                    <a:ext uri="{FF2B5EF4-FFF2-40B4-BE49-F238E27FC236}">
+                      <a16:creationId xmlns:a16="http://schemas.microsoft.com/office/drawing/2014/main" id="{3E5E1DB0-6D05-E043-893C-966E6463B1EE}"/>
+                    </a:ext>
+                  </a:extLst>
+                </p:cNvPr>
+                <p:cNvCxnSpPr/>
+                <p:nvPr/>
+              </p:nvCxnSpPr>
+              <p:spPr>
+                <a:xfrm flipV="1">
+                  <a:off x="2743200" y="1656080"/>
+                  <a:ext cx="2748280" cy="1120203"/>
+                </a:xfrm>
+                <a:prstGeom prst="line">
+                  <a:avLst/>
+                </a:prstGeom>
+                <a:ln w="25400"/>
+              </p:spPr>
+              <p:style>
+                <a:lnRef idx="1">
+                  <a:schemeClr val="accent1"/>
+                </a:lnRef>
+                <a:fillRef idx="0">
+                  <a:schemeClr val="accent1"/>
+                </a:fillRef>
+                <a:effectRef idx="0">
+                  <a:schemeClr val="accent1"/>
+                </a:effectRef>
+                <a:fontRef idx="minor">
+                  <a:schemeClr val="tx1"/>
+                </a:fontRef>
+              </p:style>
+            </p:cxnSp>
+            <p:sp>
+              <p:nvSpPr>
+                <p:cNvPr id="117" name="Oval 116">
+                  <a:extLst>
+                    <a:ext uri="{FF2B5EF4-FFF2-40B4-BE49-F238E27FC236}">
+                      <a16:creationId xmlns:a16="http://schemas.microsoft.com/office/drawing/2014/main" id="{A5378A9F-084A-634E-B6D3-847DE9A48398}"/>
+                    </a:ext>
+                  </a:extLst>
+                </p:cNvPr>
+                <p:cNvSpPr/>
+                <p:nvPr/>
+              </p:nvSpPr>
+              <p:spPr>
+                <a:xfrm>
+                  <a:off x="3368040" y="1457960"/>
+                  <a:ext cx="1498600" cy="1498600"/>
+                </a:xfrm>
+                <a:prstGeom prst="ellipse">
+                  <a:avLst/>
+                </a:prstGeom>
+                <a:solidFill>
+                  <a:srgbClr val="EEE7FF"/>
+                </a:solidFill>
+                <a:ln w="25400"/>
+              </p:spPr>
+              <p:style>
+                <a:lnRef idx="2">
+                  <a:schemeClr val="accent1">
+                    <a:shade val="50000"/>
+                  </a:schemeClr>
+                </a:lnRef>
+                <a:fillRef idx="1">
+                  <a:schemeClr val="accent1"/>
+                </a:fillRef>
+                <a:effectRef idx="0">
+                  <a:schemeClr val="accent1"/>
+                </a:effectRef>
+                <a:fontRef idx="minor">
+                  <a:schemeClr val="lt1"/>
+                </a:fontRef>
+              </p:style>
+              <p:txBody>
+                <a:bodyPr rtlCol="0" anchor="ctr"/>
+                <a:lstStyle/>
+                <a:p>
+                  <a:pPr algn="ctr"/>
+                  <a:endParaRPr lang="en-US" dirty="0"/>
+                </a:p>
+              </p:txBody>
+            </p:sp>
+          </p:grpSp>
+          <p:sp>
+            <p:nvSpPr>
+              <p:cNvPr id="95" name="TextBox 94">
+                <a:extLst>
+                  <a:ext uri="{FF2B5EF4-FFF2-40B4-BE49-F238E27FC236}">
+                    <a16:creationId xmlns:a16="http://schemas.microsoft.com/office/drawing/2014/main" id="{94ED332D-0174-6E44-B496-A14B84858831}"/>
+                  </a:ext>
+                </a:extLst>
+              </p:cNvPr>
+              <p:cNvSpPr txBox="1"/>
+              <p:nvPr/>
+            </p:nvSpPr>
+            <p:spPr>
+              <a:xfrm>
+                <a:off x="3816210" y="1718010"/>
+                <a:ext cx="301686" cy="369332"/>
+              </a:xfrm>
+              <a:prstGeom prst="rect">
+                <a:avLst/>
+              </a:prstGeom>
+              <a:noFill/>
+            </p:spPr>
+            <p:txBody>
+              <a:bodyPr wrap="none" rtlCol="0">
+                <a:spAutoFit/>
+              </a:bodyPr>
+              <a:lstStyle/>
+              <a:p>
+                <a:r>
+                  <a:rPr lang="en-US"/>
+                  <a:t>1</a:t>
+                </a:r>
+              </a:p>
+            </p:txBody>
+          </p:sp>
+          <p:sp>
+            <p:nvSpPr>
+              <p:cNvPr id="96" name="TextBox 95">
+                <a:extLst>
+                  <a:ext uri="{FF2B5EF4-FFF2-40B4-BE49-F238E27FC236}">
+                    <a16:creationId xmlns:a16="http://schemas.microsoft.com/office/drawing/2014/main" id="{D824691F-B53A-384F-AC13-D5E2D589B129}"/>
+                  </a:ext>
+                </a:extLst>
+              </p:cNvPr>
+              <p:cNvSpPr txBox="1"/>
+              <p:nvPr/>
+            </p:nvSpPr>
+            <p:spPr>
+              <a:xfrm>
+                <a:off x="3670102" y="1891738"/>
+                <a:ext cx="304800" cy="369332"/>
+              </a:xfrm>
+              <a:prstGeom prst="rect">
+                <a:avLst/>
+              </a:prstGeom>
+              <a:noFill/>
+            </p:spPr>
+            <p:txBody>
+              <a:bodyPr wrap="square" rtlCol="0">
+                <a:spAutoFit/>
+              </a:bodyPr>
+              <a:lstStyle/>
+              <a:p>
+                <a:r>
+                  <a:rPr lang="en-US"/>
+                  <a:t>1</a:t>
+                </a:r>
+              </a:p>
+            </p:txBody>
+          </p:sp>
+          <p:sp>
+            <p:nvSpPr>
+              <p:cNvPr id="97" name="TextBox 96">
+                <a:extLst>
+                  <a:ext uri="{FF2B5EF4-FFF2-40B4-BE49-F238E27FC236}">
+                    <a16:creationId xmlns:a16="http://schemas.microsoft.com/office/drawing/2014/main" id="{2CA564A9-2829-3247-9E6B-337701A7E327}"/>
+                  </a:ext>
+                </a:extLst>
+              </p:cNvPr>
+              <p:cNvSpPr txBox="1"/>
+              <p:nvPr/>
+            </p:nvSpPr>
+            <p:spPr>
+              <a:xfrm>
+                <a:off x="3941373" y="1221139"/>
+                <a:ext cx="301686" cy="369332"/>
+              </a:xfrm>
+              <a:prstGeom prst="rect">
+                <a:avLst/>
+              </a:prstGeom>
+              <a:noFill/>
+            </p:spPr>
+            <p:txBody>
+              <a:bodyPr wrap="none" rtlCol="0">
+                <a:spAutoFit/>
+              </a:bodyPr>
+              <a:lstStyle/>
+              <a:p>
+                <a:r>
+                  <a:rPr lang="en-US"/>
+                  <a:t>1</a:t>
+                </a:r>
+              </a:p>
+            </p:txBody>
+          </p:sp>
+          <p:sp>
+            <p:nvSpPr>
+              <p:cNvPr id="98" name="TextBox 97">
+                <a:extLst>
+                  <a:ext uri="{FF2B5EF4-FFF2-40B4-BE49-F238E27FC236}">
+                    <a16:creationId xmlns:a16="http://schemas.microsoft.com/office/drawing/2014/main" id="{A5344579-F84C-3D44-81B2-F0EBCB7E14BE}"/>
+                  </a:ext>
+                </a:extLst>
+              </p:cNvPr>
+              <p:cNvSpPr txBox="1"/>
+              <p:nvPr/>
+            </p:nvSpPr>
+            <p:spPr>
+              <a:xfrm>
+                <a:off x="3949404" y="1467596"/>
+                <a:ext cx="301686" cy="369332"/>
+              </a:xfrm>
+              <a:prstGeom prst="rect">
+                <a:avLst/>
+              </a:prstGeom>
+              <a:noFill/>
+            </p:spPr>
+            <p:txBody>
+              <a:bodyPr wrap="none" rtlCol="0">
+                <a:spAutoFit/>
+              </a:bodyPr>
+              <a:lstStyle/>
+              <a:p>
+                <a:r>
+                  <a:rPr lang="en-US"/>
+                  <a:t>1</a:t>
+                </a:r>
+              </a:p>
+            </p:txBody>
+          </p:sp>
+          <p:sp>
+            <p:nvSpPr>
+              <p:cNvPr id="99" name="TextBox 98">
+                <a:extLst>
+                  <a:ext uri="{FF2B5EF4-FFF2-40B4-BE49-F238E27FC236}">
+                    <a16:creationId xmlns:a16="http://schemas.microsoft.com/office/drawing/2014/main" id="{CB969972-BAD4-A441-B42E-98B41B8944AA}"/>
+                  </a:ext>
+                </a:extLst>
+              </p:cNvPr>
+              <p:cNvSpPr txBox="1"/>
+              <p:nvPr/>
+            </p:nvSpPr>
+            <p:spPr>
+              <a:xfrm>
+                <a:off x="3204494" y="752774"/>
+                <a:ext cx="301686" cy="369332"/>
+              </a:xfrm>
+              <a:prstGeom prst="rect">
+                <a:avLst/>
+              </a:prstGeom>
+              <a:noFill/>
+            </p:spPr>
+            <p:txBody>
+              <a:bodyPr wrap="none" rtlCol="0">
+                <a:spAutoFit/>
+              </a:bodyPr>
+              <a:lstStyle/>
+              <a:p>
+                <a:r>
+                  <a:rPr lang="en-US" dirty="0"/>
+                  <a:t>3</a:t>
+                </a:r>
+              </a:p>
+            </p:txBody>
+          </p:sp>
+          <p:sp>
+            <p:nvSpPr>
+              <p:cNvPr id="100" name="TextBox 99">
+                <a:extLst>
+                  <a:ext uri="{FF2B5EF4-FFF2-40B4-BE49-F238E27FC236}">
+                    <a16:creationId xmlns:a16="http://schemas.microsoft.com/office/drawing/2014/main" id="{2DE198EF-2294-6249-AB5E-07B0E163A0FD}"/>
+                  </a:ext>
+                </a:extLst>
+              </p:cNvPr>
+              <p:cNvSpPr txBox="1"/>
+              <p:nvPr/>
+            </p:nvSpPr>
+            <p:spPr>
+              <a:xfrm>
+                <a:off x="3866317" y="988053"/>
+                <a:ext cx="301686" cy="369332"/>
+              </a:xfrm>
+              <a:prstGeom prst="rect">
+                <a:avLst/>
+              </a:prstGeom>
+              <a:noFill/>
+            </p:spPr>
+            <p:txBody>
+              <a:bodyPr wrap="none" rtlCol="0">
+                <a:spAutoFit/>
+              </a:bodyPr>
+              <a:lstStyle/>
+              <a:p>
+                <a:r>
+                  <a:rPr lang="en-US"/>
+                  <a:t>1</a:t>
+                </a:r>
+              </a:p>
+            </p:txBody>
+          </p:sp>
+          <p:sp>
+            <p:nvSpPr>
+              <p:cNvPr id="101" name="TextBox 100">
+                <a:extLst>
+                  <a:ext uri="{FF2B5EF4-FFF2-40B4-BE49-F238E27FC236}">
+                    <a16:creationId xmlns:a16="http://schemas.microsoft.com/office/drawing/2014/main" id="{6A55822A-6FD3-3943-9B14-F1B061753C2D}"/>
+                  </a:ext>
+                </a:extLst>
+              </p:cNvPr>
+              <p:cNvSpPr txBox="1"/>
+              <p:nvPr/>
+            </p:nvSpPr>
+            <p:spPr>
+              <a:xfrm>
+                <a:off x="2778779" y="1020617"/>
+                <a:ext cx="301686" cy="369332"/>
+              </a:xfrm>
+              <a:prstGeom prst="rect">
+                <a:avLst/>
+              </a:prstGeom>
+              <a:noFill/>
+            </p:spPr>
+            <p:txBody>
+              <a:bodyPr wrap="none" rtlCol="0">
+                <a:spAutoFit/>
+              </a:bodyPr>
+              <a:lstStyle/>
+              <a:p>
+                <a:r>
+                  <a:rPr lang="en-US" dirty="0"/>
+                  <a:t>3</a:t>
+                </a:r>
+              </a:p>
+            </p:txBody>
+          </p:sp>
+          <p:sp>
+            <p:nvSpPr>
+              <p:cNvPr id="102" name="TextBox 101">
+                <a:extLst>
+                  <a:ext uri="{FF2B5EF4-FFF2-40B4-BE49-F238E27FC236}">
+                    <a16:creationId xmlns:a16="http://schemas.microsoft.com/office/drawing/2014/main" id="{FE971F8A-4029-6541-A4CC-81FA80B16A4F}"/>
+                  </a:ext>
+                </a:extLst>
+              </p:cNvPr>
+              <p:cNvSpPr txBox="1"/>
+              <p:nvPr/>
+            </p:nvSpPr>
+            <p:spPr>
+              <a:xfrm>
+                <a:off x="3643467" y="845026"/>
+                <a:ext cx="301686" cy="369332"/>
+              </a:xfrm>
+              <a:prstGeom prst="rect">
+                <a:avLst/>
+              </a:prstGeom>
+              <a:noFill/>
+            </p:spPr>
+            <p:txBody>
+              <a:bodyPr wrap="none" rtlCol="0">
+                <a:spAutoFit/>
+              </a:bodyPr>
+              <a:lstStyle/>
+              <a:p>
+                <a:r>
+                  <a:rPr lang="en-US" dirty="0"/>
+                  <a:t>3</a:t>
+                </a:r>
+              </a:p>
+            </p:txBody>
+          </p:sp>
+          <p:sp>
+            <p:nvSpPr>
+              <p:cNvPr id="103" name="TextBox 102">
+                <a:extLst>
+                  <a:ext uri="{FF2B5EF4-FFF2-40B4-BE49-F238E27FC236}">
+                    <a16:creationId xmlns:a16="http://schemas.microsoft.com/office/drawing/2014/main" id="{17A342AA-9A97-A640-BF6D-2E57966DFABC}"/>
+                  </a:ext>
+                </a:extLst>
+              </p:cNvPr>
+              <p:cNvSpPr txBox="1"/>
+              <p:nvPr/>
+            </p:nvSpPr>
+            <p:spPr>
+              <a:xfrm>
+                <a:off x="2964263" y="816424"/>
+                <a:ext cx="301686" cy="369332"/>
+              </a:xfrm>
+              <a:prstGeom prst="rect">
+                <a:avLst/>
+              </a:prstGeom>
+              <a:noFill/>
+            </p:spPr>
+            <p:txBody>
+              <a:bodyPr wrap="none" rtlCol="0">
+                <a:spAutoFit/>
+              </a:bodyPr>
+              <a:lstStyle/>
+              <a:p>
+                <a:r>
+                  <a:rPr lang="en-US" dirty="0"/>
+                  <a:t>3</a:t>
+                </a:r>
+              </a:p>
+            </p:txBody>
+          </p:sp>
+          <p:sp>
+            <p:nvSpPr>
+              <p:cNvPr id="104" name="TextBox 103">
+                <a:extLst>
+                  <a:ext uri="{FF2B5EF4-FFF2-40B4-BE49-F238E27FC236}">
+                    <a16:creationId xmlns:a16="http://schemas.microsoft.com/office/drawing/2014/main" id="{FBE11159-CA2E-4F4A-95B7-44CEAB101870}"/>
+                  </a:ext>
+                </a:extLst>
+              </p:cNvPr>
+              <p:cNvSpPr txBox="1"/>
+              <p:nvPr/>
+            </p:nvSpPr>
+            <p:spPr>
+              <a:xfrm>
+                <a:off x="3443887" y="742533"/>
+                <a:ext cx="301686" cy="369332"/>
+              </a:xfrm>
+              <a:prstGeom prst="rect">
+                <a:avLst/>
+              </a:prstGeom>
+              <a:noFill/>
+            </p:spPr>
+            <p:txBody>
+              <a:bodyPr wrap="none" rtlCol="0">
+                <a:spAutoFit/>
+              </a:bodyPr>
+              <a:lstStyle/>
+              <a:p>
+                <a:r>
+                  <a:rPr lang="en-US" dirty="0"/>
+                  <a:t>3</a:t>
+                </a:r>
+              </a:p>
+            </p:txBody>
+          </p:sp>
+        </p:grpSp>
+        <p:grpSp>
+          <p:nvGrpSpPr>
+            <p:cNvPr id="118" name="Group 117">
+              <a:extLst>
+                <a:ext uri="{FF2B5EF4-FFF2-40B4-BE49-F238E27FC236}">
+                  <a16:creationId xmlns:a16="http://schemas.microsoft.com/office/drawing/2014/main" id="{05550D6D-1406-7645-AC86-73F532304C59}"/>
+                </a:ext>
+              </a:extLst>
+            </p:cNvPr>
+            <p:cNvGrpSpPr/>
+            <p:nvPr/>
+          </p:nvGrpSpPr>
+          <p:grpSpPr>
+            <a:xfrm>
+              <a:off x="4370837" y="3378071"/>
+              <a:ext cx="1623060" cy="1623060"/>
+              <a:chOff x="2633980" y="723900"/>
+              <a:chExt cx="1623060" cy="1623060"/>
+            </a:xfrm>
+          </p:grpSpPr>
+          <p:grpSp>
+            <p:nvGrpSpPr>
+              <p:cNvPr id="119" name="Group 118">
+                <a:extLst>
+                  <a:ext uri="{FF2B5EF4-FFF2-40B4-BE49-F238E27FC236}">
+                    <a16:creationId xmlns:a16="http://schemas.microsoft.com/office/drawing/2014/main" id="{EF289A2F-1D90-7E4E-A8FD-273817A15DB5}"/>
+                  </a:ext>
+                </a:extLst>
+              </p:cNvPr>
+              <p:cNvGrpSpPr/>
+              <p:nvPr/>
+            </p:nvGrpSpPr>
+            <p:grpSpPr>
+              <a:xfrm>
+                <a:off x="2633980" y="723900"/>
+                <a:ext cx="1623060" cy="1623060"/>
+                <a:chOff x="2633980" y="723900"/>
+                <a:chExt cx="2966720" cy="2966720"/>
+              </a:xfrm>
+            </p:grpSpPr>
+            <p:sp>
+              <p:nvSpPr>
+                <p:cNvPr id="126" name="Oval 125">
+                  <a:extLst>
+                    <a:ext uri="{FF2B5EF4-FFF2-40B4-BE49-F238E27FC236}">
+                      <a16:creationId xmlns:a16="http://schemas.microsoft.com/office/drawing/2014/main" id="{E64E4803-CB6F-384E-B162-88F1DB10D264}"/>
+                    </a:ext>
+                  </a:extLst>
+                </p:cNvPr>
+                <p:cNvSpPr/>
+                <p:nvPr/>
+              </p:nvSpPr>
+              <p:spPr>
+                <a:xfrm>
+                  <a:off x="2633980" y="723900"/>
+                  <a:ext cx="2966720" cy="2966720"/>
+                </a:xfrm>
+                <a:prstGeom prst="ellipse">
+                  <a:avLst/>
+                </a:prstGeom>
+                <a:solidFill>
+                  <a:schemeClr val="bg1"/>
+                </a:solidFill>
+                <a:ln w="25400"/>
+              </p:spPr>
+              <p:style>
+                <a:lnRef idx="2">
+                  <a:schemeClr val="accent1">
+                    <a:shade val="50000"/>
+                  </a:schemeClr>
+                </a:lnRef>
+                <a:fillRef idx="1">
+                  <a:schemeClr val="accent1"/>
+                </a:fillRef>
+                <a:effectRef idx="0">
+                  <a:schemeClr val="accent1"/>
+                </a:effectRef>
+                <a:fontRef idx="minor">
+                  <a:schemeClr val="lt1"/>
+                </a:fontRef>
+              </p:style>
+              <p:txBody>
+                <a:bodyPr rtlCol="0" anchor="ctr"/>
+                <a:lstStyle/>
+                <a:p>
+                  <a:pPr algn="ctr"/>
+                  <a:endParaRPr lang="en-US"/>
+                </a:p>
+              </p:txBody>
+            </p:sp>
+            <p:cxnSp>
+              <p:nvCxnSpPr>
+                <p:cNvPr id="127" name="Straight Connector 126">
+                  <a:extLst>
+                    <a:ext uri="{FF2B5EF4-FFF2-40B4-BE49-F238E27FC236}">
+                      <a16:creationId xmlns:a16="http://schemas.microsoft.com/office/drawing/2014/main" id="{8797A088-8353-1745-A637-E0BC7ED7CDA3}"/>
+                    </a:ext>
+                  </a:extLst>
+                </p:cNvPr>
+                <p:cNvCxnSpPr/>
+                <p:nvPr/>
+              </p:nvCxnSpPr>
+              <p:spPr>
+                <a:xfrm>
+                  <a:off x="4117340" y="723900"/>
+                  <a:ext cx="0" cy="2966720"/>
+                </a:xfrm>
+                <a:prstGeom prst="line">
+                  <a:avLst/>
+                </a:prstGeom>
+                <a:ln w="25400"/>
+              </p:spPr>
+              <p:style>
+                <a:lnRef idx="1">
+                  <a:schemeClr val="accent1"/>
+                </a:lnRef>
+                <a:fillRef idx="0">
+                  <a:schemeClr val="accent1"/>
+                </a:fillRef>
+                <a:effectRef idx="0">
+                  <a:schemeClr val="accent1"/>
+                </a:effectRef>
+                <a:fontRef idx="minor">
+                  <a:schemeClr val="tx1"/>
+                </a:fontRef>
+              </p:style>
+            </p:cxnSp>
+            <p:cxnSp>
+              <p:nvCxnSpPr>
+                <p:cNvPr id="128" name="Straight Connector 127">
+                  <a:extLst>
+                    <a:ext uri="{FF2B5EF4-FFF2-40B4-BE49-F238E27FC236}">
+                      <a16:creationId xmlns:a16="http://schemas.microsoft.com/office/drawing/2014/main" id="{CAEBC7FE-F785-1D49-B9A1-E4976EEFDD40}"/>
+                    </a:ext>
+                  </a:extLst>
+                </p:cNvPr>
+                <p:cNvCxnSpPr/>
+                <p:nvPr/>
+              </p:nvCxnSpPr>
+              <p:spPr>
+                <a:xfrm>
+                  <a:off x="2633980" y="2207260"/>
+                  <a:ext cx="2966720" cy="0"/>
+                </a:xfrm>
+                <a:prstGeom prst="line">
+                  <a:avLst/>
+                </a:prstGeom>
+                <a:ln w="25400"/>
+              </p:spPr>
+              <p:style>
+                <a:lnRef idx="1">
+                  <a:schemeClr val="accent1"/>
+                </a:lnRef>
+                <a:fillRef idx="0">
+                  <a:schemeClr val="accent1"/>
+                </a:fillRef>
+                <a:effectRef idx="0">
+                  <a:schemeClr val="accent1"/>
+                </a:effectRef>
+                <a:fontRef idx="minor">
+                  <a:schemeClr val="tx1"/>
+                </a:fontRef>
+              </p:style>
+            </p:cxnSp>
+            <p:cxnSp>
+              <p:nvCxnSpPr>
+                <p:cNvPr id="129" name="Straight Connector 128">
+                  <a:extLst>
+                    <a:ext uri="{FF2B5EF4-FFF2-40B4-BE49-F238E27FC236}">
+                      <a16:creationId xmlns:a16="http://schemas.microsoft.com/office/drawing/2014/main" id="{BBF75DAA-99A1-F446-B939-CAA41AEA3C3F}"/>
+                    </a:ext>
+                  </a:extLst>
+                </p:cNvPr>
+                <p:cNvCxnSpPr/>
+                <p:nvPr/>
+              </p:nvCxnSpPr>
+              <p:spPr>
+                <a:xfrm>
+                  <a:off x="3068446" y="1158366"/>
+                  <a:ext cx="2097788" cy="2097788"/>
+                </a:xfrm>
+                <a:prstGeom prst="line">
+                  <a:avLst/>
+                </a:prstGeom>
+                <a:ln w="25400"/>
+              </p:spPr>
+              <p:style>
+                <a:lnRef idx="1">
+                  <a:schemeClr val="accent1"/>
+                </a:lnRef>
+                <a:fillRef idx="0">
+                  <a:schemeClr val="accent1"/>
+                </a:fillRef>
+                <a:effectRef idx="0">
+                  <a:schemeClr val="accent1"/>
+                </a:effectRef>
+                <a:fontRef idx="minor">
+                  <a:schemeClr val="tx1"/>
+                </a:fontRef>
+              </p:style>
+            </p:cxnSp>
+            <p:cxnSp>
+              <p:nvCxnSpPr>
+                <p:cNvPr id="130" name="Straight Connector 129">
+                  <a:extLst>
+                    <a:ext uri="{FF2B5EF4-FFF2-40B4-BE49-F238E27FC236}">
+                      <a16:creationId xmlns:a16="http://schemas.microsoft.com/office/drawing/2014/main" id="{477C7A80-8080-3145-8E89-A8986CE20CE0}"/>
+                    </a:ext>
+                  </a:extLst>
+                </p:cNvPr>
+                <p:cNvCxnSpPr/>
+                <p:nvPr/>
+              </p:nvCxnSpPr>
+              <p:spPr>
+                <a:xfrm flipH="1">
+                  <a:off x="3068446" y="1158366"/>
+                  <a:ext cx="2097788" cy="2097788"/>
+                </a:xfrm>
+                <a:prstGeom prst="line">
+                  <a:avLst/>
+                </a:prstGeom>
+                <a:ln w="25400"/>
+              </p:spPr>
+              <p:style>
+                <a:lnRef idx="1">
+                  <a:schemeClr val="accent1"/>
+                </a:lnRef>
+                <a:fillRef idx="0">
+                  <a:schemeClr val="accent1"/>
+                </a:fillRef>
+                <a:effectRef idx="0">
+                  <a:schemeClr val="accent1"/>
+                </a:effectRef>
+                <a:fontRef idx="minor">
+                  <a:schemeClr val="tx1"/>
+                </a:fontRef>
+              </p:style>
+            </p:cxnSp>
+            <p:cxnSp>
+              <p:nvCxnSpPr>
+                <p:cNvPr id="131" name="Straight Connector 130">
+                  <a:extLst>
+                    <a:ext uri="{FF2B5EF4-FFF2-40B4-BE49-F238E27FC236}">
+                      <a16:creationId xmlns:a16="http://schemas.microsoft.com/office/drawing/2014/main" id="{C188E9B0-1720-1046-A4F6-3A471399240D}"/>
+                    </a:ext>
+                  </a:extLst>
+                </p:cNvPr>
+                <p:cNvCxnSpPr/>
+                <p:nvPr/>
+              </p:nvCxnSpPr>
+              <p:spPr>
+                <a:xfrm>
+                  <a:off x="3548380" y="855980"/>
+                  <a:ext cx="1137920" cy="2702560"/>
+                </a:xfrm>
+                <a:prstGeom prst="line">
+                  <a:avLst/>
+                </a:prstGeom>
+                <a:ln w="25400"/>
+              </p:spPr>
+              <p:style>
+                <a:lnRef idx="1">
+                  <a:schemeClr val="accent1"/>
+                </a:lnRef>
+                <a:fillRef idx="0">
+                  <a:schemeClr val="accent1"/>
+                </a:fillRef>
+                <a:effectRef idx="0">
+                  <a:schemeClr val="accent1"/>
+                </a:effectRef>
+                <a:fontRef idx="minor">
+                  <a:schemeClr val="tx1"/>
+                </a:fontRef>
+              </p:style>
+            </p:cxnSp>
+            <p:cxnSp>
+              <p:nvCxnSpPr>
+                <p:cNvPr id="132" name="Straight Connector 131">
+                  <a:extLst>
+                    <a:ext uri="{FF2B5EF4-FFF2-40B4-BE49-F238E27FC236}">
+                      <a16:creationId xmlns:a16="http://schemas.microsoft.com/office/drawing/2014/main" id="{E0F92322-CBDD-484D-AD8A-4ACAF71B23A4}"/>
+                    </a:ext>
+                  </a:extLst>
+                </p:cNvPr>
+                <p:cNvCxnSpPr/>
+                <p:nvPr/>
+              </p:nvCxnSpPr>
+              <p:spPr>
+                <a:xfrm>
+                  <a:off x="2743200" y="1656080"/>
+                  <a:ext cx="2763520" cy="1106123"/>
+                </a:xfrm>
+                <a:prstGeom prst="line">
+                  <a:avLst/>
+                </a:prstGeom>
+                <a:ln w="25400"/>
+              </p:spPr>
+              <p:style>
+                <a:lnRef idx="1">
+                  <a:schemeClr val="accent1"/>
+                </a:lnRef>
+                <a:fillRef idx="0">
+                  <a:schemeClr val="accent1"/>
+                </a:fillRef>
+                <a:effectRef idx="0">
+                  <a:schemeClr val="accent1"/>
+                </a:effectRef>
+                <a:fontRef idx="minor">
+                  <a:schemeClr val="tx1"/>
+                </a:fontRef>
+              </p:style>
+            </p:cxnSp>
+            <p:cxnSp>
+              <p:nvCxnSpPr>
+                <p:cNvPr id="133" name="Straight Connector 132">
+                  <a:extLst>
+                    <a:ext uri="{FF2B5EF4-FFF2-40B4-BE49-F238E27FC236}">
+                      <a16:creationId xmlns:a16="http://schemas.microsoft.com/office/drawing/2014/main" id="{E4CA04C5-C0D4-D245-96CA-58A3294AC995}"/>
+                    </a:ext>
+                  </a:extLst>
+                </p:cNvPr>
+                <p:cNvCxnSpPr/>
+                <p:nvPr/>
+              </p:nvCxnSpPr>
+              <p:spPr>
+                <a:xfrm flipH="1">
+                  <a:off x="3548381" y="855980"/>
+                  <a:ext cx="1131984" cy="2702560"/>
+                </a:xfrm>
+                <a:prstGeom prst="line">
+                  <a:avLst/>
+                </a:prstGeom>
+                <a:ln w="25400"/>
+              </p:spPr>
+              <p:style>
+                <a:lnRef idx="1">
+                  <a:schemeClr val="accent1"/>
+                </a:lnRef>
+                <a:fillRef idx="0">
+                  <a:schemeClr val="accent1"/>
+                </a:fillRef>
+                <a:effectRef idx="0">
+                  <a:schemeClr val="accent1"/>
+                </a:effectRef>
+                <a:fontRef idx="minor">
+                  <a:schemeClr val="tx1"/>
+                </a:fontRef>
+              </p:style>
+            </p:cxnSp>
+            <p:cxnSp>
+              <p:nvCxnSpPr>
+                <p:cNvPr id="134" name="Straight Connector 133">
+                  <a:extLst>
+                    <a:ext uri="{FF2B5EF4-FFF2-40B4-BE49-F238E27FC236}">
+                      <a16:creationId xmlns:a16="http://schemas.microsoft.com/office/drawing/2014/main" id="{ACCFEE24-AA02-0B41-8883-5E8F772128A8}"/>
+                    </a:ext>
+                  </a:extLst>
+                </p:cNvPr>
+                <p:cNvCxnSpPr/>
+                <p:nvPr/>
+              </p:nvCxnSpPr>
+              <p:spPr>
+                <a:xfrm flipV="1">
+                  <a:off x="2743200" y="1656080"/>
+                  <a:ext cx="2748280" cy="1120203"/>
+                </a:xfrm>
+                <a:prstGeom prst="line">
+                  <a:avLst/>
+                </a:prstGeom>
+                <a:ln w="25400"/>
+              </p:spPr>
+              <p:style>
+                <a:lnRef idx="1">
+                  <a:schemeClr val="accent1"/>
+                </a:lnRef>
+                <a:fillRef idx="0">
+                  <a:schemeClr val="accent1"/>
+                </a:fillRef>
+                <a:effectRef idx="0">
+                  <a:schemeClr val="accent1"/>
+                </a:effectRef>
+                <a:fontRef idx="minor">
+                  <a:schemeClr val="tx1"/>
+                </a:fontRef>
+              </p:style>
+            </p:cxnSp>
+            <p:sp>
+              <p:nvSpPr>
+                <p:cNvPr id="135" name="Oval 134">
+                  <a:extLst>
+                    <a:ext uri="{FF2B5EF4-FFF2-40B4-BE49-F238E27FC236}">
+                      <a16:creationId xmlns:a16="http://schemas.microsoft.com/office/drawing/2014/main" id="{BB29B316-F6DD-464D-B030-240DC11B8E54}"/>
+                    </a:ext>
+                  </a:extLst>
+                </p:cNvPr>
+                <p:cNvSpPr/>
+                <p:nvPr/>
+              </p:nvSpPr>
+              <p:spPr>
+                <a:xfrm>
+                  <a:off x="3368040" y="1457960"/>
+                  <a:ext cx="1498600" cy="1498600"/>
+                </a:xfrm>
+                <a:prstGeom prst="ellipse">
+                  <a:avLst/>
+                </a:prstGeom>
+                <a:solidFill>
+                  <a:srgbClr val="EEE7FF"/>
+                </a:solidFill>
+                <a:ln w="25400"/>
+              </p:spPr>
+              <p:style>
+                <a:lnRef idx="2">
+                  <a:schemeClr val="accent1">
+                    <a:shade val="50000"/>
+                  </a:schemeClr>
+                </a:lnRef>
+                <a:fillRef idx="1">
+                  <a:schemeClr val="accent1"/>
+                </a:fillRef>
+                <a:effectRef idx="0">
+                  <a:schemeClr val="accent1"/>
+                </a:effectRef>
+                <a:fontRef idx="minor">
+                  <a:schemeClr val="lt1"/>
+                </a:fontRef>
+              </p:style>
+              <p:txBody>
+                <a:bodyPr rtlCol="0" anchor="ctr"/>
+                <a:lstStyle/>
+                <a:p>
+                  <a:pPr algn="ctr"/>
+                  <a:endParaRPr lang="en-US"/>
+                </a:p>
+              </p:txBody>
+            </p:sp>
+          </p:grpSp>
+          <p:sp>
+            <p:nvSpPr>
+              <p:cNvPr id="121" name="TextBox 120">
+                <a:extLst>
+                  <a:ext uri="{FF2B5EF4-FFF2-40B4-BE49-F238E27FC236}">
+                    <a16:creationId xmlns:a16="http://schemas.microsoft.com/office/drawing/2014/main" id="{AD640396-0EE2-D541-A35C-016C47DFF1B3}"/>
+                  </a:ext>
+                </a:extLst>
+              </p:cNvPr>
+              <p:cNvSpPr txBox="1"/>
+              <p:nvPr/>
+            </p:nvSpPr>
+            <p:spPr>
+              <a:xfrm>
+                <a:off x="3816210" y="1718010"/>
+                <a:ext cx="301686" cy="369332"/>
+              </a:xfrm>
+              <a:prstGeom prst="rect">
+                <a:avLst/>
+              </a:prstGeom>
+              <a:noFill/>
+            </p:spPr>
+            <p:txBody>
+              <a:bodyPr wrap="none" rtlCol="0">
+                <a:spAutoFit/>
+              </a:bodyPr>
+              <a:lstStyle/>
+              <a:p>
+                <a:r>
+                  <a:rPr lang="en-US" dirty="0"/>
+                  <a:t>2</a:t>
+                </a:r>
+              </a:p>
+            </p:txBody>
+          </p:sp>
+          <p:sp>
+            <p:nvSpPr>
+              <p:cNvPr id="122" name="TextBox 121">
+                <a:extLst>
+                  <a:ext uri="{FF2B5EF4-FFF2-40B4-BE49-F238E27FC236}">
+                    <a16:creationId xmlns:a16="http://schemas.microsoft.com/office/drawing/2014/main" id="{C659B116-E4D0-DA42-A2D8-DA439BEE5D4F}"/>
+                  </a:ext>
+                </a:extLst>
+              </p:cNvPr>
+              <p:cNvSpPr txBox="1"/>
+              <p:nvPr/>
+            </p:nvSpPr>
+            <p:spPr>
+              <a:xfrm>
+                <a:off x="3670102" y="1891738"/>
+                <a:ext cx="304800" cy="369332"/>
+              </a:xfrm>
+              <a:prstGeom prst="rect">
+                <a:avLst/>
+              </a:prstGeom>
+              <a:noFill/>
+            </p:spPr>
+            <p:txBody>
+              <a:bodyPr wrap="square" rtlCol="0">
+                <a:spAutoFit/>
+              </a:bodyPr>
+              <a:lstStyle/>
+              <a:p>
+                <a:r>
+                  <a:rPr lang="en-US" dirty="0"/>
+                  <a:t>2</a:t>
+                </a:r>
+              </a:p>
+            </p:txBody>
+          </p:sp>
+          <p:sp>
+            <p:nvSpPr>
+              <p:cNvPr id="123" name="TextBox 122">
+                <a:extLst>
+                  <a:ext uri="{FF2B5EF4-FFF2-40B4-BE49-F238E27FC236}">
+                    <a16:creationId xmlns:a16="http://schemas.microsoft.com/office/drawing/2014/main" id="{63A054AD-0254-2C47-A6B5-A39356BDC71E}"/>
+                  </a:ext>
+                </a:extLst>
+              </p:cNvPr>
+              <p:cNvSpPr txBox="1"/>
+              <p:nvPr/>
+            </p:nvSpPr>
+            <p:spPr>
+              <a:xfrm>
+                <a:off x="3941373" y="1221139"/>
+                <a:ext cx="301686" cy="369332"/>
+              </a:xfrm>
+              <a:prstGeom prst="rect">
+                <a:avLst/>
+              </a:prstGeom>
+              <a:noFill/>
+            </p:spPr>
+            <p:txBody>
+              <a:bodyPr wrap="none" rtlCol="0">
+                <a:spAutoFit/>
+              </a:bodyPr>
+              <a:lstStyle/>
+              <a:p>
+                <a:r>
+                  <a:rPr lang="en-US" dirty="0"/>
+                  <a:t>2</a:t>
+                </a:r>
+              </a:p>
+            </p:txBody>
+          </p:sp>
+          <p:sp>
+            <p:nvSpPr>
+              <p:cNvPr id="124" name="TextBox 123">
+                <a:extLst>
+                  <a:ext uri="{FF2B5EF4-FFF2-40B4-BE49-F238E27FC236}">
+                    <a16:creationId xmlns:a16="http://schemas.microsoft.com/office/drawing/2014/main" id="{DC6C2A0D-C169-BD41-9298-1F6F6B034965}"/>
+                  </a:ext>
+                </a:extLst>
+              </p:cNvPr>
+              <p:cNvSpPr txBox="1"/>
+              <p:nvPr/>
+            </p:nvSpPr>
+            <p:spPr>
+              <a:xfrm>
+                <a:off x="3949404" y="1467596"/>
+                <a:ext cx="301686" cy="369332"/>
+              </a:xfrm>
+              <a:prstGeom prst="rect">
+                <a:avLst/>
+              </a:prstGeom>
+              <a:noFill/>
+            </p:spPr>
+            <p:txBody>
+              <a:bodyPr wrap="none" rtlCol="0">
+                <a:spAutoFit/>
+              </a:bodyPr>
+              <a:lstStyle/>
+              <a:p>
+                <a:r>
+                  <a:rPr lang="en-US"/>
+                  <a:t>2</a:t>
+                </a:r>
+                <a:endParaRPr lang="en-US" dirty="0"/>
+              </a:p>
+            </p:txBody>
+          </p:sp>
+          <p:sp>
+            <p:nvSpPr>
+              <p:cNvPr id="125" name="TextBox 124">
+                <a:extLst>
+                  <a:ext uri="{FF2B5EF4-FFF2-40B4-BE49-F238E27FC236}">
+                    <a16:creationId xmlns:a16="http://schemas.microsoft.com/office/drawing/2014/main" id="{57EAB394-9680-C04B-9D7F-413C08DE3A81}"/>
+                  </a:ext>
+                </a:extLst>
+              </p:cNvPr>
+              <p:cNvSpPr txBox="1"/>
+              <p:nvPr/>
+            </p:nvSpPr>
+            <p:spPr>
+              <a:xfrm>
+                <a:off x="3866317" y="988053"/>
+                <a:ext cx="301686" cy="369332"/>
+              </a:xfrm>
+              <a:prstGeom prst="rect">
+                <a:avLst/>
+              </a:prstGeom>
+              <a:noFill/>
+            </p:spPr>
+            <p:txBody>
+              <a:bodyPr wrap="none" rtlCol="0">
+                <a:spAutoFit/>
+              </a:bodyPr>
+              <a:lstStyle/>
+              <a:p>
+                <a:r>
+                  <a:rPr lang="en-US"/>
+                  <a:t>2</a:t>
+                </a:r>
+                <a:endParaRPr lang="en-US" dirty="0"/>
+              </a:p>
+            </p:txBody>
+          </p:sp>
+        </p:grpSp>
+        <p:cxnSp>
+          <p:nvCxnSpPr>
+            <p:cNvPr id="136" name="Straight Arrow Connector 135">
+              <a:extLst>
+                <a:ext uri="{FF2B5EF4-FFF2-40B4-BE49-F238E27FC236}">
+                  <a16:creationId xmlns:a16="http://schemas.microsoft.com/office/drawing/2014/main" id="{3A3D3C60-9317-E247-8B30-35726DEF6A27}"/>
+                </a:ext>
+              </a:extLst>
+            </p:cNvPr>
+            <p:cNvCxnSpPr>
+              <a:cxnSpLocks/>
+              <a:endCxn id="106" idx="7"/>
+            </p:cNvCxnSpPr>
+            <p:nvPr/>
+          </p:nvCxnSpPr>
+          <p:spPr>
+            <a:xfrm flipH="1">
+              <a:off x="3905501" y="3260478"/>
+              <a:ext cx="231743" cy="355285"/>
+            </a:xfrm>
+            <a:prstGeom prst="straightConnector1">
+              <a:avLst/>
+            </a:prstGeom>
+            <a:ln w="25400">
+              <a:solidFill>
+                <a:srgbClr val="FF0000"/>
+              </a:solidFill>
+              <a:tailEnd type="arrow"/>
+            </a:ln>
+          </p:spPr>
+          <p:style>
+            <a:lnRef idx="1">
+              <a:schemeClr val="accent1"/>
+            </a:lnRef>
+            <a:fillRef idx="0">
+              <a:schemeClr val="accent1"/>
+            </a:fillRef>
+            <a:effectRef idx="0">
+              <a:schemeClr val="accent1"/>
+            </a:effectRef>
+            <a:fontRef idx="minor">
+              <a:schemeClr val="tx1"/>
+            </a:fontRef>
+          </p:style>
+        </p:cxnSp>
+        <p:cxnSp>
+          <p:nvCxnSpPr>
+            <p:cNvPr id="137" name="Straight Arrow Connector 136">
+              <a:extLst>
+                <a:ext uri="{FF2B5EF4-FFF2-40B4-BE49-F238E27FC236}">
+                  <a16:creationId xmlns:a16="http://schemas.microsoft.com/office/drawing/2014/main" id="{3F585799-5D58-4D49-BDAE-21DFCAF1BEBC}"/>
+                </a:ext>
+              </a:extLst>
+            </p:cNvPr>
+            <p:cNvCxnSpPr>
+              <a:cxnSpLocks/>
+              <a:endCxn id="126" idx="1"/>
+            </p:cNvCxnSpPr>
+            <p:nvPr/>
+          </p:nvCxnSpPr>
+          <p:spPr>
+            <a:xfrm>
+              <a:off x="4480761" y="3270238"/>
+              <a:ext cx="127768" cy="345525"/>
+            </a:xfrm>
+            <a:prstGeom prst="straightConnector1">
+              <a:avLst/>
+            </a:prstGeom>
+            <a:ln w="25400">
+              <a:solidFill>
+                <a:srgbClr val="FF0000"/>
+              </a:solidFill>
+              <a:tailEnd type="arrow"/>
+            </a:ln>
+          </p:spPr>
+          <p:style>
+            <a:lnRef idx="1">
+              <a:schemeClr val="accent1"/>
+            </a:lnRef>
+            <a:fillRef idx="0">
+              <a:schemeClr val="accent1"/>
+            </a:fillRef>
+            <a:effectRef idx="0">
+              <a:schemeClr val="accent1"/>
+            </a:effectRef>
+            <a:fontRef idx="minor">
+              <a:schemeClr val="tx1"/>
+            </a:fontRef>
+          </p:style>
+        </p:cxnSp>
+        <p:sp>
+          <p:nvSpPr>
+            <p:cNvPr id="138" name="TextBox 137">
+              <a:extLst>
+                <a:ext uri="{FF2B5EF4-FFF2-40B4-BE49-F238E27FC236}">
+                  <a16:creationId xmlns:a16="http://schemas.microsoft.com/office/drawing/2014/main" id="{081C74AA-0DC5-884B-A184-97EFBDA271D6}"/>
+                </a:ext>
+              </a:extLst>
+            </p:cNvPr>
+            <p:cNvSpPr txBox="1"/>
+            <p:nvPr/>
+          </p:nvSpPr>
+          <p:spPr>
+            <a:xfrm>
+              <a:off x="1260601" y="3984579"/>
+              <a:ext cx="1098129" cy="369332"/>
+            </a:xfrm>
+            <a:prstGeom prst="rect">
+              <a:avLst/>
+            </a:prstGeom>
+            <a:noFill/>
+          </p:spPr>
+          <p:txBody>
+            <a:bodyPr wrap="square" rtlCol="0">
+              <a:spAutoFit/>
+            </a:bodyPr>
+            <a:lstStyle/>
+            <a:p>
+              <a:pPr algn="ctr"/>
+              <a:r>
+                <a:rPr lang="en-US" dirty="0"/>
+                <a:t>Ring </a:t>
+              </a:r>
+              <a:r>
+                <a:rPr lang="en-US" dirty="0" err="1"/>
+                <a:t>Bufs</a:t>
+              </a:r>
+              <a:endParaRPr lang="en-US" dirty="0"/>
+            </a:p>
+          </p:txBody>
+        </p:sp>
+        <p:sp>
+          <p:nvSpPr>
+            <p:cNvPr id="141" name="TextBox 140">
+              <a:extLst>
+                <a:ext uri="{FF2B5EF4-FFF2-40B4-BE49-F238E27FC236}">
+                  <a16:creationId xmlns:a16="http://schemas.microsoft.com/office/drawing/2014/main" id="{431A4338-1DB3-734A-9BBA-9B48909AA1A8}"/>
+                </a:ext>
+              </a:extLst>
+            </p:cNvPr>
+            <p:cNvSpPr txBox="1"/>
+            <p:nvPr/>
+          </p:nvSpPr>
+          <p:spPr>
+            <a:xfrm>
+              <a:off x="2490419" y="5213376"/>
+              <a:ext cx="1621521" cy="276999"/>
+            </a:xfrm>
+            <a:prstGeom prst="rect">
+              <a:avLst/>
+            </a:prstGeom>
+            <a:solidFill>
+              <a:schemeClr val="bg1"/>
+            </a:solidFill>
+            <a:ln w="19050">
+              <a:solidFill>
+                <a:schemeClr val="tx1"/>
+              </a:solidFill>
+            </a:ln>
+          </p:spPr>
+          <p:txBody>
+            <a:bodyPr wrap="square" rtlCol="0">
+              <a:spAutoFit/>
+            </a:bodyPr>
+            <a:lstStyle/>
+            <a:p>
+              <a:pPr algn="ctr"/>
+              <a:r>
+                <a:rPr lang="en-US" sz="1200" b="1">
+                  <a:latin typeface="Arial" pitchFamily="34" charset="0"/>
+                  <a:cs typeface="Arial" pitchFamily="34" charset="0"/>
+                </a:rPr>
+                <a:t>Building Thread 1</a:t>
+              </a:r>
+              <a:endParaRPr lang="en-US" sz="800" b="1" dirty="0">
+                <a:latin typeface="Arial" pitchFamily="34" charset="0"/>
+                <a:cs typeface="Arial" pitchFamily="34" charset="0"/>
+              </a:endParaRPr>
+            </a:p>
+          </p:txBody>
+        </p:sp>
+        <p:sp>
+          <p:nvSpPr>
+            <p:cNvPr id="142" name="TextBox 141">
+              <a:extLst>
+                <a:ext uri="{FF2B5EF4-FFF2-40B4-BE49-F238E27FC236}">
+                  <a16:creationId xmlns:a16="http://schemas.microsoft.com/office/drawing/2014/main" id="{874C25CA-FE0C-5447-835F-A0BB4FCCD2F0}"/>
+                </a:ext>
+              </a:extLst>
+            </p:cNvPr>
+            <p:cNvSpPr txBox="1"/>
+            <p:nvPr/>
+          </p:nvSpPr>
+          <p:spPr>
+            <a:xfrm>
+              <a:off x="4339424" y="5213320"/>
+              <a:ext cx="1621521" cy="276999"/>
+            </a:xfrm>
+            <a:prstGeom prst="rect">
+              <a:avLst/>
+            </a:prstGeom>
+            <a:solidFill>
+              <a:schemeClr val="bg1"/>
+            </a:solidFill>
+            <a:ln w="19050">
+              <a:solidFill>
+                <a:schemeClr val="tx1"/>
+              </a:solidFill>
+            </a:ln>
+          </p:spPr>
+          <p:txBody>
+            <a:bodyPr wrap="square" rtlCol="0">
+              <a:spAutoFit/>
+            </a:bodyPr>
+            <a:lstStyle/>
+            <a:p>
+              <a:pPr algn="ctr"/>
+              <a:r>
+                <a:rPr lang="en-US" sz="1200" b="1" dirty="0">
+                  <a:latin typeface="Arial" pitchFamily="34" charset="0"/>
+                  <a:cs typeface="Arial" pitchFamily="34" charset="0"/>
+                </a:rPr>
+                <a:t>Building Thread 2</a:t>
+              </a:r>
+              <a:endParaRPr lang="en-US" sz="800" b="1" dirty="0">
+                <a:latin typeface="Arial" pitchFamily="34" charset="0"/>
+                <a:cs typeface="Arial" pitchFamily="34" charset="0"/>
+              </a:endParaRPr>
+            </a:p>
+          </p:txBody>
+        </p:sp>
+        <p:cxnSp>
+          <p:nvCxnSpPr>
+            <p:cNvPr id="143" name="Straight Arrow Connector 142">
+              <a:extLst>
+                <a:ext uri="{FF2B5EF4-FFF2-40B4-BE49-F238E27FC236}">
+                  <a16:creationId xmlns:a16="http://schemas.microsoft.com/office/drawing/2014/main" id="{D42140AA-0488-894D-9652-193E3F4C11C2}"/>
+                </a:ext>
+              </a:extLst>
+            </p:cNvPr>
+            <p:cNvCxnSpPr>
+              <a:cxnSpLocks/>
+            </p:cNvCxnSpPr>
+            <p:nvPr/>
+          </p:nvCxnSpPr>
+          <p:spPr>
+            <a:xfrm>
+              <a:off x="5670099" y="4861551"/>
+              <a:ext cx="127768" cy="346944"/>
+            </a:xfrm>
+            <a:prstGeom prst="straightConnector1">
+              <a:avLst/>
+            </a:prstGeom>
+            <a:ln w="25400">
+              <a:solidFill>
+                <a:srgbClr val="FF0000"/>
+              </a:solidFill>
+              <a:tailEnd type="arrow"/>
+            </a:ln>
+          </p:spPr>
+          <p:style>
+            <a:lnRef idx="1">
+              <a:schemeClr val="accent1"/>
+            </a:lnRef>
+            <a:fillRef idx="0">
+              <a:schemeClr val="accent1"/>
+            </a:fillRef>
+            <a:effectRef idx="0">
+              <a:schemeClr val="accent1"/>
+            </a:effectRef>
+            <a:fontRef idx="minor">
+              <a:schemeClr val="tx1"/>
+            </a:fontRef>
+          </p:style>
+        </p:cxnSp>
+        <p:cxnSp>
+          <p:nvCxnSpPr>
+            <p:cNvPr id="144" name="Straight Arrow Connector 143">
+              <a:extLst>
+                <a:ext uri="{FF2B5EF4-FFF2-40B4-BE49-F238E27FC236}">
+                  <a16:creationId xmlns:a16="http://schemas.microsoft.com/office/drawing/2014/main" id="{A71305A6-2CEC-A140-B340-E40299F368C4}"/>
+                </a:ext>
+              </a:extLst>
+            </p:cNvPr>
+            <p:cNvCxnSpPr>
+              <a:cxnSpLocks/>
+            </p:cNvCxnSpPr>
+            <p:nvPr/>
+          </p:nvCxnSpPr>
+          <p:spPr>
+            <a:xfrm flipH="1">
+              <a:off x="2706224" y="4883571"/>
+              <a:ext cx="202451" cy="324924"/>
+            </a:xfrm>
+            <a:prstGeom prst="straightConnector1">
+              <a:avLst/>
+            </a:prstGeom>
+            <a:ln w="25400">
+              <a:solidFill>
+                <a:srgbClr val="FF0000"/>
+              </a:solidFill>
+              <a:tailEnd type="arrow"/>
+            </a:ln>
+          </p:spPr>
+          <p:style>
+            <a:lnRef idx="1">
+              <a:schemeClr val="accent1"/>
+            </a:lnRef>
+            <a:fillRef idx="0">
+              <a:schemeClr val="accent1"/>
+            </a:fillRef>
+            <a:effectRef idx="0">
+              <a:schemeClr val="accent1"/>
+            </a:effectRef>
+            <a:fontRef idx="minor">
+              <a:schemeClr val="tx1"/>
+            </a:fontRef>
+          </p:style>
+        </p:cxnSp>
+      </p:grpSp>
+      <p:sp>
+        <p:nvSpPr>
+          <p:cNvPr id="148" name="Rectangle 147">
+            <a:extLst>
+              <a:ext uri="{FF2B5EF4-FFF2-40B4-BE49-F238E27FC236}">
+                <a16:creationId xmlns:a16="http://schemas.microsoft.com/office/drawing/2014/main" id="{0DAE4991-E685-3146-A0B6-A520E73F3A04}"/>
+              </a:ext>
+            </a:extLst>
+          </p:cNvPr>
+          <p:cNvSpPr/>
+          <p:nvPr/>
+        </p:nvSpPr>
+        <p:spPr>
+          <a:xfrm>
+            <a:off x="1136470" y="521985"/>
+            <a:ext cx="1663880" cy="2055840"/>
+          </a:xfrm>
+          <a:prstGeom prst="rect">
+            <a:avLst/>
+          </a:prstGeom>
+          <a:noFill/>
+          <a:ln w="19050">
+            <a:solidFill>
+              <a:schemeClr val="tx1"/>
+            </a:solidFill>
+          </a:ln>
+        </p:spPr>
+        <p:style>
+          <a:lnRef idx="2">
+            <a:schemeClr val="accent1">
+              <a:shade val="50000"/>
+            </a:schemeClr>
+          </a:lnRef>
+          <a:fillRef idx="1">
+            <a:schemeClr val="accent1"/>
+          </a:fillRef>
+          <a:effectRef idx="0">
+            <a:schemeClr val="accent1"/>
+          </a:effectRef>
+          <a:fontRef idx="minor">
+            <a:schemeClr val="lt1"/>
+          </a:fontRef>
+        </p:style>
+        <p:txBody>
+          <a:bodyPr rtlCol="0" anchor="ctr"/>
+          <a:lstStyle/>
+          <a:p>
+            <a:pPr algn="ctr"/>
+            <a:endParaRPr lang="en-US" dirty="0"/>
+          </a:p>
+        </p:txBody>
+      </p:sp>
+      <p:sp>
+        <p:nvSpPr>
+          <p:cNvPr id="149" name="Rectangle 148">
+            <a:extLst>
+              <a:ext uri="{FF2B5EF4-FFF2-40B4-BE49-F238E27FC236}">
+                <a16:creationId xmlns:a16="http://schemas.microsoft.com/office/drawing/2014/main" id="{D80EFE38-8E28-EE4D-9D70-6D1D9F03D6C2}"/>
+              </a:ext>
+            </a:extLst>
+          </p:cNvPr>
+          <p:cNvSpPr/>
+          <p:nvPr/>
+        </p:nvSpPr>
+        <p:spPr>
+          <a:xfrm>
+            <a:off x="3468224" y="528407"/>
+            <a:ext cx="1663880" cy="2055840"/>
+          </a:xfrm>
+          <a:prstGeom prst="rect">
+            <a:avLst/>
+          </a:prstGeom>
+          <a:noFill/>
+          <a:ln w="19050">
+            <a:solidFill>
+              <a:schemeClr val="tx1"/>
+            </a:solidFill>
+          </a:ln>
+        </p:spPr>
+        <p:style>
+          <a:lnRef idx="2">
+            <a:schemeClr val="accent1">
+              <a:shade val="50000"/>
+            </a:schemeClr>
+          </a:lnRef>
+          <a:fillRef idx="1">
+            <a:schemeClr val="accent1"/>
+          </a:fillRef>
+          <a:effectRef idx="0">
+            <a:schemeClr val="accent1"/>
+          </a:effectRef>
+          <a:fontRef idx="minor">
+            <a:schemeClr val="lt1"/>
+          </a:fontRef>
+        </p:style>
+        <p:txBody>
+          <a:bodyPr rtlCol="0" anchor="ctr"/>
+          <a:lstStyle/>
+          <a:p>
+            <a:pPr algn="ctr"/>
+            <a:endParaRPr lang="en-US" dirty="0"/>
+          </a:p>
+        </p:txBody>
+      </p:sp>
+      <p:sp>
+        <p:nvSpPr>
+          <p:cNvPr id="150" name="Rectangle 149">
+            <a:extLst>
+              <a:ext uri="{FF2B5EF4-FFF2-40B4-BE49-F238E27FC236}">
+                <a16:creationId xmlns:a16="http://schemas.microsoft.com/office/drawing/2014/main" id="{AF9D0AF4-F7F6-AE42-A81F-45E0F47384C5}"/>
+              </a:ext>
+            </a:extLst>
+          </p:cNvPr>
+          <p:cNvSpPr/>
+          <p:nvPr/>
+        </p:nvSpPr>
+        <p:spPr>
+          <a:xfrm>
+            <a:off x="5793602" y="528449"/>
+            <a:ext cx="1663880" cy="2055840"/>
+          </a:xfrm>
+          <a:prstGeom prst="rect">
+            <a:avLst/>
+          </a:prstGeom>
+          <a:noFill/>
+          <a:ln w="19050">
+            <a:solidFill>
+              <a:schemeClr val="tx1"/>
+            </a:solidFill>
+          </a:ln>
+        </p:spPr>
+        <p:style>
+          <a:lnRef idx="2">
+            <a:schemeClr val="accent1">
+              <a:shade val="50000"/>
+            </a:schemeClr>
+          </a:lnRef>
+          <a:fillRef idx="1">
+            <a:schemeClr val="accent1"/>
+          </a:fillRef>
+          <a:effectRef idx="0">
+            <a:schemeClr val="accent1"/>
+          </a:effectRef>
+          <a:fontRef idx="minor">
+            <a:schemeClr val="lt1"/>
+          </a:fontRef>
+        </p:style>
+        <p:txBody>
+          <a:bodyPr rtlCol="0" anchor="ctr"/>
+          <a:lstStyle/>
+          <a:p>
+            <a:pPr algn="ctr"/>
+            <a:endParaRPr lang="en-US" dirty="0"/>
+          </a:p>
+        </p:txBody>
+      </p:sp>
+      <p:grpSp>
+        <p:nvGrpSpPr>
+          <p:cNvPr id="178" name="Group 177">
+            <a:extLst>
+              <a:ext uri="{FF2B5EF4-FFF2-40B4-BE49-F238E27FC236}">
+                <a16:creationId xmlns:a16="http://schemas.microsoft.com/office/drawing/2014/main" id="{43904544-4EA3-2740-82A3-3D3BAC36931B}"/>
+              </a:ext>
+            </a:extLst>
+          </p:cNvPr>
+          <p:cNvGrpSpPr/>
+          <p:nvPr/>
+        </p:nvGrpSpPr>
+        <p:grpSpPr>
+          <a:xfrm>
+            <a:off x="1450961" y="5792247"/>
+            <a:ext cx="2806071" cy="792865"/>
+            <a:chOff x="1624519" y="5920280"/>
+            <a:chExt cx="2806071" cy="792865"/>
+          </a:xfrm>
+        </p:grpSpPr>
+        <p:sp>
+          <p:nvSpPr>
+            <p:cNvPr id="163" name="Rounded Rectangle 162">
+              <a:extLst>
+                <a:ext uri="{FF2B5EF4-FFF2-40B4-BE49-F238E27FC236}">
+                  <a16:creationId xmlns:a16="http://schemas.microsoft.com/office/drawing/2014/main" id="{0B8434F3-2A22-8848-A9BF-8F6A06C2A260}"/>
+                </a:ext>
+              </a:extLst>
+            </p:cNvPr>
+            <p:cNvSpPr/>
+            <p:nvPr/>
+          </p:nvSpPr>
+          <p:spPr>
+            <a:xfrm>
+              <a:off x="1624519" y="5920280"/>
+              <a:ext cx="2806071" cy="792865"/>
+            </a:xfrm>
+            <a:prstGeom prst="roundRect">
+              <a:avLst/>
+            </a:prstGeom>
+            <a:solidFill>
+              <a:schemeClr val="accent2">
+                <a:lumMod val="20000"/>
+                <a:lumOff val="80000"/>
+              </a:schemeClr>
+            </a:solidFill>
+            <a:ln w="25400">
+              <a:solidFill>
+                <a:schemeClr val="accent4">
+                  <a:lumMod val="75000"/>
+                </a:schemeClr>
+              </a:solidFill>
+            </a:ln>
+          </p:spPr>
+          <p:style>
+            <a:lnRef idx="2">
+              <a:schemeClr val="accent1">
+                <a:shade val="50000"/>
+              </a:schemeClr>
+            </a:lnRef>
+            <a:fillRef idx="1">
+              <a:schemeClr val="accent1"/>
+            </a:fillRef>
+            <a:effectRef idx="0">
+              <a:schemeClr val="accent1"/>
+            </a:effectRef>
+            <a:fontRef idx="minor">
+              <a:schemeClr val="lt1"/>
+            </a:fontRef>
+          </p:style>
+          <p:txBody>
+            <a:bodyPr rtlCol="0" anchor="ctr"/>
+            <a:lstStyle/>
+            <a:p>
+              <a:pPr algn="ctr"/>
+              <a:endParaRPr lang="en-US" dirty="0"/>
+            </a:p>
+          </p:txBody>
+        </p:sp>
+        <p:sp>
+          <p:nvSpPr>
+            <p:cNvPr id="167" name="TextBox 166">
+              <a:extLst>
+                <a:ext uri="{FF2B5EF4-FFF2-40B4-BE49-F238E27FC236}">
+                  <a16:creationId xmlns:a16="http://schemas.microsoft.com/office/drawing/2014/main" id="{A8D31A6D-86EE-B144-82AE-9C654D033315}"/>
+                </a:ext>
+              </a:extLst>
+            </p:cNvPr>
+            <p:cNvSpPr txBox="1"/>
+            <p:nvPr/>
+          </p:nvSpPr>
+          <p:spPr>
+            <a:xfrm>
+              <a:off x="1624519" y="5980946"/>
+              <a:ext cx="936479" cy="469368"/>
+            </a:xfrm>
+            <a:prstGeom prst="rect">
+              <a:avLst/>
+            </a:prstGeom>
+            <a:noFill/>
+            <a:ln w="19050">
+              <a:noFill/>
+            </a:ln>
+          </p:spPr>
+          <p:txBody>
+            <a:bodyPr wrap="square" rtlCol="0">
+              <a:spAutoFit/>
+            </a:bodyPr>
+            <a:lstStyle/>
+            <a:p>
+              <a:pPr algn="ctr"/>
+              <a:r>
+                <a:rPr lang="en-US" sz="1200" b="1" dirty="0">
+                  <a:latin typeface="Arial" pitchFamily="34" charset="0"/>
+                  <a:cs typeface="Arial" pitchFamily="34" charset="0"/>
+                </a:rPr>
+                <a:t>Output Channel 1</a:t>
+              </a:r>
+            </a:p>
+          </p:txBody>
+        </p:sp>
+        <p:grpSp>
+          <p:nvGrpSpPr>
+            <p:cNvPr id="170" name="Group 169">
+              <a:extLst>
+                <a:ext uri="{FF2B5EF4-FFF2-40B4-BE49-F238E27FC236}">
+                  <a16:creationId xmlns:a16="http://schemas.microsoft.com/office/drawing/2014/main" id="{67F6C6D9-E2C4-5E49-8AC0-F80283430FCF}"/>
+                </a:ext>
+              </a:extLst>
+            </p:cNvPr>
+            <p:cNvGrpSpPr/>
+            <p:nvPr/>
+          </p:nvGrpSpPr>
+          <p:grpSpPr>
+            <a:xfrm>
+              <a:off x="2705492" y="6017236"/>
+              <a:ext cx="661683" cy="529690"/>
+              <a:chOff x="2705492" y="6017236"/>
+              <a:chExt cx="661683" cy="529690"/>
             </a:xfrm>
           </p:grpSpPr>
           <p:sp>
             <p:nvSpPr>
-              <p:cNvPr id="23" name="Oval 22"/>
+              <p:cNvPr id="168" name="Oval 167">
+                <a:extLst>
+                  <a:ext uri="{FF2B5EF4-FFF2-40B4-BE49-F238E27FC236}">
+                    <a16:creationId xmlns:a16="http://schemas.microsoft.com/office/drawing/2014/main" id="{9400750D-BE34-2244-BB92-D54B7CB234B9}"/>
+                  </a:ext>
+                </a:extLst>
+              </p:cNvPr>
               <p:cNvSpPr/>
               <p:nvPr/>
             </p:nvSpPr>
             <p:spPr>
               <a:xfrm>
-                <a:off x="2633980" y="723900"/>
-                <a:ext cx="2966720" cy="2966720"/>
+                <a:off x="2771489" y="6017236"/>
+                <a:ext cx="529690" cy="529690"/>
               </a:xfrm>
               <a:prstGeom prst="ellipse">
                 <a:avLst/>
@@ -13453,7 +16123,6 @@
               <a:solidFill>
                 <a:schemeClr val="bg1"/>
               </a:solidFill>
-              <a:ln w="25400"/>
             </p:spPr>
             <p:style>
               <a:lnRef idx="2">
@@ -13480,264 +16149,85 @@
               </a:p>
             </p:txBody>
           </p:sp>
-          <p:cxnSp>
-            <p:nvCxnSpPr>
-              <p:cNvPr id="24" name="Straight Connector 23"/>
-              <p:cNvCxnSpPr/>
+          <p:sp>
+            <p:nvSpPr>
+              <p:cNvPr id="169" name="TextBox 168">
+                <a:extLst>
+                  <a:ext uri="{FF2B5EF4-FFF2-40B4-BE49-F238E27FC236}">
+                    <a16:creationId xmlns:a16="http://schemas.microsoft.com/office/drawing/2014/main" id="{3CD00735-E32D-2D46-8B0D-B26BCF37CBCF}"/>
+                  </a:ext>
+                </a:extLst>
+              </p:cNvPr>
+              <p:cNvSpPr txBox="1"/>
               <p:nvPr/>
-            </p:nvCxnSpPr>
+            </p:nvSpPr>
             <p:spPr>
               <a:xfrm>
-                <a:off x="4117340" y="723900"/>
-                <a:ext cx="0" cy="2966720"/>
+                <a:off x="2705492" y="6145659"/>
+                <a:ext cx="661683" cy="276999"/>
               </a:xfrm>
-              <a:prstGeom prst="line">
+              <a:prstGeom prst="rect">
                 <a:avLst/>
               </a:prstGeom>
-              <a:ln w="25400"/>
+              <a:noFill/>
+              <a:ln w="19050">
+                <a:noFill/>
+              </a:ln>
             </p:spPr>
-            <p:style>
-              <a:lnRef idx="1">
-                <a:schemeClr val="accent1"/>
-              </a:lnRef>
-              <a:fillRef idx="0">
-                <a:schemeClr val="accent1"/>
-              </a:fillRef>
-              <a:effectRef idx="0">
-                <a:schemeClr val="accent1"/>
-              </a:effectRef>
-              <a:fontRef idx="minor">
-                <a:schemeClr val="tx1"/>
-              </a:fontRef>
-            </p:style>
-          </p:cxnSp>
-          <p:cxnSp>
-            <p:nvCxnSpPr>
-              <p:cNvPr id="25" name="Straight Connector 24"/>
-              <p:cNvCxnSpPr/>
-              <p:nvPr/>
-            </p:nvCxnSpPr>
-            <p:spPr>
-              <a:xfrm>
-                <a:off x="2633980" y="2207260"/>
-                <a:ext cx="2966720" cy="0"/>
-              </a:xfrm>
-              <a:prstGeom prst="line">
-                <a:avLst/>
-              </a:prstGeom>
-              <a:ln w="25400"/>
-            </p:spPr>
-            <p:style>
-              <a:lnRef idx="1">
-                <a:schemeClr val="accent1"/>
-              </a:lnRef>
-              <a:fillRef idx="0">
-                <a:schemeClr val="accent1"/>
-              </a:fillRef>
-              <a:effectRef idx="0">
-                <a:schemeClr val="accent1"/>
-              </a:effectRef>
-              <a:fontRef idx="minor">
-                <a:schemeClr val="tx1"/>
-              </a:fontRef>
-            </p:style>
-          </p:cxnSp>
-          <p:cxnSp>
-            <p:nvCxnSpPr>
-              <p:cNvPr id="26" name="Straight Connector 25"/>
-              <p:cNvCxnSpPr/>
-              <p:nvPr/>
-            </p:nvCxnSpPr>
-            <p:spPr>
-              <a:xfrm>
-                <a:off x="3068446" y="1158366"/>
-                <a:ext cx="2097788" cy="2097788"/>
-              </a:xfrm>
-              <a:prstGeom prst="line">
-                <a:avLst/>
-              </a:prstGeom>
-              <a:ln w="25400"/>
-            </p:spPr>
-            <p:style>
-              <a:lnRef idx="1">
-                <a:schemeClr val="accent1"/>
-              </a:lnRef>
-              <a:fillRef idx="0">
-                <a:schemeClr val="accent1"/>
-              </a:fillRef>
-              <a:effectRef idx="0">
-                <a:schemeClr val="accent1"/>
-              </a:effectRef>
-              <a:fontRef idx="minor">
-                <a:schemeClr val="tx1"/>
-              </a:fontRef>
-            </p:style>
-          </p:cxnSp>
-          <p:cxnSp>
-            <p:nvCxnSpPr>
-              <p:cNvPr id="27" name="Straight Connector 26"/>
-              <p:cNvCxnSpPr/>
-              <p:nvPr/>
-            </p:nvCxnSpPr>
-            <p:spPr>
-              <a:xfrm flipH="1">
-                <a:off x="3068446" y="1158366"/>
-                <a:ext cx="2097788" cy="2097788"/>
-              </a:xfrm>
-              <a:prstGeom prst="line">
-                <a:avLst/>
-              </a:prstGeom>
-              <a:ln w="25400"/>
-            </p:spPr>
-            <p:style>
-              <a:lnRef idx="1">
-                <a:schemeClr val="accent1"/>
-              </a:lnRef>
-              <a:fillRef idx="0">
-                <a:schemeClr val="accent1"/>
-              </a:fillRef>
-              <a:effectRef idx="0">
-                <a:schemeClr val="accent1"/>
-              </a:effectRef>
-              <a:fontRef idx="minor">
-                <a:schemeClr val="tx1"/>
-              </a:fontRef>
-            </p:style>
-          </p:cxnSp>
-          <p:cxnSp>
-            <p:nvCxnSpPr>
-              <p:cNvPr id="28" name="Straight Connector 27"/>
-              <p:cNvCxnSpPr/>
-              <p:nvPr/>
-            </p:nvCxnSpPr>
-            <p:spPr>
-              <a:xfrm>
-                <a:off x="3548380" y="855980"/>
-                <a:ext cx="1137920" cy="2702560"/>
-              </a:xfrm>
-              <a:prstGeom prst="line">
-                <a:avLst/>
-              </a:prstGeom>
-              <a:ln w="25400"/>
-            </p:spPr>
-            <p:style>
-              <a:lnRef idx="1">
-                <a:schemeClr val="accent1"/>
-              </a:lnRef>
-              <a:fillRef idx="0">
-                <a:schemeClr val="accent1"/>
-              </a:fillRef>
-              <a:effectRef idx="0">
-                <a:schemeClr val="accent1"/>
-              </a:effectRef>
-              <a:fontRef idx="minor">
-                <a:schemeClr val="tx1"/>
-              </a:fontRef>
-            </p:style>
-          </p:cxnSp>
-          <p:cxnSp>
-            <p:nvCxnSpPr>
-              <p:cNvPr id="29" name="Straight Connector 28"/>
-              <p:cNvCxnSpPr/>
-              <p:nvPr/>
-            </p:nvCxnSpPr>
-            <p:spPr>
-              <a:xfrm>
-                <a:off x="2743200" y="1656080"/>
-                <a:ext cx="2763520" cy="1106123"/>
-              </a:xfrm>
-              <a:prstGeom prst="line">
-                <a:avLst/>
-              </a:prstGeom>
-              <a:ln w="25400"/>
-            </p:spPr>
-            <p:style>
-              <a:lnRef idx="1">
-                <a:schemeClr val="accent1"/>
-              </a:lnRef>
-              <a:fillRef idx="0">
-                <a:schemeClr val="accent1"/>
-              </a:fillRef>
-              <a:effectRef idx="0">
-                <a:schemeClr val="accent1"/>
-              </a:effectRef>
-              <a:fontRef idx="minor">
-                <a:schemeClr val="tx1"/>
-              </a:fontRef>
-            </p:style>
-          </p:cxnSp>
-          <p:cxnSp>
-            <p:nvCxnSpPr>
-              <p:cNvPr id="30" name="Straight Connector 29"/>
-              <p:cNvCxnSpPr/>
-              <p:nvPr/>
-            </p:nvCxnSpPr>
-            <p:spPr>
-              <a:xfrm flipH="1">
-                <a:off x="3548381" y="855980"/>
-                <a:ext cx="1131984" cy="2702560"/>
-              </a:xfrm>
-              <a:prstGeom prst="line">
-                <a:avLst/>
-              </a:prstGeom>
-              <a:ln w="25400"/>
-            </p:spPr>
-            <p:style>
-              <a:lnRef idx="1">
-                <a:schemeClr val="accent1"/>
-              </a:lnRef>
-              <a:fillRef idx="0">
-                <a:schemeClr val="accent1"/>
-              </a:fillRef>
-              <a:effectRef idx="0">
-                <a:schemeClr val="accent1"/>
-              </a:effectRef>
-              <a:fontRef idx="minor">
-                <a:schemeClr val="tx1"/>
-              </a:fontRef>
-            </p:style>
-          </p:cxnSp>
-          <p:cxnSp>
-            <p:nvCxnSpPr>
-              <p:cNvPr id="31" name="Straight Connector 30"/>
-              <p:cNvCxnSpPr/>
-              <p:nvPr/>
-            </p:nvCxnSpPr>
-            <p:spPr>
-              <a:xfrm flipV="1">
-                <a:off x="2743200" y="1656080"/>
-                <a:ext cx="2748280" cy="1120203"/>
-              </a:xfrm>
-              <a:prstGeom prst="line">
-                <a:avLst/>
-              </a:prstGeom>
-              <a:ln w="25400"/>
-            </p:spPr>
-            <p:style>
-              <a:lnRef idx="1">
-                <a:schemeClr val="accent1"/>
-              </a:lnRef>
-              <a:fillRef idx="0">
-                <a:schemeClr val="accent1"/>
-              </a:fillRef>
-              <a:effectRef idx="0">
-                <a:schemeClr val="accent1"/>
-              </a:effectRef>
-              <a:fontRef idx="minor">
-                <a:schemeClr val="tx1"/>
-              </a:fontRef>
-            </p:style>
-          </p:cxnSp>
+            <p:txBody>
+              <a:bodyPr wrap="square" rtlCol="0">
+                <a:spAutoFit/>
+              </a:bodyPr>
+              <a:lstStyle/>
+              <a:p>
+                <a:pPr algn="ctr"/>
+                <a:r>
+                  <a:rPr lang="en-US" sz="1200" b="1" dirty="0">
+                    <a:latin typeface="Arial" pitchFamily="34" charset="0"/>
+                    <a:cs typeface="Arial" pitchFamily="34" charset="0"/>
+                  </a:rPr>
+                  <a:t>Ring 1</a:t>
+                </a:r>
+              </a:p>
+            </p:txBody>
+          </p:sp>
+        </p:grpSp>
+        <p:grpSp>
+          <p:nvGrpSpPr>
+            <p:cNvPr id="171" name="Group 170">
+              <a:extLst>
+                <a:ext uri="{FF2B5EF4-FFF2-40B4-BE49-F238E27FC236}">
+                  <a16:creationId xmlns:a16="http://schemas.microsoft.com/office/drawing/2014/main" id="{756ABFAC-CE73-1D43-BEC5-2A6FD6637681}"/>
+                </a:ext>
+              </a:extLst>
+            </p:cNvPr>
+            <p:cNvGrpSpPr/>
+            <p:nvPr/>
+          </p:nvGrpSpPr>
+          <p:grpSpPr>
+            <a:xfrm>
+              <a:off x="3543311" y="6023340"/>
+              <a:ext cx="661683" cy="529690"/>
+              <a:chOff x="2705492" y="6017236"/>
+              <a:chExt cx="661683" cy="529690"/>
+            </a:xfrm>
+          </p:grpSpPr>
           <p:sp>
             <p:nvSpPr>
-              <p:cNvPr id="32" name="Oval 31"/>
+              <p:cNvPr id="172" name="Oval 171">
+                <a:extLst>
+                  <a:ext uri="{FF2B5EF4-FFF2-40B4-BE49-F238E27FC236}">
+                    <a16:creationId xmlns:a16="http://schemas.microsoft.com/office/drawing/2014/main" id="{2651892B-8D0F-FE46-AF30-16D13CC7C6D4}"/>
+                  </a:ext>
+                </a:extLst>
+              </p:cNvPr>
               <p:cNvSpPr/>
               <p:nvPr/>
             </p:nvSpPr>
             <p:spPr>
               <a:xfrm>
-                <a:off x="3368040" y="1457960"/>
-                <a:ext cx="1498600" cy="1498600"/>
+                <a:off x="2771489" y="6017236"/>
+                <a:ext cx="529690" cy="529690"/>
               </a:xfrm>
               <a:prstGeom prst="ellipse">
                 <a:avLst/>
@@ -13745,7 +16235,6 @@
               <a:solidFill>
                 <a:schemeClr val="bg1"/>
               </a:solidFill>
-              <a:ln w="25400"/>
             </p:spPr>
             <p:style>
               <a:lnRef idx="2">
@@ -13772,82 +16261,245 @@
               </a:p>
             </p:txBody>
           </p:sp>
+          <p:sp>
+            <p:nvSpPr>
+              <p:cNvPr id="173" name="TextBox 172">
+                <a:extLst>
+                  <a:ext uri="{FF2B5EF4-FFF2-40B4-BE49-F238E27FC236}">
+                    <a16:creationId xmlns:a16="http://schemas.microsoft.com/office/drawing/2014/main" id="{CA918751-C341-F54A-BCB7-14D7E1902CF1}"/>
+                  </a:ext>
+                </a:extLst>
+              </p:cNvPr>
+              <p:cNvSpPr txBox="1"/>
+              <p:nvPr/>
+            </p:nvSpPr>
+            <p:spPr>
+              <a:xfrm>
+                <a:off x="2705492" y="6145659"/>
+                <a:ext cx="661683" cy="276999"/>
+              </a:xfrm>
+              <a:prstGeom prst="rect">
+                <a:avLst/>
+              </a:prstGeom>
+              <a:noFill/>
+              <a:ln w="19050">
+                <a:noFill/>
+              </a:ln>
+            </p:spPr>
+            <p:txBody>
+              <a:bodyPr wrap="square" rtlCol="0">
+                <a:spAutoFit/>
+              </a:bodyPr>
+              <a:lstStyle/>
+              <a:p>
+                <a:pPr algn="ctr"/>
+                <a:r>
+                  <a:rPr lang="en-US" sz="1200" b="1" dirty="0">
+                    <a:latin typeface="Arial" pitchFamily="34" charset="0"/>
+                    <a:cs typeface="Arial" pitchFamily="34" charset="0"/>
+                  </a:rPr>
+                  <a:t>Ring 2</a:t>
+                </a:r>
+              </a:p>
+            </p:txBody>
+          </p:sp>
         </p:grpSp>
+      </p:grpSp>
+      <p:cxnSp>
+        <p:nvCxnSpPr>
+          <p:cNvPr id="145" name="Straight Arrow Connector 144">
+            <a:extLst>
+              <a:ext uri="{FF2B5EF4-FFF2-40B4-BE49-F238E27FC236}">
+                <a16:creationId xmlns:a16="http://schemas.microsoft.com/office/drawing/2014/main" id="{EB1B3DB8-9C26-004E-A78D-78C0C55ACED7}"/>
+              </a:ext>
+            </a:extLst>
+          </p:cNvPr>
+          <p:cNvCxnSpPr>
+            <a:cxnSpLocks/>
+            <a:stCxn id="141" idx="2"/>
+            <a:endCxn id="168" idx="0"/>
+          </p:cNvCxnSpPr>
+          <p:nvPr/>
+        </p:nvCxnSpPr>
+        <p:spPr>
+          <a:xfrm flipH="1">
+            <a:off x="2862776" y="5490375"/>
+            <a:ext cx="438404" cy="398828"/>
+          </a:xfrm>
+          <a:prstGeom prst="straightConnector1">
+            <a:avLst/>
+          </a:prstGeom>
+          <a:ln w="25400">
+            <a:solidFill>
+              <a:srgbClr val="00B050"/>
+            </a:solidFill>
+            <a:tailEnd type="arrow"/>
+          </a:ln>
+        </p:spPr>
+        <p:style>
+          <a:lnRef idx="1">
+            <a:schemeClr val="accent1"/>
+          </a:lnRef>
+          <a:fillRef idx="0">
+            <a:schemeClr val="accent1"/>
+          </a:fillRef>
+          <a:effectRef idx="0">
+            <a:schemeClr val="accent1"/>
+          </a:effectRef>
+          <a:fontRef idx="minor">
+            <a:schemeClr val="tx1"/>
+          </a:fontRef>
+        </p:style>
+      </p:cxnSp>
+      <p:cxnSp>
+        <p:nvCxnSpPr>
+          <p:cNvPr id="146" name="Straight Arrow Connector 145">
+            <a:extLst>
+              <a:ext uri="{FF2B5EF4-FFF2-40B4-BE49-F238E27FC236}">
+                <a16:creationId xmlns:a16="http://schemas.microsoft.com/office/drawing/2014/main" id="{BD670ECD-ECCA-6549-AE3E-3D6D4707BA68}"/>
+              </a:ext>
+            </a:extLst>
+          </p:cNvPr>
+          <p:cNvCxnSpPr>
+            <a:cxnSpLocks/>
+            <a:stCxn id="142" idx="2"/>
+            <a:endCxn id="172" idx="0"/>
+          </p:cNvCxnSpPr>
+          <p:nvPr/>
+        </p:nvCxnSpPr>
+        <p:spPr>
+          <a:xfrm flipH="1">
+            <a:off x="3700595" y="5490319"/>
+            <a:ext cx="1449590" cy="404988"/>
+          </a:xfrm>
+          <a:prstGeom prst="straightConnector1">
+            <a:avLst/>
+          </a:prstGeom>
+          <a:ln w="25400">
+            <a:solidFill>
+              <a:srgbClr val="00B050"/>
+            </a:solidFill>
+            <a:tailEnd type="arrow"/>
+          </a:ln>
+        </p:spPr>
+        <p:style>
+          <a:lnRef idx="1">
+            <a:schemeClr val="accent1"/>
+          </a:lnRef>
+          <a:fillRef idx="0">
+            <a:schemeClr val="accent1"/>
+          </a:fillRef>
+          <a:effectRef idx="0">
+            <a:schemeClr val="accent1"/>
+          </a:effectRef>
+          <a:fontRef idx="minor">
+            <a:schemeClr val="tx1"/>
+          </a:fontRef>
+        </p:style>
+      </p:cxnSp>
+      <p:grpSp>
+        <p:nvGrpSpPr>
+          <p:cNvPr id="179" name="Group 178">
+            <a:extLst>
+              <a:ext uri="{FF2B5EF4-FFF2-40B4-BE49-F238E27FC236}">
+                <a16:creationId xmlns:a16="http://schemas.microsoft.com/office/drawing/2014/main" id="{8861B3D8-860A-D545-B17D-6B37CDC0B2DE}"/>
+              </a:ext>
+            </a:extLst>
+          </p:cNvPr>
+          <p:cNvGrpSpPr/>
+          <p:nvPr/>
+        </p:nvGrpSpPr>
+        <p:grpSpPr>
+          <a:xfrm>
+            <a:off x="4405039" y="5787656"/>
+            <a:ext cx="2806071" cy="792865"/>
+            <a:chOff x="1624519" y="5920280"/>
+            <a:chExt cx="2806071" cy="792865"/>
+          </a:xfrm>
+        </p:grpSpPr>
         <p:sp>
           <p:nvSpPr>
-            <p:cNvPr id="11" name="TextBox 10"/>
+            <p:cNvPr id="180" name="Rounded Rectangle 179">
+              <a:extLst>
+                <a:ext uri="{FF2B5EF4-FFF2-40B4-BE49-F238E27FC236}">
+                  <a16:creationId xmlns:a16="http://schemas.microsoft.com/office/drawing/2014/main" id="{A1BCFA76-957D-AB44-A8E2-F0932B338932}"/>
+                </a:ext>
+              </a:extLst>
+            </p:cNvPr>
+            <p:cNvSpPr/>
+            <p:nvPr/>
+          </p:nvSpPr>
+          <p:spPr>
+            <a:xfrm>
+              <a:off x="1624519" y="5920280"/>
+              <a:ext cx="2806071" cy="792865"/>
+            </a:xfrm>
+            <a:prstGeom prst="roundRect">
+              <a:avLst/>
+            </a:prstGeom>
+            <a:solidFill>
+              <a:schemeClr val="accent2">
+                <a:lumMod val="20000"/>
+                <a:lumOff val="80000"/>
+              </a:schemeClr>
+            </a:solidFill>
+            <a:ln w="25400">
+              <a:solidFill>
+                <a:schemeClr val="accent4">
+                  <a:lumMod val="75000"/>
+                </a:schemeClr>
+              </a:solidFill>
+            </a:ln>
+          </p:spPr>
+          <p:style>
+            <a:lnRef idx="2">
+              <a:schemeClr val="accent1">
+                <a:shade val="50000"/>
+              </a:schemeClr>
+            </a:lnRef>
+            <a:fillRef idx="1">
+              <a:schemeClr val="accent1"/>
+            </a:fillRef>
+            <a:effectRef idx="0">
+              <a:schemeClr val="accent1"/>
+            </a:effectRef>
+            <a:fontRef idx="minor">
+              <a:schemeClr val="lt1"/>
+            </a:fontRef>
+          </p:style>
+          <p:txBody>
+            <a:bodyPr rtlCol="0" anchor="ctr"/>
+            <a:lstStyle/>
+            <a:p>
+              <a:pPr algn="ctr"/>
+              <a:endParaRPr lang="en-US" dirty="0"/>
+            </a:p>
+          </p:txBody>
+        </p:sp>
+        <p:sp>
+          <p:nvSpPr>
+            <p:cNvPr id="181" name="TextBox 180">
+              <a:extLst>
+                <a:ext uri="{FF2B5EF4-FFF2-40B4-BE49-F238E27FC236}">
+                  <a16:creationId xmlns:a16="http://schemas.microsoft.com/office/drawing/2014/main" id="{01283398-9A7E-C845-B3C4-ABD57F1B2440}"/>
+                </a:ext>
+              </a:extLst>
+            </p:cNvPr>
             <p:cNvSpPr txBox="1"/>
             <p:nvPr/>
           </p:nvSpPr>
           <p:spPr>
             <a:xfrm>
-              <a:off x="3419852" y="1952145"/>
-              <a:ext cx="301686" cy="369332"/>
+              <a:off x="1624519" y="5980946"/>
+              <a:ext cx="936479" cy="469368"/>
             </a:xfrm>
             <a:prstGeom prst="rect">
               <a:avLst/>
             </a:prstGeom>
             <a:noFill/>
-          </p:spPr>
-          <p:txBody>
-            <a:bodyPr wrap="none" rtlCol="0">
-              <a:spAutoFit/>
-            </a:bodyPr>
-            <a:lstStyle/>
-            <a:p>
-              <a:r>
-                <a:rPr lang="en-US" smtClean="0"/>
-                <a:t>1</a:t>
-              </a:r>
-              <a:endParaRPr lang="en-US"/>
-            </a:p>
-          </p:txBody>
-        </p:sp>
-        <p:sp>
-          <p:nvSpPr>
-            <p:cNvPr id="12" name="TextBox 11"/>
-            <p:cNvSpPr txBox="1"/>
-            <p:nvPr/>
-          </p:nvSpPr>
-          <p:spPr>
-            <a:xfrm>
-              <a:off x="3816210" y="1718010"/>
-              <a:ext cx="301686" cy="369332"/>
-            </a:xfrm>
-            <a:prstGeom prst="rect">
-              <a:avLst/>
-            </a:prstGeom>
-            <a:noFill/>
-          </p:spPr>
-          <p:txBody>
-            <a:bodyPr wrap="none" rtlCol="0">
-              <a:spAutoFit/>
-            </a:bodyPr>
-            <a:lstStyle/>
-            <a:p>
-              <a:r>
-                <a:rPr lang="en-US" smtClean="0"/>
-                <a:t>1</a:t>
-              </a:r>
-              <a:endParaRPr lang="en-US"/>
-            </a:p>
-          </p:txBody>
-        </p:sp>
-        <p:sp>
-          <p:nvSpPr>
-            <p:cNvPr id="13" name="TextBox 12"/>
-            <p:cNvSpPr txBox="1"/>
-            <p:nvPr/>
-          </p:nvSpPr>
-          <p:spPr>
-            <a:xfrm>
-              <a:off x="3670102" y="1891738"/>
-              <a:ext cx="304800" cy="369332"/>
-            </a:xfrm>
-            <a:prstGeom prst="rect">
-              <a:avLst/>
-            </a:prstGeom>
-            <a:noFill/>
+            <a:ln w="19050">
+              <a:noFill/>
+            </a:ln>
           </p:spPr>
           <p:txBody>
             <a:bodyPr wrap="square" rtlCol="0">
@@ -13855,322 +16507,53 @@
             </a:bodyPr>
             <a:lstStyle/>
             <a:p>
+              <a:pPr algn="ctr"/>
               <a:r>
-                <a:rPr lang="en-US" smtClean="0"/>
-                <a:t>1</a:t>
-              </a:r>
-              <a:endParaRPr lang="en-US"/>
-            </a:p>
-          </p:txBody>
-        </p:sp>
-        <p:sp>
-          <p:nvSpPr>
-            <p:cNvPr id="14" name="TextBox 13"/>
-            <p:cNvSpPr txBox="1"/>
-            <p:nvPr/>
-          </p:nvSpPr>
-          <p:spPr>
-            <a:xfrm>
-              <a:off x="3941373" y="1221139"/>
-              <a:ext cx="301686" cy="369332"/>
-            </a:xfrm>
-            <a:prstGeom prst="rect">
-              <a:avLst/>
-            </a:prstGeom>
-            <a:noFill/>
-          </p:spPr>
-          <p:txBody>
-            <a:bodyPr wrap="none" rtlCol="0">
-              <a:spAutoFit/>
-            </a:bodyPr>
-            <a:lstStyle/>
-            <a:p>
-              <a:r>
-                <a:rPr lang="en-US" smtClean="0"/>
-                <a:t>1</a:t>
-              </a:r>
-              <a:endParaRPr lang="en-US"/>
-            </a:p>
-          </p:txBody>
-        </p:sp>
-        <p:sp>
-          <p:nvSpPr>
-            <p:cNvPr id="15" name="TextBox 14"/>
-            <p:cNvSpPr txBox="1"/>
-            <p:nvPr/>
-          </p:nvSpPr>
-          <p:spPr>
-            <a:xfrm>
-              <a:off x="3949404" y="1467596"/>
-              <a:ext cx="301686" cy="369332"/>
-            </a:xfrm>
-            <a:prstGeom prst="rect">
-              <a:avLst/>
-            </a:prstGeom>
-            <a:noFill/>
-          </p:spPr>
-          <p:txBody>
-            <a:bodyPr wrap="none" rtlCol="0">
-              <a:spAutoFit/>
-            </a:bodyPr>
-            <a:lstStyle/>
-            <a:p>
-              <a:r>
-                <a:rPr lang="en-US" smtClean="0"/>
-                <a:t>1</a:t>
-              </a:r>
-              <a:endParaRPr lang="en-US"/>
-            </a:p>
-          </p:txBody>
-        </p:sp>
-        <p:sp>
-          <p:nvSpPr>
-            <p:cNvPr id="16" name="TextBox 15"/>
-            <p:cNvSpPr txBox="1"/>
-            <p:nvPr/>
-          </p:nvSpPr>
-          <p:spPr>
-            <a:xfrm>
-              <a:off x="3204494" y="752774"/>
-              <a:ext cx="301686" cy="369332"/>
-            </a:xfrm>
-            <a:prstGeom prst="rect">
-              <a:avLst/>
-            </a:prstGeom>
-            <a:noFill/>
-          </p:spPr>
-          <p:txBody>
-            <a:bodyPr wrap="none" rtlCol="0">
-              <a:spAutoFit/>
-            </a:bodyPr>
-            <a:lstStyle/>
-            <a:p>
-              <a:r>
-                <a:rPr lang="en-US" dirty="0" smtClean="0"/>
-                <a:t>3</a:t>
-              </a:r>
-              <a:endParaRPr lang="en-US" dirty="0"/>
-            </a:p>
-          </p:txBody>
-        </p:sp>
-        <p:sp>
-          <p:nvSpPr>
-            <p:cNvPr id="17" name="TextBox 16"/>
-            <p:cNvSpPr txBox="1"/>
-            <p:nvPr/>
-          </p:nvSpPr>
-          <p:spPr>
-            <a:xfrm>
-              <a:off x="3866317" y="988053"/>
-              <a:ext cx="301686" cy="369332"/>
-            </a:xfrm>
-            <a:prstGeom prst="rect">
-              <a:avLst/>
-            </a:prstGeom>
-            <a:noFill/>
-          </p:spPr>
-          <p:txBody>
-            <a:bodyPr wrap="none" rtlCol="0">
-              <a:spAutoFit/>
-            </a:bodyPr>
-            <a:lstStyle/>
-            <a:p>
-              <a:r>
-                <a:rPr lang="en-US" smtClean="0"/>
-                <a:t>1</a:t>
-              </a:r>
-              <a:endParaRPr lang="en-US"/>
-            </a:p>
-          </p:txBody>
-        </p:sp>
-        <p:sp>
-          <p:nvSpPr>
-            <p:cNvPr id="18" name="TextBox 17"/>
-            <p:cNvSpPr txBox="1"/>
-            <p:nvPr/>
-          </p:nvSpPr>
-          <p:spPr>
-            <a:xfrm>
-              <a:off x="2778779" y="1020617"/>
-              <a:ext cx="301686" cy="369332"/>
-            </a:xfrm>
-            <a:prstGeom prst="rect">
-              <a:avLst/>
-            </a:prstGeom>
-            <a:noFill/>
-          </p:spPr>
-          <p:txBody>
-            <a:bodyPr wrap="none" rtlCol="0">
-              <a:spAutoFit/>
-            </a:bodyPr>
-            <a:lstStyle/>
-            <a:p>
-              <a:r>
-                <a:rPr lang="en-US" dirty="0" smtClean="0"/>
-                <a:t>3</a:t>
-              </a:r>
-              <a:endParaRPr lang="en-US" dirty="0"/>
-            </a:p>
-          </p:txBody>
-        </p:sp>
-        <p:sp>
-          <p:nvSpPr>
-            <p:cNvPr id="19" name="TextBox 18"/>
-            <p:cNvSpPr txBox="1"/>
-            <p:nvPr/>
-          </p:nvSpPr>
-          <p:spPr>
-            <a:xfrm>
-              <a:off x="3643467" y="845026"/>
-              <a:ext cx="301686" cy="369332"/>
-            </a:xfrm>
-            <a:prstGeom prst="rect">
-              <a:avLst/>
-            </a:prstGeom>
-            <a:noFill/>
-          </p:spPr>
-          <p:txBody>
-            <a:bodyPr wrap="none" rtlCol="0">
-              <a:spAutoFit/>
-            </a:bodyPr>
-            <a:lstStyle/>
-            <a:p>
-              <a:r>
-                <a:rPr lang="en-US" dirty="0"/>
-                <a:t>3</a:t>
+                <a:rPr lang="en-US" sz="1200" b="1" dirty="0">
+                  <a:latin typeface="Arial" pitchFamily="34" charset="0"/>
+                  <a:cs typeface="Arial" pitchFamily="34" charset="0"/>
+                </a:rPr>
+                <a:t>Output Channel 2</a:t>
               </a:r>
             </a:p>
           </p:txBody>
         </p:sp>
-        <p:sp>
-          <p:nvSpPr>
-            <p:cNvPr id="20" name="TextBox 19"/>
-            <p:cNvSpPr txBox="1"/>
-            <p:nvPr/>
-          </p:nvSpPr>
-          <p:spPr>
-            <a:xfrm>
-              <a:off x="2964263" y="816424"/>
-              <a:ext cx="301686" cy="369332"/>
-            </a:xfrm>
-            <a:prstGeom prst="rect">
-              <a:avLst/>
-            </a:prstGeom>
-            <a:noFill/>
-          </p:spPr>
-          <p:txBody>
-            <a:bodyPr wrap="none" rtlCol="0">
-              <a:spAutoFit/>
-            </a:bodyPr>
-            <a:lstStyle/>
-            <a:p>
-              <a:r>
-                <a:rPr lang="en-US" dirty="0" smtClean="0"/>
-                <a:t>3</a:t>
-              </a:r>
-              <a:endParaRPr lang="en-US" dirty="0"/>
-            </a:p>
-          </p:txBody>
-        </p:sp>
-        <p:sp>
-          <p:nvSpPr>
-            <p:cNvPr id="21" name="TextBox 20"/>
-            <p:cNvSpPr txBox="1"/>
-            <p:nvPr/>
-          </p:nvSpPr>
-          <p:spPr>
-            <a:xfrm>
-              <a:off x="3443887" y="742533"/>
-              <a:ext cx="301686" cy="369332"/>
-            </a:xfrm>
-            <a:prstGeom prst="rect">
-              <a:avLst/>
-            </a:prstGeom>
-            <a:noFill/>
-          </p:spPr>
-          <p:txBody>
-            <a:bodyPr wrap="none" rtlCol="0">
-              <a:spAutoFit/>
-            </a:bodyPr>
-            <a:lstStyle/>
-            <a:p>
-              <a:r>
-                <a:rPr lang="en-US" dirty="0" smtClean="0"/>
-                <a:t>3</a:t>
-              </a:r>
-              <a:endParaRPr lang="en-US" dirty="0"/>
-            </a:p>
-          </p:txBody>
-        </p:sp>
-        <p:sp>
-          <p:nvSpPr>
-            <p:cNvPr id="22" name="TextBox 21"/>
-            <p:cNvSpPr txBox="1"/>
-            <p:nvPr/>
-          </p:nvSpPr>
-          <p:spPr>
-            <a:xfrm>
-              <a:off x="2686786" y="1233885"/>
-              <a:ext cx="301686" cy="369332"/>
-            </a:xfrm>
-            <a:prstGeom prst="rect">
-              <a:avLst/>
-            </a:prstGeom>
-            <a:noFill/>
-          </p:spPr>
-          <p:txBody>
-            <a:bodyPr wrap="none" rtlCol="0">
-              <a:spAutoFit/>
-            </a:bodyPr>
-            <a:lstStyle/>
-            <a:p>
-              <a:r>
-                <a:rPr lang="en-US" dirty="0" smtClean="0"/>
-                <a:t>3</a:t>
-              </a:r>
-              <a:endParaRPr lang="en-US" dirty="0"/>
-            </a:p>
-          </p:txBody>
-        </p:sp>
-      </p:grpSp>
-      <p:grpSp>
-        <p:nvGrpSpPr>
-          <p:cNvPr id="33" name="Group 32"/>
-          <p:cNvGrpSpPr/>
-          <p:nvPr/>
-        </p:nvGrpSpPr>
-        <p:grpSpPr>
-          <a:xfrm>
-            <a:off x="4331925" y="4214668"/>
-            <a:ext cx="1623060" cy="1623060"/>
-            <a:chOff x="2633980" y="723900"/>
-            <a:chExt cx="1623060" cy="1623060"/>
-          </a:xfrm>
-        </p:grpSpPr>
         <p:grpSp>
           <p:nvGrpSpPr>
-            <p:cNvPr id="34" name="Group 33"/>
+            <p:cNvPr id="182" name="Group 181">
+              <a:extLst>
+                <a:ext uri="{FF2B5EF4-FFF2-40B4-BE49-F238E27FC236}">
+                  <a16:creationId xmlns:a16="http://schemas.microsoft.com/office/drawing/2014/main" id="{89507A3C-238D-3D45-BBF8-854033B32805}"/>
+                </a:ext>
+              </a:extLst>
+            </p:cNvPr>
             <p:cNvGrpSpPr/>
             <p:nvPr/>
           </p:nvGrpSpPr>
           <p:grpSpPr>
             <a:xfrm>
-              <a:off x="2633980" y="723900"/>
-              <a:ext cx="1623060" cy="1623060"/>
-              <a:chOff x="2633980" y="723900"/>
-              <a:chExt cx="2966720" cy="2966720"/>
+              <a:off x="2705492" y="6017236"/>
+              <a:ext cx="661683" cy="529690"/>
+              <a:chOff x="2705492" y="6017236"/>
+              <a:chExt cx="661683" cy="529690"/>
             </a:xfrm>
           </p:grpSpPr>
           <p:sp>
             <p:nvSpPr>
-              <p:cNvPr id="41" name="Oval 40"/>
+              <p:cNvPr id="186" name="Oval 185">
+                <a:extLst>
+                  <a:ext uri="{FF2B5EF4-FFF2-40B4-BE49-F238E27FC236}">
+                    <a16:creationId xmlns:a16="http://schemas.microsoft.com/office/drawing/2014/main" id="{9F4B3370-C9C5-7648-8D1E-1538A2E9F304}"/>
+                  </a:ext>
+                </a:extLst>
+              </p:cNvPr>
               <p:cNvSpPr/>
               <p:nvPr/>
             </p:nvSpPr>
             <p:spPr>
               <a:xfrm>
-                <a:off x="2633980" y="723900"/>
-                <a:ext cx="2966720" cy="2966720"/>
+                <a:off x="2771489" y="6017236"/>
+                <a:ext cx="529690" cy="529690"/>
               </a:xfrm>
               <a:prstGeom prst="ellipse">
                 <a:avLst/>
@@ -14178,7 +16561,6 @@
               <a:solidFill>
                 <a:schemeClr val="bg1"/>
               </a:solidFill>
-              <a:ln w="25400"/>
             </p:spPr>
             <p:style>
               <a:lnRef idx="2">
@@ -14205,264 +16587,85 @@
               </a:p>
             </p:txBody>
           </p:sp>
-          <p:cxnSp>
-            <p:nvCxnSpPr>
-              <p:cNvPr id="42" name="Straight Connector 41"/>
-              <p:cNvCxnSpPr/>
+          <p:sp>
+            <p:nvSpPr>
+              <p:cNvPr id="187" name="TextBox 186">
+                <a:extLst>
+                  <a:ext uri="{FF2B5EF4-FFF2-40B4-BE49-F238E27FC236}">
+                    <a16:creationId xmlns:a16="http://schemas.microsoft.com/office/drawing/2014/main" id="{4BA1D39B-EF78-EB47-96A0-AD0B3779A5A4}"/>
+                  </a:ext>
+                </a:extLst>
+              </p:cNvPr>
+              <p:cNvSpPr txBox="1"/>
               <p:nvPr/>
-            </p:nvCxnSpPr>
+            </p:nvSpPr>
             <p:spPr>
               <a:xfrm>
-                <a:off x="4117340" y="723900"/>
-                <a:ext cx="0" cy="2966720"/>
+                <a:off x="2705492" y="6145659"/>
+                <a:ext cx="661683" cy="276999"/>
               </a:xfrm>
-              <a:prstGeom prst="line">
+              <a:prstGeom prst="rect">
                 <a:avLst/>
               </a:prstGeom>
-              <a:ln w="25400"/>
+              <a:noFill/>
+              <a:ln w="19050">
+                <a:noFill/>
+              </a:ln>
             </p:spPr>
-            <p:style>
-              <a:lnRef idx="1">
-                <a:schemeClr val="accent1"/>
-              </a:lnRef>
-              <a:fillRef idx="0">
-                <a:schemeClr val="accent1"/>
-              </a:fillRef>
-              <a:effectRef idx="0">
-                <a:schemeClr val="accent1"/>
-              </a:effectRef>
-              <a:fontRef idx="minor">
-                <a:schemeClr val="tx1"/>
-              </a:fontRef>
-            </p:style>
-          </p:cxnSp>
-          <p:cxnSp>
-            <p:nvCxnSpPr>
-              <p:cNvPr id="43" name="Straight Connector 42"/>
-              <p:cNvCxnSpPr/>
-              <p:nvPr/>
-            </p:nvCxnSpPr>
-            <p:spPr>
-              <a:xfrm>
-                <a:off x="2633980" y="2207260"/>
-                <a:ext cx="2966720" cy="0"/>
-              </a:xfrm>
-              <a:prstGeom prst="line">
-                <a:avLst/>
-              </a:prstGeom>
-              <a:ln w="25400"/>
-            </p:spPr>
-            <p:style>
-              <a:lnRef idx="1">
-                <a:schemeClr val="accent1"/>
-              </a:lnRef>
-              <a:fillRef idx="0">
-                <a:schemeClr val="accent1"/>
-              </a:fillRef>
-              <a:effectRef idx="0">
-                <a:schemeClr val="accent1"/>
-              </a:effectRef>
-              <a:fontRef idx="minor">
-                <a:schemeClr val="tx1"/>
-              </a:fontRef>
-            </p:style>
-          </p:cxnSp>
-          <p:cxnSp>
-            <p:nvCxnSpPr>
-              <p:cNvPr id="44" name="Straight Connector 43"/>
-              <p:cNvCxnSpPr/>
-              <p:nvPr/>
-            </p:nvCxnSpPr>
-            <p:spPr>
-              <a:xfrm>
-                <a:off x="3068446" y="1158366"/>
-                <a:ext cx="2097788" cy="2097788"/>
-              </a:xfrm>
-              <a:prstGeom prst="line">
-                <a:avLst/>
-              </a:prstGeom>
-              <a:ln w="25400"/>
-            </p:spPr>
-            <p:style>
-              <a:lnRef idx="1">
-                <a:schemeClr val="accent1"/>
-              </a:lnRef>
-              <a:fillRef idx="0">
-                <a:schemeClr val="accent1"/>
-              </a:fillRef>
-              <a:effectRef idx="0">
-                <a:schemeClr val="accent1"/>
-              </a:effectRef>
-              <a:fontRef idx="minor">
-                <a:schemeClr val="tx1"/>
-              </a:fontRef>
-            </p:style>
-          </p:cxnSp>
-          <p:cxnSp>
-            <p:nvCxnSpPr>
-              <p:cNvPr id="45" name="Straight Connector 44"/>
-              <p:cNvCxnSpPr/>
-              <p:nvPr/>
-            </p:nvCxnSpPr>
-            <p:spPr>
-              <a:xfrm flipH="1">
-                <a:off x="3068446" y="1158366"/>
-                <a:ext cx="2097788" cy="2097788"/>
-              </a:xfrm>
-              <a:prstGeom prst="line">
-                <a:avLst/>
-              </a:prstGeom>
-              <a:ln w="25400"/>
-            </p:spPr>
-            <p:style>
-              <a:lnRef idx="1">
-                <a:schemeClr val="accent1"/>
-              </a:lnRef>
-              <a:fillRef idx="0">
-                <a:schemeClr val="accent1"/>
-              </a:fillRef>
-              <a:effectRef idx="0">
-                <a:schemeClr val="accent1"/>
-              </a:effectRef>
-              <a:fontRef idx="minor">
-                <a:schemeClr val="tx1"/>
-              </a:fontRef>
-            </p:style>
-          </p:cxnSp>
-          <p:cxnSp>
-            <p:nvCxnSpPr>
-              <p:cNvPr id="46" name="Straight Connector 45"/>
-              <p:cNvCxnSpPr/>
-              <p:nvPr/>
-            </p:nvCxnSpPr>
-            <p:spPr>
-              <a:xfrm>
-                <a:off x="3548380" y="855980"/>
-                <a:ext cx="1137920" cy="2702560"/>
-              </a:xfrm>
-              <a:prstGeom prst="line">
-                <a:avLst/>
-              </a:prstGeom>
-              <a:ln w="25400"/>
-            </p:spPr>
-            <p:style>
-              <a:lnRef idx="1">
-                <a:schemeClr val="accent1"/>
-              </a:lnRef>
-              <a:fillRef idx="0">
-                <a:schemeClr val="accent1"/>
-              </a:fillRef>
-              <a:effectRef idx="0">
-                <a:schemeClr val="accent1"/>
-              </a:effectRef>
-              <a:fontRef idx="minor">
-                <a:schemeClr val="tx1"/>
-              </a:fontRef>
-            </p:style>
-          </p:cxnSp>
-          <p:cxnSp>
-            <p:nvCxnSpPr>
-              <p:cNvPr id="47" name="Straight Connector 46"/>
-              <p:cNvCxnSpPr/>
-              <p:nvPr/>
-            </p:nvCxnSpPr>
-            <p:spPr>
-              <a:xfrm>
-                <a:off x="2743200" y="1656080"/>
-                <a:ext cx="2763520" cy="1106123"/>
-              </a:xfrm>
-              <a:prstGeom prst="line">
-                <a:avLst/>
-              </a:prstGeom>
-              <a:ln w="25400"/>
-            </p:spPr>
-            <p:style>
-              <a:lnRef idx="1">
-                <a:schemeClr val="accent1"/>
-              </a:lnRef>
-              <a:fillRef idx="0">
-                <a:schemeClr val="accent1"/>
-              </a:fillRef>
-              <a:effectRef idx="0">
-                <a:schemeClr val="accent1"/>
-              </a:effectRef>
-              <a:fontRef idx="minor">
-                <a:schemeClr val="tx1"/>
-              </a:fontRef>
-            </p:style>
-          </p:cxnSp>
-          <p:cxnSp>
-            <p:nvCxnSpPr>
-              <p:cNvPr id="48" name="Straight Connector 47"/>
-              <p:cNvCxnSpPr/>
-              <p:nvPr/>
-            </p:nvCxnSpPr>
-            <p:spPr>
-              <a:xfrm flipH="1">
-                <a:off x="3548381" y="855980"/>
-                <a:ext cx="1131984" cy="2702560"/>
-              </a:xfrm>
-              <a:prstGeom prst="line">
-                <a:avLst/>
-              </a:prstGeom>
-              <a:ln w="25400"/>
-            </p:spPr>
-            <p:style>
-              <a:lnRef idx="1">
-                <a:schemeClr val="accent1"/>
-              </a:lnRef>
-              <a:fillRef idx="0">
-                <a:schemeClr val="accent1"/>
-              </a:fillRef>
-              <a:effectRef idx="0">
-                <a:schemeClr val="accent1"/>
-              </a:effectRef>
-              <a:fontRef idx="minor">
-                <a:schemeClr val="tx1"/>
-              </a:fontRef>
-            </p:style>
-          </p:cxnSp>
-          <p:cxnSp>
-            <p:nvCxnSpPr>
-              <p:cNvPr id="49" name="Straight Connector 48"/>
-              <p:cNvCxnSpPr/>
-              <p:nvPr/>
-            </p:nvCxnSpPr>
-            <p:spPr>
-              <a:xfrm flipV="1">
-                <a:off x="2743200" y="1656080"/>
-                <a:ext cx="2748280" cy="1120203"/>
-              </a:xfrm>
-              <a:prstGeom prst="line">
-                <a:avLst/>
-              </a:prstGeom>
-              <a:ln w="25400"/>
-            </p:spPr>
-            <p:style>
-              <a:lnRef idx="1">
-                <a:schemeClr val="accent1"/>
-              </a:lnRef>
-              <a:fillRef idx="0">
-                <a:schemeClr val="accent1"/>
-              </a:fillRef>
-              <a:effectRef idx="0">
-                <a:schemeClr val="accent1"/>
-              </a:effectRef>
-              <a:fontRef idx="minor">
-                <a:schemeClr val="tx1"/>
-              </a:fontRef>
-            </p:style>
-          </p:cxnSp>
+            <p:txBody>
+              <a:bodyPr wrap="square" rtlCol="0">
+                <a:spAutoFit/>
+              </a:bodyPr>
+              <a:lstStyle/>
+              <a:p>
+                <a:pPr algn="ctr"/>
+                <a:r>
+                  <a:rPr lang="en-US" sz="1200" b="1" dirty="0">
+                    <a:latin typeface="Arial" pitchFamily="34" charset="0"/>
+                    <a:cs typeface="Arial" pitchFamily="34" charset="0"/>
+                  </a:rPr>
+                  <a:t>Ring 1</a:t>
+                </a:r>
+              </a:p>
+            </p:txBody>
+          </p:sp>
+        </p:grpSp>
+        <p:grpSp>
+          <p:nvGrpSpPr>
+            <p:cNvPr id="183" name="Group 182">
+              <a:extLst>
+                <a:ext uri="{FF2B5EF4-FFF2-40B4-BE49-F238E27FC236}">
+                  <a16:creationId xmlns:a16="http://schemas.microsoft.com/office/drawing/2014/main" id="{2BF40376-ADDA-3C46-B882-4133397D727A}"/>
+                </a:ext>
+              </a:extLst>
+            </p:cNvPr>
+            <p:cNvGrpSpPr/>
+            <p:nvPr/>
+          </p:nvGrpSpPr>
+          <p:grpSpPr>
+            <a:xfrm>
+              <a:off x="3543311" y="6023340"/>
+              <a:ext cx="661683" cy="529690"/>
+              <a:chOff x="2705492" y="6017236"/>
+              <a:chExt cx="661683" cy="529690"/>
+            </a:xfrm>
+          </p:grpSpPr>
           <p:sp>
             <p:nvSpPr>
-              <p:cNvPr id="50" name="Oval 49"/>
+              <p:cNvPr id="184" name="Oval 183">
+                <a:extLst>
+                  <a:ext uri="{FF2B5EF4-FFF2-40B4-BE49-F238E27FC236}">
+                    <a16:creationId xmlns:a16="http://schemas.microsoft.com/office/drawing/2014/main" id="{AB980858-C82F-BC43-BCA3-47FC342E6FF5}"/>
+                  </a:ext>
+                </a:extLst>
+              </p:cNvPr>
               <p:cNvSpPr/>
               <p:nvPr/>
             </p:nvSpPr>
             <p:spPr>
               <a:xfrm>
-                <a:off x="3368040" y="1457960"/>
-                <a:ext cx="1498600" cy="1498600"/>
+                <a:off x="2771489" y="6017236"/>
+                <a:ext cx="529690" cy="529690"/>
               </a:xfrm>
               <a:prstGeom prst="ellipse">
                 <a:avLst/>
@@ -14470,7 +16673,6 @@
               <a:solidFill>
                 <a:schemeClr val="bg1"/>
               </a:solidFill>
-              <a:ln w="25400"/>
             </p:spPr>
             <p:style>
               <a:lnRef idx="2">
@@ -14497,205 +16699,77 @@
               </a:p>
             </p:txBody>
           </p:sp>
+          <p:sp>
+            <p:nvSpPr>
+              <p:cNvPr id="185" name="TextBox 184">
+                <a:extLst>
+                  <a:ext uri="{FF2B5EF4-FFF2-40B4-BE49-F238E27FC236}">
+                    <a16:creationId xmlns:a16="http://schemas.microsoft.com/office/drawing/2014/main" id="{3EF7B70A-4A0A-514E-8BDC-0878920FC6F6}"/>
+                  </a:ext>
+                </a:extLst>
+              </p:cNvPr>
+              <p:cNvSpPr txBox="1"/>
+              <p:nvPr/>
+            </p:nvSpPr>
+            <p:spPr>
+              <a:xfrm>
+                <a:off x="2705492" y="6145659"/>
+                <a:ext cx="661683" cy="276999"/>
+              </a:xfrm>
+              <a:prstGeom prst="rect">
+                <a:avLst/>
+              </a:prstGeom>
+              <a:noFill/>
+              <a:ln w="19050">
+                <a:noFill/>
+              </a:ln>
+            </p:spPr>
+            <p:txBody>
+              <a:bodyPr wrap="square" rtlCol="0">
+                <a:spAutoFit/>
+              </a:bodyPr>
+              <a:lstStyle/>
+              <a:p>
+                <a:pPr algn="ctr"/>
+                <a:r>
+                  <a:rPr lang="en-US" sz="1200" b="1" dirty="0">
+                    <a:latin typeface="Arial" pitchFamily="34" charset="0"/>
+                    <a:cs typeface="Arial" pitchFamily="34" charset="0"/>
+                  </a:rPr>
+                  <a:t>Ring 2</a:t>
+                </a:r>
+              </a:p>
+            </p:txBody>
+          </p:sp>
         </p:grpSp>
-        <p:sp>
-          <p:nvSpPr>
-            <p:cNvPr id="35" name="TextBox 34"/>
-            <p:cNvSpPr txBox="1"/>
-            <p:nvPr/>
-          </p:nvSpPr>
-          <p:spPr>
-            <a:xfrm>
-              <a:off x="3419852" y="1952145"/>
-              <a:ext cx="301686" cy="369332"/>
-            </a:xfrm>
-            <a:prstGeom prst="rect">
-              <a:avLst/>
-            </a:prstGeom>
-            <a:noFill/>
-          </p:spPr>
-          <p:txBody>
-            <a:bodyPr wrap="none" rtlCol="0">
-              <a:spAutoFit/>
-            </a:bodyPr>
-            <a:lstStyle/>
-            <a:p>
-              <a:r>
-                <a:rPr lang="en-US" dirty="0" smtClean="0"/>
-                <a:t>2</a:t>
-              </a:r>
-              <a:endParaRPr lang="en-US" dirty="0"/>
-            </a:p>
-          </p:txBody>
-        </p:sp>
-        <p:sp>
-          <p:nvSpPr>
-            <p:cNvPr id="36" name="TextBox 35"/>
-            <p:cNvSpPr txBox="1"/>
-            <p:nvPr/>
-          </p:nvSpPr>
-          <p:spPr>
-            <a:xfrm>
-              <a:off x="3816210" y="1718010"/>
-              <a:ext cx="301686" cy="369332"/>
-            </a:xfrm>
-            <a:prstGeom prst="rect">
-              <a:avLst/>
-            </a:prstGeom>
-            <a:noFill/>
-          </p:spPr>
-          <p:txBody>
-            <a:bodyPr wrap="none" rtlCol="0">
-              <a:spAutoFit/>
-            </a:bodyPr>
-            <a:lstStyle/>
-            <a:p>
-              <a:r>
-                <a:rPr lang="en-US" dirty="0" smtClean="0"/>
-                <a:t>2</a:t>
-              </a:r>
-              <a:endParaRPr lang="en-US" dirty="0"/>
-            </a:p>
-          </p:txBody>
-        </p:sp>
-        <p:sp>
-          <p:nvSpPr>
-            <p:cNvPr id="37" name="TextBox 36"/>
-            <p:cNvSpPr txBox="1"/>
-            <p:nvPr/>
-          </p:nvSpPr>
-          <p:spPr>
-            <a:xfrm>
-              <a:off x="3670102" y="1891738"/>
-              <a:ext cx="304800" cy="369332"/>
-            </a:xfrm>
-            <a:prstGeom prst="rect">
-              <a:avLst/>
-            </a:prstGeom>
-            <a:noFill/>
-          </p:spPr>
-          <p:txBody>
-            <a:bodyPr wrap="square" rtlCol="0">
-              <a:spAutoFit/>
-            </a:bodyPr>
-            <a:lstStyle/>
-            <a:p>
-              <a:r>
-                <a:rPr lang="en-US" dirty="0" smtClean="0"/>
-                <a:t>2</a:t>
-              </a:r>
-              <a:endParaRPr lang="en-US" dirty="0"/>
-            </a:p>
-          </p:txBody>
-        </p:sp>
-        <p:sp>
-          <p:nvSpPr>
-            <p:cNvPr id="38" name="TextBox 37"/>
-            <p:cNvSpPr txBox="1"/>
-            <p:nvPr/>
-          </p:nvSpPr>
-          <p:spPr>
-            <a:xfrm>
-              <a:off x="3941373" y="1221139"/>
-              <a:ext cx="301686" cy="369332"/>
-            </a:xfrm>
-            <a:prstGeom prst="rect">
-              <a:avLst/>
-            </a:prstGeom>
-            <a:noFill/>
-          </p:spPr>
-          <p:txBody>
-            <a:bodyPr wrap="none" rtlCol="0">
-              <a:spAutoFit/>
-            </a:bodyPr>
-            <a:lstStyle/>
-            <a:p>
-              <a:r>
-                <a:rPr lang="en-US" dirty="0" smtClean="0"/>
-                <a:t>2</a:t>
-              </a:r>
-              <a:endParaRPr lang="en-US" dirty="0"/>
-            </a:p>
-          </p:txBody>
-        </p:sp>
-        <p:sp>
-          <p:nvSpPr>
-            <p:cNvPr id="39" name="TextBox 38"/>
-            <p:cNvSpPr txBox="1"/>
-            <p:nvPr/>
-          </p:nvSpPr>
-          <p:spPr>
-            <a:xfrm>
-              <a:off x="3949404" y="1467596"/>
-              <a:ext cx="301686" cy="369332"/>
-            </a:xfrm>
-            <a:prstGeom prst="rect">
-              <a:avLst/>
-            </a:prstGeom>
-            <a:noFill/>
-          </p:spPr>
-          <p:txBody>
-            <a:bodyPr wrap="none" rtlCol="0">
-              <a:spAutoFit/>
-            </a:bodyPr>
-            <a:lstStyle/>
-            <a:p>
-              <a:r>
-                <a:rPr lang="en-US" smtClean="0"/>
-                <a:t>2</a:t>
-              </a:r>
-              <a:endParaRPr lang="en-US" dirty="0"/>
-            </a:p>
-          </p:txBody>
-        </p:sp>
-        <p:sp>
-          <p:nvSpPr>
-            <p:cNvPr id="40" name="TextBox 39"/>
-            <p:cNvSpPr txBox="1"/>
-            <p:nvPr/>
-          </p:nvSpPr>
-          <p:spPr>
-            <a:xfrm>
-              <a:off x="3866317" y="988053"/>
-              <a:ext cx="301686" cy="369332"/>
-            </a:xfrm>
-            <a:prstGeom prst="rect">
-              <a:avLst/>
-            </a:prstGeom>
-            <a:noFill/>
-          </p:spPr>
-          <p:txBody>
-            <a:bodyPr wrap="none" rtlCol="0">
-              <a:spAutoFit/>
-            </a:bodyPr>
-            <a:lstStyle/>
-            <a:p>
-              <a:r>
-                <a:rPr lang="en-US" smtClean="0"/>
-                <a:t>2</a:t>
-              </a:r>
-              <a:endParaRPr lang="en-US" dirty="0"/>
-            </a:p>
-          </p:txBody>
-        </p:sp>
       </p:grpSp>
       <p:cxnSp>
         <p:nvCxnSpPr>
-          <p:cNvPr id="51" name="Straight Arrow Connector 50"/>
-          <p:cNvCxnSpPr/>
+          <p:cNvPr id="189" name="Straight Arrow Connector 188">
+            <a:extLst>
+              <a:ext uri="{FF2B5EF4-FFF2-40B4-BE49-F238E27FC236}">
+                <a16:creationId xmlns:a16="http://schemas.microsoft.com/office/drawing/2014/main" id="{D9B28603-1B33-E247-A4D3-FABF0CA612F9}"/>
+              </a:ext>
+            </a:extLst>
+          </p:cNvPr>
+          <p:cNvCxnSpPr>
+            <a:cxnSpLocks/>
+            <a:stCxn id="141" idx="2"/>
+            <a:endCxn id="186" idx="1"/>
+          </p:cNvCxnSpPr>
           <p:nvPr/>
         </p:nvCxnSpPr>
         <p:spPr>
-          <a:xfrm flipH="1">
-            <a:off x="3866589" y="4097075"/>
-            <a:ext cx="231743" cy="355285"/>
+          <a:xfrm>
+            <a:off x="3301180" y="5490375"/>
+            <a:ext cx="2328400" cy="471808"/>
           </a:xfrm>
           <a:prstGeom prst="straightConnector1">
             <a:avLst/>
           </a:prstGeom>
           <a:ln w="25400">
             <a:solidFill>
-              <a:srgbClr val="FF0000"/>
+              <a:srgbClr val="00B050"/>
             </a:solidFill>
             <a:tailEnd type="arrow"/>
           </a:ln>
@@ -14717,21 +16791,309 @@
       </p:cxnSp>
       <p:cxnSp>
         <p:nvCxnSpPr>
-          <p:cNvPr id="52" name="Straight Arrow Connector 51"/>
-          <p:cNvCxnSpPr/>
+          <p:cNvPr id="192" name="Straight Arrow Connector 191">
+            <a:extLst>
+              <a:ext uri="{FF2B5EF4-FFF2-40B4-BE49-F238E27FC236}">
+                <a16:creationId xmlns:a16="http://schemas.microsoft.com/office/drawing/2014/main" id="{83B5FEBB-05A2-CE4F-9560-6486C46E07E9}"/>
+              </a:ext>
+            </a:extLst>
+          </p:cNvPr>
+          <p:cNvCxnSpPr>
+            <a:cxnSpLocks/>
+            <a:stCxn id="142" idx="2"/>
+            <a:endCxn id="184" idx="1"/>
+          </p:cNvCxnSpPr>
           <p:nvPr/>
         </p:nvCxnSpPr>
         <p:spPr>
           <a:xfrm>
-            <a:off x="4441849" y="4106835"/>
-            <a:ext cx="127768" cy="345525"/>
+            <a:off x="5150185" y="5490319"/>
+            <a:ext cx="1317214" cy="477968"/>
           </a:xfrm>
           <a:prstGeom prst="straightConnector1">
             <a:avLst/>
           </a:prstGeom>
           <a:ln w="25400">
             <a:solidFill>
-              <a:srgbClr val="FF0000"/>
+              <a:srgbClr val="00B050"/>
+            </a:solidFill>
+            <a:tailEnd type="arrow"/>
+          </a:ln>
+        </p:spPr>
+        <p:style>
+          <a:lnRef idx="1">
+            <a:schemeClr val="accent1"/>
+          </a:lnRef>
+          <a:fillRef idx="0">
+            <a:schemeClr val="accent1"/>
+          </a:fillRef>
+          <a:effectRef idx="0">
+            <a:schemeClr val="accent1"/>
+          </a:effectRef>
+          <a:fontRef idx="minor">
+            <a:schemeClr val="tx1"/>
+          </a:fontRef>
+        </p:style>
+      </p:cxnSp>
+      <p:cxnSp>
+        <p:nvCxnSpPr>
+          <p:cNvPr id="196" name="Straight Arrow Connector 195">
+            <a:extLst>
+              <a:ext uri="{FF2B5EF4-FFF2-40B4-BE49-F238E27FC236}">
+                <a16:creationId xmlns:a16="http://schemas.microsoft.com/office/drawing/2014/main" id="{9C82AD23-604E-384F-A0A9-54ABB330727D}"/>
+              </a:ext>
+            </a:extLst>
+          </p:cNvPr>
+          <p:cNvCxnSpPr>
+            <a:cxnSpLocks/>
+            <a:stCxn id="168" idx="5"/>
+          </p:cNvCxnSpPr>
+          <p:nvPr/>
+        </p:nvCxnSpPr>
+        <p:spPr>
+          <a:xfrm>
+            <a:off x="3050050" y="6341322"/>
+            <a:ext cx="225578" cy="77571"/>
+          </a:xfrm>
+          <a:prstGeom prst="straightConnector1">
+            <a:avLst/>
+          </a:prstGeom>
+          <a:ln w="25400">
+            <a:solidFill>
+              <a:schemeClr val="accent4">
+                <a:lumMod val="50000"/>
+              </a:schemeClr>
+            </a:solidFill>
+            <a:tailEnd type="none"/>
+          </a:ln>
+        </p:spPr>
+        <p:style>
+          <a:lnRef idx="1">
+            <a:schemeClr val="accent1"/>
+          </a:lnRef>
+          <a:fillRef idx="0">
+            <a:schemeClr val="accent1"/>
+          </a:fillRef>
+          <a:effectRef idx="0">
+            <a:schemeClr val="accent1"/>
+          </a:effectRef>
+          <a:fontRef idx="minor">
+            <a:schemeClr val="tx1"/>
+          </a:fontRef>
+        </p:style>
+      </p:cxnSp>
+      <p:cxnSp>
+        <p:nvCxnSpPr>
+          <p:cNvPr id="200" name="Straight Arrow Connector 199">
+            <a:extLst>
+              <a:ext uri="{FF2B5EF4-FFF2-40B4-BE49-F238E27FC236}">
+                <a16:creationId xmlns:a16="http://schemas.microsoft.com/office/drawing/2014/main" id="{B7E9D5BC-7443-FA49-8AC7-9B360753C48F}"/>
+              </a:ext>
+            </a:extLst>
+          </p:cNvPr>
+          <p:cNvCxnSpPr>
+            <a:cxnSpLocks/>
+            <a:endCxn id="172" idx="3"/>
+          </p:cNvCxnSpPr>
+          <p:nvPr/>
+        </p:nvCxnSpPr>
+        <p:spPr>
+          <a:xfrm flipV="1">
+            <a:off x="3275628" y="6347426"/>
+            <a:ext cx="237693" cy="82049"/>
+          </a:xfrm>
+          <a:prstGeom prst="straightConnector1">
+            <a:avLst/>
+          </a:prstGeom>
+          <a:ln w="25400">
+            <a:solidFill>
+              <a:schemeClr val="accent4">
+                <a:lumMod val="50000"/>
+              </a:schemeClr>
+            </a:solidFill>
+            <a:tailEnd type="none"/>
+          </a:ln>
+        </p:spPr>
+        <p:style>
+          <a:lnRef idx="1">
+            <a:schemeClr val="accent1"/>
+          </a:lnRef>
+          <a:fillRef idx="0">
+            <a:schemeClr val="accent1"/>
+          </a:fillRef>
+          <a:effectRef idx="0">
+            <a:schemeClr val="accent1"/>
+          </a:effectRef>
+          <a:fontRef idx="minor">
+            <a:schemeClr val="tx1"/>
+          </a:fontRef>
+        </p:style>
+      </p:cxnSp>
+      <p:cxnSp>
+        <p:nvCxnSpPr>
+          <p:cNvPr id="205" name="Straight Arrow Connector 204">
+            <a:extLst>
+              <a:ext uri="{FF2B5EF4-FFF2-40B4-BE49-F238E27FC236}">
+                <a16:creationId xmlns:a16="http://schemas.microsoft.com/office/drawing/2014/main" id="{22FC8A77-D9B6-524E-8E56-6D1E941BB8AA}"/>
+              </a:ext>
+            </a:extLst>
+          </p:cNvPr>
+          <p:cNvCxnSpPr>
+            <a:cxnSpLocks/>
+          </p:cNvCxnSpPr>
+          <p:nvPr/>
+        </p:nvCxnSpPr>
+        <p:spPr>
+          <a:xfrm flipH="1">
+            <a:off x="3287743" y="6429475"/>
+            <a:ext cx="13437" cy="381016"/>
+          </a:xfrm>
+          <a:prstGeom prst="straightConnector1">
+            <a:avLst/>
+          </a:prstGeom>
+          <a:ln w="25400">
+            <a:solidFill>
+              <a:schemeClr val="accent4">
+                <a:lumMod val="50000"/>
+              </a:schemeClr>
+            </a:solidFill>
+            <a:tailEnd type="arrow"/>
+          </a:ln>
+        </p:spPr>
+        <p:style>
+          <a:lnRef idx="1">
+            <a:schemeClr val="accent1"/>
+          </a:lnRef>
+          <a:fillRef idx="0">
+            <a:schemeClr val="accent1"/>
+          </a:fillRef>
+          <a:effectRef idx="0">
+            <a:schemeClr val="accent1"/>
+          </a:effectRef>
+          <a:fontRef idx="minor">
+            <a:schemeClr val="tx1"/>
+          </a:fontRef>
+        </p:style>
+      </p:cxnSp>
+      <p:cxnSp>
+        <p:nvCxnSpPr>
+          <p:cNvPr id="208" name="Straight Arrow Connector 207">
+            <a:extLst>
+              <a:ext uri="{FF2B5EF4-FFF2-40B4-BE49-F238E27FC236}">
+                <a16:creationId xmlns:a16="http://schemas.microsoft.com/office/drawing/2014/main" id="{0237BFFC-0C4B-7148-93A7-1E8118BD01B8}"/>
+              </a:ext>
+            </a:extLst>
+          </p:cNvPr>
+          <p:cNvCxnSpPr>
+            <a:cxnSpLocks/>
+          </p:cNvCxnSpPr>
+          <p:nvPr/>
+        </p:nvCxnSpPr>
+        <p:spPr>
+          <a:xfrm>
+            <a:off x="6004128" y="6328678"/>
+            <a:ext cx="225578" cy="77571"/>
+          </a:xfrm>
+          <a:prstGeom prst="straightConnector1">
+            <a:avLst/>
+          </a:prstGeom>
+          <a:ln w="25400">
+            <a:solidFill>
+              <a:schemeClr val="accent4">
+                <a:lumMod val="50000"/>
+              </a:schemeClr>
+            </a:solidFill>
+            <a:tailEnd type="none"/>
+          </a:ln>
+        </p:spPr>
+        <p:style>
+          <a:lnRef idx="1">
+            <a:schemeClr val="accent1"/>
+          </a:lnRef>
+          <a:fillRef idx="0">
+            <a:schemeClr val="accent1"/>
+          </a:fillRef>
+          <a:effectRef idx="0">
+            <a:schemeClr val="accent1"/>
+          </a:effectRef>
+          <a:fontRef idx="minor">
+            <a:schemeClr val="tx1"/>
+          </a:fontRef>
+        </p:style>
+      </p:cxnSp>
+      <p:cxnSp>
+        <p:nvCxnSpPr>
+          <p:cNvPr id="209" name="Straight Arrow Connector 208">
+            <a:extLst>
+              <a:ext uri="{FF2B5EF4-FFF2-40B4-BE49-F238E27FC236}">
+                <a16:creationId xmlns:a16="http://schemas.microsoft.com/office/drawing/2014/main" id="{A33DF7FF-AD0F-1545-B88D-1733E6271495}"/>
+              </a:ext>
+            </a:extLst>
+          </p:cNvPr>
+          <p:cNvCxnSpPr>
+            <a:cxnSpLocks/>
+          </p:cNvCxnSpPr>
+          <p:nvPr/>
+        </p:nvCxnSpPr>
+        <p:spPr>
+          <a:xfrm flipV="1">
+            <a:off x="6229706" y="6334782"/>
+            <a:ext cx="237693" cy="82049"/>
+          </a:xfrm>
+          <a:prstGeom prst="straightConnector1">
+            <a:avLst/>
+          </a:prstGeom>
+          <a:ln w="25400">
+            <a:solidFill>
+              <a:schemeClr val="accent4">
+                <a:lumMod val="50000"/>
+              </a:schemeClr>
+            </a:solidFill>
+            <a:tailEnd type="none"/>
+          </a:ln>
+        </p:spPr>
+        <p:style>
+          <a:lnRef idx="1">
+            <a:schemeClr val="accent1"/>
+          </a:lnRef>
+          <a:fillRef idx="0">
+            <a:schemeClr val="accent1"/>
+          </a:fillRef>
+          <a:effectRef idx="0">
+            <a:schemeClr val="accent1"/>
+          </a:effectRef>
+          <a:fontRef idx="minor">
+            <a:schemeClr val="tx1"/>
+          </a:fontRef>
+        </p:style>
+      </p:cxnSp>
+      <p:cxnSp>
+        <p:nvCxnSpPr>
+          <p:cNvPr id="210" name="Straight Arrow Connector 209">
+            <a:extLst>
+              <a:ext uri="{FF2B5EF4-FFF2-40B4-BE49-F238E27FC236}">
+                <a16:creationId xmlns:a16="http://schemas.microsoft.com/office/drawing/2014/main" id="{47D25900-9C47-A243-A865-9B88246712F7}"/>
+              </a:ext>
+            </a:extLst>
+          </p:cNvPr>
+          <p:cNvCxnSpPr>
+            <a:cxnSpLocks/>
+          </p:cNvCxnSpPr>
+          <p:nvPr/>
+        </p:nvCxnSpPr>
+        <p:spPr>
+          <a:xfrm flipH="1">
+            <a:off x="6241821" y="6416831"/>
+            <a:ext cx="13437" cy="381016"/>
+          </a:xfrm>
+          <a:prstGeom prst="straightConnector1">
+            <a:avLst/>
+          </a:prstGeom>
+          <a:ln w="25400">
+            <a:solidFill>
+              <a:schemeClr val="accent4">
+                <a:lumMod val="50000"/>
+              </a:schemeClr>
             </a:solidFill>
             <a:tailEnd type="arrow"/>
           </a:ln>
@@ -14753,336 +17115,49 @@
       </p:cxnSp>
       <p:sp>
         <p:nvSpPr>
-          <p:cNvPr id="53" name="TextBox 52"/>
-          <p:cNvSpPr txBox="1"/>
+          <p:cNvPr id="211" name="Rectangle 210">
+            <a:extLst>
+              <a:ext uri="{FF2B5EF4-FFF2-40B4-BE49-F238E27FC236}">
+                <a16:creationId xmlns:a16="http://schemas.microsoft.com/office/drawing/2014/main" id="{D230B07C-2E8E-1A42-A5D3-D2D6A1A58C39}"/>
+              </a:ext>
+            </a:extLst>
+          </p:cNvPr>
+          <p:cNvSpPr/>
           <p:nvPr/>
         </p:nvSpPr>
         <p:spPr>
           <a:xfrm>
-            <a:off x="1103538" y="4705126"/>
-            <a:ext cx="1347969" cy="646331"/>
+            <a:off x="894945" y="0"/>
+            <a:ext cx="6828817" cy="6858000"/>
           </a:xfrm>
           <a:prstGeom prst="rect">
             <a:avLst/>
           </a:prstGeom>
           <a:noFill/>
-        </p:spPr>
-        <p:txBody>
-          <a:bodyPr wrap="square" rtlCol="0">
-            <a:spAutoFit/>
-          </a:bodyPr>
-          <a:lstStyle/>
-          <a:p>
-            <a:pPr algn="ctr"/>
-            <a:r>
-              <a:rPr lang="en-US" dirty="0" smtClean="0"/>
-              <a:t>Ring </a:t>
-            </a:r>
-            <a:r>
-              <a:rPr lang="en-US" dirty="0" err="1" smtClean="0"/>
-              <a:t>Buf</a:t>
-            </a:r>
-            <a:r>
-              <a:rPr lang="en-US" dirty="0" smtClean="0"/>
-              <a:t> of TSBs (TS </a:t>
-            </a:r>
-            <a:r>
-              <a:rPr lang="en-US" dirty="0" err="1" smtClean="0"/>
-              <a:t>val</a:t>
-            </a:r>
-            <a:r>
-              <a:rPr lang="en-US" dirty="0" smtClean="0"/>
-              <a:t>)</a:t>
-            </a:r>
-            <a:endParaRPr lang="en-US" dirty="0"/>
-          </a:p>
-        </p:txBody>
-      </p:sp>
-      <p:sp>
-        <p:nvSpPr>
-          <p:cNvPr id="54" name="TextBox 53"/>
-          <p:cNvSpPr txBox="1"/>
-          <p:nvPr/>
-        </p:nvSpPr>
-        <p:spPr>
-          <a:xfrm>
-            <a:off x="88024" y="5990204"/>
-            <a:ext cx="2452950" cy="369332"/>
-          </a:xfrm>
-          <a:prstGeom prst="rect">
-            <a:avLst/>
-          </a:prstGeom>
-          <a:noFill/>
-        </p:spPr>
-        <p:txBody>
-          <a:bodyPr wrap="square" rtlCol="0">
-            <a:spAutoFit/>
-          </a:bodyPr>
-          <a:lstStyle/>
-          <a:p>
-            <a:pPr algn="ctr"/>
-            <a:r>
-              <a:rPr lang="en-US" dirty="0" smtClean="0"/>
-              <a:t>Event Building Threads</a:t>
-            </a:r>
-            <a:endParaRPr lang="en-US" dirty="0"/>
-          </a:p>
-        </p:txBody>
-      </p:sp>
-      <p:sp>
-        <p:nvSpPr>
-          <p:cNvPr id="55" name="TextBox 54"/>
-          <p:cNvSpPr txBox="1"/>
-          <p:nvPr/>
-        </p:nvSpPr>
-        <p:spPr>
-          <a:xfrm>
-            <a:off x="2451507" y="6049973"/>
-            <a:ext cx="1621521" cy="276999"/>
-          </a:xfrm>
-          <a:prstGeom prst="rect">
-            <a:avLst/>
-          </a:prstGeom>
-          <a:noFill/>
-          <a:ln w="19050">
-            <a:solidFill>
-              <a:schemeClr val="tx1"/>
-            </a:solidFill>
-          </a:ln>
-        </p:spPr>
-        <p:txBody>
-          <a:bodyPr wrap="square" rtlCol="0">
-            <a:spAutoFit/>
-          </a:bodyPr>
-          <a:lstStyle/>
-          <a:p>
-            <a:pPr algn="ctr"/>
-            <a:r>
-              <a:rPr lang="en-US" sz="1200" b="1" smtClean="0">
-                <a:latin typeface="Arial" pitchFamily="34" charset="0"/>
-                <a:cs typeface="Arial" pitchFamily="34" charset="0"/>
-              </a:rPr>
-              <a:t>Building Thread 1</a:t>
-            </a:r>
-            <a:endParaRPr lang="en-US" sz="800" b="1" dirty="0" smtClean="0">
-              <a:latin typeface="Arial" pitchFamily="34" charset="0"/>
-              <a:cs typeface="Arial" pitchFamily="34" charset="0"/>
-            </a:endParaRPr>
-          </a:p>
-        </p:txBody>
-      </p:sp>
-      <p:sp>
-        <p:nvSpPr>
-          <p:cNvPr id="56" name="TextBox 55"/>
-          <p:cNvSpPr txBox="1"/>
-          <p:nvPr/>
-        </p:nvSpPr>
-        <p:spPr>
-          <a:xfrm>
-            <a:off x="4300512" y="6049917"/>
-            <a:ext cx="1621521" cy="276999"/>
-          </a:xfrm>
-          <a:prstGeom prst="rect">
-            <a:avLst/>
-          </a:prstGeom>
-          <a:noFill/>
-          <a:ln w="19050">
-            <a:solidFill>
-              <a:schemeClr val="tx1"/>
-            </a:solidFill>
-          </a:ln>
-        </p:spPr>
-        <p:txBody>
-          <a:bodyPr wrap="square" rtlCol="0">
-            <a:spAutoFit/>
-          </a:bodyPr>
-          <a:lstStyle/>
-          <a:p>
-            <a:pPr algn="ctr"/>
-            <a:r>
-              <a:rPr lang="en-US" sz="1200" b="1" dirty="0" smtClean="0">
-                <a:latin typeface="Arial" pitchFamily="34" charset="0"/>
-                <a:cs typeface="Arial" pitchFamily="34" charset="0"/>
-              </a:rPr>
-              <a:t>Building Thread 2</a:t>
-            </a:r>
-            <a:endParaRPr lang="en-US" sz="800" b="1" dirty="0" smtClean="0">
-              <a:latin typeface="Arial" pitchFamily="34" charset="0"/>
-              <a:cs typeface="Arial" pitchFamily="34" charset="0"/>
-            </a:endParaRPr>
-          </a:p>
-        </p:txBody>
-      </p:sp>
-      <p:cxnSp>
-        <p:nvCxnSpPr>
-          <p:cNvPr id="57" name="Straight Arrow Connector 56"/>
-          <p:cNvCxnSpPr/>
-          <p:nvPr/>
-        </p:nvCxnSpPr>
-        <p:spPr>
-          <a:xfrm>
-            <a:off x="5631187" y="5699567"/>
-            <a:ext cx="127768" cy="345525"/>
-          </a:xfrm>
-          <a:prstGeom prst="straightConnector1">
-            <a:avLst/>
-          </a:prstGeom>
-          <a:ln w="25400">
-            <a:solidFill>
-              <a:srgbClr val="FF0000"/>
-            </a:solidFill>
-            <a:tailEnd type="arrow"/>
-          </a:ln>
+          <a:ln w="25400"/>
         </p:spPr>
         <p:style>
-          <a:lnRef idx="1">
-            <a:schemeClr val="accent1"/>
+          <a:lnRef idx="2">
+            <a:schemeClr val="accent1">
+              <a:shade val="50000"/>
+            </a:schemeClr>
           </a:lnRef>
-          <a:fillRef idx="0">
+          <a:fillRef idx="1">
             <a:schemeClr val="accent1"/>
           </a:fillRef>
           <a:effectRef idx="0">
             <a:schemeClr val="accent1"/>
           </a:effectRef>
           <a:fontRef idx="minor">
-            <a:schemeClr val="tx1"/>
+            <a:schemeClr val="lt1"/>
           </a:fontRef>
         </p:style>
-      </p:cxnSp>
-      <p:cxnSp>
-        <p:nvCxnSpPr>
-          <p:cNvPr id="58" name="Straight Arrow Connector 57"/>
-          <p:cNvCxnSpPr/>
-          <p:nvPr/>
-        </p:nvCxnSpPr>
-        <p:spPr>
-          <a:xfrm flipH="1">
-            <a:off x="2638019" y="5720168"/>
-            <a:ext cx="231743" cy="355285"/>
-          </a:xfrm>
-          <a:prstGeom prst="straightConnector1">
-            <a:avLst/>
-          </a:prstGeom>
-          <a:ln w="25400">
-            <a:solidFill>
-              <a:srgbClr val="FF0000"/>
-            </a:solidFill>
-            <a:tailEnd type="arrow"/>
-          </a:ln>
-        </p:spPr>
-        <p:style>
-          <a:lnRef idx="1">
-            <a:schemeClr val="accent1"/>
-          </a:lnRef>
-          <a:fillRef idx="0">
-            <a:schemeClr val="accent1"/>
-          </a:fillRef>
-          <a:effectRef idx="0">
-            <a:schemeClr val="accent1"/>
-          </a:effectRef>
-          <a:fontRef idx="minor">
-            <a:schemeClr val="tx1"/>
-          </a:fontRef>
-        </p:style>
-      </p:cxnSp>
-      <p:sp>
-        <p:nvSpPr>
-          <p:cNvPr id="114" name="TextBox 113"/>
-          <p:cNvSpPr txBox="1"/>
-          <p:nvPr/>
-        </p:nvSpPr>
-        <p:spPr>
-          <a:xfrm>
-            <a:off x="6245279" y="202475"/>
-            <a:ext cx="1469450" cy="276999"/>
-          </a:xfrm>
-          <a:prstGeom prst="rect">
-            <a:avLst/>
-          </a:prstGeom>
-          <a:solidFill>
-            <a:schemeClr val="accent1">
-              <a:lumMod val="20000"/>
-              <a:lumOff val="80000"/>
-            </a:schemeClr>
-          </a:solidFill>
-          <a:ln w="19050">
-            <a:solidFill>
-              <a:schemeClr val="tx1"/>
-            </a:solidFill>
-          </a:ln>
-        </p:spPr>
         <p:txBody>
-          <a:bodyPr wrap="square" rtlCol="0">
-            <a:spAutoFit/>
-          </a:bodyPr>
+          <a:bodyPr rtlCol="0" anchor="ctr"/>
           <a:lstStyle/>
           <a:p>
             <a:pPr algn="ctr"/>
-            <a:r>
-              <a:rPr lang="en-US" sz="1200" b="1" smtClean="0">
-                <a:latin typeface="Arial" pitchFamily="34" charset="0"/>
-                <a:cs typeface="Arial" pitchFamily="34" charset="0"/>
-              </a:rPr>
-              <a:t>ROC 3, </a:t>
-            </a:r>
-            <a:r>
-              <a:rPr lang="en-US" sz="1200" b="1" dirty="0" smtClean="0">
-                <a:latin typeface="Arial" pitchFamily="34" charset="0"/>
-                <a:cs typeface="Arial" pitchFamily="34" charset="0"/>
-              </a:rPr>
-              <a:t>TS 1, S 1</a:t>
-            </a:r>
-            <a:endParaRPr lang="en-US" sz="1200" b="1" dirty="0">
-              <a:latin typeface="Arial" pitchFamily="34" charset="0"/>
-              <a:cs typeface="Arial" pitchFamily="34" charset="0"/>
-            </a:endParaRPr>
-          </a:p>
-        </p:txBody>
-      </p:sp>
-      <p:sp>
-        <p:nvSpPr>
-          <p:cNvPr id="115" name="TextBox 114"/>
-          <p:cNvSpPr txBox="1"/>
-          <p:nvPr/>
-        </p:nvSpPr>
-        <p:spPr>
-          <a:xfrm>
-            <a:off x="1071524" y="199618"/>
-            <a:ext cx="1469450" cy="276999"/>
-          </a:xfrm>
-          <a:prstGeom prst="rect">
-            <a:avLst/>
-          </a:prstGeom>
-          <a:solidFill>
-            <a:schemeClr val="accent1">
-              <a:lumMod val="20000"/>
-              <a:lumOff val="80000"/>
-            </a:schemeClr>
-          </a:solidFill>
-          <a:ln w="19050">
-            <a:solidFill>
-              <a:schemeClr val="tx1"/>
-            </a:solidFill>
-          </a:ln>
-        </p:spPr>
-        <p:txBody>
-          <a:bodyPr wrap="square" rtlCol="0">
-            <a:spAutoFit/>
-          </a:bodyPr>
-          <a:lstStyle/>
-          <a:p>
-            <a:pPr algn="ctr"/>
-            <a:r>
-              <a:rPr lang="en-US" sz="1200" b="1" dirty="0" smtClean="0">
-                <a:latin typeface="Arial" pitchFamily="34" charset="0"/>
-                <a:cs typeface="Arial" pitchFamily="34" charset="0"/>
-              </a:rPr>
-              <a:t>ROC 1, TS 1, S 1</a:t>
-            </a:r>
-            <a:endParaRPr lang="en-US" sz="1200" b="1" dirty="0">
-              <a:latin typeface="Arial" pitchFamily="34" charset="0"/>
-              <a:cs typeface="Arial" pitchFamily="34" charset="0"/>
-            </a:endParaRPr>
+            <a:endParaRPr lang="en-US"/>
           </a:p>
         </p:txBody>
       </p:sp>

--- a/doc/Streaming.pptx
+++ b/doc/Streaming.pptx
@@ -247,7 +247,7 @@
           <a:p>
             <a:fld id="{593F253B-0AEB-9446-A946-A05F6455C0D4}" type="datetimeFigureOut">
               <a:rPr lang="en-US" smtClean="0"/>
-              <a:t>11/3/22</a:t>
+              <a:t>4/2/25</a:t>
             </a:fld>
             <a:endParaRPr lang="en-US"/>
           </a:p>
@@ -412,7 +412,7 @@
           <a:p>
             <a:fld id="{593F253B-0AEB-9446-A946-A05F6455C0D4}" type="datetimeFigureOut">
               <a:rPr lang="en-US" smtClean="0"/>
-              <a:t>11/3/22</a:t>
+              <a:t>4/2/25</a:t>
             </a:fld>
             <a:endParaRPr lang="en-US"/>
           </a:p>
@@ -587,7 +587,7 @@
           <a:p>
             <a:fld id="{593F253B-0AEB-9446-A946-A05F6455C0D4}" type="datetimeFigureOut">
               <a:rPr lang="en-US" smtClean="0"/>
-              <a:t>11/3/22</a:t>
+              <a:t>4/2/25</a:t>
             </a:fld>
             <a:endParaRPr lang="en-US"/>
           </a:p>
@@ -752,7 +752,7 @@
           <a:p>
             <a:fld id="{593F253B-0AEB-9446-A946-A05F6455C0D4}" type="datetimeFigureOut">
               <a:rPr lang="en-US" smtClean="0"/>
-              <a:t>11/3/22</a:t>
+              <a:t>4/2/25</a:t>
             </a:fld>
             <a:endParaRPr lang="en-US"/>
           </a:p>
@@ -991,7 +991,7 @@
           <a:p>
             <a:fld id="{593F253B-0AEB-9446-A946-A05F6455C0D4}" type="datetimeFigureOut">
               <a:rPr lang="en-US" smtClean="0"/>
-              <a:t>11/3/22</a:t>
+              <a:t>4/2/25</a:t>
             </a:fld>
             <a:endParaRPr lang="en-US"/>
           </a:p>
@@ -1218,7 +1218,7 @@
           <a:p>
             <a:fld id="{593F253B-0AEB-9446-A946-A05F6455C0D4}" type="datetimeFigureOut">
               <a:rPr lang="en-US" smtClean="0"/>
-              <a:t>11/3/22</a:t>
+              <a:t>4/2/25</a:t>
             </a:fld>
             <a:endParaRPr lang="en-US"/>
           </a:p>
@@ -1580,7 +1580,7 @@
           <a:p>
             <a:fld id="{593F253B-0AEB-9446-A946-A05F6455C0D4}" type="datetimeFigureOut">
               <a:rPr lang="en-US" smtClean="0"/>
-              <a:t>11/3/22</a:t>
+              <a:t>4/2/25</a:t>
             </a:fld>
             <a:endParaRPr lang="en-US"/>
           </a:p>
@@ -1693,7 +1693,7 @@
           <a:p>
             <a:fld id="{593F253B-0AEB-9446-A946-A05F6455C0D4}" type="datetimeFigureOut">
               <a:rPr lang="en-US" smtClean="0"/>
-              <a:t>11/3/22</a:t>
+              <a:t>4/2/25</a:t>
             </a:fld>
             <a:endParaRPr lang="en-US"/>
           </a:p>
@@ -1783,7 +1783,7 @@
           <a:p>
             <a:fld id="{593F253B-0AEB-9446-A946-A05F6455C0D4}" type="datetimeFigureOut">
               <a:rPr lang="en-US" smtClean="0"/>
-              <a:t>11/3/22</a:t>
+              <a:t>4/2/25</a:t>
             </a:fld>
             <a:endParaRPr lang="en-US"/>
           </a:p>
@@ -2055,7 +2055,7 @@
           <a:p>
             <a:fld id="{593F253B-0AEB-9446-A946-A05F6455C0D4}" type="datetimeFigureOut">
               <a:rPr lang="en-US" smtClean="0"/>
-              <a:t>11/3/22</a:t>
+              <a:t>4/2/25</a:t>
             </a:fld>
             <a:endParaRPr lang="en-US"/>
           </a:p>
@@ -2307,7 +2307,7 @@
           <a:p>
             <a:fld id="{593F253B-0AEB-9446-A946-A05F6455C0D4}" type="datetimeFigureOut">
               <a:rPr lang="en-US" smtClean="0"/>
-              <a:t>11/3/22</a:t>
+              <a:t>4/2/25</a:t>
             </a:fld>
             <a:endParaRPr lang="en-US"/>
           </a:p>
@@ -2515,7 +2515,7 @@
           <a:p>
             <a:fld id="{593F253B-0AEB-9446-A946-A05F6455C0D4}" type="datetimeFigureOut">
               <a:rPr lang="en-US" smtClean="0"/>
-              <a:t>11/3/22</a:t>
+              <a:t>4/2/25</a:t>
             </a:fld>
             <a:endParaRPr lang="en-US"/>
           </a:p>
@@ -2959,42 +2959,6 @@
           </a:p>
         </p:txBody>
       </p:sp>
-      <p:cxnSp>
-        <p:nvCxnSpPr>
-          <p:cNvPr id="103" name="Straight Arrow Connector 102"/>
-          <p:cNvCxnSpPr/>
-          <p:nvPr/>
-        </p:nvCxnSpPr>
-        <p:spPr>
-          <a:xfrm flipV="1">
-            <a:off x="4267200" y="971669"/>
-            <a:ext cx="1016179" cy="224761"/>
-          </a:xfrm>
-          <a:prstGeom prst="straightConnector1">
-            <a:avLst/>
-          </a:prstGeom>
-          <a:ln w="12700">
-            <a:solidFill>
-              <a:srgbClr val="FF0000"/>
-            </a:solidFill>
-            <a:tailEnd type="arrow"/>
-          </a:ln>
-        </p:spPr>
-        <p:style>
-          <a:lnRef idx="1">
-            <a:schemeClr val="accent1"/>
-          </a:lnRef>
-          <a:fillRef idx="0">
-            <a:schemeClr val="accent1"/>
-          </a:fillRef>
-          <a:effectRef idx="0">
-            <a:schemeClr val="accent1"/>
-          </a:effectRef>
-          <a:fontRef idx="minor">
-            <a:schemeClr val="tx1"/>
-          </a:fontRef>
-        </p:style>
-      </p:cxnSp>
       <p:sp>
         <p:nvSpPr>
           <p:cNvPr id="104" name="TextBox 103"/>
@@ -3003,8 +2967,8 @@
         </p:nvSpPr>
         <p:spPr>
           <a:xfrm>
-            <a:off x="4865980" y="5182850"/>
-            <a:ext cx="3148814" cy="1446550"/>
+            <a:off x="4534624" y="6104928"/>
+            <a:ext cx="4305147" cy="646331"/>
           </a:xfrm>
           <a:prstGeom prst="rect">
             <a:avLst/>
@@ -3028,26 +2992,8 @@
           <a:lstStyle/>
           <a:p>
             <a:r>
-              <a:rPr lang="en-US" sz="1600" dirty="0"/>
-              <a:t>ROC Time Slice Bank</a:t>
-            </a:r>
-          </a:p>
-          <a:p>
-            <a:endParaRPr lang="en-US" sz="1200" dirty="0"/>
-          </a:p>
-          <a:p>
-            <a:r>
               <a:rPr lang="en-US" sz="1200" dirty="0"/>
-              <a:t>(Note that multiple Time Slices can be transported as defined in the EVIO Header)</a:t>
-            </a:r>
-          </a:p>
-          <a:p>
-            <a:endParaRPr lang="en-US" sz="1200" dirty="0"/>
-          </a:p>
-          <a:p>
-            <a:r>
-              <a:rPr lang="en-US" sz="1200" dirty="0"/>
-              <a:t>Multiple Streams can be included as defined by the Stream Status bits.</a:t>
+              <a:t>Multiple Time Slices can be transported as defined in the EVIO Header. Multiple Streams can be included as defined by the Stream Status bits.</a:t>
             </a:r>
           </a:p>
         </p:txBody>
@@ -3147,52 +3093,6 @@
               </a:rPr>
               <a:t>(SIB)</a:t>
             </a:r>
-          </a:p>
-        </p:txBody>
-      </p:sp>
-      <p:sp>
-        <p:nvSpPr>
-          <p:cNvPr id="107" name="Left Brace 106"/>
-          <p:cNvSpPr/>
-          <p:nvPr/>
-        </p:nvSpPr>
-        <p:spPr>
-          <a:xfrm flipH="1">
-            <a:off x="4381500" y="1903870"/>
-            <a:ext cx="304800" cy="1086979"/>
-          </a:xfrm>
-          <a:prstGeom prst="leftBrace">
-            <a:avLst>
-              <a:gd name="adj1" fmla="val 42708"/>
-              <a:gd name="adj2" fmla="val 50000"/>
-            </a:avLst>
-          </a:prstGeom>
-          <a:ln>
-            <a:solidFill>
-              <a:srgbClr val="FF0000"/>
-            </a:solidFill>
-          </a:ln>
-        </p:spPr>
-        <p:style>
-          <a:lnRef idx="1">
-            <a:schemeClr val="accent1"/>
-          </a:lnRef>
-          <a:fillRef idx="0">
-            <a:schemeClr val="accent1"/>
-          </a:fillRef>
-          <a:effectRef idx="0">
-            <a:schemeClr val="accent1"/>
-          </a:effectRef>
-          <a:fontRef idx="minor">
-            <a:schemeClr val="tx1"/>
-          </a:fontRef>
-        </p:style>
-        <p:txBody>
-          <a:bodyPr rtlCol="0" anchor="ctr"/>
-          <a:lstStyle/>
-          <a:p>
-            <a:pPr algn="ctr"/>
-            <a:endParaRPr lang="en-US"/>
           </a:p>
         </p:txBody>
       </p:sp>
@@ -4160,685 +4060,6 @@
                   <a:cs typeface="Arial" pitchFamily="34" charset="0"/>
                 </a:rPr>
                 <a:t>Timestamp1 (63 – 32)</a:t>
-              </a:r>
-            </a:p>
-          </p:txBody>
-        </p:sp>
-      </p:grpSp>
-      <p:grpSp>
-        <p:nvGrpSpPr>
-          <p:cNvPr id="136" name="Group 135"/>
-          <p:cNvGrpSpPr/>
-          <p:nvPr/>
-        </p:nvGrpSpPr>
-        <p:grpSpPr>
-          <a:xfrm>
-            <a:off x="4826178" y="401419"/>
-            <a:ext cx="3963362" cy="1649350"/>
-            <a:chOff x="4648199" y="482648"/>
-            <a:chExt cx="3963362" cy="1649350"/>
-          </a:xfrm>
-        </p:grpSpPr>
-        <p:cxnSp>
-          <p:nvCxnSpPr>
-            <p:cNvPr id="137" name="Straight Connector 136"/>
-            <p:cNvCxnSpPr/>
-            <p:nvPr/>
-          </p:nvCxnSpPr>
-          <p:spPr>
-            <a:xfrm>
-              <a:off x="6515100" y="772180"/>
-              <a:ext cx="0" cy="258010"/>
-            </a:xfrm>
-            <a:prstGeom prst="line">
-              <a:avLst/>
-            </a:prstGeom>
-          </p:spPr>
-          <p:style>
-            <a:lnRef idx="1">
-              <a:schemeClr val="accent1"/>
-            </a:lnRef>
-            <a:fillRef idx="0">
-              <a:schemeClr val="accent1"/>
-            </a:fillRef>
-            <a:effectRef idx="0">
-              <a:schemeClr val="accent1"/>
-            </a:effectRef>
-            <a:fontRef idx="minor">
-              <a:schemeClr val="tx1"/>
-            </a:fontRef>
-          </p:style>
-        </p:cxnSp>
-        <p:cxnSp>
-          <p:nvCxnSpPr>
-            <p:cNvPr id="138" name="Straight Connector 137"/>
-            <p:cNvCxnSpPr>
-              <a:stCxn id="129" idx="2"/>
-            </p:cNvCxnSpPr>
-            <p:nvPr/>
-          </p:nvCxnSpPr>
-          <p:spPr>
-            <a:xfrm>
-              <a:off x="5622695" y="759647"/>
-              <a:ext cx="0" cy="258010"/>
-            </a:xfrm>
-            <a:prstGeom prst="line">
-              <a:avLst/>
-            </a:prstGeom>
-          </p:spPr>
-          <p:style>
-            <a:lnRef idx="1">
-              <a:schemeClr val="accent1"/>
-            </a:lnRef>
-            <a:fillRef idx="0">
-              <a:schemeClr val="accent1"/>
-            </a:fillRef>
-            <a:effectRef idx="0">
-              <a:schemeClr val="accent1"/>
-            </a:effectRef>
-            <a:fontRef idx="minor">
-              <a:schemeClr val="tx1"/>
-            </a:fontRef>
-          </p:style>
-        </p:cxnSp>
-        <p:cxnSp>
-          <p:nvCxnSpPr>
-            <p:cNvPr id="139" name="Straight Connector 138"/>
-            <p:cNvCxnSpPr/>
-            <p:nvPr/>
-          </p:nvCxnSpPr>
-          <p:spPr>
-            <a:xfrm flipH="1">
-              <a:off x="7315200" y="1052898"/>
-              <a:ext cx="228598" cy="0"/>
-            </a:xfrm>
-            <a:prstGeom prst="line">
-              <a:avLst/>
-            </a:prstGeom>
-          </p:spPr>
-          <p:style>
-            <a:lnRef idx="1">
-              <a:schemeClr val="accent1"/>
-            </a:lnRef>
-            <a:fillRef idx="0">
-              <a:schemeClr val="accent1"/>
-            </a:fillRef>
-            <a:effectRef idx="0">
-              <a:schemeClr val="accent1"/>
-            </a:effectRef>
-            <a:fontRef idx="minor">
-              <a:schemeClr val="tx1"/>
-            </a:fontRef>
-          </p:style>
-        </p:cxnSp>
-        <p:sp>
-          <p:nvSpPr>
-            <p:cNvPr id="140" name="TextBox 139"/>
-            <p:cNvSpPr txBox="1"/>
-            <p:nvPr/>
-          </p:nvSpPr>
-          <p:spPr>
-            <a:xfrm>
-              <a:off x="6248400" y="484999"/>
-              <a:ext cx="1066800" cy="276999"/>
-            </a:xfrm>
-            <a:prstGeom prst="rect">
-              <a:avLst/>
-            </a:prstGeom>
-            <a:noFill/>
-            <a:ln w="3175">
-              <a:solidFill>
-                <a:srgbClr val="0070C0"/>
-              </a:solidFill>
-              <a:prstDash val="lgDash"/>
-            </a:ln>
-          </p:spPr>
-          <p:txBody>
-            <a:bodyPr wrap="square" rtlCol="0">
-              <a:spAutoFit/>
-            </a:bodyPr>
-            <a:lstStyle/>
-            <a:p>
-              <a:r>
-                <a:rPr lang="en-US" sz="1200" dirty="0">
-                  <a:solidFill>
-                    <a:srgbClr val="0070C0"/>
-                  </a:solidFill>
-                </a:rPr>
-                <a:t>Bank of banks</a:t>
-              </a:r>
-            </a:p>
-          </p:txBody>
-        </p:sp>
-        <p:sp>
-          <p:nvSpPr>
-            <p:cNvPr id="141" name="TextBox 140"/>
-            <p:cNvSpPr txBox="1"/>
-            <p:nvPr/>
-          </p:nvSpPr>
-          <p:spPr>
-            <a:xfrm>
-              <a:off x="7542835" y="936595"/>
-              <a:ext cx="1068726" cy="276999"/>
-            </a:xfrm>
-            <a:prstGeom prst="rect">
-              <a:avLst/>
-            </a:prstGeom>
-            <a:noFill/>
-            <a:ln w="3175">
-              <a:solidFill>
-                <a:srgbClr val="0070C0"/>
-              </a:solidFill>
-              <a:prstDash val="lgDash"/>
-            </a:ln>
-          </p:spPr>
-          <p:txBody>
-            <a:bodyPr wrap="square" rtlCol="0">
-              <a:spAutoFit/>
-            </a:bodyPr>
-            <a:lstStyle/>
-            <a:p>
-              <a:r>
-                <a:rPr lang="en-US" sz="1200">
-                  <a:solidFill>
-                    <a:srgbClr val="0070C0"/>
-                  </a:solidFill>
-                </a:rPr>
-                <a:t>Stream Status</a:t>
-              </a:r>
-              <a:endParaRPr lang="en-US" sz="1200" dirty="0">
-                <a:solidFill>
-                  <a:srgbClr val="0070C0"/>
-                </a:solidFill>
-              </a:endParaRPr>
-            </a:p>
-          </p:txBody>
-        </p:sp>
-        <p:sp>
-          <p:nvSpPr>
-            <p:cNvPr id="142" name="TextBox 141"/>
-            <p:cNvSpPr txBox="1"/>
-            <p:nvPr/>
-          </p:nvSpPr>
-          <p:spPr>
-            <a:xfrm>
-              <a:off x="5075220" y="482648"/>
-              <a:ext cx="1094950" cy="276999"/>
-            </a:xfrm>
-            <a:prstGeom prst="rect">
-              <a:avLst/>
-            </a:prstGeom>
-            <a:noFill/>
-            <a:ln w="3175">
-              <a:solidFill>
-                <a:srgbClr val="0070C0"/>
-              </a:solidFill>
-              <a:prstDash val="lgDash"/>
-            </a:ln>
-          </p:spPr>
-          <p:txBody>
-            <a:bodyPr wrap="square" rtlCol="0">
-              <a:spAutoFit/>
-            </a:bodyPr>
-            <a:lstStyle/>
-            <a:p>
-              <a:r>
-                <a:rPr lang="en-US" sz="1200">
-                  <a:solidFill>
-                    <a:srgbClr val="0070C0"/>
-                  </a:solidFill>
-                </a:rPr>
-                <a:t> 16 </a:t>
-              </a:r>
-              <a:r>
-                <a:rPr lang="en-US" sz="1200" dirty="0">
-                  <a:solidFill>
-                    <a:srgbClr val="0070C0"/>
-                  </a:solidFill>
-                </a:rPr>
-                <a:t>bit ROC  ID</a:t>
-              </a:r>
-            </a:p>
-          </p:txBody>
-        </p:sp>
-        <p:grpSp>
-          <p:nvGrpSpPr>
-            <p:cNvPr id="143" name="Group 142"/>
-            <p:cNvGrpSpPr/>
-            <p:nvPr/>
-          </p:nvGrpSpPr>
-          <p:grpSpPr>
-            <a:xfrm>
-              <a:off x="5105400" y="914398"/>
-              <a:ext cx="2209800" cy="276999"/>
-              <a:chOff x="6096000" y="990600"/>
-              <a:chExt cx="2209800" cy="276999"/>
-            </a:xfrm>
-            <a:solidFill>
-              <a:schemeClr val="bg1"/>
-            </a:solidFill>
-          </p:grpSpPr>
-          <p:grpSp>
-            <p:nvGrpSpPr>
-              <p:cNvPr id="153" name="Group 152"/>
-              <p:cNvGrpSpPr/>
-              <p:nvPr/>
-            </p:nvGrpSpPr>
-            <p:grpSpPr>
-              <a:xfrm>
-                <a:off x="6096000" y="990600"/>
-                <a:ext cx="2209800" cy="276999"/>
-                <a:chOff x="6248400" y="1066800"/>
-                <a:chExt cx="2209800" cy="276999"/>
-              </a:xfrm>
-              <a:grpFill/>
-            </p:grpSpPr>
-            <p:sp>
-              <p:nvSpPr>
-                <p:cNvPr id="155" name="TextBox 154"/>
-                <p:cNvSpPr txBox="1"/>
-                <p:nvPr/>
-              </p:nvSpPr>
-              <p:spPr>
-                <a:xfrm>
-                  <a:off x="6248400" y="1066800"/>
-                  <a:ext cx="2209800" cy="276999"/>
-                </a:xfrm>
-                <a:prstGeom prst="rect">
-                  <a:avLst/>
-                </a:prstGeom>
-                <a:grpFill/>
-                <a:ln w="19050">
-                  <a:solidFill>
-                    <a:schemeClr val="tx1"/>
-                  </a:solidFill>
-                </a:ln>
-              </p:spPr>
-              <p:txBody>
-                <a:bodyPr wrap="square" rtlCol="0">
-                  <a:spAutoFit/>
-                </a:bodyPr>
-                <a:lstStyle/>
-                <a:p>
-                  <a:r>
-                    <a:rPr lang="en-US" sz="1200" b="1" dirty="0">
-                      <a:latin typeface="Arial" pitchFamily="34" charset="0"/>
-                      <a:cs typeface="Arial" pitchFamily="34" charset="0"/>
-                    </a:rPr>
-                    <a:t>     ROC ID        0x10       SS</a:t>
-                  </a:r>
-                </a:p>
-              </p:txBody>
-            </p:sp>
-            <p:cxnSp>
-              <p:nvCxnSpPr>
-                <p:cNvPr id="156" name="Straight Connector 155"/>
-                <p:cNvCxnSpPr/>
-                <p:nvPr/>
-              </p:nvCxnSpPr>
-              <p:spPr>
-                <a:xfrm rot="16200000" flipH="1">
-                  <a:off x="7786300" y="1205300"/>
-                  <a:ext cx="276999" cy="0"/>
-                </a:xfrm>
-                <a:prstGeom prst="line">
-                  <a:avLst/>
-                </a:prstGeom>
-                <a:grpFill/>
-                <a:ln w="19050">
-                  <a:solidFill>
-                    <a:schemeClr val="tx1"/>
-                  </a:solidFill>
-                </a:ln>
-              </p:spPr>
-              <p:style>
-                <a:lnRef idx="1">
-                  <a:schemeClr val="accent1"/>
-                </a:lnRef>
-                <a:fillRef idx="0">
-                  <a:schemeClr val="accent1"/>
-                </a:fillRef>
-                <a:effectRef idx="0">
-                  <a:schemeClr val="accent1"/>
-                </a:effectRef>
-                <a:fontRef idx="minor">
-                  <a:schemeClr val="tx1"/>
-                </a:fontRef>
-              </p:style>
-            </p:cxnSp>
-          </p:grpSp>
-          <p:cxnSp>
-            <p:nvCxnSpPr>
-              <p:cNvPr id="154" name="Straight Connector 153"/>
-              <p:cNvCxnSpPr/>
-              <p:nvPr/>
-            </p:nvCxnSpPr>
-            <p:spPr>
-              <a:xfrm rot="16200000" flipH="1">
-                <a:off x="7024300" y="1129100"/>
-                <a:ext cx="276999" cy="0"/>
-              </a:xfrm>
-              <a:prstGeom prst="line">
-                <a:avLst/>
-              </a:prstGeom>
-              <a:grpFill/>
-              <a:ln w="19050">
-                <a:solidFill>
-                  <a:schemeClr val="tx1"/>
-                </a:solidFill>
-              </a:ln>
-            </p:spPr>
-            <p:style>
-              <a:lnRef idx="1">
-                <a:schemeClr val="accent1"/>
-              </a:lnRef>
-              <a:fillRef idx="0">
-                <a:schemeClr val="accent1"/>
-              </a:fillRef>
-              <a:effectRef idx="0">
-                <a:schemeClr val="accent1"/>
-              </a:effectRef>
-              <a:fontRef idx="minor">
-                <a:schemeClr val="tx1"/>
-              </a:fontRef>
-            </p:style>
-          </p:cxnSp>
-        </p:grpSp>
-        <p:cxnSp>
-          <p:nvCxnSpPr>
-            <p:cNvPr id="144" name="Straight Connector 143"/>
-            <p:cNvCxnSpPr/>
-            <p:nvPr/>
-          </p:nvCxnSpPr>
-          <p:spPr>
-            <a:xfrm flipH="1">
-              <a:off x="4648201" y="1194736"/>
-              <a:ext cx="2114870" cy="285960"/>
-            </a:xfrm>
-            <a:prstGeom prst="line">
-              <a:avLst/>
-            </a:prstGeom>
-            <a:ln>
-              <a:solidFill>
-                <a:srgbClr val="FF0000"/>
-              </a:solidFill>
-            </a:ln>
-          </p:spPr>
-          <p:style>
-            <a:lnRef idx="1">
-              <a:schemeClr val="accent1"/>
-            </a:lnRef>
-            <a:fillRef idx="0">
-              <a:schemeClr val="accent1"/>
-            </a:fillRef>
-            <a:effectRef idx="0">
-              <a:schemeClr val="accent1"/>
-            </a:effectRef>
-            <a:fontRef idx="minor">
-              <a:schemeClr val="tx1"/>
-            </a:fontRef>
-          </p:style>
-        </p:cxnSp>
-        <p:cxnSp>
-          <p:nvCxnSpPr>
-            <p:cNvPr id="145" name="Straight Connector 144"/>
-            <p:cNvCxnSpPr/>
-            <p:nvPr/>
-          </p:nvCxnSpPr>
-          <p:spPr>
-            <a:xfrm>
-              <a:off x="7315200" y="1179487"/>
-              <a:ext cx="228598" cy="330768"/>
-            </a:xfrm>
-            <a:prstGeom prst="line">
-              <a:avLst/>
-            </a:prstGeom>
-            <a:ln>
-              <a:solidFill>
-                <a:srgbClr val="FF0000"/>
-              </a:solidFill>
-            </a:ln>
-          </p:spPr>
-          <p:style>
-            <a:lnRef idx="1">
-              <a:schemeClr val="accent2"/>
-            </a:lnRef>
-            <a:fillRef idx="0">
-              <a:schemeClr val="accent2"/>
-            </a:fillRef>
-            <a:effectRef idx="0">
-              <a:schemeClr val="accent2"/>
-            </a:effectRef>
-            <a:fontRef idx="minor">
-              <a:schemeClr val="tx1"/>
-            </a:fontRef>
-          </p:style>
-        </p:cxnSp>
-        <p:grpSp>
-          <p:nvGrpSpPr>
-            <p:cNvPr id="146" name="Group 145"/>
-            <p:cNvGrpSpPr/>
-            <p:nvPr/>
-          </p:nvGrpSpPr>
-          <p:grpSpPr>
-            <a:xfrm>
-              <a:off x="4648199" y="1510255"/>
-              <a:ext cx="2895600" cy="289299"/>
-              <a:chOff x="4648199" y="1510255"/>
-              <a:chExt cx="2895600" cy="289299"/>
-            </a:xfrm>
-          </p:grpSpPr>
-          <p:grpSp>
-            <p:nvGrpSpPr>
-              <p:cNvPr id="149" name="Group 148"/>
-              <p:cNvGrpSpPr/>
-              <p:nvPr/>
-            </p:nvGrpSpPr>
-            <p:grpSpPr>
-              <a:xfrm>
-                <a:off x="4648199" y="1510255"/>
-                <a:ext cx="2895600" cy="277000"/>
-                <a:chOff x="5562600" y="1600200"/>
-                <a:chExt cx="1524000" cy="277000"/>
-              </a:xfrm>
-            </p:grpSpPr>
-            <p:sp>
-              <p:nvSpPr>
-                <p:cNvPr id="151" name="TextBox 150"/>
-                <p:cNvSpPr txBox="1"/>
-                <p:nvPr/>
-              </p:nvSpPr>
-              <p:spPr>
-                <a:xfrm>
-                  <a:off x="5562600" y="1600201"/>
-                  <a:ext cx="1524000" cy="276999"/>
-                </a:xfrm>
-                <a:prstGeom prst="rect">
-                  <a:avLst/>
-                </a:prstGeom>
-                <a:noFill/>
-                <a:ln w="19050">
-                  <a:solidFill>
-                    <a:schemeClr val="tx1"/>
-                  </a:solidFill>
-                </a:ln>
-              </p:spPr>
-              <p:txBody>
-                <a:bodyPr wrap="square" rtlCol="0">
-                  <a:spAutoFit/>
-                </a:bodyPr>
-                <a:lstStyle/>
-                <a:p>
-                  <a:r>
-                    <a:rPr lang="en-US" sz="1200" b="1" dirty="0">
-                      <a:latin typeface="Arial" pitchFamily="34" charset="0"/>
-                      <a:cs typeface="Arial" pitchFamily="34" charset="0"/>
-                    </a:rPr>
-                    <a:t>      Total </a:t>
-                  </a:r>
-                  <a:r>
-                    <a:rPr lang="en-US" sz="1200" b="1">
-                      <a:latin typeface="Arial" pitchFamily="34" charset="0"/>
-                      <a:cs typeface="Arial" pitchFamily="34" charset="0"/>
-                    </a:rPr>
-                    <a:t>Streams         </a:t>
-                  </a:r>
-                  <a:r>
-                    <a:rPr lang="en-US" sz="1200" b="1" dirty="0">
-                      <a:latin typeface="Arial" pitchFamily="34" charset="0"/>
-                      <a:cs typeface="Arial" pitchFamily="34" charset="0"/>
-                    </a:rPr>
-                    <a:t>Stream Mask</a:t>
-                  </a:r>
-                </a:p>
-              </p:txBody>
-            </p:sp>
-            <p:cxnSp>
-              <p:nvCxnSpPr>
-                <p:cNvPr id="152" name="Straight Connector 151"/>
-                <p:cNvCxnSpPr/>
-                <p:nvPr/>
-              </p:nvCxnSpPr>
-              <p:spPr>
-                <a:xfrm rot="16200000" flipH="1">
-                  <a:off x="6186100" y="1738700"/>
-                  <a:ext cx="276999" cy="0"/>
-                </a:xfrm>
-                <a:prstGeom prst="line">
-                  <a:avLst/>
-                </a:prstGeom>
-                <a:ln w="19050">
-                  <a:solidFill>
-                    <a:schemeClr val="tx1"/>
-                  </a:solidFill>
-                </a:ln>
-              </p:spPr>
-              <p:style>
-                <a:lnRef idx="1">
-                  <a:schemeClr val="accent1"/>
-                </a:lnRef>
-                <a:fillRef idx="0">
-                  <a:schemeClr val="accent1"/>
-                </a:fillRef>
-                <a:effectRef idx="0">
-                  <a:schemeClr val="accent1"/>
-                </a:effectRef>
-                <a:fontRef idx="minor">
-                  <a:schemeClr val="tx1"/>
-                </a:fontRef>
-              </p:style>
-            </p:cxnSp>
-          </p:grpSp>
-          <p:cxnSp>
-            <p:nvCxnSpPr>
-              <p:cNvPr id="150" name="Straight Connector 149"/>
-              <p:cNvCxnSpPr/>
-              <p:nvPr/>
-            </p:nvCxnSpPr>
-            <p:spPr>
-              <a:xfrm rot="16200000" flipH="1">
-                <a:off x="4733163" y="1661055"/>
-                <a:ext cx="276999" cy="0"/>
-              </a:xfrm>
-              <a:prstGeom prst="line">
-                <a:avLst/>
-              </a:prstGeom>
-              <a:ln w="19050">
-                <a:solidFill>
-                  <a:schemeClr val="tx1"/>
-                </a:solidFill>
-              </a:ln>
-            </p:spPr>
-            <p:style>
-              <a:lnRef idx="1">
-                <a:schemeClr val="accent1"/>
-              </a:lnRef>
-              <a:fillRef idx="0">
-                <a:schemeClr val="accent1"/>
-              </a:fillRef>
-              <a:effectRef idx="0">
-                <a:schemeClr val="accent1"/>
-              </a:effectRef>
-              <a:fontRef idx="minor">
-                <a:schemeClr val="tx1"/>
-              </a:fontRef>
-            </p:style>
-          </p:cxnSp>
-        </p:grpSp>
-        <p:sp>
-          <p:nvSpPr>
-            <p:cNvPr id="147" name="TextBox 146"/>
-            <p:cNvSpPr txBox="1"/>
-            <p:nvPr/>
-          </p:nvSpPr>
-          <p:spPr>
-            <a:xfrm>
-              <a:off x="5088918" y="1849554"/>
-              <a:ext cx="725129" cy="276999"/>
-            </a:xfrm>
-            <a:prstGeom prst="rect">
-              <a:avLst/>
-            </a:prstGeom>
-            <a:noFill/>
-            <a:ln w="3175">
-              <a:solidFill>
-                <a:srgbClr val="0070C0"/>
-              </a:solidFill>
-              <a:prstDash val="lgDash"/>
-            </a:ln>
-          </p:spPr>
-          <p:txBody>
-            <a:bodyPr wrap="square" rtlCol="0">
-              <a:spAutoFit/>
-            </a:bodyPr>
-            <a:lstStyle/>
-            <a:p>
-              <a:r>
-                <a:rPr lang="en-US" sz="1200" dirty="0">
-                  <a:solidFill>
-                    <a:srgbClr val="0070C0"/>
-                  </a:solidFill>
-                </a:rPr>
-                <a:t>Bits 6 - 4</a:t>
-              </a:r>
-            </a:p>
-          </p:txBody>
-        </p:sp>
-        <p:sp>
-          <p:nvSpPr>
-            <p:cNvPr id="148" name="TextBox 147"/>
-            <p:cNvSpPr txBox="1"/>
-            <p:nvPr/>
-          </p:nvSpPr>
-          <p:spPr>
-            <a:xfrm>
-              <a:off x="6395662" y="1854999"/>
-              <a:ext cx="762002" cy="276999"/>
-            </a:xfrm>
-            <a:prstGeom prst="rect">
-              <a:avLst/>
-            </a:prstGeom>
-            <a:noFill/>
-            <a:ln w="3175">
-              <a:solidFill>
-                <a:srgbClr val="0070C0"/>
-              </a:solidFill>
-              <a:prstDash val="lgDash"/>
-            </a:ln>
-          </p:spPr>
-          <p:txBody>
-            <a:bodyPr wrap="square" rtlCol="0">
-              <a:spAutoFit/>
-            </a:bodyPr>
-            <a:lstStyle/>
-            <a:p>
-              <a:r>
-                <a:rPr lang="en-US" sz="1200" dirty="0">
-                  <a:solidFill>
-                    <a:srgbClr val="0070C0"/>
-                  </a:solidFill>
-                </a:rPr>
-                <a:t>Bits 3 - 0</a:t>
               </a:r>
             </a:p>
           </p:txBody>
@@ -5713,96 +4934,6 @@
       </p:sp>
       <p:sp>
         <p:nvSpPr>
-          <p:cNvPr id="184" name="Left Brace 183"/>
-          <p:cNvSpPr/>
-          <p:nvPr/>
-        </p:nvSpPr>
-        <p:spPr>
-          <a:xfrm flipH="1">
-            <a:off x="4379893" y="2999047"/>
-            <a:ext cx="304800" cy="1097092"/>
-          </a:xfrm>
-          <a:prstGeom prst="leftBrace">
-            <a:avLst>
-              <a:gd name="adj1" fmla="val 42708"/>
-              <a:gd name="adj2" fmla="val 76222"/>
-            </a:avLst>
-          </a:prstGeom>
-          <a:ln>
-            <a:solidFill>
-              <a:srgbClr val="FF0000"/>
-            </a:solidFill>
-          </a:ln>
-        </p:spPr>
-        <p:style>
-          <a:lnRef idx="1">
-            <a:schemeClr val="accent1"/>
-          </a:lnRef>
-          <a:fillRef idx="0">
-            <a:schemeClr val="accent1"/>
-          </a:fillRef>
-          <a:effectRef idx="0">
-            <a:schemeClr val="accent1"/>
-          </a:effectRef>
-          <a:fontRef idx="minor">
-            <a:schemeClr val="tx1"/>
-          </a:fontRef>
-        </p:style>
-        <p:txBody>
-          <a:bodyPr rtlCol="0" anchor="ctr"/>
-          <a:lstStyle/>
-          <a:p>
-            <a:pPr algn="ctr"/>
-            <a:endParaRPr lang="en-US"/>
-          </a:p>
-        </p:txBody>
-      </p:sp>
-      <p:sp>
-        <p:nvSpPr>
-          <p:cNvPr id="185" name="TextBox 184"/>
-          <p:cNvSpPr txBox="1"/>
-          <p:nvPr/>
-        </p:nvSpPr>
-        <p:spPr>
-          <a:xfrm>
-            <a:off x="4707011" y="2314074"/>
-            <a:ext cx="1884288" cy="276999"/>
-          </a:xfrm>
-          <a:prstGeom prst="rect">
-            <a:avLst/>
-          </a:prstGeom>
-          <a:noFill/>
-          <a:ln w="3175">
-            <a:solidFill>
-              <a:srgbClr val="0070C0"/>
-            </a:solidFill>
-            <a:prstDash val="lgDash"/>
-          </a:ln>
-        </p:spPr>
-        <p:txBody>
-          <a:bodyPr wrap="square" rtlCol="0">
-            <a:spAutoFit/>
-          </a:bodyPr>
-          <a:lstStyle/>
-          <a:p>
-            <a:r>
-              <a:rPr lang="en-US" sz="1200">
-                <a:solidFill>
-                  <a:srgbClr val="0070C0"/>
-                </a:solidFill>
-              </a:rPr>
-              <a:t>Time Slice Segment (TSS)</a:t>
-            </a:r>
-            <a:endParaRPr lang="en-US" sz="1200" dirty="0">
-              <a:solidFill>
-                <a:srgbClr val="0070C0"/>
-              </a:solidFill>
-            </a:endParaRPr>
-          </a:p>
-        </p:txBody>
-      </p:sp>
-      <p:sp>
-        <p:nvSpPr>
           <p:cNvPr id="186" name="TextBox 185"/>
           <p:cNvSpPr txBox="1"/>
           <p:nvPr/>
@@ -5897,30 +5028,1554 @@
           </a:p>
         </p:txBody>
       </p:sp>
+      <p:cxnSp>
+        <p:nvCxnSpPr>
+          <p:cNvPr id="100" name="Straight Arrow Connector 99">
+            <a:extLst>
+              <a:ext uri="{FF2B5EF4-FFF2-40B4-BE49-F238E27FC236}">
+                <a16:creationId xmlns:a16="http://schemas.microsoft.com/office/drawing/2014/main" id="{58017067-86BC-D746-9116-82CF7279667C}"/>
+              </a:ext>
+            </a:extLst>
+          </p:cNvPr>
+          <p:cNvCxnSpPr>
+            <a:endCxn id="209" idx="1"/>
+          </p:cNvCxnSpPr>
+          <p:nvPr/>
+        </p:nvCxnSpPr>
+        <p:spPr>
+          <a:xfrm flipV="1">
+            <a:off x="4261319" y="975272"/>
+            <a:ext cx="1016179" cy="224761"/>
+          </a:xfrm>
+          <a:prstGeom prst="straightConnector1">
+            <a:avLst/>
+          </a:prstGeom>
+          <a:ln w="12700">
+            <a:solidFill>
+              <a:srgbClr val="FF0000"/>
+            </a:solidFill>
+            <a:tailEnd type="arrow"/>
+          </a:ln>
+        </p:spPr>
+        <p:style>
+          <a:lnRef idx="1">
+            <a:schemeClr val="accent1"/>
+          </a:lnRef>
+          <a:fillRef idx="0">
+            <a:schemeClr val="accent1"/>
+          </a:fillRef>
+          <a:effectRef idx="0">
+            <a:schemeClr val="accent1"/>
+          </a:effectRef>
+          <a:fontRef idx="minor">
+            <a:schemeClr val="tx1"/>
+          </a:fontRef>
+        </p:style>
+      </p:cxnSp>
+      <p:sp>
+        <p:nvSpPr>
+          <p:cNvPr id="101" name="Left Brace 100">
+            <a:extLst>
+              <a:ext uri="{FF2B5EF4-FFF2-40B4-BE49-F238E27FC236}">
+                <a16:creationId xmlns:a16="http://schemas.microsoft.com/office/drawing/2014/main" id="{D98C3845-9812-D241-A6F6-B0B796556336}"/>
+              </a:ext>
+            </a:extLst>
+          </p:cNvPr>
+          <p:cNvSpPr/>
+          <p:nvPr/>
+        </p:nvSpPr>
+        <p:spPr>
+          <a:xfrm flipH="1">
+            <a:off x="4375619" y="1907473"/>
+            <a:ext cx="304800" cy="1086979"/>
+          </a:xfrm>
+          <a:prstGeom prst="leftBrace">
+            <a:avLst>
+              <a:gd name="adj1" fmla="val 42708"/>
+              <a:gd name="adj2" fmla="val 50000"/>
+            </a:avLst>
+          </a:prstGeom>
+          <a:ln>
+            <a:solidFill>
+              <a:srgbClr val="FF0000"/>
+            </a:solidFill>
+          </a:ln>
+        </p:spPr>
+        <p:style>
+          <a:lnRef idx="1">
+            <a:schemeClr val="accent1"/>
+          </a:lnRef>
+          <a:fillRef idx="0">
+            <a:schemeClr val="accent1"/>
+          </a:fillRef>
+          <a:effectRef idx="0">
+            <a:schemeClr val="accent1"/>
+          </a:effectRef>
+          <a:fontRef idx="minor">
+            <a:schemeClr val="tx1"/>
+          </a:fontRef>
+        </p:style>
+        <p:txBody>
+          <a:bodyPr rtlCol="0" anchor="ctr"/>
+          <a:lstStyle/>
+          <a:p>
+            <a:pPr algn="ctr"/>
+            <a:endParaRPr lang="en-US"/>
+          </a:p>
+        </p:txBody>
+      </p:sp>
+      <p:cxnSp>
+        <p:nvCxnSpPr>
+          <p:cNvPr id="200" name="Straight Connector 199">
+            <a:extLst>
+              <a:ext uri="{FF2B5EF4-FFF2-40B4-BE49-F238E27FC236}">
+                <a16:creationId xmlns:a16="http://schemas.microsoft.com/office/drawing/2014/main" id="{11B26958-8921-EE4D-B07A-4CEDF71430EE}"/>
+              </a:ext>
+            </a:extLst>
+          </p:cNvPr>
+          <p:cNvCxnSpPr/>
+          <p:nvPr/>
+        </p:nvCxnSpPr>
+        <p:spPr>
+          <a:xfrm>
+            <a:off x="6687198" y="694554"/>
+            <a:ext cx="0" cy="258010"/>
+          </a:xfrm>
+          <a:prstGeom prst="line">
+            <a:avLst/>
+          </a:prstGeom>
+        </p:spPr>
+        <p:style>
+          <a:lnRef idx="1">
+            <a:schemeClr val="accent1"/>
+          </a:lnRef>
+          <a:fillRef idx="0">
+            <a:schemeClr val="accent1"/>
+          </a:fillRef>
+          <a:effectRef idx="0">
+            <a:schemeClr val="accent1"/>
+          </a:effectRef>
+          <a:fontRef idx="minor">
+            <a:schemeClr val="tx1"/>
+          </a:fontRef>
+        </p:style>
+      </p:cxnSp>
+      <p:cxnSp>
+        <p:nvCxnSpPr>
+          <p:cNvPr id="201" name="Straight Connector 200">
+            <a:extLst>
+              <a:ext uri="{FF2B5EF4-FFF2-40B4-BE49-F238E27FC236}">
+                <a16:creationId xmlns:a16="http://schemas.microsoft.com/office/drawing/2014/main" id="{42A1DD38-4728-DA4C-B504-D3B74654FB6F}"/>
+              </a:ext>
+            </a:extLst>
+          </p:cNvPr>
+          <p:cNvCxnSpPr>
+            <a:stCxn id="205" idx="2"/>
+          </p:cNvCxnSpPr>
+          <p:nvPr/>
+        </p:nvCxnSpPr>
+        <p:spPr>
+          <a:xfrm>
+            <a:off x="5794793" y="682021"/>
+            <a:ext cx="0" cy="258010"/>
+          </a:xfrm>
+          <a:prstGeom prst="line">
+            <a:avLst/>
+          </a:prstGeom>
+        </p:spPr>
+        <p:style>
+          <a:lnRef idx="1">
+            <a:schemeClr val="accent1"/>
+          </a:lnRef>
+          <a:fillRef idx="0">
+            <a:schemeClr val="accent1"/>
+          </a:fillRef>
+          <a:effectRef idx="0">
+            <a:schemeClr val="accent1"/>
+          </a:effectRef>
+          <a:fontRef idx="minor">
+            <a:schemeClr val="tx1"/>
+          </a:fontRef>
+        </p:style>
+      </p:cxnSp>
+      <p:cxnSp>
+        <p:nvCxnSpPr>
+          <p:cNvPr id="202" name="Straight Connector 201">
+            <a:extLst>
+              <a:ext uri="{FF2B5EF4-FFF2-40B4-BE49-F238E27FC236}">
+                <a16:creationId xmlns:a16="http://schemas.microsoft.com/office/drawing/2014/main" id="{89A2D0C6-0958-944A-A5D4-DAB4166127D1}"/>
+              </a:ext>
+            </a:extLst>
+          </p:cNvPr>
+          <p:cNvCxnSpPr>
+            <a:endCxn id="209" idx="3"/>
+          </p:cNvCxnSpPr>
+          <p:nvPr/>
+        </p:nvCxnSpPr>
+        <p:spPr>
+          <a:xfrm flipH="1">
+            <a:off x="7487298" y="975272"/>
+            <a:ext cx="228598" cy="0"/>
+          </a:xfrm>
+          <a:prstGeom prst="line">
+            <a:avLst/>
+          </a:prstGeom>
+        </p:spPr>
+        <p:style>
+          <a:lnRef idx="1">
+            <a:schemeClr val="accent1"/>
+          </a:lnRef>
+          <a:fillRef idx="0">
+            <a:schemeClr val="accent1"/>
+          </a:fillRef>
+          <a:effectRef idx="0">
+            <a:schemeClr val="accent1"/>
+          </a:effectRef>
+          <a:fontRef idx="minor">
+            <a:schemeClr val="tx1"/>
+          </a:fontRef>
+        </p:style>
+      </p:cxnSp>
+      <p:sp>
+        <p:nvSpPr>
+          <p:cNvPr id="203" name="TextBox 202">
+            <a:extLst>
+              <a:ext uri="{FF2B5EF4-FFF2-40B4-BE49-F238E27FC236}">
+                <a16:creationId xmlns:a16="http://schemas.microsoft.com/office/drawing/2014/main" id="{6F7694F9-613E-E64E-82DF-A6FF893B5CFA}"/>
+              </a:ext>
+            </a:extLst>
+          </p:cNvPr>
+          <p:cNvSpPr txBox="1"/>
+          <p:nvPr/>
+        </p:nvSpPr>
+        <p:spPr>
+          <a:xfrm>
+            <a:off x="6420498" y="407373"/>
+            <a:ext cx="1066800" cy="276999"/>
+          </a:xfrm>
+          <a:prstGeom prst="rect">
+            <a:avLst/>
+          </a:prstGeom>
+          <a:noFill/>
+          <a:ln w="3175">
+            <a:solidFill>
+              <a:srgbClr val="0070C0"/>
+            </a:solidFill>
+            <a:prstDash val="lgDash"/>
+          </a:ln>
+        </p:spPr>
+        <p:txBody>
+          <a:bodyPr wrap="square" rtlCol="0">
+            <a:spAutoFit/>
+          </a:bodyPr>
+          <a:lstStyle/>
+          <a:p>
+            <a:r>
+              <a:rPr lang="en-US" sz="1200" dirty="0">
+                <a:solidFill>
+                  <a:srgbClr val="0070C0"/>
+                </a:solidFill>
+              </a:rPr>
+              <a:t>Bank of banks</a:t>
+            </a:r>
+          </a:p>
+        </p:txBody>
+      </p:sp>
+      <p:sp>
+        <p:nvSpPr>
+          <p:cNvPr id="204" name="TextBox 203">
+            <a:extLst>
+              <a:ext uri="{FF2B5EF4-FFF2-40B4-BE49-F238E27FC236}">
+                <a16:creationId xmlns:a16="http://schemas.microsoft.com/office/drawing/2014/main" id="{5CCD681D-8F3A-E44F-8A80-7E23E86205CA}"/>
+              </a:ext>
+            </a:extLst>
+          </p:cNvPr>
+          <p:cNvSpPr txBox="1"/>
+          <p:nvPr/>
+        </p:nvSpPr>
+        <p:spPr>
+          <a:xfrm>
+            <a:off x="7714933" y="858969"/>
+            <a:ext cx="1068726" cy="276999"/>
+          </a:xfrm>
+          <a:prstGeom prst="rect">
+            <a:avLst/>
+          </a:prstGeom>
+          <a:noFill/>
+          <a:ln w="3175">
+            <a:solidFill>
+              <a:srgbClr val="0070C0"/>
+            </a:solidFill>
+            <a:prstDash val="lgDash"/>
+          </a:ln>
+        </p:spPr>
+        <p:txBody>
+          <a:bodyPr wrap="square" rtlCol="0">
+            <a:spAutoFit/>
+          </a:bodyPr>
+          <a:lstStyle/>
+          <a:p>
+            <a:r>
+              <a:rPr lang="en-US" sz="1200">
+                <a:solidFill>
+                  <a:srgbClr val="0070C0"/>
+                </a:solidFill>
+              </a:rPr>
+              <a:t>Stream Status</a:t>
+            </a:r>
+            <a:endParaRPr lang="en-US" sz="1200" dirty="0">
+              <a:solidFill>
+                <a:srgbClr val="0070C0"/>
+              </a:solidFill>
+            </a:endParaRPr>
+          </a:p>
+        </p:txBody>
+      </p:sp>
+      <p:sp>
+        <p:nvSpPr>
+          <p:cNvPr id="205" name="TextBox 204">
+            <a:extLst>
+              <a:ext uri="{FF2B5EF4-FFF2-40B4-BE49-F238E27FC236}">
+                <a16:creationId xmlns:a16="http://schemas.microsoft.com/office/drawing/2014/main" id="{A226B3FD-7335-AE47-A82D-56B26087C6FC}"/>
+              </a:ext>
+            </a:extLst>
+          </p:cNvPr>
+          <p:cNvSpPr txBox="1"/>
+          <p:nvPr/>
+        </p:nvSpPr>
+        <p:spPr>
+          <a:xfrm>
+            <a:off x="5247318" y="405022"/>
+            <a:ext cx="1094950" cy="276999"/>
+          </a:xfrm>
+          <a:prstGeom prst="rect">
+            <a:avLst/>
+          </a:prstGeom>
+          <a:noFill/>
+          <a:ln w="3175">
+            <a:solidFill>
+              <a:srgbClr val="0070C0"/>
+            </a:solidFill>
+            <a:prstDash val="lgDash"/>
+          </a:ln>
+        </p:spPr>
+        <p:txBody>
+          <a:bodyPr wrap="square" rtlCol="0">
+            <a:spAutoFit/>
+          </a:bodyPr>
+          <a:lstStyle/>
+          <a:p>
+            <a:r>
+              <a:rPr lang="en-US" sz="1200">
+                <a:solidFill>
+                  <a:srgbClr val="0070C0"/>
+                </a:solidFill>
+              </a:rPr>
+              <a:t> 16 </a:t>
+            </a:r>
+            <a:r>
+              <a:rPr lang="en-US" sz="1200" dirty="0">
+                <a:solidFill>
+                  <a:srgbClr val="0070C0"/>
+                </a:solidFill>
+              </a:rPr>
+              <a:t>bit ROC  ID</a:t>
+            </a:r>
+          </a:p>
+        </p:txBody>
+      </p:sp>
       <p:grpSp>
         <p:nvGrpSpPr>
-          <p:cNvPr id="188" name="Group 187"/>
+          <p:cNvPr id="206" name="Group 205">
+            <a:extLst>
+              <a:ext uri="{FF2B5EF4-FFF2-40B4-BE49-F238E27FC236}">
+                <a16:creationId xmlns:a16="http://schemas.microsoft.com/office/drawing/2014/main" id="{E168BF9D-6FA0-3049-B744-39DEAFEBB3C0}"/>
+              </a:ext>
+            </a:extLst>
+          </p:cNvPr>
           <p:cNvGrpSpPr/>
           <p:nvPr/>
         </p:nvGrpSpPr>
         <p:grpSpPr>
           <a:xfrm>
-            <a:off x="4707011" y="3619677"/>
-            <a:ext cx="3979790" cy="1384995"/>
-            <a:chOff x="4707010" y="3415345"/>
-            <a:chExt cx="3979790" cy="1384995"/>
+            <a:off x="5277498" y="836772"/>
+            <a:ext cx="2209800" cy="276999"/>
+            <a:chOff x="6096000" y="990600"/>
+            <a:chExt cx="2209800" cy="276999"/>
+          </a:xfrm>
+          <a:solidFill>
+            <a:schemeClr val="bg1"/>
+          </a:solidFill>
+        </p:grpSpPr>
+        <p:grpSp>
+          <p:nvGrpSpPr>
+            <p:cNvPr id="207" name="Group 206">
+              <a:extLst>
+                <a:ext uri="{FF2B5EF4-FFF2-40B4-BE49-F238E27FC236}">
+                  <a16:creationId xmlns:a16="http://schemas.microsoft.com/office/drawing/2014/main" id="{D8E3CE76-A397-284D-82FA-064340FFFD09}"/>
+                </a:ext>
+              </a:extLst>
+            </p:cNvPr>
+            <p:cNvGrpSpPr/>
+            <p:nvPr/>
+          </p:nvGrpSpPr>
+          <p:grpSpPr>
+            <a:xfrm>
+              <a:off x="6096000" y="990600"/>
+              <a:ext cx="2209800" cy="276999"/>
+              <a:chOff x="6248400" y="1066800"/>
+              <a:chExt cx="2209800" cy="276999"/>
+            </a:xfrm>
+            <a:grpFill/>
+          </p:grpSpPr>
+          <p:sp>
+            <p:nvSpPr>
+              <p:cNvPr id="209" name="TextBox 208">
+                <a:extLst>
+                  <a:ext uri="{FF2B5EF4-FFF2-40B4-BE49-F238E27FC236}">
+                    <a16:creationId xmlns:a16="http://schemas.microsoft.com/office/drawing/2014/main" id="{567276E3-39FB-CC47-8F75-082FA4EAC3FA}"/>
+                  </a:ext>
+                </a:extLst>
+              </p:cNvPr>
+              <p:cNvSpPr txBox="1"/>
+              <p:nvPr/>
+            </p:nvSpPr>
+            <p:spPr>
+              <a:xfrm>
+                <a:off x="6248400" y="1066800"/>
+                <a:ext cx="2209800" cy="276999"/>
+              </a:xfrm>
+              <a:prstGeom prst="rect">
+                <a:avLst/>
+              </a:prstGeom>
+              <a:grpFill/>
+              <a:ln w="19050">
+                <a:solidFill>
+                  <a:schemeClr val="tx1"/>
+                </a:solidFill>
+              </a:ln>
+            </p:spPr>
+            <p:txBody>
+              <a:bodyPr wrap="square" rtlCol="0">
+                <a:spAutoFit/>
+              </a:bodyPr>
+              <a:lstStyle/>
+              <a:p>
+                <a:r>
+                  <a:rPr lang="en-US" sz="1200" b="1" dirty="0">
+                    <a:latin typeface="Arial" pitchFamily="34" charset="0"/>
+                    <a:cs typeface="Arial" pitchFamily="34" charset="0"/>
+                  </a:rPr>
+                  <a:t>     ROC ID        0x10       SS</a:t>
+                </a:r>
+              </a:p>
+            </p:txBody>
+          </p:sp>
+          <p:cxnSp>
+            <p:nvCxnSpPr>
+              <p:cNvPr id="210" name="Straight Connector 209">
+                <a:extLst>
+                  <a:ext uri="{FF2B5EF4-FFF2-40B4-BE49-F238E27FC236}">
+                    <a16:creationId xmlns:a16="http://schemas.microsoft.com/office/drawing/2014/main" id="{0C70CCA3-7A3E-5A4D-BC15-FCBED07362AE}"/>
+                  </a:ext>
+                </a:extLst>
+              </p:cNvPr>
+              <p:cNvCxnSpPr/>
+              <p:nvPr/>
+            </p:nvCxnSpPr>
+            <p:spPr>
+              <a:xfrm rot="16200000" flipH="1">
+                <a:off x="7786300" y="1205300"/>
+                <a:ext cx="276999" cy="0"/>
+              </a:xfrm>
+              <a:prstGeom prst="line">
+                <a:avLst/>
+              </a:prstGeom>
+              <a:grpFill/>
+              <a:ln w="19050">
+                <a:solidFill>
+                  <a:schemeClr val="tx1"/>
+                </a:solidFill>
+              </a:ln>
+            </p:spPr>
+            <p:style>
+              <a:lnRef idx="1">
+                <a:schemeClr val="accent1"/>
+              </a:lnRef>
+              <a:fillRef idx="0">
+                <a:schemeClr val="accent1"/>
+              </a:fillRef>
+              <a:effectRef idx="0">
+                <a:schemeClr val="accent1"/>
+              </a:effectRef>
+              <a:fontRef idx="minor">
+                <a:schemeClr val="tx1"/>
+              </a:fontRef>
+            </p:style>
+          </p:cxnSp>
+        </p:grpSp>
+        <p:cxnSp>
+          <p:nvCxnSpPr>
+            <p:cNvPr id="208" name="Straight Connector 207">
+              <a:extLst>
+                <a:ext uri="{FF2B5EF4-FFF2-40B4-BE49-F238E27FC236}">
+                  <a16:creationId xmlns:a16="http://schemas.microsoft.com/office/drawing/2014/main" id="{A5C43277-241C-3A40-9EBF-8CB95CC4FB4B}"/>
+                </a:ext>
+              </a:extLst>
+            </p:cNvPr>
+            <p:cNvCxnSpPr/>
+            <p:nvPr/>
+          </p:nvCxnSpPr>
+          <p:spPr>
+            <a:xfrm rot="16200000" flipH="1">
+              <a:off x="7024300" y="1129100"/>
+              <a:ext cx="276999" cy="0"/>
+            </a:xfrm>
+            <a:prstGeom prst="line">
+              <a:avLst/>
+            </a:prstGeom>
+            <a:grpFill/>
+            <a:ln w="19050">
+              <a:solidFill>
+                <a:schemeClr val="tx1"/>
+              </a:solidFill>
+            </a:ln>
+          </p:spPr>
+          <p:style>
+            <a:lnRef idx="1">
+              <a:schemeClr val="accent1"/>
+            </a:lnRef>
+            <a:fillRef idx="0">
+              <a:schemeClr val="accent1"/>
+            </a:fillRef>
+            <a:effectRef idx="0">
+              <a:schemeClr val="accent1"/>
+            </a:effectRef>
+            <a:fontRef idx="minor">
+              <a:schemeClr val="tx1"/>
+            </a:fontRef>
+          </p:style>
+        </p:cxnSp>
+      </p:grpSp>
+      <p:cxnSp>
+        <p:nvCxnSpPr>
+          <p:cNvPr id="211" name="Straight Connector 210">
+            <a:extLst>
+              <a:ext uri="{FF2B5EF4-FFF2-40B4-BE49-F238E27FC236}">
+                <a16:creationId xmlns:a16="http://schemas.microsoft.com/office/drawing/2014/main" id="{8D704F53-80CE-2F45-93E4-2357D818B732}"/>
+              </a:ext>
+            </a:extLst>
+          </p:cNvPr>
+          <p:cNvCxnSpPr/>
+          <p:nvPr/>
+        </p:nvCxnSpPr>
+        <p:spPr>
+          <a:xfrm flipH="1">
+            <a:off x="4820299" y="1117110"/>
+            <a:ext cx="2114870" cy="285960"/>
+          </a:xfrm>
+          <a:prstGeom prst="line">
+            <a:avLst/>
+          </a:prstGeom>
+          <a:ln>
+            <a:solidFill>
+              <a:srgbClr val="FF0000"/>
+            </a:solidFill>
+          </a:ln>
+        </p:spPr>
+        <p:style>
+          <a:lnRef idx="1">
+            <a:schemeClr val="accent1"/>
+          </a:lnRef>
+          <a:fillRef idx="0">
+            <a:schemeClr val="accent1"/>
+          </a:fillRef>
+          <a:effectRef idx="0">
+            <a:schemeClr val="accent1"/>
+          </a:effectRef>
+          <a:fontRef idx="minor">
+            <a:schemeClr val="tx1"/>
+          </a:fontRef>
+        </p:style>
+      </p:cxnSp>
+      <p:cxnSp>
+        <p:nvCxnSpPr>
+          <p:cNvPr id="212" name="Straight Connector 211">
+            <a:extLst>
+              <a:ext uri="{FF2B5EF4-FFF2-40B4-BE49-F238E27FC236}">
+                <a16:creationId xmlns:a16="http://schemas.microsoft.com/office/drawing/2014/main" id="{10952891-AB80-6745-9618-353B6D1AD64A}"/>
+              </a:ext>
+            </a:extLst>
+          </p:cNvPr>
+          <p:cNvCxnSpPr/>
+          <p:nvPr/>
+        </p:nvCxnSpPr>
+        <p:spPr>
+          <a:xfrm>
+            <a:off x="7487298" y="1101861"/>
+            <a:ext cx="228598" cy="330768"/>
+          </a:xfrm>
+          <a:prstGeom prst="line">
+            <a:avLst/>
+          </a:prstGeom>
+          <a:ln>
+            <a:solidFill>
+              <a:srgbClr val="FF0000"/>
+            </a:solidFill>
+          </a:ln>
+        </p:spPr>
+        <p:style>
+          <a:lnRef idx="1">
+            <a:schemeClr val="accent2"/>
+          </a:lnRef>
+          <a:fillRef idx="0">
+            <a:schemeClr val="accent2"/>
+          </a:fillRef>
+          <a:effectRef idx="0">
+            <a:schemeClr val="accent2"/>
+          </a:effectRef>
+          <a:fontRef idx="minor">
+            <a:schemeClr val="tx1"/>
+          </a:fontRef>
+        </p:style>
+      </p:cxnSp>
+      <p:grpSp>
+        <p:nvGrpSpPr>
+          <p:cNvPr id="213" name="Group 212">
+            <a:extLst>
+              <a:ext uri="{FF2B5EF4-FFF2-40B4-BE49-F238E27FC236}">
+                <a16:creationId xmlns:a16="http://schemas.microsoft.com/office/drawing/2014/main" id="{4B3DDE15-CEEE-CB40-B63E-5C85253951BC}"/>
+              </a:ext>
+            </a:extLst>
+          </p:cNvPr>
+          <p:cNvGrpSpPr/>
+          <p:nvPr/>
+        </p:nvGrpSpPr>
+        <p:grpSpPr>
+          <a:xfrm>
+            <a:off x="4820297" y="1432629"/>
+            <a:ext cx="2895600" cy="277000"/>
+            <a:chOff x="4648199" y="1510255"/>
+            <a:chExt cx="2895600" cy="277000"/>
+          </a:xfrm>
+        </p:grpSpPr>
+        <p:grpSp>
+          <p:nvGrpSpPr>
+            <p:cNvPr id="214" name="Group 213">
+              <a:extLst>
+                <a:ext uri="{FF2B5EF4-FFF2-40B4-BE49-F238E27FC236}">
+                  <a16:creationId xmlns:a16="http://schemas.microsoft.com/office/drawing/2014/main" id="{1C6CC270-64F7-334E-9BEB-DCE6D815EE40}"/>
+                </a:ext>
+              </a:extLst>
+            </p:cNvPr>
+            <p:cNvGrpSpPr/>
+            <p:nvPr/>
+          </p:nvGrpSpPr>
+          <p:grpSpPr>
+            <a:xfrm>
+              <a:off x="4648199" y="1510255"/>
+              <a:ext cx="2895600" cy="277000"/>
+              <a:chOff x="5562600" y="1600200"/>
+              <a:chExt cx="1524000" cy="277000"/>
+            </a:xfrm>
+          </p:grpSpPr>
+          <p:sp>
+            <p:nvSpPr>
+              <p:cNvPr id="216" name="TextBox 215">
+                <a:extLst>
+                  <a:ext uri="{FF2B5EF4-FFF2-40B4-BE49-F238E27FC236}">
+                    <a16:creationId xmlns:a16="http://schemas.microsoft.com/office/drawing/2014/main" id="{1D02F107-A2BD-D84D-8263-21A5765AA4B1}"/>
+                  </a:ext>
+                </a:extLst>
+              </p:cNvPr>
+              <p:cNvSpPr txBox="1"/>
+              <p:nvPr/>
+            </p:nvSpPr>
+            <p:spPr>
+              <a:xfrm>
+                <a:off x="5562600" y="1600201"/>
+                <a:ext cx="1524000" cy="276999"/>
+              </a:xfrm>
+              <a:prstGeom prst="rect">
+                <a:avLst/>
+              </a:prstGeom>
+              <a:noFill/>
+              <a:ln w="19050">
+                <a:solidFill>
+                  <a:schemeClr val="tx1"/>
+                </a:solidFill>
+              </a:ln>
+            </p:spPr>
+            <p:txBody>
+              <a:bodyPr wrap="square" rtlCol="0">
+                <a:spAutoFit/>
+              </a:bodyPr>
+              <a:lstStyle/>
+              <a:p>
+                <a:r>
+                  <a:rPr lang="en-US" sz="1200" b="1" dirty="0">
+                    <a:latin typeface="Arial" pitchFamily="34" charset="0"/>
+                    <a:cs typeface="Arial" pitchFamily="34" charset="0"/>
+                  </a:rPr>
+                  <a:t> Err    Total Streams       Stream Mask</a:t>
+                </a:r>
+              </a:p>
+            </p:txBody>
+          </p:sp>
+          <p:cxnSp>
+            <p:nvCxnSpPr>
+              <p:cNvPr id="217" name="Straight Connector 216">
+                <a:extLst>
+                  <a:ext uri="{FF2B5EF4-FFF2-40B4-BE49-F238E27FC236}">
+                    <a16:creationId xmlns:a16="http://schemas.microsoft.com/office/drawing/2014/main" id="{F01C88BF-1EB4-7946-97FD-769B5CA0C24B}"/>
+                  </a:ext>
+                </a:extLst>
+              </p:cNvPr>
+              <p:cNvCxnSpPr/>
+              <p:nvPr/>
+            </p:nvCxnSpPr>
+            <p:spPr>
+              <a:xfrm rot="16200000" flipH="1">
+                <a:off x="6323612" y="1738700"/>
+                <a:ext cx="276999" cy="0"/>
+              </a:xfrm>
+              <a:prstGeom prst="line">
+                <a:avLst/>
+              </a:prstGeom>
+              <a:ln w="19050">
+                <a:solidFill>
+                  <a:schemeClr val="tx1"/>
+                </a:solidFill>
+              </a:ln>
+            </p:spPr>
+            <p:style>
+              <a:lnRef idx="1">
+                <a:schemeClr val="accent1"/>
+              </a:lnRef>
+              <a:fillRef idx="0">
+                <a:schemeClr val="accent1"/>
+              </a:fillRef>
+              <a:effectRef idx="0">
+                <a:schemeClr val="accent1"/>
+              </a:effectRef>
+              <a:fontRef idx="minor">
+                <a:schemeClr val="tx1"/>
+              </a:fontRef>
+            </p:style>
+          </p:cxnSp>
+        </p:grpSp>
+        <p:cxnSp>
+          <p:nvCxnSpPr>
+            <p:cNvPr id="215" name="Straight Connector 214">
+              <a:extLst>
+                <a:ext uri="{FF2B5EF4-FFF2-40B4-BE49-F238E27FC236}">
+                  <a16:creationId xmlns:a16="http://schemas.microsoft.com/office/drawing/2014/main" id="{7B071919-63D6-764E-9947-EA53657EB7F3}"/>
+                </a:ext>
+              </a:extLst>
+            </p:cNvPr>
+            <p:cNvCxnSpPr/>
+            <p:nvPr/>
+          </p:nvCxnSpPr>
+          <p:spPr>
+            <a:xfrm rot="16200000" flipH="1">
+              <a:off x="4930269" y="1648756"/>
+              <a:ext cx="276999" cy="0"/>
+            </a:xfrm>
+            <a:prstGeom prst="line">
+              <a:avLst/>
+            </a:prstGeom>
+            <a:ln w="19050">
+              <a:solidFill>
+                <a:schemeClr val="tx1"/>
+              </a:solidFill>
+            </a:ln>
+          </p:spPr>
+          <p:style>
+            <a:lnRef idx="1">
+              <a:schemeClr val="accent1"/>
+            </a:lnRef>
+            <a:fillRef idx="0">
+              <a:schemeClr val="accent1"/>
+            </a:fillRef>
+            <a:effectRef idx="0">
+              <a:schemeClr val="accent1"/>
+            </a:effectRef>
+            <a:fontRef idx="minor">
+              <a:schemeClr val="tx1"/>
+            </a:fontRef>
+          </p:style>
+        </p:cxnSp>
+      </p:grpSp>
+      <p:sp>
+        <p:nvSpPr>
+          <p:cNvPr id="218" name="TextBox 217">
+            <a:extLst>
+              <a:ext uri="{FF2B5EF4-FFF2-40B4-BE49-F238E27FC236}">
+                <a16:creationId xmlns:a16="http://schemas.microsoft.com/office/drawing/2014/main" id="{47F300C4-D582-7A42-A16E-09CFFA2D572F}"/>
+              </a:ext>
+            </a:extLst>
+          </p:cNvPr>
+          <p:cNvSpPr txBox="1"/>
+          <p:nvPr/>
+        </p:nvSpPr>
+        <p:spPr>
+          <a:xfrm>
+            <a:off x="5480519" y="1759798"/>
+            <a:ext cx="725129" cy="276999"/>
+          </a:xfrm>
+          <a:prstGeom prst="rect">
+            <a:avLst/>
+          </a:prstGeom>
+          <a:noFill/>
+          <a:ln w="3175">
+            <a:solidFill>
+              <a:srgbClr val="0070C0"/>
+            </a:solidFill>
+            <a:prstDash val="lgDash"/>
+          </a:ln>
+        </p:spPr>
+        <p:txBody>
+          <a:bodyPr wrap="square" rtlCol="0">
+            <a:spAutoFit/>
+          </a:bodyPr>
+          <a:lstStyle/>
+          <a:p>
+            <a:r>
+              <a:rPr lang="en-US" sz="1200" dirty="0">
+                <a:solidFill>
+                  <a:srgbClr val="0070C0"/>
+                </a:solidFill>
+              </a:rPr>
+              <a:t>   6 - 4</a:t>
+            </a:r>
+          </a:p>
+        </p:txBody>
+      </p:sp>
+      <p:sp>
+        <p:nvSpPr>
+          <p:cNvPr id="219" name="TextBox 218">
+            <a:extLst>
+              <a:ext uri="{FF2B5EF4-FFF2-40B4-BE49-F238E27FC236}">
+                <a16:creationId xmlns:a16="http://schemas.microsoft.com/office/drawing/2014/main" id="{3842B710-3DD0-F942-9F4C-65406E62BBA9}"/>
+              </a:ext>
+            </a:extLst>
+          </p:cNvPr>
+          <p:cNvSpPr txBox="1"/>
+          <p:nvPr/>
+        </p:nvSpPr>
+        <p:spPr>
+          <a:xfrm>
+            <a:off x="6775917" y="1759798"/>
+            <a:ext cx="762002" cy="276999"/>
+          </a:xfrm>
+          <a:prstGeom prst="rect">
+            <a:avLst/>
+          </a:prstGeom>
+          <a:noFill/>
+          <a:ln w="3175">
+            <a:solidFill>
+              <a:srgbClr val="0070C0"/>
+            </a:solidFill>
+            <a:prstDash val="lgDash"/>
+          </a:ln>
+        </p:spPr>
+        <p:txBody>
+          <a:bodyPr wrap="square" rtlCol="0">
+            <a:spAutoFit/>
+          </a:bodyPr>
+          <a:lstStyle/>
+          <a:p>
+            <a:r>
+              <a:rPr lang="en-US" sz="1200" dirty="0">
+                <a:solidFill>
+                  <a:srgbClr val="0070C0"/>
+                </a:solidFill>
+              </a:rPr>
+              <a:t>   3 - 0</a:t>
+            </a:r>
+          </a:p>
+        </p:txBody>
+      </p:sp>
+      <p:sp>
+        <p:nvSpPr>
+          <p:cNvPr id="220" name="Left Brace 219">
+            <a:extLst>
+              <a:ext uri="{FF2B5EF4-FFF2-40B4-BE49-F238E27FC236}">
+                <a16:creationId xmlns:a16="http://schemas.microsoft.com/office/drawing/2014/main" id="{0B3DB0E0-881C-F640-9909-2DF77EDBC00B}"/>
+              </a:ext>
+            </a:extLst>
+          </p:cNvPr>
+          <p:cNvSpPr/>
+          <p:nvPr/>
+        </p:nvSpPr>
+        <p:spPr>
+          <a:xfrm flipH="1">
+            <a:off x="4374012" y="3002650"/>
+            <a:ext cx="304800" cy="1097092"/>
+          </a:xfrm>
+          <a:prstGeom prst="leftBrace">
+            <a:avLst>
+              <a:gd name="adj1" fmla="val 42708"/>
+              <a:gd name="adj2" fmla="val 76222"/>
+            </a:avLst>
+          </a:prstGeom>
+          <a:ln>
+            <a:solidFill>
+              <a:srgbClr val="FF0000"/>
+            </a:solidFill>
+          </a:ln>
+        </p:spPr>
+        <p:style>
+          <a:lnRef idx="1">
+            <a:schemeClr val="accent1"/>
+          </a:lnRef>
+          <a:fillRef idx="0">
+            <a:schemeClr val="accent1"/>
+          </a:fillRef>
+          <a:effectRef idx="0">
+            <a:schemeClr val="accent1"/>
+          </a:effectRef>
+          <a:fontRef idx="minor">
+            <a:schemeClr val="tx1"/>
+          </a:fontRef>
+        </p:style>
+        <p:txBody>
+          <a:bodyPr rtlCol="0" anchor="ctr"/>
+          <a:lstStyle/>
+          <a:p>
+            <a:pPr algn="ctr"/>
+            <a:endParaRPr lang="en-US"/>
+          </a:p>
+        </p:txBody>
+      </p:sp>
+      <p:sp>
+        <p:nvSpPr>
+          <p:cNvPr id="221" name="TextBox 220">
+            <a:extLst>
+              <a:ext uri="{FF2B5EF4-FFF2-40B4-BE49-F238E27FC236}">
+                <a16:creationId xmlns:a16="http://schemas.microsoft.com/office/drawing/2014/main" id="{F7DE538D-9A51-5D4D-A1F7-7E163F9523B3}"/>
+              </a:ext>
+            </a:extLst>
+          </p:cNvPr>
+          <p:cNvSpPr txBox="1"/>
+          <p:nvPr/>
+        </p:nvSpPr>
+        <p:spPr>
+          <a:xfrm>
+            <a:off x="4701130" y="2317677"/>
+            <a:ext cx="1884288" cy="276999"/>
+          </a:xfrm>
+          <a:prstGeom prst="rect">
+            <a:avLst/>
+          </a:prstGeom>
+          <a:noFill/>
+          <a:ln w="3175">
+            <a:solidFill>
+              <a:srgbClr val="0070C0"/>
+            </a:solidFill>
+            <a:prstDash val="lgDash"/>
+          </a:ln>
+        </p:spPr>
+        <p:txBody>
+          <a:bodyPr wrap="square" rtlCol="0">
+            <a:spAutoFit/>
+          </a:bodyPr>
+          <a:lstStyle/>
+          <a:p>
+            <a:r>
+              <a:rPr lang="en-US" sz="1200">
+                <a:solidFill>
+                  <a:srgbClr val="0070C0"/>
+                </a:solidFill>
+              </a:rPr>
+              <a:t>Time Slice Segment (TSS)</a:t>
+            </a:r>
+            <a:endParaRPr lang="en-US" sz="1200" dirty="0">
+              <a:solidFill>
+                <a:srgbClr val="0070C0"/>
+              </a:solidFill>
+            </a:endParaRPr>
+          </a:p>
+        </p:txBody>
+      </p:sp>
+      <p:cxnSp>
+        <p:nvCxnSpPr>
+          <p:cNvPr id="222" name="Straight Arrow Connector 221">
+            <a:extLst>
+              <a:ext uri="{FF2B5EF4-FFF2-40B4-BE49-F238E27FC236}">
+                <a16:creationId xmlns:a16="http://schemas.microsoft.com/office/drawing/2014/main" id="{D21C8EAA-D348-9F48-96C3-508660862514}"/>
+              </a:ext>
+            </a:extLst>
+          </p:cNvPr>
+          <p:cNvCxnSpPr/>
+          <p:nvPr/>
+        </p:nvCxnSpPr>
+        <p:spPr>
+          <a:xfrm flipV="1">
+            <a:off x="4261314" y="3124377"/>
+            <a:ext cx="811517" cy="5650"/>
+          </a:xfrm>
+          <a:prstGeom prst="straightConnector1">
+            <a:avLst/>
+          </a:prstGeom>
+          <a:ln w="12700">
+            <a:solidFill>
+              <a:srgbClr val="FF0000"/>
+            </a:solidFill>
+            <a:tailEnd type="arrow"/>
+          </a:ln>
+        </p:spPr>
+        <p:style>
+          <a:lnRef idx="1">
+            <a:schemeClr val="accent1"/>
+          </a:lnRef>
+          <a:fillRef idx="0">
+            <a:schemeClr val="accent1"/>
+          </a:fillRef>
+          <a:effectRef idx="0">
+            <a:schemeClr val="accent1"/>
+          </a:effectRef>
+          <a:fontRef idx="minor">
+            <a:schemeClr val="tx1"/>
+          </a:fontRef>
+        </p:style>
+      </p:cxnSp>
+      <p:sp>
+        <p:nvSpPr>
+          <p:cNvPr id="223" name="TextBox 222">
+            <a:extLst>
+              <a:ext uri="{FF2B5EF4-FFF2-40B4-BE49-F238E27FC236}">
+                <a16:creationId xmlns:a16="http://schemas.microsoft.com/office/drawing/2014/main" id="{BCB30303-F5F1-F045-9EE4-F00787C1C5D8}"/>
+              </a:ext>
+            </a:extLst>
+          </p:cNvPr>
+          <p:cNvSpPr txBox="1"/>
+          <p:nvPr/>
+        </p:nvSpPr>
+        <p:spPr>
+          <a:xfrm>
+            <a:off x="5067412" y="2801211"/>
+            <a:ext cx="3307854" cy="646331"/>
+          </a:xfrm>
+          <a:prstGeom prst="rect">
+            <a:avLst/>
+          </a:prstGeom>
+          <a:noFill/>
+          <a:ln w="3175">
+            <a:solidFill>
+              <a:srgbClr val="0070C0"/>
+            </a:solidFill>
+            <a:prstDash val="lgDash"/>
+          </a:ln>
+        </p:spPr>
+        <p:txBody>
+          <a:bodyPr wrap="square" rtlCol="0">
+            <a:spAutoFit/>
+          </a:bodyPr>
+          <a:lstStyle/>
+          <a:p>
+            <a:r>
+              <a:rPr lang="en-US" sz="1200" dirty="0">
+                <a:solidFill>
+                  <a:srgbClr val="0070C0"/>
+                </a:solidFill>
+              </a:rPr>
+              <a:t>2</a:t>
+            </a:r>
+            <a:r>
+              <a:rPr lang="en-US" sz="1200" baseline="30000" dirty="0">
+                <a:solidFill>
+                  <a:srgbClr val="0070C0"/>
+                </a:solidFill>
+              </a:rPr>
+              <a:t>nd</a:t>
+            </a:r>
+            <a:r>
+              <a:rPr lang="en-US" sz="1200" dirty="0">
+                <a:solidFill>
+                  <a:srgbClr val="0070C0"/>
+                </a:solidFill>
+              </a:rPr>
+              <a:t> byte: top 2 bits = 2 for padding if odd # payloads (else 0), lower 6 bits is type 5 (unsigned short) =&gt; 0x85 (1000 0101)</a:t>
+            </a:r>
+          </a:p>
+        </p:txBody>
+      </p:sp>
+      <p:sp>
+        <p:nvSpPr>
+          <p:cNvPr id="224" name="TextBox 223">
+            <a:extLst>
+              <a:ext uri="{FF2B5EF4-FFF2-40B4-BE49-F238E27FC236}">
+                <a16:creationId xmlns:a16="http://schemas.microsoft.com/office/drawing/2014/main" id="{61C39F55-226E-4C45-AF7A-6C9B359ED6DA}"/>
+              </a:ext>
+            </a:extLst>
+          </p:cNvPr>
+          <p:cNvSpPr txBox="1"/>
+          <p:nvPr/>
+        </p:nvSpPr>
+        <p:spPr>
+          <a:xfrm>
+            <a:off x="4648470" y="1759798"/>
+            <a:ext cx="592396" cy="276999"/>
+          </a:xfrm>
+          <a:prstGeom prst="rect">
+            <a:avLst/>
+          </a:prstGeom>
+          <a:noFill/>
+          <a:ln w="3175">
+            <a:solidFill>
+              <a:srgbClr val="0070C0"/>
+            </a:solidFill>
+            <a:prstDash val="lgDash"/>
+          </a:ln>
+        </p:spPr>
+        <p:txBody>
+          <a:bodyPr wrap="square" rtlCol="0">
+            <a:spAutoFit/>
+          </a:bodyPr>
+          <a:lstStyle/>
+          <a:p>
+            <a:r>
+              <a:rPr lang="en-US" sz="1200" dirty="0">
+                <a:solidFill>
+                  <a:srgbClr val="0070C0"/>
+                </a:solidFill>
+              </a:rPr>
+              <a:t>Bits 7</a:t>
+            </a:r>
+          </a:p>
+        </p:txBody>
+      </p:sp>
+      <p:grpSp>
+        <p:nvGrpSpPr>
+          <p:cNvPr id="225" name="Group 224">
+            <a:extLst>
+              <a:ext uri="{FF2B5EF4-FFF2-40B4-BE49-F238E27FC236}">
+                <a16:creationId xmlns:a16="http://schemas.microsoft.com/office/drawing/2014/main" id="{AE54F7E7-BD33-F746-BD9C-ED5BAE8A9678}"/>
+              </a:ext>
+            </a:extLst>
+          </p:cNvPr>
+          <p:cNvGrpSpPr/>
+          <p:nvPr/>
+        </p:nvGrpSpPr>
+        <p:grpSpPr>
+          <a:xfrm>
+            <a:off x="4709659" y="5324819"/>
+            <a:ext cx="3979790" cy="646331"/>
+            <a:chOff x="4123329" y="5142133"/>
+            <a:chExt cx="3979790" cy="646331"/>
           </a:xfrm>
         </p:grpSpPr>
         <p:sp>
           <p:nvSpPr>
-            <p:cNvPr id="189" name="TextBox 188"/>
+            <p:cNvPr id="226" name="TextBox 225">
+              <a:extLst>
+                <a:ext uri="{FF2B5EF4-FFF2-40B4-BE49-F238E27FC236}">
+                  <a16:creationId xmlns:a16="http://schemas.microsoft.com/office/drawing/2014/main" id="{CA4C375D-EE30-FC45-BEDF-FBC6C20B8BFA}"/>
+                </a:ext>
+              </a:extLst>
+            </p:cNvPr>
             <p:cNvSpPr txBox="1"/>
             <p:nvPr/>
           </p:nvSpPr>
           <p:spPr>
             <a:xfrm>
-              <a:off x="4707010" y="3415345"/>
-              <a:ext cx="3979790" cy="1384995"/>
+              <a:off x="4123329" y="5142133"/>
+              <a:ext cx="3979790" cy="646331"/>
+            </a:xfrm>
+            <a:prstGeom prst="rect">
+              <a:avLst/>
+            </a:prstGeom>
+            <a:noFill/>
+            <a:ln w="3175">
+              <a:solidFill>
+                <a:srgbClr val="0070C0"/>
+              </a:solidFill>
+              <a:prstDash val="lgDash"/>
+            </a:ln>
+          </p:spPr>
+          <p:txBody>
+            <a:bodyPr wrap="square" rtlCol="0">
+              <a:spAutoFit/>
+            </a:bodyPr>
+            <a:lstStyle/>
+            <a:p>
+              <a:r>
+                <a:rPr lang="en-US" sz="1200" dirty="0">
+                  <a:solidFill>
+                    <a:srgbClr val="0070C0"/>
+                  </a:solidFill>
+                </a:rPr>
+                <a:t>Payload Port (SS) :     7                   6-3                 2        1       0</a:t>
+              </a:r>
+            </a:p>
+            <a:p>
+              <a:endParaRPr lang="en-US" sz="1200" dirty="0">
+                <a:solidFill>
+                  <a:srgbClr val="0070C0"/>
+                </a:solidFill>
+              </a:endParaRPr>
+            </a:p>
+            <a:p>
+              <a:endParaRPr lang="en-US" sz="1200" dirty="0">
+                <a:solidFill>
+                  <a:srgbClr val="0070C0"/>
+                </a:solidFill>
+              </a:endParaRPr>
+            </a:p>
+          </p:txBody>
+        </p:sp>
+        <p:grpSp>
+          <p:nvGrpSpPr>
+            <p:cNvPr id="227" name="Group 226">
+              <a:extLst>
+                <a:ext uri="{FF2B5EF4-FFF2-40B4-BE49-F238E27FC236}">
+                  <a16:creationId xmlns:a16="http://schemas.microsoft.com/office/drawing/2014/main" id="{21E2CD90-C1F5-F347-9E29-7CE5D07661B4}"/>
+                </a:ext>
+              </a:extLst>
+            </p:cNvPr>
+            <p:cNvGrpSpPr/>
+            <p:nvPr/>
+          </p:nvGrpSpPr>
+          <p:grpSpPr>
+            <a:xfrm>
+              <a:off x="5334944" y="5404415"/>
+              <a:ext cx="2589856" cy="269824"/>
+              <a:chOff x="5208463" y="5404415"/>
+              <a:chExt cx="2589856" cy="269824"/>
+            </a:xfrm>
+          </p:grpSpPr>
+          <p:sp>
+            <p:nvSpPr>
+              <p:cNvPr id="228" name="TextBox 227">
+                <a:extLst>
+                  <a:ext uri="{FF2B5EF4-FFF2-40B4-BE49-F238E27FC236}">
+                    <a16:creationId xmlns:a16="http://schemas.microsoft.com/office/drawing/2014/main" id="{2DE33458-E39B-5C4B-BEA5-648ECAFE959A}"/>
+                  </a:ext>
+                </a:extLst>
+              </p:cNvPr>
+              <p:cNvSpPr txBox="1"/>
+              <p:nvPr/>
+            </p:nvSpPr>
+            <p:spPr>
+              <a:xfrm>
+                <a:off x="5208463" y="5410200"/>
+                <a:ext cx="2589856" cy="261610"/>
+              </a:xfrm>
+              <a:prstGeom prst="rect">
+                <a:avLst/>
+              </a:prstGeom>
+              <a:noFill/>
+              <a:ln w="19050">
+                <a:solidFill>
+                  <a:schemeClr val="tx1"/>
+                </a:solidFill>
+              </a:ln>
+            </p:spPr>
+            <p:txBody>
+              <a:bodyPr wrap="square" rtlCol="0">
+                <a:spAutoFit/>
+              </a:bodyPr>
+              <a:lstStyle/>
+              <a:p>
+                <a:pPr algn="r"/>
+                <a:r>
+                  <a:rPr lang="en-US" sz="1100" b="1" dirty="0">
+                    <a:latin typeface="Arial" pitchFamily="34" charset="0"/>
+                    <a:cs typeface="Arial" pitchFamily="34" charset="0"/>
+                  </a:rPr>
+                  <a:t> Err              Mode                   DD   ND</a:t>
+                </a:r>
+              </a:p>
+            </p:txBody>
+          </p:sp>
+          <p:cxnSp>
+            <p:nvCxnSpPr>
+              <p:cNvPr id="229" name="Straight Connector 228">
+                <a:extLst>
+                  <a:ext uri="{FF2B5EF4-FFF2-40B4-BE49-F238E27FC236}">
+                    <a16:creationId xmlns:a16="http://schemas.microsoft.com/office/drawing/2014/main" id="{9952E051-212D-2144-8B9C-95F3A4DFD385}"/>
+                  </a:ext>
+                </a:extLst>
+              </p:cNvPr>
+              <p:cNvCxnSpPr/>
+              <p:nvPr/>
+            </p:nvCxnSpPr>
+            <p:spPr>
+              <a:xfrm>
+                <a:off x="7128603" y="5404415"/>
+                <a:ext cx="0" cy="261612"/>
+              </a:xfrm>
+              <a:prstGeom prst="line">
+                <a:avLst/>
+              </a:prstGeom>
+              <a:ln w="19050">
+                <a:solidFill>
+                  <a:schemeClr val="tx1"/>
+                </a:solidFill>
+              </a:ln>
+            </p:spPr>
+            <p:style>
+              <a:lnRef idx="1">
+                <a:schemeClr val="accent1"/>
+              </a:lnRef>
+              <a:fillRef idx="0">
+                <a:schemeClr val="accent1"/>
+              </a:fillRef>
+              <a:effectRef idx="0">
+                <a:schemeClr val="accent1"/>
+              </a:effectRef>
+              <a:fontRef idx="minor">
+                <a:schemeClr val="tx1"/>
+              </a:fontRef>
+            </p:style>
+          </p:cxnSp>
+          <p:cxnSp>
+            <p:nvCxnSpPr>
+              <p:cNvPr id="230" name="Straight Connector 229">
+                <a:extLst>
+                  <a:ext uri="{FF2B5EF4-FFF2-40B4-BE49-F238E27FC236}">
+                    <a16:creationId xmlns:a16="http://schemas.microsoft.com/office/drawing/2014/main" id="{4DF1B641-08AC-874A-BE6D-9C4ECB48A151}"/>
+                  </a:ext>
+                </a:extLst>
+              </p:cNvPr>
+              <p:cNvCxnSpPr/>
+              <p:nvPr/>
+            </p:nvCxnSpPr>
+            <p:spPr>
+              <a:xfrm>
+                <a:off x="5619318" y="5412627"/>
+                <a:ext cx="0" cy="261612"/>
+              </a:xfrm>
+              <a:prstGeom prst="line">
+                <a:avLst/>
+              </a:prstGeom>
+              <a:ln w="19050">
+                <a:solidFill>
+                  <a:schemeClr val="tx1"/>
+                </a:solidFill>
+              </a:ln>
+            </p:spPr>
+            <p:style>
+              <a:lnRef idx="1">
+                <a:schemeClr val="accent1"/>
+              </a:lnRef>
+              <a:fillRef idx="0">
+                <a:schemeClr val="accent1"/>
+              </a:fillRef>
+              <a:effectRef idx="0">
+                <a:schemeClr val="accent1"/>
+              </a:effectRef>
+              <a:fontRef idx="minor">
+                <a:schemeClr val="tx1"/>
+              </a:fontRef>
+            </p:style>
+          </p:cxnSp>
+          <p:cxnSp>
+            <p:nvCxnSpPr>
+              <p:cNvPr id="231" name="Straight Connector 230">
+                <a:extLst>
+                  <a:ext uri="{FF2B5EF4-FFF2-40B4-BE49-F238E27FC236}">
+                    <a16:creationId xmlns:a16="http://schemas.microsoft.com/office/drawing/2014/main" id="{2FE75522-6ADE-6947-A41B-51320156B392}"/>
+                  </a:ext>
+                </a:extLst>
+              </p:cNvPr>
+              <p:cNvCxnSpPr/>
+              <p:nvPr/>
+            </p:nvCxnSpPr>
+            <p:spPr>
+              <a:xfrm>
+                <a:off x="7467600" y="5410198"/>
+                <a:ext cx="0" cy="261612"/>
+              </a:xfrm>
+              <a:prstGeom prst="line">
+                <a:avLst/>
+              </a:prstGeom>
+              <a:ln w="19050">
+                <a:solidFill>
+                  <a:schemeClr val="tx1"/>
+                </a:solidFill>
+              </a:ln>
+            </p:spPr>
+            <p:style>
+              <a:lnRef idx="1">
+                <a:schemeClr val="accent1"/>
+              </a:lnRef>
+              <a:fillRef idx="0">
+                <a:schemeClr val="accent1"/>
+              </a:fillRef>
+              <a:effectRef idx="0">
+                <a:schemeClr val="accent1"/>
+              </a:effectRef>
+              <a:fontRef idx="minor">
+                <a:schemeClr val="tx1"/>
+              </a:fontRef>
+            </p:style>
+          </p:cxnSp>
+          <p:cxnSp>
+            <p:nvCxnSpPr>
+              <p:cNvPr id="232" name="Straight Connector 231">
+                <a:extLst>
+                  <a:ext uri="{FF2B5EF4-FFF2-40B4-BE49-F238E27FC236}">
+                    <a16:creationId xmlns:a16="http://schemas.microsoft.com/office/drawing/2014/main" id="{B3C123FE-9170-8F4B-ABE4-059A3A916CA5}"/>
+                  </a:ext>
+                </a:extLst>
+              </p:cNvPr>
+              <p:cNvCxnSpPr/>
+              <p:nvPr/>
+            </p:nvCxnSpPr>
+            <p:spPr>
+              <a:xfrm>
+                <a:off x="6781800" y="5404415"/>
+                <a:ext cx="0" cy="261612"/>
+              </a:xfrm>
+              <a:prstGeom prst="line">
+                <a:avLst/>
+              </a:prstGeom>
+              <a:ln w="19050">
+                <a:solidFill>
+                  <a:schemeClr val="tx1"/>
+                </a:solidFill>
+              </a:ln>
+            </p:spPr>
+            <p:style>
+              <a:lnRef idx="1">
+                <a:schemeClr val="accent1"/>
+              </a:lnRef>
+              <a:fillRef idx="0">
+                <a:schemeClr val="accent1"/>
+              </a:fillRef>
+              <a:effectRef idx="0">
+                <a:schemeClr val="accent1"/>
+              </a:effectRef>
+              <a:fontRef idx="minor">
+                <a:schemeClr val="tx1"/>
+              </a:fontRef>
+            </p:style>
+          </p:cxnSp>
+        </p:grpSp>
+      </p:grpSp>
+      <p:sp>
+        <p:nvSpPr>
+          <p:cNvPr id="233" name="TextBox 232">
+            <a:extLst>
+              <a:ext uri="{FF2B5EF4-FFF2-40B4-BE49-F238E27FC236}">
+                <a16:creationId xmlns:a16="http://schemas.microsoft.com/office/drawing/2014/main" id="{9519870A-6770-3149-8BC7-C7F10061F2CD}"/>
+              </a:ext>
+            </a:extLst>
+          </p:cNvPr>
+          <p:cNvSpPr txBox="1"/>
+          <p:nvPr/>
+        </p:nvSpPr>
+        <p:spPr>
+          <a:xfrm>
+            <a:off x="4880017" y="4986921"/>
+            <a:ext cx="3682644" cy="261610"/>
+          </a:xfrm>
+          <a:prstGeom prst="rect">
+            <a:avLst/>
+          </a:prstGeom>
+          <a:noFill/>
+          <a:ln w="19050">
+            <a:noFill/>
+          </a:ln>
+        </p:spPr>
+        <p:txBody>
+          <a:bodyPr wrap="square" rtlCol="0">
+            <a:spAutoFit/>
+          </a:bodyPr>
+          <a:lstStyle/>
+          <a:p>
+            <a:r>
+              <a:rPr lang="en-US" sz="1100" b="1" dirty="0">
+                <a:latin typeface="Arial" pitchFamily="34" charset="0"/>
+                <a:cs typeface="Arial" pitchFamily="34" charset="0"/>
+              </a:rPr>
+              <a:t> ND = No Data Available     DD = Data was Discarded</a:t>
+            </a:r>
+          </a:p>
+        </p:txBody>
+      </p:sp>
+      <p:cxnSp>
+        <p:nvCxnSpPr>
+          <p:cNvPr id="234" name="Straight Arrow Connector 233">
+            <a:extLst>
+              <a:ext uri="{FF2B5EF4-FFF2-40B4-BE49-F238E27FC236}">
+                <a16:creationId xmlns:a16="http://schemas.microsoft.com/office/drawing/2014/main" id="{B6F5657A-F630-C142-BD54-CFDA967C86D0}"/>
+              </a:ext>
+            </a:extLst>
+          </p:cNvPr>
+          <p:cNvCxnSpPr>
+            <a:cxnSpLocks/>
+          </p:cNvCxnSpPr>
+          <p:nvPr/>
+        </p:nvCxnSpPr>
+        <p:spPr>
+          <a:xfrm>
+            <a:off x="4255895" y="5872086"/>
+            <a:ext cx="445235" cy="0"/>
+          </a:xfrm>
+          <a:prstGeom prst="straightConnector1">
+            <a:avLst/>
+          </a:prstGeom>
+          <a:ln w="12700">
+            <a:solidFill>
+              <a:srgbClr val="FF0000"/>
+            </a:solidFill>
+            <a:tailEnd type="arrow"/>
+          </a:ln>
+        </p:spPr>
+        <p:style>
+          <a:lnRef idx="1">
+            <a:schemeClr val="accent1"/>
+          </a:lnRef>
+          <a:fillRef idx="0">
+            <a:schemeClr val="accent1"/>
+          </a:fillRef>
+          <a:effectRef idx="0">
+            <a:schemeClr val="accent1"/>
+          </a:effectRef>
+          <a:fontRef idx="minor">
+            <a:schemeClr val="tx1"/>
+          </a:fontRef>
+        </p:style>
+      </p:cxnSp>
+      <p:grpSp>
+        <p:nvGrpSpPr>
+          <p:cNvPr id="11" name="Group 10">
+            <a:extLst>
+              <a:ext uri="{FF2B5EF4-FFF2-40B4-BE49-F238E27FC236}">
+                <a16:creationId xmlns:a16="http://schemas.microsoft.com/office/drawing/2014/main" id="{0CCF67AB-D6C4-CD43-95BF-6CA7406F7D04}"/>
+              </a:ext>
+            </a:extLst>
+          </p:cNvPr>
+          <p:cNvGrpSpPr/>
+          <p:nvPr/>
+        </p:nvGrpSpPr>
+        <p:grpSpPr>
+          <a:xfrm>
+            <a:off x="4701130" y="3686258"/>
+            <a:ext cx="3988320" cy="1200329"/>
+            <a:chOff x="4701130" y="3686258"/>
+            <a:chExt cx="3988320" cy="1200329"/>
+          </a:xfrm>
+        </p:grpSpPr>
+        <p:sp>
+          <p:nvSpPr>
+            <p:cNvPr id="236" name="TextBox 235">
+              <a:extLst>
+                <a:ext uri="{FF2B5EF4-FFF2-40B4-BE49-F238E27FC236}">
+                  <a16:creationId xmlns:a16="http://schemas.microsoft.com/office/drawing/2014/main" id="{2F60FB09-6B20-3645-9520-355D124B5D30}"/>
+                </a:ext>
+              </a:extLst>
+            </p:cNvPr>
+            <p:cNvSpPr txBox="1"/>
+            <p:nvPr/>
+          </p:nvSpPr>
+          <p:spPr>
+            <a:xfrm>
+              <a:off x="4701130" y="3686258"/>
+              <a:ext cx="3988320" cy="1200329"/>
             </a:xfrm>
             <a:prstGeom prst="rect">
               <a:avLst/>
@@ -5983,65 +6638,489 @@
                 </a:solidFill>
               </a:endParaRPr>
             </a:p>
-            <a:p>
-              <a:r>
-                <a:rPr lang="en-US" sz="1200" dirty="0">
-                  <a:solidFill>
-                    <a:srgbClr val="0070C0"/>
-                  </a:solidFill>
-                </a:rPr>
-                <a:t>N &lt;= 20</a:t>
-              </a:r>
-            </a:p>
           </p:txBody>
         </p:sp>
-        <p:sp>
-          <p:nvSpPr>
-            <p:cNvPr id="190" name="TextBox 189"/>
-            <p:cNvSpPr txBox="1"/>
+        <p:grpSp>
+          <p:nvGrpSpPr>
+            <p:cNvPr id="237" name="Group 236">
+              <a:extLst>
+                <a:ext uri="{FF2B5EF4-FFF2-40B4-BE49-F238E27FC236}">
+                  <a16:creationId xmlns:a16="http://schemas.microsoft.com/office/drawing/2014/main" id="{B0261519-51AC-B34B-AFDD-3D144EE97D7B}"/>
+                </a:ext>
+              </a:extLst>
+            </p:cNvPr>
+            <p:cNvGrpSpPr/>
             <p:nvPr/>
-          </p:nvSpPr>
-          <p:spPr>
+          </p:nvGrpSpPr>
+          <p:grpSpPr>
             <a:xfrm>
-              <a:off x="5130980" y="3798741"/>
-              <a:ext cx="3251020" cy="261610"/>
+              <a:off x="4770027" y="4069652"/>
+              <a:ext cx="3864924" cy="604616"/>
+              <a:chOff x="4188039" y="3964794"/>
+              <a:chExt cx="4108455" cy="604616"/>
             </a:xfrm>
-            <a:prstGeom prst="rect">
-              <a:avLst/>
-            </a:prstGeom>
-            <a:noFill/>
-            <a:ln w="19050">
+          </p:grpSpPr>
+          <p:sp>
+            <p:nvSpPr>
+              <p:cNvPr id="238" name="TextBox 237">
+                <a:extLst>
+                  <a:ext uri="{FF2B5EF4-FFF2-40B4-BE49-F238E27FC236}">
+                    <a16:creationId xmlns:a16="http://schemas.microsoft.com/office/drawing/2014/main" id="{CE965ACA-705A-6A47-BDF2-257F93897291}"/>
+                  </a:ext>
+                </a:extLst>
+              </p:cNvPr>
+              <p:cNvSpPr txBox="1"/>
+              <p:nvPr/>
+            </p:nvSpPr>
+            <p:spPr>
+              <a:xfrm>
+                <a:off x="4233966" y="3964796"/>
+                <a:ext cx="4062528" cy="230832"/>
+              </a:xfrm>
+              <a:prstGeom prst="rect">
+                <a:avLst/>
+              </a:prstGeom>
+              <a:noFill/>
+              <a:ln w="19050">
+                <a:solidFill>
+                  <a:schemeClr val="tx1"/>
+                </a:solidFill>
+              </a:ln>
+            </p:spPr>
+            <p:txBody>
+              <a:bodyPr wrap="square" rtlCol="0">
+                <a:spAutoFit/>
+              </a:bodyPr>
+              <a:lstStyle/>
+              <a:p>
+                <a:r>
+                  <a:rPr lang="en-US" sz="900" b="1" dirty="0">
+                    <a:latin typeface="Arial" pitchFamily="34" charset="0"/>
+                    <a:cs typeface="Arial" pitchFamily="34" charset="0"/>
+                  </a:rPr>
+                  <a:t>Err  ND   DD            Module ID     Bond      Lane ID    Payload Port #</a:t>
+                </a:r>
+              </a:p>
+            </p:txBody>
+          </p:sp>
+          <p:sp>
+            <p:nvSpPr>
+              <p:cNvPr id="242" name="TextBox 241">
+                <a:extLst>
+                  <a:ext uri="{FF2B5EF4-FFF2-40B4-BE49-F238E27FC236}">
+                    <a16:creationId xmlns:a16="http://schemas.microsoft.com/office/drawing/2014/main" id="{F88A0794-FC28-8045-9BFC-CD4178388F29}"/>
+                  </a:ext>
+                </a:extLst>
+              </p:cNvPr>
+              <p:cNvSpPr txBox="1"/>
+              <p:nvPr/>
+            </p:nvSpPr>
+            <p:spPr>
+              <a:xfrm>
+                <a:off x="7347138" y="4269436"/>
+                <a:ext cx="762002" cy="276999"/>
+              </a:xfrm>
+              <a:prstGeom prst="rect">
+                <a:avLst/>
+              </a:prstGeom>
+              <a:noFill/>
+              <a:ln w="3175">
+                <a:solidFill>
+                  <a:srgbClr val="0070C0"/>
+                </a:solidFill>
+                <a:prstDash val="lgDash"/>
+              </a:ln>
+            </p:spPr>
+            <p:txBody>
+              <a:bodyPr wrap="square" rtlCol="0">
+                <a:spAutoFit/>
+              </a:bodyPr>
+              <a:lstStyle/>
+              <a:p>
+                <a:r>
+                  <a:rPr lang="en-US" sz="1200" dirty="0">
+                    <a:solidFill>
+                      <a:srgbClr val="0070C0"/>
+                    </a:solidFill>
+                  </a:rPr>
+                  <a:t>    4 - 0</a:t>
+                </a:r>
+              </a:p>
+            </p:txBody>
+          </p:sp>
+          <p:sp>
+            <p:nvSpPr>
+              <p:cNvPr id="243" name="TextBox 242">
+                <a:extLst>
+                  <a:ext uri="{FF2B5EF4-FFF2-40B4-BE49-F238E27FC236}">
+                    <a16:creationId xmlns:a16="http://schemas.microsoft.com/office/drawing/2014/main" id="{ABCEB57B-9A93-084F-ACD4-3509B04E2A51}"/>
+                  </a:ext>
+                </a:extLst>
+              </p:cNvPr>
+              <p:cNvSpPr txBox="1"/>
+              <p:nvPr/>
+            </p:nvSpPr>
+            <p:spPr>
+              <a:xfrm>
+                <a:off x="6117819" y="4292410"/>
+                <a:ext cx="495299" cy="276999"/>
+              </a:xfrm>
+              <a:prstGeom prst="rect">
+                <a:avLst/>
+              </a:prstGeom>
+              <a:noFill/>
+              <a:ln w="3175">
+                <a:solidFill>
+                  <a:srgbClr val="0070C0"/>
+                </a:solidFill>
+                <a:prstDash val="lgDash"/>
+              </a:ln>
+            </p:spPr>
+            <p:txBody>
+              <a:bodyPr wrap="square" rtlCol="0">
+                <a:spAutoFit/>
+              </a:bodyPr>
+              <a:lstStyle/>
+              <a:p>
+                <a:r>
+                  <a:rPr lang="en-US" sz="1200" dirty="0">
+                    <a:solidFill>
+                      <a:srgbClr val="0070C0"/>
+                    </a:solidFill>
+                  </a:rPr>
+                  <a:t>   7</a:t>
+                </a:r>
+              </a:p>
+            </p:txBody>
+          </p:sp>
+          <p:sp>
+            <p:nvSpPr>
+              <p:cNvPr id="244" name="TextBox 243">
+                <a:extLst>
+                  <a:ext uri="{FF2B5EF4-FFF2-40B4-BE49-F238E27FC236}">
+                    <a16:creationId xmlns:a16="http://schemas.microsoft.com/office/drawing/2014/main" id="{A7E1063B-D7CF-8D4A-9B4E-CF7A0F7A6448}"/>
+                  </a:ext>
+                </a:extLst>
+              </p:cNvPr>
+              <p:cNvSpPr txBox="1"/>
+              <p:nvPr/>
+            </p:nvSpPr>
+            <p:spPr>
+              <a:xfrm>
+                <a:off x="5470122" y="4284510"/>
+                <a:ext cx="567319" cy="276999"/>
+              </a:xfrm>
+              <a:prstGeom prst="rect">
+                <a:avLst/>
+              </a:prstGeom>
+              <a:noFill/>
+              <a:ln w="3175">
+                <a:solidFill>
+                  <a:srgbClr val="0070C0"/>
+                </a:solidFill>
+                <a:prstDash val="lgDash"/>
+              </a:ln>
+            </p:spPr>
+            <p:txBody>
+              <a:bodyPr wrap="square" rtlCol="0">
+                <a:spAutoFit/>
+              </a:bodyPr>
+              <a:lstStyle/>
+              <a:p>
+                <a:r>
+                  <a:rPr lang="en-US" sz="1200" dirty="0">
+                    <a:solidFill>
+                      <a:srgbClr val="0070C0"/>
+                    </a:solidFill>
+                  </a:rPr>
+                  <a:t>11 - 8</a:t>
+                </a:r>
+              </a:p>
+            </p:txBody>
+          </p:sp>
+          <p:sp>
+            <p:nvSpPr>
+              <p:cNvPr id="245" name="TextBox 244">
+                <a:extLst>
+                  <a:ext uri="{FF2B5EF4-FFF2-40B4-BE49-F238E27FC236}">
+                    <a16:creationId xmlns:a16="http://schemas.microsoft.com/office/drawing/2014/main" id="{18B0BA44-6DEC-D949-8146-5CF71CF8BFD3}"/>
+                  </a:ext>
+                </a:extLst>
+              </p:cNvPr>
+              <p:cNvSpPr txBox="1"/>
+              <p:nvPr/>
+            </p:nvSpPr>
+            <p:spPr>
+              <a:xfrm>
+                <a:off x="6692005" y="4269437"/>
+                <a:ext cx="534677" cy="276999"/>
+              </a:xfrm>
+              <a:prstGeom prst="rect">
+                <a:avLst/>
+              </a:prstGeom>
               <a:solidFill>
+                <a:schemeClr val="bg1"/>
+              </a:solidFill>
+              <a:ln w="3175">
+                <a:solidFill>
+                  <a:srgbClr val="0070C0"/>
+                </a:solidFill>
+                <a:prstDash val="lgDash"/>
+              </a:ln>
+            </p:spPr>
+            <p:txBody>
+              <a:bodyPr wrap="square" rtlCol="0">
+                <a:spAutoFit/>
+              </a:bodyPr>
+              <a:lstStyle/>
+              <a:p>
+                <a:r>
+                  <a:rPr lang="en-US" sz="1200" dirty="0">
+                    <a:solidFill>
+                      <a:srgbClr val="0070C0"/>
+                    </a:solidFill>
+                  </a:rPr>
+                  <a:t> 6 , 5</a:t>
+                </a:r>
+              </a:p>
+            </p:txBody>
+          </p:sp>
+          <p:cxnSp>
+            <p:nvCxnSpPr>
+              <p:cNvPr id="246" name="Straight Connector 245">
+                <a:extLst>
+                  <a:ext uri="{FF2B5EF4-FFF2-40B4-BE49-F238E27FC236}">
+                    <a16:creationId xmlns:a16="http://schemas.microsoft.com/office/drawing/2014/main" id="{344C94CC-30D1-5D4E-90D2-CF85B77AB43C}"/>
+                  </a:ext>
+                </a:extLst>
+              </p:cNvPr>
+              <p:cNvCxnSpPr>
+                <a:cxnSpLocks/>
+              </p:cNvCxnSpPr>
+              <p:nvPr/>
+            </p:nvCxnSpPr>
+            <p:spPr>
+              <a:xfrm>
+                <a:off x="5353380" y="3964794"/>
+                <a:ext cx="0" cy="216770"/>
+              </a:xfrm>
+              <a:prstGeom prst="line">
+                <a:avLst/>
+              </a:prstGeom>
+              <a:ln w="19050">
+                <a:solidFill>
+                  <a:schemeClr val="tx1"/>
+                </a:solidFill>
+              </a:ln>
+            </p:spPr>
+            <p:style>
+              <a:lnRef idx="1">
+                <a:schemeClr val="accent1"/>
+              </a:lnRef>
+              <a:fillRef idx="0">
+                <a:schemeClr val="accent1"/>
+              </a:fillRef>
+              <a:effectRef idx="0">
+                <a:schemeClr val="accent1"/>
+              </a:effectRef>
+              <a:fontRef idx="minor">
                 <a:schemeClr val="tx1"/>
-              </a:solidFill>
-            </a:ln>
-          </p:spPr>
-          <p:txBody>
-            <a:bodyPr wrap="square" rtlCol="0">
-              <a:spAutoFit/>
-            </a:bodyPr>
-            <a:lstStyle/>
-            <a:p>
-              <a:r>
-                <a:rPr lang="en-US" sz="1100" b="1" dirty="0">
-                  <a:latin typeface="Arial" pitchFamily="34" charset="0"/>
-                  <a:cs typeface="Arial" pitchFamily="34" charset="0"/>
-                </a:rPr>
-                <a:t> Module ID     Bond?  Lane ID    Payload Port #</a:t>
-              </a:r>
-            </a:p>
-          </p:txBody>
-        </p:sp>
+              </a:fontRef>
+            </p:style>
+          </p:cxnSp>
+          <p:cxnSp>
+            <p:nvCxnSpPr>
+              <p:cNvPr id="247" name="Straight Connector 246">
+                <a:extLst>
+                  <a:ext uri="{FF2B5EF4-FFF2-40B4-BE49-F238E27FC236}">
+                    <a16:creationId xmlns:a16="http://schemas.microsoft.com/office/drawing/2014/main" id="{0CF96BEE-26DD-1244-AD5D-04F9956E8F5C}"/>
+                  </a:ext>
+                </a:extLst>
+              </p:cNvPr>
+              <p:cNvCxnSpPr>
+                <a:cxnSpLocks/>
+              </p:cNvCxnSpPr>
+              <p:nvPr/>
+            </p:nvCxnSpPr>
+            <p:spPr>
+              <a:xfrm>
+                <a:off x="5110274" y="3964794"/>
+                <a:ext cx="0" cy="216770"/>
+              </a:xfrm>
+              <a:prstGeom prst="line">
+                <a:avLst/>
+              </a:prstGeom>
+              <a:ln w="19050">
+                <a:solidFill>
+                  <a:schemeClr val="tx1"/>
+                </a:solidFill>
+              </a:ln>
+            </p:spPr>
+            <p:style>
+              <a:lnRef idx="1">
+                <a:schemeClr val="accent1"/>
+              </a:lnRef>
+              <a:fillRef idx="0">
+                <a:schemeClr val="accent1"/>
+              </a:fillRef>
+              <a:effectRef idx="0">
+                <a:schemeClr val="accent1"/>
+              </a:effectRef>
+              <a:fontRef idx="minor">
+                <a:schemeClr val="tx1"/>
+              </a:fontRef>
+            </p:style>
+          </p:cxnSp>
+          <p:cxnSp>
+            <p:nvCxnSpPr>
+              <p:cNvPr id="248" name="Straight Connector 247">
+                <a:extLst>
+                  <a:ext uri="{FF2B5EF4-FFF2-40B4-BE49-F238E27FC236}">
+                    <a16:creationId xmlns:a16="http://schemas.microsoft.com/office/drawing/2014/main" id="{D7106CBA-2D0D-5D4E-970C-9C2D2A5AC1C3}"/>
+                  </a:ext>
+                </a:extLst>
+              </p:cNvPr>
+              <p:cNvCxnSpPr>
+                <a:cxnSpLocks/>
+              </p:cNvCxnSpPr>
+              <p:nvPr/>
+            </p:nvCxnSpPr>
+            <p:spPr>
+              <a:xfrm>
+                <a:off x="4780848" y="3964794"/>
+                <a:ext cx="0" cy="230834"/>
+              </a:xfrm>
+              <a:prstGeom prst="line">
+                <a:avLst/>
+              </a:prstGeom>
+              <a:ln w="19050">
+                <a:solidFill>
+                  <a:schemeClr val="tx1"/>
+                </a:solidFill>
+              </a:ln>
+            </p:spPr>
+            <p:style>
+              <a:lnRef idx="1">
+                <a:schemeClr val="accent1"/>
+              </a:lnRef>
+              <a:fillRef idx="0">
+                <a:schemeClr val="accent1"/>
+              </a:fillRef>
+              <a:effectRef idx="0">
+                <a:schemeClr val="accent1"/>
+              </a:effectRef>
+              <a:fontRef idx="minor">
+                <a:schemeClr val="tx1"/>
+              </a:fontRef>
+            </p:style>
+          </p:cxnSp>
+          <p:cxnSp>
+            <p:nvCxnSpPr>
+              <p:cNvPr id="249" name="Straight Connector 248">
+                <a:extLst>
+                  <a:ext uri="{FF2B5EF4-FFF2-40B4-BE49-F238E27FC236}">
+                    <a16:creationId xmlns:a16="http://schemas.microsoft.com/office/drawing/2014/main" id="{889612BB-A563-D142-9960-23B9B87C775F}"/>
+                  </a:ext>
+                </a:extLst>
+              </p:cNvPr>
+              <p:cNvCxnSpPr>
+                <a:cxnSpLocks/>
+              </p:cNvCxnSpPr>
+              <p:nvPr/>
+            </p:nvCxnSpPr>
+            <p:spPr>
+              <a:xfrm>
+                <a:off x="4524100" y="3964794"/>
+                <a:ext cx="0" cy="216770"/>
+              </a:xfrm>
+              <a:prstGeom prst="line">
+                <a:avLst/>
+              </a:prstGeom>
+              <a:ln w="19050">
+                <a:solidFill>
+                  <a:schemeClr val="tx1"/>
+                </a:solidFill>
+              </a:ln>
+            </p:spPr>
+            <p:style>
+              <a:lnRef idx="1">
+                <a:schemeClr val="accent1"/>
+              </a:lnRef>
+              <a:fillRef idx="0">
+                <a:schemeClr val="accent1"/>
+              </a:fillRef>
+              <a:effectRef idx="0">
+                <a:schemeClr val="accent1"/>
+              </a:effectRef>
+              <a:fontRef idx="minor">
+                <a:schemeClr val="tx1"/>
+              </a:fontRef>
+            </p:style>
+          </p:cxnSp>
+          <p:sp>
+            <p:nvSpPr>
+              <p:cNvPr id="250" name="TextBox 249">
+                <a:extLst>
+                  <a:ext uri="{FF2B5EF4-FFF2-40B4-BE49-F238E27FC236}">
+                    <a16:creationId xmlns:a16="http://schemas.microsoft.com/office/drawing/2014/main" id="{FC9DA992-4A74-FD4D-A5CC-38AAAB814360}"/>
+                  </a:ext>
+                </a:extLst>
+              </p:cNvPr>
+              <p:cNvSpPr txBox="1"/>
+              <p:nvPr/>
+            </p:nvSpPr>
+            <p:spPr>
+              <a:xfrm>
+                <a:off x="4188039" y="4292411"/>
+                <a:ext cx="1165341" cy="276999"/>
+              </a:xfrm>
+              <a:prstGeom prst="rect">
+                <a:avLst/>
+              </a:prstGeom>
+              <a:noFill/>
+              <a:ln w="3175">
+                <a:solidFill>
+                  <a:srgbClr val="0070C0"/>
+                </a:solidFill>
+                <a:prstDash val="lgDash"/>
+              </a:ln>
+            </p:spPr>
+            <p:txBody>
+              <a:bodyPr wrap="square" rtlCol="0">
+                <a:spAutoFit/>
+              </a:bodyPr>
+              <a:lstStyle/>
+              <a:p>
+                <a:r>
+                  <a:rPr lang="en-US" sz="1200" dirty="0">
+                    <a:solidFill>
+                      <a:srgbClr val="0070C0"/>
+                    </a:solidFill>
+                  </a:rPr>
+                  <a:t>15   14   13  12</a:t>
+                </a:r>
+              </a:p>
+            </p:txBody>
+          </p:sp>
+        </p:grpSp>
         <p:cxnSp>
           <p:nvCxnSpPr>
-            <p:cNvPr id="191" name="Straight Connector 190"/>
-            <p:cNvCxnSpPr/>
+            <p:cNvPr id="251" name="Straight Connector 250">
+              <a:extLst>
+                <a:ext uri="{FF2B5EF4-FFF2-40B4-BE49-F238E27FC236}">
+                  <a16:creationId xmlns:a16="http://schemas.microsoft.com/office/drawing/2014/main" id="{4752A539-DD22-664E-A43C-5F74C26739E3}"/>
+                </a:ext>
+              </a:extLst>
+            </p:cNvPr>
+            <p:cNvCxnSpPr>
+              <a:cxnSpLocks/>
+            </p:cNvCxnSpPr>
             <p:nvPr/>
           </p:nvCxnSpPr>
           <p:spPr>
             <a:xfrm>
-              <a:off x="7188167" y="3798739"/>
-              <a:ext cx="0" cy="261612"/>
+              <a:off x="6536558" y="4096139"/>
+              <a:ext cx="0" cy="216770"/>
             </a:xfrm>
             <a:prstGeom prst="line">
               <a:avLst/>
@@ -6069,14 +7148,22 @@
         </p:cxnSp>
         <p:cxnSp>
           <p:nvCxnSpPr>
-            <p:cNvPr id="192" name="Straight Connector 191"/>
-            <p:cNvCxnSpPr/>
+            <p:cNvPr id="252" name="Straight Connector 251">
+              <a:extLst>
+                <a:ext uri="{FF2B5EF4-FFF2-40B4-BE49-F238E27FC236}">
+                  <a16:creationId xmlns:a16="http://schemas.microsoft.com/office/drawing/2014/main" id="{34D2959F-B9A9-4A43-B8BB-DD1896ACEA8D}"/>
+                </a:ext>
+              </a:extLst>
+            </p:cNvPr>
+            <p:cNvCxnSpPr>
+              <a:cxnSpLocks/>
+            </p:cNvCxnSpPr>
             <p:nvPr/>
           </p:nvCxnSpPr>
           <p:spPr>
             <a:xfrm>
-              <a:off x="6584987" y="3798741"/>
-              <a:ext cx="0" cy="261612"/>
+              <a:off x="7067912" y="4096139"/>
+              <a:ext cx="0" cy="216770"/>
             </a:xfrm>
             <a:prstGeom prst="line">
               <a:avLst/>
@@ -6104,14 +7191,22 @@
         </p:cxnSp>
         <p:cxnSp>
           <p:nvCxnSpPr>
-            <p:cNvPr id="193" name="Straight Connector 192"/>
-            <p:cNvCxnSpPr/>
+            <p:cNvPr id="253" name="Straight Connector 252">
+              <a:extLst>
+                <a:ext uri="{FF2B5EF4-FFF2-40B4-BE49-F238E27FC236}">
+                  <a16:creationId xmlns:a16="http://schemas.microsoft.com/office/drawing/2014/main" id="{742A7723-BC53-F34E-A2AE-C06A3727600E}"/>
+                </a:ext>
+              </a:extLst>
+            </p:cNvPr>
+            <p:cNvCxnSpPr>
+              <a:cxnSpLocks/>
+            </p:cNvCxnSpPr>
             <p:nvPr/>
           </p:nvCxnSpPr>
           <p:spPr>
             <a:xfrm>
-              <a:off x="6019801" y="3798739"/>
-              <a:ext cx="0" cy="261612"/>
+              <a:off x="7601597" y="4105108"/>
+              <a:ext cx="0" cy="216770"/>
             </a:xfrm>
             <a:prstGeom prst="line">
               <a:avLst/>
@@ -6137,267 +7232,7 @@
             </a:fontRef>
           </p:style>
         </p:cxnSp>
-        <p:sp>
-          <p:nvSpPr>
-            <p:cNvPr id="194" name="TextBox 193"/>
-            <p:cNvSpPr txBox="1"/>
-            <p:nvPr/>
-          </p:nvSpPr>
-          <p:spPr>
-            <a:xfrm>
-              <a:off x="7511255" y="4131184"/>
-              <a:ext cx="762002" cy="276999"/>
-            </a:xfrm>
-            <a:prstGeom prst="rect">
-              <a:avLst/>
-            </a:prstGeom>
-            <a:noFill/>
-            <a:ln w="3175">
-              <a:solidFill>
-                <a:srgbClr val="0070C0"/>
-              </a:solidFill>
-              <a:prstDash val="lgDash"/>
-            </a:ln>
-          </p:spPr>
-          <p:txBody>
-            <a:bodyPr wrap="square" rtlCol="0">
-              <a:spAutoFit/>
-            </a:bodyPr>
-            <a:lstStyle/>
-            <a:p>
-              <a:r>
-                <a:rPr lang="en-US" sz="1200" dirty="0">
-                  <a:solidFill>
-                    <a:srgbClr val="0070C0"/>
-                  </a:solidFill>
-                </a:rPr>
-                <a:t>Bits 4 - 0</a:t>
-              </a:r>
-            </a:p>
-          </p:txBody>
-        </p:sp>
-        <p:sp>
-          <p:nvSpPr>
-            <p:cNvPr id="195" name="TextBox 194"/>
-            <p:cNvSpPr txBox="1"/>
-            <p:nvPr/>
-          </p:nvSpPr>
-          <p:spPr>
-            <a:xfrm>
-              <a:off x="6653490" y="4131184"/>
-              <a:ext cx="739523" cy="276999"/>
-            </a:xfrm>
-            <a:prstGeom prst="rect">
-              <a:avLst/>
-            </a:prstGeom>
-            <a:noFill/>
-            <a:ln w="3175">
-              <a:solidFill>
-                <a:srgbClr val="0070C0"/>
-              </a:solidFill>
-              <a:prstDash val="lgDash"/>
-            </a:ln>
-          </p:spPr>
-          <p:txBody>
-            <a:bodyPr wrap="square" rtlCol="0">
-              <a:spAutoFit/>
-            </a:bodyPr>
-            <a:lstStyle/>
-            <a:p>
-              <a:r>
-                <a:rPr lang="en-US" sz="1200" dirty="0">
-                  <a:solidFill>
-                    <a:srgbClr val="0070C0"/>
-                  </a:solidFill>
-                </a:rPr>
-                <a:t>Bits 6 , 5</a:t>
-              </a:r>
-            </a:p>
-          </p:txBody>
-        </p:sp>
-        <p:sp>
-          <p:nvSpPr>
-            <p:cNvPr id="196" name="TextBox 195"/>
-            <p:cNvSpPr txBox="1"/>
-            <p:nvPr/>
-          </p:nvSpPr>
-          <p:spPr>
-            <a:xfrm>
-              <a:off x="6039949" y="4131184"/>
-              <a:ext cx="495299" cy="276999"/>
-            </a:xfrm>
-            <a:prstGeom prst="rect">
-              <a:avLst/>
-            </a:prstGeom>
-            <a:noFill/>
-            <a:ln w="3175">
-              <a:solidFill>
-                <a:srgbClr val="0070C0"/>
-              </a:solidFill>
-              <a:prstDash val="lgDash"/>
-            </a:ln>
-          </p:spPr>
-          <p:txBody>
-            <a:bodyPr wrap="square" rtlCol="0">
-              <a:spAutoFit/>
-            </a:bodyPr>
-            <a:lstStyle/>
-            <a:p>
-              <a:r>
-                <a:rPr lang="en-US" sz="1200">
-                  <a:solidFill>
-                    <a:srgbClr val="0070C0"/>
-                  </a:solidFill>
-                </a:rPr>
-                <a:t>Bit 7</a:t>
-              </a:r>
-              <a:endParaRPr lang="en-US" sz="1200" dirty="0">
-                <a:solidFill>
-                  <a:srgbClr val="0070C0"/>
-                </a:solidFill>
-              </a:endParaRPr>
-            </a:p>
-          </p:txBody>
-        </p:sp>
-        <p:sp>
-          <p:nvSpPr>
-            <p:cNvPr id="197" name="TextBox 196"/>
-            <p:cNvSpPr txBox="1"/>
-            <p:nvPr/>
-          </p:nvSpPr>
-          <p:spPr>
-            <a:xfrm>
-              <a:off x="5114498" y="4131184"/>
-              <a:ext cx="807209" cy="276999"/>
-            </a:xfrm>
-            <a:prstGeom prst="rect">
-              <a:avLst/>
-            </a:prstGeom>
-            <a:noFill/>
-            <a:ln w="3175">
-              <a:solidFill>
-                <a:srgbClr val="0070C0"/>
-              </a:solidFill>
-              <a:prstDash val="lgDash"/>
-            </a:ln>
-          </p:spPr>
-          <p:txBody>
-            <a:bodyPr wrap="square" rtlCol="0">
-              <a:spAutoFit/>
-            </a:bodyPr>
-            <a:lstStyle/>
-            <a:p>
-              <a:r>
-                <a:rPr lang="en-US" sz="1200">
-                  <a:solidFill>
-                    <a:srgbClr val="0070C0"/>
-                  </a:solidFill>
-                </a:rPr>
-                <a:t>Bits 11 - </a:t>
-              </a:r>
-              <a:r>
-                <a:rPr lang="en-US" sz="1200" dirty="0">
-                  <a:solidFill>
-                    <a:srgbClr val="0070C0"/>
-                  </a:solidFill>
-                </a:rPr>
-                <a:t>8</a:t>
-              </a:r>
-            </a:p>
-          </p:txBody>
-        </p:sp>
       </p:grpSp>
-      <p:cxnSp>
-        <p:nvCxnSpPr>
-          <p:cNvPr id="198" name="Straight Arrow Connector 197"/>
-          <p:cNvCxnSpPr/>
-          <p:nvPr/>
-        </p:nvCxnSpPr>
-        <p:spPr>
-          <a:xfrm flipV="1">
-            <a:off x="4267195" y="3120774"/>
-            <a:ext cx="811517" cy="5650"/>
-          </a:xfrm>
-          <a:prstGeom prst="straightConnector1">
-            <a:avLst/>
-          </a:prstGeom>
-          <a:ln w="12700">
-            <a:solidFill>
-              <a:srgbClr val="FF0000"/>
-            </a:solidFill>
-            <a:tailEnd type="arrow"/>
-          </a:ln>
-        </p:spPr>
-        <p:style>
-          <a:lnRef idx="1">
-            <a:schemeClr val="accent1"/>
-          </a:lnRef>
-          <a:fillRef idx="0">
-            <a:schemeClr val="accent1"/>
-          </a:fillRef>
-          <a:effectRef idx="0">
-            <a:schemeClr val="accent1"/>
-          </a:effectRef>
-          <a:fontRef idx="minor">
-            <a:schemeClr val="tx1"/>
-          </a:fontRef>
-        </p:style>
-      </p:cxnSp>
-      <p:sp>
-        <p:nvSpPr>
-          <p:cNvPr id="199" name="TextBox 198"/>
-          <p:cNvSpPr txBox="1"/>
-          <p:nvPr/>
-        </p:nvSpPr>
-        <p:spPr>
-          <a:xfrm>
-            <a:off x="5073293" y="2797608"/>
-            <a:ext cx="3307854" cy="646331"/>
-          </a:xfrm>
-          <a:prstGeom prst="rect">
-            <a:avLst/>
-          </a:prstGeom>
-          <a:noFill/>
-          <a:ln w="3175">
-            <a:solidFill>
-              <a:srgbClr val="0070C0"/>
-            </a:solidFill>
-            <a:prstDash val="lgDash"/>
-          </a:ln>
-        </p:spPr>
-        <p:txBody>
-          <a:bodyPr wrap="square" rtlCol="0">
-            <a:spAutoFit/>
-          </a:bodyPr>
-          <a:lstStyle/>
-          <a:p>
-            <a:r>
-              <a:rPr lang="en-US" sz="1200" dirty="0">
-                <a:solidFill>
-                  <a:srgbClr val="0070C0"/>
-                </a:solidFill>
-              </a:rPr>
-              <a:t>2</a:t>
-            </a:r>
-            <a:r>
-              <a:rPr lang="en-US" sz="1200" baseline="30000" dirty="0">
-                <a:solidFill>
-                  <a:srgbClr val="0070C0"/>
-                </a:solidFill>
-              </a:rPr>
-              <a:t>nd</a:t>
-            </a:r>
-            <a:r>
-              <a:rPr lang="en-US" sz="1200" dirty="0">
-                <a:solidFill>
-                  <a:srgbClr val="0070C0"/>
-                </a:solidFill>
-              </a:rPr>
-              <a:t> byte: top 2 bits = 2 for padding if odd # payloads (else 0), lower 6 bits is type 5 (unsigned short) =&gt; 0x85 (1000 0101)</a:t>
-            </a:r>
-          </a:p>
-        </p:txBody>
-      </p:sp>
     </p:spTree>
     <p:extLst>
       <p:ext uri="{BB962C8B-B14F-4D97-AF65-F5344CB8AC3E}">
@@ -7989,14 +8824,20 @@
       </p:grpSpPr>
       <p:sp>
         <p:nvSpPr>
-          <p:cNvPr id="4" name="TextBox 3"/>
+          <p:cNvPr id="6" name="TextBox 5">
+            <a:extLst>
+              <a:ext uri="{FF2B5EF4-FFF2-40B4-BE49-F238E27FC236}">
+                <a16:creationId xmlns:a16="http://schemas.microsoft.com/office/drawing/2014/main" id="{EB7974B0-3700-AB4B-A396-EC5F00E0D20C}"/>
+              </a:ext>
+            </a:extLst>
+          </p:cNvPr>
           <p:cNvSpPr txBox="1"/>
           <p:nvPr/>
         </p:nvSpPr>
         <p:spPr>
           <a:xfrm>
-            <a:off x="2286000" y="990600"/>
-            <a:ext cx="4876800" cy="400110"/>
+            <a:off x="3276600" y="609600"/>
+            <a:ext cx="2667000" cy="400110"/>
           </a:xfrm>
           <a:prstGeom prst="rect">
             <a:avLst/>
@@ -8017,32 +8858,42 @@
           <a:lstStyle/>
           <a:p>
             <a:r>
-              <a:rPr lang="en-US" sz="2000" b="1" dirty="0">
+              <a:rPr lang="en-US" sz="2000" b="1">
                 <a:latin typeface="Arial" pitchFamily="34" charset="0"/>
                 <a:cs typeface="Arial" pitchFamily="34" charset="0"/>
               </a:rPr>
-              <a:t>TRIGGER / STREAMING  BANK  TAGS</a:t>
+              <a:t>STREAMING  TAGS</a:t>
             </a:r>
+            <a:endParaRPr lang="en-US" sz="2000" b="1" dirty="0">
+              <a:latin typeface="Arial" pitchFamily="34" charset="0"/>
+              <a:cs typeface="Arial" pitchFamily="34" charset="0"/>
+            </a:endParaRPr>
           </a:p>
         </p:txBody>
       </p:sp>
       <p:graphicFrame>
         <p:nvGraphicFramePr>
-          <p:cNvPr id="5" name="Table 4"/>
+          <p:cNvPr id="7" name="Table 6">
+            <a:extLst>
+              <a:ext uri="{FF2B5EF4-FFF2-40B4-BE49-F238E27FC236}">
+                <a16:creationId xmlns:a16="http://schemas.microsoft.com/office/drawing/2014/main" id="{9923A58F-D6F9-7748-885F-E3708C242503}"/>
+              </a:ext>
+            </a:extLst>
+          </p:cNvPr>
           <p:cNvGraphicFramePr>
             <a:graphicFrameLocks noGrp="1"/>
           </p:cNvGraphicFramePr>
           <p:nvPr>
             <p:extLst>
               <p:ext uri="{D42A27DB-BD31-4B8C-83A1-F6EECF244321}">
-                <p14:modId xmlns:p14="http://schemas.microsoft.com/office/powerpoint/2010/main" val="2139104316"/>
+                <p14:modId xmlns:p14="http://schemas.microsoft.com/office/powerpoint/2010/main" val="2702894760"/>
               </p:ext>
             </p:extLst>
           </p:nvPr>
         </p:nvGraphicFramePr>
         <p:xfrm>
-          <a:off x="609600" y="1693816"/>
-          <a:ext cx="7848600" cy="3971110"/>
+          <a:off x="609600" y="1312816"/>
+          <a:ext cx="8001000" cy="4824552"/>
         </p:xfrm>
         <a:graphic>
           <a:graphicData uri="http://schemas.openxmlformats.org/drawingml/2006/table">
@@ -8058,7 +8909,7 @@
                     </a:ext>
                   </a:extLst>
                 </a:gridCol>
-                <a:gridCol w="6295233">
+                <a:gridCol w="6447633">
                   <a:extLst>
                     <a:ext uri="{9D8B030D-6E8A-4147-A177-3AD203B41FA5}">
                       <a16:colId xmlns:a16="http://schemas.microsoft.com/office/drawing/2014/main" val="20001"/>
@@ -8152,18 +9003,9 @@
                     <a:p>
                       <a:pPr algn="ctr"/>
                       <a:r>
-                        <a:rPr lang="en-US" sz="1400" kern="1200" dirty="0">
-                          <a:solidFill>
-                            <a:schemeClr val="dk1"/>
-                          </a:solidFill>
-                          <a:effectLst/>
-                          <a:latin typeface="+mn-lt"/>
-                          <a:ea typeface="+mn-ea"/>
-                          <a:cs typeface="+mn-cs"/>
-                        </a:rPr>
-                        <a:t>0xFF4F</a:t>
+                        <a:rPr lang="en-US" sz="1400" dirty="0"/>
+                        <a:t>0xFF30</a:t>
                       </a:r>
-                      <a:endParaRPr lang="en-US" sz="1400" baseline="0" dirty="0"/>
                     </a:p>
                   </a:txBody>
                   <a:tcPr>
@@ -8201,8 +9043,25 @@
                     <a:bodyPr/>
                     <a:lstStyle/>
                     <a:p>
+                      <a:pPr marL="0" marR="0" lvl="2" indent="-342900" algn="l" defTabSz="914400" rtl="0" eaLnBrk="1" fontAlgn="auto" latinLnBrk="0" hangingPunct="1">
+                        <a:lnSpc>
+                          <a:spcPct val="100000"/>
+                        </a:lnSpc>
+                        <a:spcBef>
+                          <a:spcPts val="0"/>
+                        </a:spcBef>
+                        <a:spcAft>
+                          <a:spcPts val="0"/>
+                        </a:spcAft>
+                        <a:buClrTx/>
+                        <a:buSzTx/>
+                        <a:buFont typeface="+mj-lt"/>
+                        <a:buNone/>
+                        <a:tabLst/>
+                        <a:defRPr/>
+                      </a:pPr>
                       <a:r>
-                        <a:rPr lang="en-US" sz="1400" i="0" kern="1200" dirty="0">
+                        <a:rPr lang="en-US" sz="1400" b="0" i="0" kern="1200" dirty="0">
                           <a:solidFill>
                             <a:schemeClr val="dk1"/>
                           </a:solidFill>
@@ -8211,10 +9070,10 @@
                           <a:ea typeface="+mn-ea"/>
                           <a:cs typeface="+mn-cs"/>
                         </a:rPr>
-                        <a:t>At least one ROC used in building trigger bank</a:t>
+                        <a:t>Stream Info Bank (SIB) from ROC containing frame #</a:t>
                       </a:r>
                       <a:r>
-                        <a:rPr lang="en-US" sz="1400" i="0" kern="1200" baseline="0" dirty="0">
+                        <a:rPr lang="en-US" sz="1400" b="0" i="0" kern="1200" baseline="0" dirty="0">
                           <a:solidFill>
                             <a:schemeClr val="dk1"/>
                           </a:solidFill>
@@ -8223,127 +9082,7 @@
                           <a:ea typeface="+mn-ea"/>
                           <a:cs typeface="+mn-cs"/>
                         </a:rPr>
-                        <a:t> </a:t>
-                      </a:r>
-                      <a:r>
-                        <a:rPr lang="en-US" sz="1400" i="0" kern="1200" dirty="0">
-                          <a:solidFill>
-                            <a:schemeClr val="dk1"/>
-                          </a:solidFill>
-                          <a:effectLst/>
-                          <a:latin typeface="+mn-lt"/>
-                          <a:ea typeface="+mn-ea"/>
-                          <a:cs typeface="+mn-cs"/>
-                        </a:rPr>
-                        <a:t>has bad or nonexistent trigger bank</a:t>
-                      </a:r>
-                      <a:endParaRPr lang="en-US" sz="1400" i="0" baseline="0" dirty="0"/>
-                    </a:p>
-                  </a:txBody>
-                  <a:tcPr>
-                    <a:lnL w="12700" cap="flat" cmpd="sng" algn="ctr">
-                      <a:solidFill>
-                        <a:schemeClr val="tx1"/>
-                      </a:solidFill>
-                      <a:prstDash val="solid"/>
-                      <a:round/>
-                      <a:headEnd type="none" w="med" len="med"/>
-                      <a:tailEnd type="none" w="med" len="med"/>
-                    </a:lnL>
-                    <a:lnR w="12700" cap="flat" cmpd="sng" algn="ctr">
-                      <a:solidFill>
-                        <a:schemeClr val="tx1"/>
-                      </a:solidFill>
-                      <a:prstDash val="solid"/>
-                      <a:round/>
-                      <a:headEnd type="none" w="med" len="med"/>
-                      <a:tailEnd type="none" w="med" len="med"/>
-                    </a:lnR>
-                    <a:lnB w="12700" cap="flat" cmpd="sng" algn="ctr">
-                      <a:solidFill>
-                        <a:schemeClr val="tx1"/>
-                      </a:solidFill>
-                      <a:prstDash val="solid"/>
-                      <a:round/>
-                      <a:headEnd type="none" w="med" len="med"/>
-                      <a:tailEnd type="none" w="med" len="med"/>
-                    </a:lnB>
-                  </a:tcPr>
-                </a:tc>
-                <a:extLst>
-                  <a:ext uri="{0D108BD9-81ED-4DB2-BD59-A6C34878D82A}">
-                    <a16:rowId xmlns:a16="http://schemas.microsoft.com/office/drawing/2014/main" val="10002"/>
-                  </a:ext>
-                </a:extLst>
-              </a:tr>
-              <a:tr h="330926">
-                <a:tc>
-                  <a:txBody>
-                    <a:bodyPr/>
-                    <a:lstStyle/>
-                    <a:p>
-                      <a:pPr algn="ctr"/>
-                      <a:r>
-                        <a:rPr lang="en-US" sz="1400" dirty="0"/>
-                        <a:t>0xFF50</a:t>
-                      </a:r>
-                    </a:p>
-                  </a:txBody>
-                  <a:tcPr>
-                    <a:lnL w="12700" cap="flat" cmpd="sng" algn="ctr">
-                      <a:solidFill>
-                        <a:schemeClr val="tx1"/>
-                      </a:solidFill>
-                      <a:prstDash val="solid"/>
-                      <a:round/>
-                      <a:headEnd type="none" w="med" len="med"/>
-                      <a:tailEnd type="none" w="med" len="med"/>
-                    </a:lnL>
-                    <a:lnR w="12700" cap="flat" cmpd="sng" algn="ctr">
-                      <a:solidFill>
-                        <a:schemeClr val="tx1"/>
-                      </a:solidFill>
-                      <a:prstDash val="solid"/>
-                      <a:round/>
-                      <a:headEnd type="none" w="med" len="med"/>
-                      <a:tailEnd type="none" w="med" len="med"/>
-                    </a:lnR>
-                    <a:lnT w="12700" cap="flat" cmpd="sng" algn="ctr">
-                      <a:solidFill>
-                        <a:schemeClr val="tx1"/>
-                      </a:solidFill>
-                      <a:prstDash val="solid"/>
-                      <a:round/>
-                      <a:headEnd type="none" w="med" len="med"/>
-                      <a:tailEnd type="none" w="med" len="med"/>
-                    </a:lnT>
-                    <a:lnB w="12700" cap="flat" cmpd="sng" algn="ctr">
-                      <a:solidFill>
-                        <a:schemeClr val="tx1"/>
-                      </a:solidFill>
-                      <a:prstDash val="solid"/>
-                      <a:round/>
-                      <a:headEnd type="none" w="med" len="med"/>
-                      <a:tailEnd type="none" w="med" len="med"/>
-                    </a:lnB>
-                  </a:tcPr>
-                </a:tc>
-                <a:tc>
-                  <a:txBody>
-                    <a:bodyPr/>
-                    <a:lstStyle/>
-                    <a:p>
-                      <a:r>
-                        <a:rPr lang="en-US" sz="1400" i="0" kern="1200" dirty="0">
-                          <a:solidFill>
-                            <a:schemeClr val="dk1"/>
-                          </a:solidFill>
-                          <a:effectLst/>
-                          <a:latin typeface="+mn-lt"/>
-                          <a:ea typeface="+mn-ea"/>
-                          <a:cs typeface="+mn-cs"/>
-                        </a:rPr>
-                        <a:t>Event built by primary event builder</a:t>
+                        <a:t> followed by timestamp</a:t>
                       </a:r>
                       <a:endParaRPr lang="en-US" sz="1400" b="0" i="0" dirty="0"/>
                     </a:p>
@@ -8367,682 +9106,6 @@
                       <a:headEnd type="none" w="med" len="med"/>
                       <a:tailEnd type="none" w="med" len="med"/>
                     </a:lnR>
-                    <a:lnT w="12700" cap="flat" cmpd="sng" algn="ctr">
-                      <a:solidFill>
-                        <a:schemeClr val="tx1"/>
-                      </a:solidFill>
-                      <a:prstDash val="solid"/>
-                      <a:round/>
-                      <a:headEnd type="none" w="med" len="med"/>
-                      <a:tailEnd type="none" w="med" len="med"/>
-                    </a:lnT>
-                    <a:lnB w="12700" cap="flat" cmpd="sng" algn="ctr">
-                      <a:solidFill>
-                        <a:schemeClr val="tx1"/>
-                      </a:solidFill>
-                      <a:prstDash val="solid"/>
-                      <a:round/>
-                      <a:headEnd type="none" w="med" len="med"/>
-                      <a:tailEnd type="none" w="med" len="med"/>
-                    </a:lnB>
-                  </a:tcPr>
-                </a:tc>
-                <a:extLst>
-                  <a:ext uri="{0D108BD9-81ED-4DB2-BD59-A6C34878D82A}">
-                    <a16:rowId xmlns:a16="http://schemas.microsoft.com/office/drawing/2014/main" val="10003"/>
-                  </a:ext>
-                </a:extLst>
-              </a:tr>
-              <a:tr h="330926">
-                <a:tc>
-                  <a:txBody>
-                    <a:bodyPr/>
-                    <a:lstStyle/>
-                    <a:p>
-                      <a:pPr algn="ctr"/>
-                      <a:r>
-                        <a:rPr lang="en-US" sz="1400" dirty="0"/>
-                        <a:t>0xFF58</a:t>
-                      </a:r>
-                    </a:p>
-                  </a:txBody>
-                  <a:tcPr>
-                    <a:lnL w="12700" cap="flat" cmpd="sng" algn="ctr">
-                      <a:solidFill>
-                        <a:schemeClr val="tx1"/>
-                      </a:solidFill>
-                      <a:prstDash val="solid"/>
-                      <a:round/>
-                      <a:headEnd type="none" w="med" len="med"/>
-                      <a:tailEnd type="none" w="med" len="med"/>
-                    </a:lnL>
-                    <a:lnR w="12700" cap="flat" cmpd="sng" algn="ctr">
-                      <a:solidFill>
-                        <a:schemeClr val="tx1"/>
-                      </a:solidFill>
-                      <a:prstDash val="solid"/>
-                      <a:round/>
-                      <a:headEnd type="none" w="med" len="med"/>
-                      <a:tailEnd type="none" w="med" len="med"/>
-                    </a:lnR>
-                    <a:lnT w="12700" cap="flat" cmpd="sng" algn="ctr">
-                      <a:solidFill>
-                        <a:schemeClr val="tx1"/>
-                      </a:solidFill>
-                      <a:prstDash val="solid"/>
-                      <a:round/>
-                      <a:headEnd type="none" w="med" len="med"/>
-                      <a:tailEnd type="none" w="med" len="med"/>
-                    </a:lnT>
-                    <a:lnB w="12700" cap="flat" cmpd="sng" algn="ctr">
-                      <a:solidFill>
-                        <a:schemeClr val="tx1"/>
-                      </a:solidFill>
-                      <a:prstDash val="solid"/>
-                      <a:round/>
-                      <a:headEnd type="none" w="med" len="med"/>
-                      <a:tailEnd type="none" w="med" len="med"/>
-                    </a:lnB>
-                  </a:tcPr>
-                </a:tc>
-                <a:tc>
-                  <a:txBody>
-                    <a:bodyPr/>
-                    <a:lstStyle/>
-                    <a:p>
-                      <a:pPr marL="0" marR="0" indent="0" algn="l" defTabSz="914400" rtl="0" eaLnBrk="1" fontAlgn="auto" latinLnBrk="0" hangingPunct="1">
-                        <a:lnSpc>
-                          <a:spcPct val="100000"/>
-                        </a:lnSpc>
-                        <a:spcBef>
-                          <a:spcPts val="0"/>
-                        </a:spcBef>
-                        <a:spcAft>
-                          <a:spcPts val="0"/>
-                        </a:spcAft>
-                        <a:buClrTx/>
-                        <a:buSzTx/>
-                        <a:buFontTx/>
-                        <a:buNone/>
-                        <a:tabLst/>
-                        <a:defRPr/>
-                      </a:pPr>
-                      <a:r>
-                        <a:rPr lang="en-US" sz="1400" i="0" kern="1200" dirty="0">
-                          <a:solidFill>
-                            <a:schemeClr val="dk1"/>
-                          </a:solidFill>
-                          <a:effectLst/>
-                          <a:latin typeface="+mn-lt"/>
-                          <a:ea typeface="+mn-ea"/>
-                          <a:cs typeface="+mn-cs"/>
-                        </a:rPr>
-                        <a:t>Event built by primary event builder with sync bit set</a:t>
-                      </a:r>
-                      <a:endParaRPr lang="en-US" sz="1400" b="0" i="0" dirty="0"/>
-                    </a:p>
-                  </a:txBody>
-                  <a:tcPr>
-                    <a:lnL w="12700" cap="flat" cmpd="sng" algn="ctr">
-                      <a:solidFill>
-                        <a:schemeClr val="tx1"/>
-                      </a:solidFill>
-                      <a:prstDash val="solid"/>
-                      <a:round/>
-                      <a:headEnd type="none" w="med" len="med"/>
-                      <a:tailEnd type="none" w="med" len="med"/>
-                    </a:lnL>
-                    <a:lnR w="12700" cap="flat" cmpd="sng" algn="ctr">
-                      <a:solidFill>
-                        <a:schemeClr val="tx1"/>
-                      </a:solidFill>
-                      <a:prstDash val="solid"/>
-                      <a:round/>
-                      <a:headEnd type="none" w="med" len="med"/>
-                      <a:tailEnd type="none" w="med" len="med"/>
-                    </a:lnR>
-                    <a:lnT w="12700" cap="flat" cmpd="sng" algn="ctr">
-                      <a:solidFill>
-                        <a:schemeClr val="tx1"/>
-                      </a:solidFill>
-                      <a:prstDash val="solid"/>
-                      <a:round/>
-                      <a:headEnd type="none" w="med" len="med"/>
-                      <a:tailEnd type="none" w="med" len="med"/>
-                    </a:lnT>
-                    <a:lnB w="12700" cap="flat" cmpd="sng" algn="ctr">
-                      <a:solidFill>
-                        <a:schemeClr val="tx1"/>
-                      </a:solidFill>
-                      <a:prstDash val="solid"/>
-                      <a:round/>
-                      <a:headEnd type="none" w="med" len="med"/>
-                      <a:tailEnd type="none" w="med" len="med"/>
-                    </a:lnB>
-                  </a:tcPr>
-                </a:tc>
-                <a:extLst>
-                  <a:ext uri="{0D108BD9-81ED-4DB2-BD59-A6C34878D82A}">
-                    <a16:rowId xmlns:a16="http://schemas.microsoft.com/office/drawing/2014/main" val="10004"/>
-                  </a:ext>
-                </a:extLst>
-              </a:tr>
-              <a:tr h="326570">
-                <a:tc>
-                  <a:txBody>
-                    <a:bodyPr/>
-                    <a:lstStyle/>
-                    <a:p>
-                      <a:pPr algn="ctr"/>
-                      <a:r>
-                        <a:rPr lang="en-US" sz="1400" baseline="0" dirty="0"/>
-                        <a:t>0xFF70</a:t>
-                      </a:r>
-                      <a:endParaRPr lang="en-US" sz="1400" dirty="0"/>
-                    </a:p>
-                  </a:txBody>
-                  <a:tcPr>
-                    <a:lnL w="12700" cap="flat" cmpd="sng" algn="ctr">
-                      <a:solidFill>
-                        <a:schemeClr val="tx1"/>
-                      </a:solidFill>
-                      <a:prstDash val="solid"/>
-                      <a:round/>
-                      <a:headEnd type="none" w="med" len="med"/>
-                      <a:tailEnd type="none" w="med" len="med"/>
-                    </a:lnL>
-                    <a:lnR w="12700" cap="flat" cmpd="sng" algn="ctr">
-                      <a:solidFill>
-                        <a:schemeClr val="tx1"/>
-                      </a:solidFill>
-                      <a:prstDash val="solid"/>
-                      <a:round/>
-                      <a:headEnd type="none" w="med" len="med"/>
-                      <a:tailEnd type="none" w="med" len="med"/>
-                    </a:lnR>
-                    <a:lnT w="12700" cap="flat" cmpd="sng" algn="ctr">
-                      <a:solidFill>
-                        <a:schemeClr val="tx1"/>
-                      </a:solidFill>
-                      <a:prstDash val="solid"/>
-                      <a:round/>
-                      <a:headEnd type="none" w="med" len="med"/>
-                      <a:tailEnd type="none" w="med" len="med"/>
-                    </a:lnT>
-                    <a:lnB w="12700" cap="flat" cmpd="sng" algn="ctr">
-                      <a:solidFill>
-                        <a:schemeClr val="tx1"/>
-                      </a:solidFill>
-                      <a:prstDash val="solid"/>
-                      <a:round/>
-                      <a:headEnd type="none" w="med" len="med"/>
-                      <a:tailEnd type="none" w="med" len="med"/>
-                    </a:lnB>
-                  </a:tcPr>
-                </a:tc>
-                <a:tc>
-                  <a:txBody>
-                    <a:bodyPr/>
-                    <a:lstStyle/>
-                    <a:p>
-                      <a:pPr marL="0" marR="0" indent="0" algn="l" defTabSz="914400" rtl="0" eaLnBrk="1" fontAlgn="auto" latinLnBrk="0" hangingPunct="1">
-                        <a:lnSpc>
-                          <a:spcPct val="100000"/>
-                        </a:lnSpc>
-                        <a:spcBef>
-                          <a:spcPts val="0"/>
-                        </a:spcBef>
-                        <a:spcAft>
-                          <a:spcPts val="0"/>
-                        </a:spcAft>
-                        <a:buClrTx/>
-                        <a:buSzTx/>
-                        <a:buFontTx/>
-                        <a:buNone/>
-                        <a:tabLst/>
-                        <a:defRPr/>
-                      </a:pPr>
-                      <a:r>
-                        <a:rPr lang="en-US" sz="1400" i="0" kern="1200" dirty="0">
-                          <a:solidFill>
-                            <a:schemeClr val="dk1"/>
-                          </a:solidFill>
-                          <a:effectLst/>
-                          <a:latin typeface="+mn-lt"/>
-                          <a:ea typeface="+mn-ea"/>
-                          <a:cs typeface="+mn-cs"/>
-                        </a:rPr>
-                        <a:t>Event built by secondary event builder</a:t>
-                      </a:r>
-                      <a:endParaRPr lang="en-US" sz="1400" b="0" i="0" dirty="0"/>
-                    </a:p>
-                  </a:txBody>
-                  <a:tcPr>
-                    <a:lnL w="12700" cap="flat" cmpd="sng" algn="ctr">
-                      <a:solidFill>
-                        <a:schemeClr val="tx1"/>
-                      </a:solidFill>
-                      <a:prstDash val="solid"/>
-                      <a:round/>
-                      <a:headEnd type="none" w="med" len="med"/>
-                      <a:tailEnd type="none" w="med" len="med"/>
-                    </a:lnL>
-                    <a:lnR w="12700" cap="flat" cmpd="sng" algn="ctr">
-                      <a:solidFill>
-                        <a:schemeClr val="tx1"/>
-                      </a:solidFill>
-                      <a:prstDash val="solid"/>
-                      <a:round/>
-                      <a:headEnd type="none" w="med" len="med"/>
-                      <a:tailEnd type="none" w="med" len="med"/>
-                    </a:lnR>
-                    <a:lnT w="12700" cap="flat" cmpd="sng" algn="ctr">
-                      <a:solidFill>
-                        <a:schemeClr val="tx1"/>
-                      </a:solidFill>
-                      <a:prstDash val="solid"/>
-                      <a:round/>
-                      <a:headEnd type="none" w="med" len="med"/>
-                      <a:tailEnd type="none" w="med" len="med"/>
-                    </a:lnT>
-                    <a:lnB w="12700" cap="flat" cmpd="sng" algn="ctr">
-                      <a:solidFill>
-                        <a:schemeClr val="tx1"/>
-                      </a:solidFill>
-                      <a:prstDash val="solid"/>
-                      <a:round/>
-                      <a:headEnd type="none" w="med" len="med"/>
-                      <a:tailEnd type="none" w="med" len="med"/>
-                    </a:lnB>
-                  </a:tcPr>
-                </a:tc>
-                <a:extLst>
-                  <a:ext uri="{0D108BD9-81ED-4DB2-BD59-A6C34878D82A}">
-                    <a16:rowId xmlns:a16="http://schemas.microsoft.com/office/drawing/2014/main" val="10005"/>
-                  </a:ext>
-                </a:extLst>
-              </a:tr>
-              <a:tr h="330926">
-                <a:tc>
-                  <a:txBody>
-                    <a:bodyPr/>
-                    <a:lstStyle/>
-                    <a:p>
-                      <a:pPr algn="ctr"/>
-                      <a:r>
-                        <a:rPr lang="en-US" sz="1400" dirty="0"/>
-                        <a:t>0xFF78</a:t>
-                      </a:r>
-                    </a:p>
-                  </a:txBody>
-                  <a:tcPr>
-                    <a:lnL w="12700" cap="flat" cmpd="sng" algn="ctr">
-                      <a:solidFill>
-                        <a:schemeClr val="tx1"/>
-                      </a:solidFill>
-                      <a:prstDash val="solid"/>
-                      <a:round/>
-                      <a:headEnd type="none" w="med" len="med"/>
-                      <a:tailEnd type="none" w="med" len="med"/>
-                    </a:lnL>
-                    <a:lnR w="12700" cap="flat" cmpd="sng" algn="ctr">
-                      <a:solidFill>
-                        <a:schemeClr val="tx1"/>
-                      </a:solidFill>
-                      <a:prstDash val="solid"/>
-                      <a:round/>
-                      <a:headEnd type="none" w="med" len="med"/>
-                      <a:tailEnd type="none" w="med" len="med"/>
-                    </a:lnR>
-                    <a:lnT w="12700" cap="flat" cmpd="sng" algn="ctr">
-                      <a:solidFill>
-                        <a:schemeClr val="tx1"/>
-                      </a:solidFill>
-                      <a:prstDash val="solid"/>
-                      <a:round/>
-                      <a:headEnd type="none" w="med" len="med"/>
-                      <a:tailEnd type="none" w="med" len="med"/>
-                    </a:lnT>
-                    <a:lnB w="12700" cap="flat" cmpd="sng" algn="ctr">
-                      <a:solidFill>
-                        <a:schemeClr val="tx1"/>
-                      </a:solidFill>
-                      <a:prstDash val="solid"/>
-                      <a:round/>
-                      <a:headEnd type="none" w="med" len="med"/>
-                      <a:tailEnd type="none" w="med" len="med"/>
-                    </a:lnB>
-                  </a:tcPr>
-                </a:tc>
-                <a:tc>
-                  <a:txBody>
-                    <a:bodyPr/>
-                    <a:lstStyle/>
-                    <a:p>
-                      <a:pPr marL="0" marR="0" lvl="2" indent="-342900" algn="l" defTabSz="914400" rtl="0" eaLnBrk="1" fontAlgn="auto" latinLnBrk="0" hangingPunct="1">
-                        <a:lnSpc>
-                          <a:spcPct val="100000"/>
-                        </a:lnSpc>
-                        <a:spcBef>
-                          <a:spcPts val="0"/>
-                        </a:spcBef>
-                        <a:spcAft>
-                          <a:spcPts val="0"/>
-                        </a:spcAft>
-                        <a:buClrTx/>
-                        <a:buSzTx/>
-                        <a:buFont typeface="+mj-lt"/>
-                        <a:buNone/>
-                        <a:tabLst/>
-                        <a:defRPr/>
-                      </a:pPr>
-                      <a:r>
-                        <a:rPr lang="en-US" sz="1400" i="0" kern="1200" dirty="0">
-                          <a:solidFill>
-                            <a:schemeClr val="dk1"/>
-                          </a:solidFill>
-                          <a:effectLst/>
-                          <a:latin typeface="+mn-lt"/>
-                          <a:ea typeface="+mn-ea"/>
-                          <a:cs typeface="+mn-cs"/>
-                        </a:rPr>
-                        <a:t>Event built by secondary event builder with sync bit set</a:t>
-                      </a:r>
-                      <a:endParaRPr lang="en-US" sz="1400" b="0" i="0" dirty="0"/>
-                    </a:p>
-                  </a:txBody>
-                  <a:tcPr>
-                    <a:lnL w="12700" cap="flat" cmpd="sng" algn="ctr">
-                      <a:solidFill>
-                        <a:schemeClr val="tx1"/>
-                      </a:solidFill>
-                      <a:prstDash val="solid"/>
-                      <a:round/>
-                      <a:headEnd type="none" w="med" len="med"/>
-                      <a:tailEnd type="none" w="med" len="med"/>
-                    </a:lnL>
-                    <a:lnR w="12700" cap="flat" cmpd="sng" algn="ctr">
-                      <a:solidFill>
-                        <a:schemeClr val="tx1"/>
-                      </a:solidFill>
-                      <a:prstDash val="solid"/>
-                      <a:round/>
-                      <a:headEnd type="none" w="med" len="med"/>
-                      <a:tailEnd type="none" w="med" len="med"/>
-                    </a:lnR>
-                    <a:lnT w="12700" cap="flat" cmpd="sng" algn="ctr">
-                      <a:solidFill>
-                        <a:schemeClr val="tx1"/>
-                      </a:solidFill>
-                      <a:prstDash val="solid"/>
-                      <a:round/>
-                      <a:headEnd type="none" w="med" len="med"/>
-                      <a:tailEnd type="none" w="med" len="med"/>
-                    </a:lnT>
-                    <a:lnB w="12700" cap="flat" cmpd="sng" algn="ctr">
-                      <a:solidFill>
-                        <a:schemeClr val="tx1"/>
-                      </a:solidFill>
-                      <a:prstDash val="solid"/>
-                      <a:round/>
-                      <a:headEnd type="none" w="med" len="med"/>
-                      <a:tailEnd type="none" w="med" len="med"/>
-                    </a:lnB>
-                  </a:tcPr>
-                </a:tc>
-                <a:extLst>
-                  <a:ext uri="{0D108BD9-81ED-4DB2-BD59-A6C34878D82A}">
-                    <a16:rowId xmlns:a16="http://schemas.microsoft.com/office/drawing/2014/main" val="10006"/>
-                  </a:ext>
-                </a:extLst>
-              </a:tr>
-              <a:tr h="330926">
-                <a:tc>
-                  <a:txBody>
-                    <a:bodyPr/>
-                    <a:lstStyle/>
-                    <a:p>
-                      <a:pPr algn="ctr"/>
-                      <a:endParaRPr lang="en-US" sz="1400" dirty="0"/>
-                    </a:p>
-                  </a:txBody>
-                  <a:tcPr>
-                    <a:lnL w="12700" cap="flat" cmpd="sng" algn="ctr">
-                      <a:solidFill>
-                        <a:schemeClr val="tx1"/>
-                      </a:solidFill>
-                      <a:prstDash val="solid"/>
-                      <a:round/>
-                      <a:headEnd type="none" w="med" len="med"/>
-                      <a:tailEnd type="none" w="med" len="med"/>
-                    </a:lnL>
-                    <a:lnR w="12700" cap="flat" cmpd="sng" algn="ctr">
-                      <a:solidFill>
-                        <a:schemeClr val="tx1"/>
-                      </a:solidFill>
-                      <a:prstDash val="solid"/>
-                      <a:round/>
-                      <a:headEnd type="none" w="med" len="med"/>
-                      <a:tailEnd type="none" w="med" len="med"/>
-                    </a:lnR>
-                    <a:lnT w="12700" cap="flat" cmpd="sng" algn="ctr">
-                      <a:solidFill>
-                        <a:schemeClr val="tx1"/>
-                      </a:solidFill>
-                      <a:prstDash val="solid"/>
-                      <a:round/>
-                      <a:headEnd type="none" w="med" len="med"/>
-                      <a:tailEnd type="none" w="med" len="med"/>
-                    </a:lnT>
-                    <a:lnB w="12700" cap="flat" cmpd="sng" algn="ctr">
-                      <a:solidFill>
-                        <a:schemeClr val="tx1"/>
-                      </a:solidFill>
-                      <a:prstDash val="solid"/>
-                      <a:round/>
-                      <a:headEnd type="none" w="med" len="med"/>
-                      <a:tailEnd type="none" w="med" len="med"/>
-                    </a:lnB>
-                    <a:solidFill>
-                      <a:schemeClr val="accent6">
-                        <a:lumMod val="20000"/>
-                        <a:lumOff val="80000"/>
-                      </a:schemeClr>
-                    </a:solidFill>
-                  </a:tcPr>
-                </a:tc>
-                <a:tc>
-                  <a:txBody>
-                    <a:bodyPr/>
-                    <a:lstStyle/>
-                    <a:p>
-                      <a:pPr marL="0" marR="0" lvl="2" indent="-342900" algn="ctr" defTabSz="914400" rtl="0" eaLnBrk="1" fontAlgn="auto" latinLnBrk="0" hangingPunct="1">
-                        <a:lnSpc>
-                          <a:spcPct val="100000"/>
-                        </a:lnSpc>
-                        <a:spcBef>
-                          <a:spcPts val="0"/>
-                        </a:spcBef>
-                        <a:spcAft>
-                          <a:spcPts val="0"/>
-                        </a:spcAft>
-                        <a:buClrTx/>
-                        <a:buSzTx/>
-                        <a:buFont typeface="+mj-lt"/>
-                        <a:buNone/>
-                        <a:tabLst/>
-                        <a:defRPr/>
-                      </a:pPr>
-                      <a:r>
-                        <a:rPr lang="en-US" sz="1200" b="0" dirty="0"/>
-                        <a:t>STREAMING TAGS</a:t>
-                      </a:r>
-                    </a:p>
-                  </a:txBody>
-                  <a:tcPr>
-                    <a:lnL w="12700" cap="flat" cmpd="sng" algn="ctr">
-                      <a:solidFill>
-                        <a:schemeClr val="tx1"/>
-                      </a:solidFill>
-                      <a:prstDash val="solid"/>
-                      <a:round/>
-                      <a:headEnd type="none" w="med" len="med"/>
-                      <a:tailEnd type="none" w="med" len="med"/>
-                    </a:lnL>
-                    <a:lnR w="12700" cap="flat" cmpd="sng" algn="ctr">
-                      <a:solidFill>
-                        <a:schemeClr val="tx1"/>
-                      </a:solidFill>
-                      <a:prstDash val="solid"/>
-                      <a:round/>
-                      <a:headEnd type="none" w="med" len="med"/>
-                      <a:tailEnd type="none" w="med" len="med"/>
-                    </a:lnR>
-                    <a:lnT w="12700" cap="flat" cmpd="sng" algn="ctr">
-                      <a:solidFill>
-                        <a:schemeClr val="tx1"/>
-                      </a:solidFill>
-                      <a:prstDash val="solid"/>
-                      <a:round/>
-                      <a:headEnd type="none" w="med" len="med"/>
-                      <a:tailEnd type="none" w="med" len="med"/>
-                    </a:lnT>
-                    <a:lnB w="12700" cap="flat" cmpd="sng" algn="ctr">
-                      <a:solidFill>
-                        <a:schemeClr val="tx1"/>
-                      </a:solidFill>
-                      <a:prstDash val="solid"/>
-                      <a:round/>
-                      <a:headEnd type="none" w="med" len="med"/>
-                      <a:tailEnd type="none" w="med" len="med"/>
-                    </a:lnB>
-                    <a:solidFill>
-                      <a:schemeClr val="accent6">
-                        <a:lumMod val="20000"/>
-                        <a:lumOff val="80000"/>
-                      </a:schemeClr>
-                    </a:solidFill>
-                  </a:tcPr>
-                </a:tc>
-                <a:extLst>
-                  <a:ext uri="{0D108BD9-81ED-4DB2-BD59-A6C34878D82A}">
-                    <a16:rowId xmlns:a16="http://schemas.microsoft.com/office/drawing/2014/main" val="10010"/>
-                  </a:ext>
-                </a:extLst>
-              </a:tr>
-              <a:tr h="330926">
-                <a:tc>
-                  <a:txBody>
-                    <a:bodyPr/>
-                    <a:lstStyle/>
-                    <a:p>
-                      <a:pPr algn="ctr"/>
-                      <a:r>
-                        <a:rPr lang="en-US" sz="1400" dirty="0"/>
-                        <a:t>0xFF30</a:t>
-                      </a:r>
-                    </a:p>
-                  </a:txBody>
-                  <a:tcPr>
-                    <a:lnL w="12700" cap="flat" cmpd="sng" algn="ctr">
-                      <a:solidFill>
-                        <a:schemeClr val="tx1"/>
-                      </a:solidFill>
-                      <a:prstDash val="solid"/>
-                      <a:round/>
-                      <a:headEnd type="none" w="med" len="med"/>
-                      <a:tailEnd type="none" w="med" len="med"/>
-                    </a:lnL>
-                    <a:lnR w="12700" cap="flat" cmpd="sng" algn="ctr">
-                      <a:solidFill>
-                        <a:schemeClr val="tx1"/>
-                      </a:solidFill>
-                      <a:prstDash val="solid"/>
-                      <a:round/>
-                      <a:headEnd type="none" w="med" len="med"/>
-                      <a:tailEnd type="none" w="med" len="med"/>
-                    </a:lnR>
-                    <a:lnT w="12700" cap="flat" cmpd="sng" algn="ctr">
-                      <a:solidFill>
-                        <a:schemeClr val="tx1"/>
-                      </a:solidFill>
-                      <a:prstDash val="solid"/>
-                      <a:round/>
-                      <a:headEnd type="none" w="med" len="med"/>
-                      <a:tailEnd type="none" w="med" len="med"/>
-                    </a:lnT>
-                    <a:lnB w="12700" cap="flat" cmpd="sng" algn="ctr">
-                      <a:solidFill>
-                        <a:schemeClr val="tx1"/>
-                      </a:solidFill>
-                      <a:prstDash val="solid"/>
-                      <a:round/>
-                      <a:headEnd type="none" w="med" len="med"/>
-                      <a:tailEnd type="none" w="med" len="med"/>
-                    </a:lnB>
-                  </a:tcPr>
-                </a:tc>
-                <a:tc>
-                  <a:txBody>
-                    <a:bodyPr/>
-                    <a:lstStyle/>
-                    <a:p>
-                      <a:pPr marL="0" marR="0" lvl="2" indent="-342900" algn="l" defTabSz="914400" rtl="0" eaLnBrk="1" fontAlgn="auto" latinLnBrk="0" hangingPunct="1">
-                        <a:lnSpc>
-                          <a:spcPct val="100000"/>
-                        </a:lnSpc>
-                        <a:spcBef>
-                          <a:spcPts val="0"/>
-                        </a:spcBef>
-                        <a:spcAft>
-                          <a:spcPts val="0"/>
-                        </a:spcAft>
-                        <a:buClrTx/>
-                        <a:buSzTx/>
-                        <a:buFont typeface="+mj-lt"/>
-                        <a:buNone/>
-                        <a:tabLst/>
-                        <a:defRPr/>
-                      </a:pPr>
-                      <a:r>
-                        <a:rPr lang="en-US" sz="1400" b="0" dirty="0"/>
-                        <a:t>Stream Info Bank</a:t>
-                      </a:r>
-                      <a:r>
-                        <a:rPr lang="en-US" sz="1400" b="0" baseline="0" dirty="0"/>
-                        <a:t> (for ROC Raw)</a:t>
-                      </a:r>
-                      <a:endParaRPr lang="en-US" sz="1400" b="0" dirty="0"/>
-                    </a:p>
-                  </a:txBody>
-                  <a:tcPr>
-                    <a:lnL w="12700" cap="flat" cmpd="sng" algn="ctr">
-                      <a:solidFill>
-                        <a:schemeClr val="tx1"/>
-                      </a:solidFill>
-                      <a:prstDash val="solid"/>
-                      <a:round/>
-                      <a:headEnd type="none" w="med" len="med"/>
-                      <a:tailEnd type="none" w="med" len="med"/>
-                    </a:lnL>
-                    <a:lnR w="12700" cap="flat" cmpd="sng" algn="ctr">
-                      <a:solidFill>
-                        <a:schemeClr val="tx1"/>
-                      </a:solidFill>
-                      <a:prstDash val="solid"/>
-                      <a:round/>
-                      <a:headEnd type="none" w="med" len="med"/>
-                      <a:tailEnd type="none" w="med" len="med"/>
-                    </a:lnR>
-                    <a:lnT w="12700" cap="flat" cmpd="sng" algn="ctr">
-                      <a:solidFill>
-                        <a:schemeClr val="tx1"/>
-                      </a:solidFill>
-                      <a:prstDash val="solid"/>
-                      <a:round/>
-                      <a:headEnd type="none" w="med" len="med"/>
-                      <a:tailEnd type="none" w="med" len="med"/>
-                    </a:lnT>
                     <a:lnB w="12700" cap="flat" cmpd="sng" algn="ctr">
                       <a:solidFill>
                         <a:schemeClr val="tx1"/>
@@ -9136,14 +9199,30 @@
                         <a:defRPr/>
                       </a:pPr>
                       <a:r>
-                        <a:rPr lang="en-US" sz="1400" b="0" dirty="0"/>
-                        <a:t>Time Info Bank</a:t>
+                        <a:rPr lang="en-US" sz="1400" b="0" i="0" kern="1200" dirty="0">
+                          <a:solidFill>
+                            <a:schemeClr val="dk1"/>
+                          </a:solidFill>
+                          <a:effectLst/>
+                          <a:latin typeface="+mn-lt"/>
+                          <a:ea typeface="+mn-ea"/>
+                          <a:cs typeface="+mn-cs"/>
+                        </a:rPr>
+                        <a:t>Stream Info Bank (SIB) from Aggregator containing frame #</a:t>
                       </a:r>
                       <a:r>
-                        <a:rPr lang="en-US" sz="1400" b="0" baseline="0" dirty="0"/>
-                        <a:t> (for Physics)</a:t>
+                        <a:rPr lang="en-US" sz="1400" b="0" i="0" kern="1200" baseline="0" dirty="0">
+                          <a:solidFill>
+                            <a:schemeClr val="dk1"/>
+                          </a:solidFill>
+                          <a:effectLst/>
+                          <a:latin typeface="+mn-lt"/>
+                          <a:ea typeface="+mn-ea"/>
+                          <a:cs typeface="+mn-cs"/>
+                        </a:rPr>
+                        <a:t> followed by timestamp</a:t>
                       </a:r>
-                      <a:endParaRPr lang="en-US" sz="1400" b="0" dirty="0"/>
+                      <a:endParaRPr lang="en-US" sz="1400" b="0" i="0" dirty="0"/>
                     </a:p>
                   </a:txBody>
                   <a:tcPr>
@@ -9200,6 +9279,719 @@
                       <a:pPr algn="ctr"/>
                       <a:r>
                         <a:rPr lang="en-US" sz="1400" baseline="0" dirty="0"/>
+                        <a:t>0xFF32</a:t>
+                      </a:r>
+                      <a:endParaRPr lang="en-US" sz="1400" dirty="0"/>
+                    </a:p>
+                  </a:txBody>
+                  <a:tcPr>
+                    <a:lnL w="12700" cap="flat" cmpd="sng" algn="ctr">
+                      <a:solidFill>
+                        <a:schemeClr val="tx1"/>
+                      </a:solidFill>
+                      <a:prstDash val="solid"/>
+                      <a:round/>
+                      <a:headEnd type="none" w="med" len="med"/>
+                      <a:tailEnd type="none" w="med" len="med"/>
+                    </a:lnL>
+                    <a:lnR w="12700" cap="flat" cmpd="sng" algn="ctr">
+                      <a:solidFill>
+                        <a:schemeClr val="tx1"/>
+                      </a:solidFill>
+                      <a:prstDash val="solid"/>
+                      <a:round/>
+                      <a:headEnd type="none" w="med" len="med"/>
+                      <a:tailEnd type="none" w="med" len="med"/>
+                    </a:lnR>
+                    <a:lnT w="12700" cap="flat" cmpd="sng" algn="ctr">
+                      <a:solidFill>
+                        <a:schemeClr val="tx1"/>
+                      </a:solidFill>
+                      <a:prstDash val="solid"/>
+                      <a:round/>
+                      <a:headEnd type="none" w="med" len="med"/>
+                      <a:tailEnd type="none" w="med" len="med"/>
+                    </a:lnT>
+                    <a:lnB w="12700" cap="flat" cmpd="sng" algn="ctr">
+                      <a:solidFill>
+                        <a:schemeClr val="tx1"/>
+                      </a:solidFill>
+                      <a:prstDash val="solid"/>
+                      <a:round/>
+                      <a:headEnd type="none" w="med" len="med"/>
+                      <a:tailEnd type="none" w="med" len="med"/>
+                    </a:lnB>
+                  </a:tcPr>
+                </a:tc>
+                <a:tc>
+                  <a:txBody>
+                    <a:bodyPr/>
+                    <a:lstStyle/>
+                    <a:p>
+                      <a:pPr marL="0" marR="0" lvl="2" indent="-342900" algn="l" defTabSz="914400" rtl="0" eaLnBrk="1" fontAlgn="auto" latinLnBrk="0" hangingPunct="1">
+                        <a:lnSpc>
+                          <a:spcPct val="100000"/>
+                        </a:lnSpc>
+                        <a:spcBef>
+                          <a:spcPts val="0"/>
+                        </a:spcBef>
+                        <a:spcAft>
+                          <a:spcPts val="0"/>
+                        </a:spcAft>
+                        <a:buClrTx/>
+                        <a:buSzTx/>
+                        <a:buFont typeface="+mj-lt"/>
+                        <a:buNone/>
+                        <a:tabLst/>
+                        <a:defRPr/>
+                      </a:pPr>
+                      <a:r>
+                        <a:rPr lang="en-US" sz="1400" b="0" i="0" kern="1200" dirty="0">
+                          <a:solidFill>
+                            <a:schemeClr val="dk1"/>
+                          </a:solidFill>
+                          <a:effectLst/>
+                          <a:latin typeface="+mn-lt"/>
+                          <a:ea typeface="+mn-ea"/>
+                          <a:cs typeface="+mn-cs"/>
+                        </a:rPr>
+                        <a:t>Stream Info Bank (SIB) from Aggregator containing frame #</a:t>
+                      </a:r>
+                      <a:r>
+                        <a:rPr lang="en-US" sz="1400" b="0" i="0" kern="1200" baseline="0" dirty="0">
+                          <a:solidFill>
+                            <a:schemeClr val="dk1"/>
+                          </a:solidFill>
+                          <a:effectLst/>
+                          <a:latin typeface="+mn-lt"/>
+                          <a:ea typeface="+mn-ea"/>
+                          <a:cs typeface="+mn-cs"/>
+                        </a:rPr>
+                        <a:t> followed by timestamp with non-fatal error</a:t>
+                      </a:r>
+                      <a:endParaRPr lang="en-US" sz="1400" b="0" i="0" dirty="0"/>
+                    </a:p>
+                  </a:txBody>
+                  <a:tcPr>
+                    <a:lnL w="12700" cap="flat" cmpd="sng" algn="ctr">
+                      <a:solidFill>
+                        <a:schemeClr val="tx1"/>
+                      </a:solidFill>
+                      <a:prstDash val="solid"/>
+                      <a:round/>
+                      <a:headEnd type="none" w="med" len="med"/>
+                      <a:tailEnd type="none" w="med" len="med"/>
+                    </a:lnL>
+                    <a:lnR w="12700" cap="flat" cmpd="sng" algn="ctr">
+                      <a:solidFill>
+                        <a:schemeClr val="tx1"/>
+                      </a:solidFill>
+                      <a:prstDash val="solid"/>
+                      <a:round/>
+                      <a:headEnd type="none" w="med" len="med"/>
+                      <a:tailEnd type="none" w="med" len="med"/>
+                    </a:lnR>
+                    <a:lnT w="12700" cap="flat" cmpd="sng" algn="ctr">
+                      <a:solidFill>
+                        <a:schemeClr val="tx1"/>
+                      </a:solidFill>
+                      <a:prstDash val="solid"/>
+                      <a:round/>
+                      <a:headEnd type="none" w="med" len="med"/>
+                      <a:tailEnd type="none" w="med" len="med"/>
+                    </a:lnT>
+                    <a:lnB w="12700" cap="flat" cmpd="sng" algn="ctr">
+                      <a:solidFill>
+                        <a:schemeClr val="tx1"/>
+                      </a:solidFill>
+                      <a:prstDash val="solid"/>
+                      <a:round/>
+                      <a:headEnd type="none" w="med" len="med"/>
+                      <a:tailEnd type="none" w="med" len="med"/>
+                    </a:lnB>
+                  </a:tcPr>
+                </a:tc>
+                <a:extLst>
+                  <a:ext uri="{0D108BD9-81ED-4DB2-BD59-A6C34878D82A}">
+                    <a16:rowId xmlns:a16="http://schemas.microsoft.com/office/drawing/2014/main" val="10003"/>
+                  </a:ext>
+                </a:extLst>
+              </a:tr>
+              <a:tr h="330926">
+                <a:tc>
+                  <a:txBody>
+                    <a:bodyPr/>
+                    <a:lstStyle/>
+                    <a:p>
+                      <a:pPr algn="ctr"/>
+                      <a:r>
+                        <a:rPr lang="en-US" sz="1400" dirty="0"/>
+                        <a:t>0x31</a:t>
+                      </a:r>
+                    </a:p>
+                  </a:txBody>
+                  <a:tcPr>
+                    <a:lnL w="12700" cap="flat" cmpd="sng" algn="ctr">
+                      <a:solidFill>
+                        <a:schemeClr val="tx1"/>
+                      </a:solidFill>
+                      <a:prstDash val="solid"/>
+                      <a:round/>
+                      <a:headEnd type="none" w="med" len="med"/>
+                      <a:tailEnd type="none" w="med" len="med"/>
+                    </a:lnL>
+                    <a:lnR w="12700" cap="flat" cmpd="sng" algn="ctr">
+                      <a:solidFill>
+                        <a:schemeClr val="tx1"/>
+                      </a:solidFill>
+                      <a:prstDash val="solid"/>
+                      <a:round/>
+                      <a:headEnd type="none" w="med" len="med"/>
+                      <a:tailEnd type="none" w="med" len="med"/>
+                    </a:lnR>
+                    <a:lnT w="12700" cap="flat" cmpd="sng" algn="ctr">
+                      <a:solidFill>
+                        <a:schemeClr val="tx1"/>
+                      </a:solidFill>
+                      <a:prstDash val="solid"/>
+                      <a:round/>
+                      <a:headEnd type="none" w="med" len="med"/>
+                      <a:tailEnd type="none" w="med" len="med"/>
+                    </a:lnT>
+                    <a:lnB w="12700" cap="flat" cmpd="sng" algn="ctr">
+                      <a:solidFill>
+                        <a:schemeClr val="tx1"/>
+                      </a:solidFill>
+                      <a:prstDash val="solid"/>
+                      <a:round/>
+                      <a:headEnd type="none" w="med" len="med"/>
+                      <a:tailEnd type="none" w="med" len="med"/>
+                    </a:lnB>
+                  </a:tcPr>
+                </a:tc>
+                <a:tc>
+                  <a:txBody>
+                    <a:bodyPr/>
+                    <a:lstStyle/>
+                    <a:p>
+                      <a:pPr marL="0" marR="0" lvl="2" indent="-342900" algn="l" defTabSz="914400" rtl="0" eaLnBrk="1" fontAlgn="auto" latinLnBrk="0" hangingPunct="1">
+                        <a:lnSpc>
+                          <a:spcPct val="100000"/>
+                        </a:lnSpc>
+                        <a:spcBef>
+                          <a:spcPts val="0"/>
+                        </a:spcBef>
+                        <a:spcAft>
+                          <a:spcPts val="0"/>
+                        </a:spcAft>
+                        <a:buClrTx/>
+                        <a:buSzTx/>
+                        <a:buFont typeface="+mj-lt"/>
+                        <a:buNone/>
+                        <a:tabLst/>
+                        <a:defRPr/>
+                      </a:pPr>
+                      <a:r>
+                        <a:rPr lang="en-US" sz="1400" b="0" i="0" dirty="0"/>
+                        <a:t>Time Slice Segment (TSS) from ROC </a:t>
+                      </a:r>
+                      <a:r>
+                        <a:rPr lang="en-US" sz="1400" b="0" i="0" kern="1200" dirty="0">
+                          <a:solidFill>
+                            <a:schemeClr val="dk1"/>
+                          </a:solidFill>
+                          <a:effectLst/>
+                          <a:latin typeface="+mn-lt"/>
+                          <a:ea typeface="+mn-ea"/>
+                          <a:cs typeface="+mn-cs"/>
+                        </a:rPr>
+                        <a:t>containing frame #</a:t>
+                      </a:r>
+                      <a:r>
+                        <a:rPr lang="en-US" sz="1400" b="0" i="0" kern="1200" baseline="0" dirty="0">
+                          <a:solidFill>
+                            <a:schemeClr val="dk1"/>
+                          </a:solidFill>
+                          <a:effectLst/>
+                          <a:latin typeface="+mn-lt"/>
+                          <a:ea typeface="+mn-ea"/>
+                          <a:cs typeface="+mn-cs"/>
+                        </a:rPr>
+                        <a:t> followed by timestamp</a:t>
+                      </a:r>
+                      <a:endParaRPr lang="en-US" sz="1400" b="0" i="0" dirty="0"/>
+                    </a:p>
+                  </a:txBody>
+                  <a:tcPr>
+                    <a:lnL w="12700" cap="flat" cmpd="sng" algn="ctr">
+                      <a:solidFill>
+                        <a:schemeClr val="tx1"/>
+                      </a:solidFill>
+                      <a:prstDash val="solid"/>
+                      <a:round/>
+                      <a:headEnd type="none" w="med" len="med"/>
+                      <a:tailEnd type="none" w="med" len="med"/>
+                    </a:lnL>
+                    <a:lnR w="12700" cap="flat" cmpd="sng" algn="ctr">
+                      <a:solidFill>
+                        <a:schemeClr val="tx1"/>
+                      </a:solidFill>
+                      <a:prstDash val="solid"/>
+                      <a:round/>
+                      <a:headEnd type="none" w="med" len="med"/>
+                      <a:tailEnd type="none" w="med" len="med"/>
+                    </a:lnR>
+                    <a:lnT w="12700" cap="flat" cmpd="sng" algn="ctr">
+                      <a:solidFill>
+                        <a:schemeClr val="tx1"/>
+                      </a:solidFill>
+                      <a:prstDash val="solid"/>
+                      <a:round/>
+                      <a:headEnd type="none" w="med" len="med"/>
+                      <a:tailEnd type="none" w="med" len="med"/>
+                    </a:lnT>
+                    <a:lnB w="12700" cap="flat" cmpd="sng" algn="ctr">
+                      <a:solidFill>
+                        <a:schemeClr val="tx1"/>
+                      </a:solidFill>
+                      <a:prstDash val="solid"/>
+                      <a:round/>
+                      <a:headEnd type="none" w="med" len="med"/>
+                      <a:tailEnd type="none" w="med" len="med"/>
+                    </a:lnB>
+                  </a:tcPr>
+                </a:tc>
+                <a:extLst>
+                  <a:ext uri="{0D108BD9-81ED-4DB2-BD59-A6C34878D82A}">
+                    <a16:rowId xmlns:a16="http://schemas.microsoft.com/office/drawing/2014/main" val="10004"/>
+                  </a:ext>
+                </a:extLst>
+              </a:tr>
+              <a:tr h="330926">
+                <a:tc>
+                  <a:txBody>
+                    <a:bodyPr/>
+                    <a:lstStyle/>
+                    <a:p>
+                      <a:pPr algn="ctr"/>
+                      <a:r>
+                        <a:rPr lang="en-US" sz="1400" dirty="0"/>
+                        <a:t>0x41</a:t>
+                      </a:r>
+                    </a:p>
+                  </a:txBody>
+                  <a:tcPr>
+                    <a:lnL w="12700" cap="flat" cmpd="sng" algn="ctr">
+                      <a:solidFill>
+                        <a:schemeClr val="tx1"/>
+                      </a:solidFill>
+                      <a:prstDash val="solid"/>
+                      <a:round/>
+                      <a:headEnd type="none" w="med" len="med"/>
+                      <a:tailEnd type="none" w="med" len="med"/>
+                    </a:lnL>
+                    <a:lnR w="12700" cap="flat" cmpd="sng" algn="ctr">
+                      <a:solidFill>
+                        <a:schemeClr val="tx1"/>
+                      </a:solidFill>
+                      <a:prstDash val="solid"/>
+                      <a:round/>
+                      <a:headEnd type="none" w="med" len="med"/>
+                      <a:tailEnd type="none" w="med" len="med"/>
+                    </a:lnR>
+                    <a:lnT w="12700" cap="flat" cmpd="sng" algn="ctr">
+                      <a:solidFill>
+                        <a:schemeClr val="tx1"/>
+                      </a:solidFill>
+                      <a:prstDash val="solid"/>
+                      <a:round/>
+                      <a:headEnd type="none" w="med" len="med"/>
+                      <a:tailEnd type="none" w="med" len="med"/>
+                    </a:lnT>
+                    <a:lnB w="12700" cap="flat" cmpd="sng" algn="ctr">
+                      <a:solidFill>
+                        <a:schemeClr val="tx1"/>
+                      </a:solidFill>
+                      <a:prstDash val="solid"/>
+                      <a:round/>
+                      <a:headEnd type="none" w="med" len="med"/>
+                      <a:tailEnd type="none" w="med" len="med"/>
+                    </a:lnB>
+                  </a:tcPr>
+                </a:tc>
+                <a:tc>
+                  <a:txBody>
+                    <a:bodyPr/>
+                    <a:lstStyle/>
+                    <a:p>
+                      <a:pPr marL="0" marR="0" lvl="2" indent="-342900" algn="l" defTabSz="914400" rtl="0" eaLnBrk="1" fontAlgn="auto" latinLnBrk="0" hangingPunct="1">
+                        <a:lnSpc>
+                          <a:spcPct val="100000"/>
+                        </a:lnSpc>
+                        <a:spcBef>
+                          <a:spcPts val="0"/>
+                        </a:spcBef>
+                        <a:spcAft>
+                          <a:spcPts val="0"/>
+                        </a:spcAft>
+                        <a:buClrTx/>
+                        <a:buSzTx/>
+                        <a:buFont typeface="+mj-lt"/>
+                        <a:buNone/>
+                        <a:tabLst/>
+                        <a:defRPr/>
+                      </a:pPr>
+                      <a:r>
+                        <a:rPr lang="en-US" sz="1400" b="0" i="0" dirty="0"/>
+                        <a:t>Aggregation Info Segment (AIS) from ROC</a:t>
+                      </a:r>
+                    </a:p>
+                  </a:txBody>
+                  <a:tcPr>
+                    <a:lnL w="12700" cap="flat" cmpd="sng" algn="ctr">
+                      <a:solidFill>
+                        <a:schemeClr val="tx1"/>
+                      </a:solidFill>
+                      <a:prstDash val="solid"/>
+                      <a:round/>
+                      <a:headEnd type="none" w="med" len="med"/>
+                      <a:tailEnd type="none" w="med" len="med"/>
+                    </a:lnL>
+                    <a:lnR w="12700" cap="flat" cmpd="sng" algn="ctr">
+                      <a:solidFill>
+                        <a:schemeClr val="tx1"/>
+                      </a:solidFill>
+                      <a:prstDash val="solid"/>
+                      <a:round/>
+                      <a:headEnd type="none" w="med" len="med"/>
+                      <a:tailEnd type="none" w="med" len="med"/>
+                    </a:lnR>
+                    <a:lnT w="12700" cap="flat" cmpd="sng" algn="ctr">
+                      <a:solidFill>
+                        <a:schemeClr val="tx1"/>
+                      </a:solidFill>
+                      <a:prstDash val="solid"/>
+                      <a:round/>
+                      <a:headEnd type="none" w="med" len="med"/>
+                      <a:tailEnd type="none" w="med" len="med"/>
+                    </a:lnT>
+                    <a:lnB w="12700" cap="flat" cmpd="sng" algn="ctr">
+                      <a:solidFill>
+                        <a:schemeClr val="tx1"/>
+                      </a:solidFill>
+                      <a:prstDash val="solid"/>
+                      <a:round/>
+                      <a:headEnd type="none" w="med" len="med"/>
+                      <a:tailEnd type="none" w="med" len="med"/>
+                    </a:lnB>
+                  </a:tcPr>
+                </a:tc>
+                <a:extLst>
+                  <a:ext uri="{0D108BD9-81ED-4DB2-BD59-A6C34878D82A}">
+                    <a16:rowId xmlns:a16="http://schemas.microsoft.com/office/drawing/2014/main" val="10005"/>
+                  </a:ext>
+                </a:extLst>
+              </a:tr>
+              <a:tr h="330926">
+                <a:tc>
+                  <a:txBody>
+                    <a:bodyPr/>
+                    <a:lstStyle/>
+                    <a:p>
+                      <a:pPr algn="ctr"/>
+                      <a:r>
+                        <a:rPr lang="en-US" sz="1400" dirty="0"/>
+                        <a:t>0x32</a:t>
+                      </a:r>
+                    </a:p>
+                  </a:txBody>
+                  <a:tcPr>
+                    <a:lnL w="12700" cap="flat" cmpd="sng" algn="ctr">
+                      <a:solidFill>
+                        <a:schemeClr val="tx1"/>
+                      </a:solidFill>
+                      <a:prstDash val="solid"/>
+                      <a:round/>
+                      <a:headEnd type="none" w="med" len="med"/>
+                      <a:tailEnd type="none" w="med" len="med"/>
+                    </a:lnL>
+                    <a:lnR w="12700" cap="flat" cmpd="sng" algn="ctr">
+                      <a:solidFill>
+                        <a:schemeClr val="tx1"/>
+                      </a:solidFill>
+                      <a:prstDash val="solid"/>
+                      <a:round/>
+                      <a:headEnd type="none" w="med" len="med"/>
+                      <a:tailEnd type="none" w="med" len="med"/>
+                    </a:lnR>
+                    <a:lnT w="12700" cap="flat" cmpd="sng" algn="ctr">
+                      <a:solidFill>
+                        <a:schemeClr val="tx1"/>
+                      </a:solidFill>
+                      <a:prstDash val="solid"/>
+                      <a:round/>
+                      <a:headEnd type="none" w="med" len="med"/>
+                      <a:tailEnd type="none" w="med" len="med"/>
+                    </a:lnT>
+                    <a:lnB w="12700" cap="flat" cmpd="sng" algn="ctr">
+                      <a:solidFill>
+                        <a:schemeClr val="tx1"/>
+                      </a:solidFill>
+                      <a:prstDash val="solid"/>
+                      <a:round/>
+                      <a:headEnd type="none" w="med" len="med"/>
+                      <a:tailEnd type="none" w="med" len="med"/>
+                    </a:lnB>
+                  </a:tcPr>
+                </a:tc>
+                <a:tc>
+                  <a:txBody>
+                    <a:bodyPr/>
+                    <a:lstStyle/>
+                    <a:p>
+                      <a:pPr marL="0" marR="0" lvl="2" indent="-342900" algn="l" defTabSz="914400" rtl="0" eaLnBrk="1" fontAlgn="auto" latinLnBrk="0" hangingPunct="1">
+                        <a:lnSpc>
+                          <a:spcPct val="100000"/>
+                        </a:lnSpc>
+                        <a:spcBef>
+                          <a:spcPts val="0"/>
+                        </a:spcBef>
+                        <a:spcAft>
+                          <a:spcPts val="0"/>
+                        </a:spcAft>
+                        <a:buClrTx/>
+                        <a:buSzTx/>
+                        <a:buFont typeface="+mj-lt"/>
+                        <a:buNone/>
+                        <a:tabLst/>
+                        <a:defRPr/>
+                      </a:pPr>
+                      <a:r>
+                        <a:rPr lang="en-US" sz="1400" b="0" i="0" dirty="0"/>
+                        <a:t>Time Slice Segment (TSS) from Aggregator </a:t>
+                      </a:r>
+                      <a:r>
+                        <a:rPr lang="en-US" sz="1400" b="0" i="0" kern="1200" dirty="0">
+                          <a:solidFill>
+                            <a:schemeClr val="dk1"/>
+                          </a:solidFill>
+                          <a:effectLst/>
+                          <a:latin typeface="+mn-lt"/>
+                          <a:ea typeface="+mn-ea"/>
+                          <a:cs typeface="+mn-cs"/>
+                        </a:rPr>
+                        <a:t>containing frame #</a:t>
+                      </a:r>
+                      <a:r>
+                        <a:rPr lang="en-US" sz="1400" b="0" i="0" kern="1200" baseline="0" dirty="0">
+                          <a:solidFill>
+                            <a:schemeClr val="dk1"/>
+                          </a:solidFill>
+                          <a:effectLst/>
+                          <a:latin typeface="+mn-lt"/>
+                          <a:ea typeface="+mn-ea"/>
+                          <a:cs typeface="+mn-cs"/>
+                        </a:rPr>
+                        <a:t> followed by timestamp</a:t>
+                      </a:r>
+                      <a:endParaRPr lang="en-US" sz="1400" b="0" i="0" dirty="0"/>
+                    </a:p>
+                  </a:txBody>
+                  <a:tcPr>
+                    <a:lnL w="12700" cap="flat" cmpd="sng" algn="ctr">
+                      <a:solidFill>
+                        <a:schemeClr val="tx1"/>
+                      </a:solidFill>
+                      <a:prstDash val="solid"/>
+                      <a:round/>
+                      <a:headEnd type="none" w="med" len="med"/>
+                      <a:tailEnd type="none" w="med" len="med"/>
+                    </a:lnL>
+                    <a:lnR w="12700" cap="flat" cmpd="sng" algn="ctr">
+                      <a:solidFill>
+                        <a:schemeClr val="tx1"/>
+                      </a:solidFill>
+                      <a:prstDash val="solid"/>
+                      <a:round/>
+                      <a:headEnd type="none" w="med" len="med"/>
+                      <a:tailEnd type="none" w="med" len="med"/>
+                    </a:lnR>
+                    <a:lnT w="12700" cap="flat" cmpd="sng" algn="ctr">
+                      <a:solidFill>
+                        <a:schemeClr val="tx1"/>
+                      </a:solidFill>
+                      <a:prstDash val="solid"/>
+                      <a:round/>
+                      <a:headEnd type="none" w="med" len="med"/>
+                      <a:tailEnd type="none" w="med" len="med"/>
+                    </a:lnT>
+                    <a:lnB w="12700" cap="flat" cmpd="sng" algn="ctr">
+                      <a:solidFill>
+                        <a:schemeClr val="tx1"/>
+                      </a:solidFill>
+                      <a:prstDash val="solid"/>
+                      <a:round/>
+                      <a:headEnd type="none" w="med" len="med"/>
+                      <a:tailEnd type="none" w="med" len="med"/>
+                    </a:lnB>
+                  </a:tcPr>
+                </a:tc>
+                <a:extLst>
+                  <a:ext uri="{0D108BD9-81ED-4DB2-BD59-A6C34878D82A}">
+                    <a16:rowId xmlns:a16="http://schemas.microsoft.com/office/drawing/2014/main" val="2908693728"/>
+                  </a:ext>
+                </a:extLst>
+              </a:tr>
+              <a:tr h="330926">
+                <a:tc>
+                  <a:txBody>
+                    <a:bodyPr/>
+                    <a:lstStyle/>
+                    <a:p>
+                      <a:pPr algn="ctr"/>
+                      <a:r>
+                        <a:rPr lang="en-US" sz="1400" dirty="0"/>
+                        <a:t>0x42</a:t>
+                      </a:r>
+                    </a:p>
+                  </a:txBody>
+                  <a:tcPr>
+                    <a:lnL w="12700" cap="flat" cmpd="sng" algn="ctr">
+                      <a:solidFill>
+                        <a:schemeClr val="tx1"/>
+                      </a:solidFill>
+                      <a:prstDash val="solid"/>
+                      <a:round/>
+                      <a:headEnd type="none" w="med" len="med"/>
+                      <a:tailEnd type="none" w="med" len="med"/>
+                    </a:lnL>
+                    <a:lnR w="12700" cap="flat" cmpd="sng" algn="ctr">
+                      <a:solidFill>
+                        <a:schemeClr val="tx1"/>
+                      </a:solidFill>
+                      <a:prstDash val="solid"/>
+                      <a:round/>
+                      <a:headEnd type="none" w="med" len="med"/>
+                      <a:tailEnd type="none" w="med" len="med"/>
+                    </a:lnR>
+                    <a:lnT w="12700" cap="flat" cmpd="sng" algn="ctr">
+                      <a:solidFill>
+                        <a:schemeClr val="tx1"/>
+                      </a:solidFill>
+                      <a:prstDash val="solid"/>
+                      <a:round/>
+                      <a:headEnd type="none" w="med" len="med"/>
+                      <a:tailEnd type="none" w="med" len="med"/>
+                    </a:lnT>
+                    <a:lnB w="12700" cap="flat" cmpd="sng" algn="ctr">
+                      <a:solidFill>
+                        <a:schemeClr val="tx1"/>
+                      </a:solidFill>
+                      <a:prstDash val="solid"/>
+                      <a:round/>
+                      <a:headEnd type="none" w="med" len="med"/>
+                      <a:tailEnd type="none" w="med" len="med"/>
+                    </a:lnB>
+                  </a:tcPr>
+                </a:tc>
+                <a:tc>
+                  <a:txBody>
+                    <a:bodyPr/>
+                    <a:lstStyle/>
+                    <a:p>
+                      <a:pPr marL="0" marR="0" lvl="2" indent="-342900" algn="l" defTabSz="914400" rtl="0" eaLnBrk="1" fontAlgn="auto" latinLnBrk="0" hangingPunct="1">
+                        <a:lnSpc>
+                          <a:spcPct val="100000"/>
+                        </a:lnSpc>
+                        <a:spcBef>
+                          <a:spcPts val="0"/>
+                        </a:spcBef>
+                        <a:spcAft>
+                          <a:spcPts val="0"/>
+                        </a:spcAft>
+                        <a:buClrTx/>
+                        <a:buSzTx/>
+                        <a:buFont typeface="+mj-lt"/>
+                        <a:buNone/>
+                        <a:tabLst/>
+                        <a:defRPr/>
+                      </a:pPr>
+                      <a:r>
+                        <a:rPr lang="en-US" sz="1400" b="0" i="0" dirty="0"/>
+                        <a:t>Aggregation Info Segment (AIS) from Aggregator</a:t>
+                      </a:r>
+                    </a:p>
+                  </a:txBody>
+                  <a:tcPr>
+                    <a:lnL w="12700" cap="flat" cmpd="sng" algn="ctr">
+                      <a:solidFill>
+                        <a:schemeClr val="tx1"/>
+                      </a:solidFill>
+                      <a:prstDash val="solid"/>
+                      <a:round/>
+                      <a:headEnd type="none" w="med" len="med"/>
+                      <a:tailEnd type="none" w="med" len="med"/>
+                    </a:lnL>
+                    <a:lnR w="12700" cap="flat" cmpd="sng" algn="ctr">
+                      <a:solidFill>
+                        <a:schemeClr val="tx1"/>
+                      </a:solidFill>
+                      <a:prstDash val="solid"/>
+                      <a:round/>
+                      <a:headEnd type="none" w="med" len="med"/>
+                      <a:tailEnd type="none" w="med" len="med"/>
+                    </a:lnR>
+                    <a:lnT w="12700" cap="flat" cmpd="sng" algn="ctr">
+                      <a:solidFill>
+                        <a:schemeClr val="tx1"/>
+                      </a:solidFill>
+                      <a:prstDash val="solid"/>
+                      <a:round/>
+                      <a:headEnd type="none" w="med" len="med"/>
+                      <a:tailEnd type="none" w="med" len="med"/>
+                    </a:lnT>
+                    <a:lnB w="12700" cap="flat" cmpd="sng" algn="ctr">
+                      <a:solidFill>
+                        <a:schemeClr val="tx1"/>
+                      </a:solidFill>
+                      <a:prstDash val="solid"/>
+                      <a:round/>
+                      <a:headEnd type="none" w="med" len="med"/>
+                      <a:tailEnd type="none" w="med" len="med"/>
+                    </a:lnB>
+                  </a:tcPr>
+                </a:tc>
+                <a:extLst>
+                  <a:ext uri="{0D108BD9-81ED-4DB2-BD59-A6C34878D82A}">
+                    <a16:rowId xmlns:a16="http://schemas.microsoft.com/office/drawing/2014/main" val="3500639815"/>
+                  </a:ext>
+                </a:extLst>
+              </a:tr>
+              <a:tr h="330926">
+                <a:tc>
+                  <a:txBody>
+                    <a:bodyPr/>
+                    <a:lstStyle/>
+                    <a:p>
+                      <a:pPr marL="0" marR="0" indent="0" algn="ctr" defTabSz="914400" rtl="0" eaLnBrk="1" fontAlgn="auto" latinLnBrk="0" hangingPunct="1">
+                        <a:lnSpc>
+                          <a:spcPct val="100000"/>
+                        </a:lnSpc>
+                        <a:spcBef>
+                          <a:spcPts val="0"/>
+                        </a:spcBef>
+                        <a:spcAft>
+                          <a:spcPts val="0"/>
+                        </a:spcAft>
+                        <a:buClrTx/>
+                        <a:buSzTx/>
+                        <a:buFontTx/>
+                        <a:buNone/>
+                        <a:tabLst/>
+                        <a:defRPr/>
+                      </a:pPr>
+                      <a:r>
+                        <a:rPr lang="en-US" sz="1400" baseline="0"/>
                         <a:t>0xFF60</a:t>
                       </a:r>
                       <a:endParaRPr lang="en-US" sz="1400" dirty="0"/>
@@ -9267,16 +10059,12 @@
                         <a:defRPr/>
                       </a:pPr>
                       <a:r>
-                        <a:rPr lang="en-US" sz="1400" i="0" kern="1200" dirty="0">
-                          <a:solidFill>
-                            <a:schemeClr val="dk1"/>
-                          </a:solidFill>
-                          <a:effectLst/>
-                          <a:latin typeface="+mn-lt"/>
-                          <a:ea typeface="+mn-ea"/>
-                          <a:cs typeface="+mn-cs"/>
-                        </a:rPr>
-                        <a:t>Event built by primary event builder in streaming mode</a:t>
+                        <a:rPr lang="en-US" sz="1400" b="0" i="0" dirty="0"/>
+                        <a:t>Built from ROC Raw Data</a:t>
+                      </a:r>
+                      <a:r>
+                        <a:rPr lang="en-US" sz="1400" b="0" i="0" baseline="0" dirty="0"/>
+                        <a:t> streamed from ROC / VTP</a:t>
                       </a:r>
                       <a:endParaRPr lang="en-US" sz="1400" b="0" i="0" dirty="0"/>
                     </a:p>
@@ -9322,7 +10110,154 @@
                 </a:tc>
                 <a:extLst>
                   <a:ext uri="{0D108BD9-81ED-4DB2-BD59-A6C34878D82A}">
-                    <a16:rowId xmlns:a16="http://schemas.microsoft.com/office/drawing/2014/main" val="10009"/>
+                    <a16:rowId xmlns:a16="http://schemas.microsoft.com/office/drawing/2014/main" val="10006"/>
+                  </a:ext>
+                </a:extLst>
+              </a:tr>
+              <a:tr h="330926">
+                <a:tc>
+                  <a:txBody>
+                    <a:bodyPr/>
+                    <a:lstStyle/>
+                    <a:p>
+                      <a:pPr marL="0" marR="0" indent="0" algn="ctr" defTabSz="914400" rtl="0" eaLnBrk="1" fontAlgn="auto" latinLnBrk="0" hangingPunct="1">
+                        <a:lnSpc>
+                          <a:spcPct val="100000"/>
+                        </a:lnSpc>
+                        <a:spcBef>
+                          <a:spcPts val="0"/>
+                        </a:spcBef>
+                        <a:spcAft>
+                          <a:spcPts val="0"/>
+                        </a:spcAft>
+                        <a:buClrTx/>
+                        <a:buSzTx/>
+                        <a:buFontTx/>
+                        <a:buNone/>
+                        <a:tabLst/>
+                        <a:defRPr/>
+                      </a:pPr>
+                      <a:r>
+                        <a:rPr lang="en-US" sz="1400" baseline="0" dirty="0"/>
+                        <a:t>0xFF61</a:t>
+                      </a:r>
+                      <a:endParaRPr lang="en-US" sz="1400" dirty="0"/>
+                    </a:p>
+                  </a:txBody>
+                  <a:tcPr>
+                    <a:lnL w="12700" cap="flat" cmpd="sng" algn="ctr">
+                      <a:solidFill>
+                        <a:schemeClr val="tx1"/>
+                      </a:solidFill>
+                      <a:prstDash val="solid"/>
+                      <a:round/>
+                      <a:headEnd type="none" w="med" len="med"/>
+                      <a:tailEnd type="none" w="med" len="med"/>
+                    </a:lnL>
+                    <a:lnR w="12700" cap="flat" cmpd="sng" algn="ctr">
+                      <a:solidFill>
+                        <a:schemeClr val="tx1"/>
+                      </a:solidFill>
+                      <a:prstDash val="solid"/>
+                      <a:round/>
+                      <a:headEnd type="none" w="med" len="med"/>
+                      <a:tailEnd type="none" w="med" len="med"/>
+                    </a:lnR>
+                    <a:lnT w="12700" cap="flat" cmpd="sng" algn="ctr">
+                      <a:solidFill>
+                        <a:schemeClr val="tx1"/>
+                      </a:solidFill>
+                      <a:prstDash val="solid"/>
+                      <a:round/>
+                      <a:headEnd type="none" w="med" len="med"/>
+                      <a:tailEnd type="none" w="med" len="med"/>
+                    </a:lnT>
+                    <a:lnB w="12700" cap="flat" cmpd="sng" algn="ctr">
+                      <a:solidFill>
+                        <a:schemeClr val="tx1"/>
+                      </a:solidFill>
+                      <a:prstDash val="solid"/>
+                      <a:round/>
+                      <a:headEnd type="none" w="med" len="med"/>
+                      <a:tailEnd type="none" w="med" len="med"/>
+                    </a:lnB>
+                  </a:tcPr>
+                </a:tc>
+                <a:tc>
+                  <a:txBody>
+                    <a:bodyPr/>
+                    <a:lstStyle/>
+                    <a:p>
+                      <a:pPr marL="0" marR="0" indent="0" algn="l" defTabSz="914400" rtl="0" eaLnBrk="1" fontAlgn="auto" latinLnBrk="0" hangingPunct="1">
+                        <a:lnSpc>
+                          <a:spcPct val="100000"/>
+                        </a:lnSpc>
+                        <a:spcBef>
+                          <a:spcPts val="0"/>
+                        </a:spcBef>
+                        <a:spcAft>
+                          <a:spcPts val="0"/>
+                        </a:spcAft>
+                        <a:buClrTx/>
+                        <a:buSzTx/>
+                        <a:buFontTx/>
+                        <a:buNone/>
+                        <a:tabLst/>
+                        <a:defRPr/>
+                      </a:pPr>
+                      <a:r>
+                        <a:rPr lang="en-US" sz="1400" b="0" i="0" dirty="0"/>
+                        <a:t>Built from ROC Raw Data</a:t>
+                      </a:r>
+                      <a:r>
+                        <a:rPr lang="en-US" sz="1400" b="0" i="0" baseline="0" dirty="0"/>
+                        <a:t> streamed from ROC / VTP with non-fatal error</a:t>
+                      </a:r>
+                      <a:endParaRPr lang="en-US" sz="1400" b="0" i="0" dirty="0"/>
+                    </a:p>
+                  </a:txBody>
+                  <a:tcPr>
+                    <a:lnL w="12700" cap="flat" cmpd="sng" algn="ctr">
+                      <a:solidFill>
+                        <a:schemeClr val="tx1"/>
+                      </a:solidFill>
+                      <a:prstDash val="solid"/>
+                      <a:round/>
+                      <a:headEnd type="none" w="med" len="med"/>
+                      <a:tailEnd type="none" w="med" len="med"/>
+                    </a:lnL>
+                    <a:lnR w="12700" cap="flat" cmpd="sng" algn="ctr">
+                      <a:solidFill>
+                        <a:schemeClr val="tx1"/>
+                      </a:solidFill>
+                      <a:prstDash val="solid"/>
+                      <a:round/>
+                      <a:headEnd type="none" w="med" len="med"/>
+                      <a:tailEnd type="none" w="med" len="med"/>
+                    </a:lnR>
+                    <a:lnT w="12700" cap="flat" cmpd="sng" algn="ctr">
+                      <a:solidFill>
+                        <a:schemeClr val="tx1"/>
+                      </a:solidFill>
+                      <a:prstDash val="solid"/>
+                      <a:round/>
+                      <a:headEnd type="none" w="med" len="med"/>
+                      <a:tailEnd type="none" w="med" len="med"/>
+                    </a:lnT>
+                    <a:lnB w="12700" cap="flat" cmpd="sng" algn="ctr">
+                      <a:solidFill>
+                        <a:schemeClr val="tx1"/>
+                      </a:solidFill>
+                      <a:prstDash val="solid"/>
+                      <a:round/>
+                      <a:headEnd type="none" w="med" len="med"/>
+                      <a:tailEnd type="none" w="med" len="med"/>
+                    </a:lnB>
+                  </a:tcPr>
+                </a:tc>
+                <a:extLst>
+                  <a:ext uri="{0D108BD9-81ED-4DB2-BD59-A6C34878D82A}">
+                    <a16:rowId xmlns:a16="http://schemas.microsoft.com/office/drawing/2014/main" val="10010"/>
                   </a:ext>
                 </a:extLst>
               </a:tr>
@@ -9402,6 +10337,18 @@
                         <a:defRPr/>
                       </a:pPr>
                       <a:r>
+                        <a:rPr lang="en-US" sz="1400" b="1" i="1" kern="1200" dirty="0">
+                          <a:solidFill>
+                            <a:schemeClr val="dk1"/>
+                          </a:solidFill>
+                          <a:effectLst/>
+                          <a:latin typeface="+mn-lt"/>
+                          <a:ea typeface="+mn-ea"/>
+                          <a:cs typeface="+mn-cs"/>
+                        </a:rPr>
+                        <a:t>Possibly:</a:t>
+                      </a:r>
+                      <a:r>
                         <a:rPr lang="en-US" sz="1400" i="0" kern="1200" dirty="0">
                           <a:solidFill>
                             <a:schemeClr val="dk1"/>
@@ -9411,7 +10358,7 @@
                           <a:ea typeface="+mn-ea"/>
                           <a:cs typeface="+mn-cs"/>
                         </a:rPr>
-                        <a:t>Event built by secondary event builder in streaming mode</a:t>
+                        <a:t> event built by DC event builder in streaming mode</a:t>
                       </a:r>
                       <a:endParaRPr lang="en-US" sz="1400" b="0" i="0" dirty="0"/>
                     </a:p>
@@ -9457,7 +10404,7 @@
                 </a:tc>
                 <a:extLst>
                   <a:ext uri="{0D108BD9-81ED-4DB2-BD59-A6C34878D82A}">
-                    <a16:rowId xmlns:a16="http://schemas.microsoft.com/office/drawing/2014/main" val="10011"/>
+                    <a16:rowId xmlns:a16="http://schemas.microsoft.com/office/drawing/2014/main" val="10009"/>
                   </a:ext>
                 </a:extLst>
               </a:tr>
@@ -9537,6 +10484,18 @@
                         <a:defRPr/>
                       </a:pPr>
                       <a:r>
+                        <a:rPr lang="en-US" sz="1400" b="1" i="1" kern="1200" dirty="0">
+                          <a:solidFill>
+                            <a:schemeClr val="dk1"/>
+                          </a:solidFill>
+                          <a:effectLst/>
+                          <a:latin typeface="+mn-lt"/>
+                          <a:ea typeface="+mn-ea"/>
+                          <a:cs typeface="+mn-cs"/>
+                        </a:rPr>
+                        <a:t>Possibly:</a:t>
+                      </a:r>
+                      <a:r>
                         <a:rPr lang="en-US" sz="1400" i="0" kern="1200" dirty="0">
                           <a:solidFill>
                             <a:schemeClr val="dk1"/>
@@ -9546,7 +10505,166 @@
                           <a:ea typeface="+mn-ea"/>
                           <a:cs typeface="+mn-cs"/>
                         </a:rPr>
-                        <a:t>Event built by DC event builder in streaming mode</a:t>
+                        <a:t> event built by secondary event builder in streaming mode</a:t>
+                      </a:r>
+                      <a:endParaRPr lang="en-US" sz="1400" b="0" i="0" dirty="0"/>
+                    </a:p>
+                  </a:txBody>
+                  <a:tcPr>
+                    <a:lnL w="12700" cap="flat" cmpd="sng" algn="ctr">
+                      <a:solidFill>
+                        <a:schemeClr val="tx1"/>
+                      </a:solidFill>
+                      <a:prstDash val="solid"/>
+                      <a:round/>
+                      <a:headEnd type="none" w="med" len="med"/>
+                      <a:tailEnd type="none" w="med" len="med"/>
+                    </a:lnL>
+                    <a:lnR w="12700" cap="flat" cmpd="sng" algn="ctr">
+                      <a:solidFill>
+                        <a:schemeClr val="tx1"/>
+                      </a:solidFill>
+                      <a:prstDash val="solid"/>
+                      <a:round/>
+                      <a:headEnd type="none" w="med" len="med"/>
+                      <a:tailEnd type="none" w="med" len="med"/>
+                    </a:lnR>
+                    <a:lnT w="12700" cap="flat" cmpd="sng" algn="ctr">
+                      <a:solidFill>
+                        <a:schemeClr val="tx1"/>
+                      </a:solidFill>
+                      <a:prstDash val="solid"/>
+                      <a:round/>
+                      <a:headEnd type="none" w="med" len="med"/>
+                      <a:tailEnd type="none" w="med" len="med"/>
+                    </a:lnT>
+                    <a:lnB w="12700" cap="flat" cmpd="sng" algn="ctr">
+                      <a:solidFill>
+                        <a:schemeClr val="tx1"/>
+                      </a:solidFill>
+                      <a:prstDash val="solid"/>
+                      <a:round/>
+                      <a:headEnd type="none" w="med" len="med"/>
+                      <a:tailEnd type="none" w="med" len="med"/>
+                    </a:lnB>
+                  </a:tcPr>
+                </a:tc>
+                <a:extLst>
+                  <a:ext uri="{0D108BD9-81ED-4DB2-BD59-A6C34878D82A}">
+                    <a16:rowId xmlns:a16="http://schemas.microsoft.com/office/drawing/2014/main" val="10011"/>
+                  </a:ext>
+                </a:extLst>
+              </a:tr>
+              <a:tr h="330926">
+                <a:tc>
+                  <a:txBody>
+                    <a:bodyPr/>
+                    <a:lstStyle/>
+                    <a:p>
+                      <a:pPr algn="ctr"/>
+                      <a:r>
+                        <a:rPr lang="en-US" sz="1400" baseline="0" dirty="0"/>
+                        <a:t>0xFF66</a:t>
+                      </a:r>
+                      <a:endParaRPr lang="en-US" sz="1400" dirty="0"/>
+                    </a:p>
+                  </a:txBody>
+                  <a:tcPr>
+                    <a:lnL w="12700" cap="flat" cmpd="sng" algn="ctr">
+                      <a:solidFill>
+                        <a:schemeClr val="tx1"/>
+                      </a:solidFill>
+                      <a:prstDash val="solid"/>
+                      <a:round/>
+                      <a:headEnd type="none" w="med" len="med"/>
+                      <a:tailEnd type="none" w="med" len="med"/>
+                    </a:lnL>
+                    <a:lnR w="12700" cap="flat" cmpd="sng" algn="ctr">
+                      <a:solidFill>
+                        <a:schemeClr val="tx1"/>
+                      </a:solidFill>
+                      <a:prstDash val="solid"/>
+                      <a:round/>
+                      <a:headEnd type="none" w="med" len="med"/>
+                      <a:tailEnd type="none" w="med" len="med"/>
+                    </a:lnR>
+                    <a:lnT w="12700" cap="flat" cmpd="sng" algn="ctr">
+                      <a:solidFill>
+                        <a:schemeClr val="tx1"/>
+                      </a:solidFill>
+                      <a:prstDash val="solid"/>
+                      <a:round/>
+                      <a:headEnd type="none" w="med" len="med"/>
+                      <a:tailEnd type="none" w="med" len="med"/>
+                    </a:lnT>
+                    <a:lnB w="12700" cap="flat" cmpd="sng" algn="ctr">
+                      <a:solidFill>
+                        <a:schemeClr val="tx1"/>
+                      </a:solidFill>
+                      <a:prstDash val="solid"/>
+                      <a:round/>
+                      <a:headEnd type="none" w="med" len="med"/>
+                      <a:tailEnd type="none" w="med" len="med"/>
+                    </a:lnB>
+                  </a:tcPr>
+                </a:tc>
+                <a:tc>
+                  <a:txBody>
+                    <a:bodyPr/>
+                    <a:lstStyle/>
+                    <a:p>
+                      <a:pPr marL="0" marR="0" indent="0" algn="l" defTabSz="914400" rtl="0" eaLnBrk="1" fontAlgn="auto" latinLnBrk="0" hangingPunct="1">
+                        <a:lnSpc>
+                          <a:spcPct val="100000"/>
+                        </a:lnSpc>
+                        <a:spcBef>
+                          <a:spcPts val="0"/>
+                        </a:spcBef>
+                        <a:spcAft>
+                          <a:spcPts val="0"/>
+                        </a:spcAft>
+                        <a:buClrTx/>
+                        <a:buSzTx/>
+                        <a:buFontTx/>
+                        <a:buNone/>
+                        <a:tabLst/>
+                        <a:defRPr/>
+                      </a:pPr>
+                      <a:r>
+                        <a:rPr lang="en-US" sz="1400" b="1" i="1" kern="1200" dirty="0">
+                          <a:solidFill>
+                            <a:schemeClr val="dk1"/>
+                          </a:solidFill>
+                          <a:effectLst/>
+                          <a:latin typeface="+mn-lt"/>
+                          <a:ea typeface="+mn-ea"/>
+                          <a:cs typeface="+mn-cs"/>
+                        </a:rPr>
+                        <a:t>Possibly:</a:t>
+                      </a:r>
+                      <a:r>
+                        <a:rPr lang="en-US" sz="1400" i="0" kern="1200" baseline="0" dirty="0">
+                          <a:solidFill>
+                            <a:schemeClr val="dk1"/>
+                          </a:solidFill>
+                          <a:effectLst/>
+                          <a:latin typeface="+mn-lt"/>
+                          <a:ea typeface="+mn-ea"/>
+                          <a:cs typeface="+mn-cs"/>
+                        </a:rPr>
+                        <a:t> e</a:t>
+                      </a:r>
+                      <a:r>
+                        <a:rPr lang="en-US" sz="1400" i="0" kern="1200" dirty="0">
+                          <a:solidFill>
+                            <a:schemeClr val="dk1"/>
+                          </a:solidFill>
+                          <a:effectLst/>
+                          <a:latin typeface="+mn-lt"/>
+                          <a:ea typeface="+mn-ea"/>
+                          <a:cs typeface="+mn-cs"/>
+                        </a:rPr>
+                        <a:t>vent built by primary event builder in streaming mode</a:t>
                       </a:r>
                       <a:endParaRPr lang="en-US" sz="1400" b="0" i="0" dirty="0"/>
                     </a:p>
@@ -9593,6 +10711,131 @@
                 <a:extLst>
                   <a:ext uri="{0D108BD9-81ED-4DB2-BD59-A6C34878D82A}">
                     <a16:rowId xmlns:a16="http://schemas.microsoft.com/office/drawing/2014/main" val="10012"/>
+                  </a:ext>
+                </a:extLst>
+              </a:tr>
+              <a:tr h="330926">
+                <a:tc>
+                  <a:txBody>
+                    <a:bodyPr/>
+                    <a:lstStyle/>
+                    <a:p>
+                      <a:pPr algn="ctr"/>
+                      <a:r>
+                        <a:rPr lang="en-US" sz="1400" dirty="0"/>
+                        <a:t>0xFF68</a:t>
+                      </a:r>
+                    </a:p>
+                  </a:txBody>
+                  <a:tcPr>
+                    <a:lnL w="12700" cap="flat" cmpd="sng" algn="ctr">
+                      <a:solidFill>
+                        <a:schemeClr val="tx1"/>
+                      </a:solidFill>
+                      <a:prstDash val="solid"/>
+                      <a:round/>
+                      <a:headEnd type="none" w="med" len="med"/>
+                      <a:tailEnd type="none" w="med" len="med"/>
+                    </a:lnL>
+                    <a:lnR w="12700" cap="flat" cmpd="sng" algn="ctr">
+                      <a:solidFill>
+                        <a:schemeClr val="tx1"/>
+                      </a:solidFill>
+                      <a:prstDash val="solid"/>
+                      <a:round/>
+                      <a:headEnd type="none" w="med" len="med"/>
+                      <a:tailEnd type="none" w="med" len="med"/>
+                    </a:lnR>
+                    <a:lnT w="12700" cap="flat" cmpd="sng" algn="ctr">
+                      <a:solidFill>
+                        <a:schemeClr val="tx1"/>
+                      </a:solidFill>
+                      <a:prstDash val="solid"/>
+                      <a:round/>
+                      <a:headEnd type="none" w="med" len="med"/>
+                      <a:tailEnd type="none" w="med" len="med"/>
+                    </a:lnT>
+                    <a:lnB w="12700" cap="flat" cmpd="sng" algn="ctr">
+                      <a:solidFill>
+                        <a:schemeClr val="tx1"/>
+                      </a:solidFill>
+                      <a:prstDash val="solid"/>
+                      <a:round/>
+                      <a:headEnd type="none" w="med" len="med"/>
+                      <a:tailEnd type="none" w="med" len="med"/>
+                    </a:lnB>
+                  </a:tcPr>
+                </a:tc>
+                <a:tc>
+                  <a:txBody>
+                    <a:bodyPr/>
+                    <a:lstStyle/>
+                    <a:p>
+                      <a:pPr marL="0" marR="0" indent="0" algn="l" defTabSz="914400" rtl="0" eaLnBrk="1" fontAlgn="auto" latinLnBrk="0" hangingPunct="1">
+                        <a:lnSpc>
+                          <a:spcPct val="100000"/>
+                        </a:lnSpc>
+                        <a:spcBef>
+                          <a:spcPts val="0"/>
+                        </a:spcBef>
+                        <a:spcAft>
+                          <a:spcPts val="0"/>
+                        </a:spcAft>
+                        <a:buClrTx/>
+                        <a:buSzTx/>
+                        <a:buFontTx/>
+                        <a:buNone/>
+                        <a:tabLst/>
+                        <a:defRPr/>
+                      </a:pPr>
+                      <a:r>
+                        <a:rPr lang="en-US" sz="1400" b="0" i="0" dirty="0"/>
+                        <a:t>Missing Frame (no ROC data available, estimate for timestamp)</a:t>
+                      </a:r>
+                    </a:p>
+                  </a:txBody>
+                  <a:tcPr>
+                    <a:lnL w="12700" cap="flat" cmpd="sng" algn="ctr">
+                      <a:solidFill>
+                        <a:schemeClr val="tx1"/>
+                      </a:solidFill>
+                      <a:prstDash val="solid"/>
+                      <a:round/>
+                      <a:headEnd type="none" w="med" len="med"/>
+                      <a:tailEnd type="none" w="med" len="med"/>
+                    </a:lnL>
+                    <a:lnR w="12700" cap="flat" cmpd="sng" algn="ctr">
+                      <a:solidFill>
+                        <a:schemeClr val="tx1"/>
+                      </a:solidFill>
+                      <a:prstDash val="solid"/>
+                      <a:round/>
+                      <a:headEnd type="none" w="med" len="med"/>
+                      <a:tailEnd type="none" w="med" len="med"/>
+                    </a:lnR>
+                    <a:lnT w="12700" cap="flat" cmpd="sng" algn="ctr">
+                      <a:solidFill>
+                        <a:schemeClr val="tx1"/>
+                      </a:solidFill>
+                      <a:prstDash val="solid"/>
+                      <a:round/>
+                      <a:headEnd type="none" w="med" len="med"/>
+                      <a:tailEnd type="none" w="med" len="med"/>
+                    </a:lnT>
+                    <a:lnB w="12700" cap="flat" cmpd="sng" algn="ctr">
+                      <a:solidFill>
+                        <a:schemeClr val="tx1"/>
+                      </a:solidFill>
+                      <a:prstDash val="solid"/>
+                      <a:round/>
+                      <a:headEnd type="none" w="med" len="med"/>
+                      <a:tailEnd type="none" w="med" len="med"/>
+                    </a:lnB>
+                  </a:tcPr>
+                </a:tc>
+                <a:extLst>
+                  <a:ext uri="{0D108BD9-81ED-4DB2-BD59-A6C34878D82A}">
+                    <a16:rowId xmlns:a16="http://schemas.microsoft.com/office/drawing/2014/main" val="1652644484"/>
                   </a:ext>
                 </a:extLst>
               </a:tr>
